--- a/docs/Pseudocode_to_C_Review2.pptx
+++ b/docs/Pseudocode_to_C_Review2.pptx
@@ -2,22 +2,22 @@
 <file path=ppt/presentation.xml><?xml version="1.0" encoding="utf-8"?>
 <p:presentation xmlns:p="http://schemas.openxmlformats.org/presentationml/2006/main">
   <p:sldMasterIdLst>
-    <p:sldMasterId xmlns:r="http://schemas.openxmlformats.org/officeDocument/2006/relationships" id="2147483648" r:id="R77ff7d0cee014fc8"/>
+    <p:sldMasterId xmlns:r="http://schemas.openxmlformats.org/officeDocument/2006/relationships" id="2147483648" r:id="R9d657f8e09574e0d"/>
   </p:sldMasterIdLst>
   <p:notesMasterIdLst>
-    <p:notesMasterId xmlns:r="http://schemas.openxmlformats.org/officeDocument/2006/relationships" r:id="Ra6c7fff8e4604842"/>
+    <p:notesMasterId xmlns:r="http://schemas.openxmlformats.org/officeDocument/2006/relationships" r:id="R4b335573748a4e90"/>
   </p:notesMasterIdLst>
   <p:sldIdLst>
-    <p:sldId xmlns:r="http://schemas.openxmlformats.org/officeDocument/2006/relationships" id="256" r:id="R471c7d6bad264d3d"/>
-    <p:sldId xmlns:r="http://schemas.openxmlformats.org/officeDocument/2006/relationships" id="257" r:id="R7fbebf4535284441"/>
-    <p:sldId xmlns:r="http://schemas.openxmlformats.org/officeDocument/2006/relationships" id="258" r:id="Rec09d55a58f04265"/>
-    <p:sldId xmlns:r="http://schemas.openxmlformats.org/officeDocument/2006/relationships" id="259" r:id="R1eebbc2ed581435d"/>
-    <p:sldId xmlns:r="http://schemas.openxmlformats.org/officeDocument/2006/relationships" id="260" r:id="Rc65f8a1465d94cda"/>
-    <p:sldId xmlns:r="http://schemas.openxmlformats.org/officeDocument/2006/relationships" id="261" r:id="R54dad522cbe04e9b"/>
-    <p:sldId xmlns:r="http://schemas.openxmlformats.org/officeDocument/2006/relationships" id="262" r:id="R02dec67d7fa54ff6"/>
-    <p:sldId xmlns:r="http://schemas.openxmlformats.org/officeDocument/2006/relationships" id="263" r:id="R7daf5528acad4363"/>
-    <p:sldId xmlns:r="http://schemas.openxmlformats.org/officeDocument/2006/relationships" id="264" r:id="R1480123c69654327"/>
-    <p:sldId xmlns:r="http://schemas.openxmlformats.org/officeDocument/2006/relationships" id="265" r:id="Ra2ecd7bab1064a82"/>
+    <p:sldId xmlns:r="http://schemas.openxmlformats.org/officeDocument/2006/relationships" id="256" r:id="R612d071f91e54c6f"/>
+    <p:sldId xmlns:r="http://schemas.openxmlformats.org/officeDocument/2006/relationships" id="257" r:id="R9f5c8dc9fabb471b"/>
+    <p:sldId xmlns:r="http://schemas.openxmlformats.org/officeDocument/2006/relationships" id="258" r:id="Rc2ffc35426c74664"/>
+    <p:sldId xmlns:r="http://schemas.openxmlformats.org/officeDocument/2006/relationships" id="259" r:id="R9473c12bb496497b"/>
+    <p:sldId xmlns:r="http://schemas.openxmlformats.org/officeDocument/2006/relationships" id="260" r:id="R186edfb80f5b40c7"/>
+    <p:sldId xmlns:r="http://schemas.openxmlformats.org/officeDocument/2006/relationships" id="261" r:id="Rc602a5c58a564cc2"/>
+    <p:sldId xmlns:r="http://schemas.openxmlformats.org/officeDocument/2006/relationships" id="262" r:id="R6999182ca13a4a4d"/>
+    <p:sldId xmlns:r="http://schemas.openxmlformats.org/officeDocument/2006/relationships" id="263" r:id="R99df64238b794c5b"/>
+    <p:sldId xmlns:r="http://schemas.openxmlformats.org/officeDocument/2006/relationships" id="264" r:id="R27f8fdade2f14963"/>
+    <p:sldId xmlns:r="http://schemas.openxmlformats.org/officeDocument/2006/relationships" id="265" r:id="R980ba4cb489f4185"/>
   </p:sldIdLst>
   <p:sldSz cx="12192000" cy="6858000"/>
   <p:notesSz cx="6858000" cy="9144000"/>
@@ -521,7 +521,7 @@
           <a:lstStyle xmlns:a="http://schemas.openxmlformats.org/drawingml/2006/main"/>
           <a:p xmlns:a="http://schemas.openxmlformats.org/drawingml/2006/main">
             <a:r>
-              <a:t>Be clear that the project is a restricted translator. It does not understand unrestricted prose, define functions or support multidimensional arrays or Boolean AND/OR. Strings use a fixed C buffer holding up to 255 ASCII characters. General arithmetic overflow and definite assignment are not checked. The automatic guards target specific operations and do not prove universal safety.</a:t>
+              <a:t>The example is examples/invalid.pseudo. Semantic analysis reports both an undeclared y on line 3 and a REAL-to-INTEGER assignment on line 4, then stops before C generation. Syntax and lexical errors are also rejected at their stages. The language has a defined grammar, not free-form English. It lacks user-defined functions, multidimensional arrays and Boolean AND/OR. STRING is limited to 255 ASCII characters. General arithmetic overflow and uninitialized variable use remain unchecked.</a:t>
             </a:r>
           </a:p>
         </p:txBody>
@@ -871,7 +871,7 @@
           <a:lstStyle xmlns:a="http://schemas.openxmlformats.org/drawingml/2006/main"/>
           <a:p xmlns:a="http://schemas.openxmlformats.org/drawingml/2006/main">
             <a:r>
-              <a:t>Show the live FOR example if asked about code generation. The current C generator emits an ordinary for loop for fixed bounds that are safe for the int iterator. It emits continue without goto. Dynamic or extreme bounds use a wider control value in a C for loop. WHILE source still generates C while.</a:t>
+              <a:t>Explain the complete path: the parser makes a FOR node containing an IF and assignment. The IR keeps the FOR and CONTINUE structure. The C backend emits a normal for loop and continue, with no goto. The run prints 8 because iteration 2 is skipped. This is the verified example in review2-build/ex-control.pseudo.</a:t>
             </a:r>
           </a:p>
         </p:txBody>
@@ -941,7 +941,7 @@
           <a:lstStyle xmlns:a="http://schemas.openxmlformats.org/drawingml/2006/main"/>
           <a:p xmlns:a="http://schemas.openxmlformats.org/drawingml/2006/main">
             <a:r>
-              <a:t>There are two kinds of error handling. The lexer/parser/semantic analyzer reject invalid source, such as unknown tokens, malformed syntax, undeclared names or incompatible assignments. The left excerpt is from examples/invalid.pseudo. The compiler stops at the first undeclared-name error; if that line is removed, the REAL-to-INTEGER assignment is a separate error. Generated C also checks input-dependent faults at runtime: division or remainder by zero, dynamic array bounds and shift counts. The right pseudocode is an excerpt; full programs need BEGIN, END and declarations. REQUIRE and ENSURE are optional explicit conditions. Do not say the compiler repairs arbitrary errors.</a:t>
+              <a:t>The symbol table records name as STRING and bits as INTEGER. The IR retains a bitwise expression. C uses a fixed character buffer, strcpy and integer bitwise AND. The actual generated scanf line is wrapped in an input-failure check; the slide shows only the relevant statements. With input 5, the program prints Mira and 1 on separate lines. This is the verified example in review2-build/ex-string-bits.pseudo.</a:t>
             </a:r>
           </a:p>
         </p:txBody>
@@ -1011,7 +1011,7 @@
           <a:lstStyle xmlns:a="http://schemas.openxmlformats.org/drawingml/2006/main"/>
           <a:p xmlns:a="http://schemas.openxmlformats.org/drawingml/2006/main">
             <a:r>
-              <a:t>If asked what is novel, describe this as a useful improvement in this project, not a newly invented compiler algorithm. First, the C generator recognizes operations and inserts selected runtime guards automatically; a zero divisor is the simplest example, and dynamic array indices and shift counts are also covered. Second, the project has a seeded differential check targeted at its optimizer: generated bounded programs are translated with optimization on and off, compiled with GCC and compared by output, errors and status. The method is inspired by established compiler-testing research; the current implementation is project-specific.</a:t>
+              <a:t>This is examples/automatic_division.pseudo. The IR shows an ordinary division. The C generator recognizes the variable divisor and inserts a zero check before the division. The slide uses equivalent adjacent C string literals to fit the diagnostic; the actual generator emits it on one source line. With input 20 0, the generated program reports “Division or remainder by zero at pseudocode line 6” and exits with status 1. This is the project’s implemented rule-based improvement. It does not infer arbitrary errors.</a:t>
             </a:r>
           </a:p>
         </p:txBody>
@@ -1081,7 +1081,7 @@
           <a:lstStyle xmlns:a="http://schemas.openxmlformats.org/drawingml/2006/main"/>
           <a:p xmlns:a="http://schemas.openxmlformats.org/drawingml/2006/main">
             <a:r>
-              <a:t>The Python unit suite completed 111 tests with GCC present. It covers translation and selected generated C execution, including errors. The optimizer comparison used seed 20260925 and 30 bounded generated programs, producing 60 optimized and unoptimized executions; output, standard error and exit status matched in that run. These observations do not prove correctness for every possible program.</a:t>
+              <a:t>This is examples/automatic_array_bounds.pseudo. The array has valid positions 0, 1 and 2. The IR inserts BOUNDS_CHECK before write and read. The C generator emits an index check before touching the array. The slide uses equivalent adjacent C string literals to fit the diagnostic; actual output is “Array index out of bounds at pseudocode line 7”. Input 3 42 fails on the write and exits with status 1. Input 2 42 succeeds and prints 42.</a:t>
             </a:r>
           </a:p>
         </p:txBody>
@@ -1128,7 +1128,7 @@
           <p:cNvPr id="3" name="Title">
             <a:extLst xmlns:a="http://schemas.openxmlformats.org/drawingml/2006/main">
               <a:ext uri="{FF2B5EF4-FFF2-40B4-BE49-F238E27FC236}">
-                <a16:creationId xmlns:a16="http://schemas.microsoft.com/office/drawing/2014/main" id="{B1950889-0ECC-4022-8CD2-14A358378AEE}"/>
+                <a16:creationId xmlns:a16="http://schemas.microsoft.com/office/drawing/2014/main" id="{26EFD1AB-4780-46C9-8336-4CB15B678351}"/>
               </a:ext>
             </a:extLst>
           </p:cNvPr>
@@ -1285,7 +1285,7 @@
           <p:cNvPr id="2" name="Subtitle">
             <a:extLst xmlns:a="http://schemas.openxmlformats.org/drawingml/2006/main">
               <a:ext uri="{FF2B5EF4-FFF2-40B4-BE49-F238E27FC236}">
-                <a16:creationId xmlns:a16="http://schemas.microsoft.com/office/drawing/2014/main" id="{76ED21CC-7727-47DD-8737-9D398BA9B2F1}"/>
+                <a16:creationId xmlns:a16="http://schemas.microsoft.com/office/drawing/2014/main" id="{EDD71AD9-820F-4BED-8119-5B808FE217B1}"/>
               </a:ext>
             </a:extLst>
           </p:cNvPr>
@@ -1459,7 +1459,7 @@
           <p:cNvPr id="2" name="Section title">
             <a:extLst xmlns:a="http://schemas.openxmlformats.org/drawingml/2006/main">
               <a:ext uri="{FF2B5EF4-FFF2-40B4-BE49-F238E27FC236}">
-                <a16:creationId xmlns:a16="http://schemas.microsoft.com/office/drawing/2014/main" id="{EF87D88E-E360-4548-B0DF-94937A3392E9}"/>
+                <a16:creationId xmlns:a16="http://schemas.microsoft.com/office/drawing/2014/main" id="{EFAF8E11-2E4C-47FB-932F-E1021ADE424A}"/>
               </a:ext>
             </a:extLst>
           </p:cNvPr>
@@ -1633,7 +1633,7 @@
           <p:cNvPr id="3" name="Title">
             <a:extLst xmlns:a="http://schemas.openxmlformats.org/drawingml/2006/main">
               <a:ext uri="{FF2B5EF4-FFF2-40B4-BE49-F238E27FC236}">
-                <a16:creationId xmlns:a16="http://schemas.microsoft.com/office/drawing/2014/main" id="{322C6F1E-054A-4E5D-ACA1-4F8400E4078A}"/>
+                <a16:creationId xmlns:a16="http://schemas.microsoft.com/office/drawing/2014/main" id="{12BD5DB9-3C20-46BE-B473-8A17E1086E5C}"/>
               </a:ext>
             </a:extLst>
           </p:cNvPr>
@@ -1790,7 +1790,7 @@
           <p:cNvPr id="2" name="Body">
             <a:extLst xmlns:a="http://schemas.openxmlformats.org/drawingml/2006/main">
               <a:ext uri="{FF2B5EF4-FFF2-40B4-BE49-F238E27FC236}">
-                <a16:creationId xmlns:a16="http://schemas.microsoft.com/office/drawing/2014/main" id="{B6583E9F-497E-4397-A540-BCC7F22959FA}"/>
+                <a16:creationId xmlns:a16="http://schemas.microsoft.com/office/drawing/2014/main" id="{BE578509-3DA8-4544-8442-D2717005A14B}"/>
               </a:ext>
             </a:extLst>
           </p:cNvPr>
@@ -1964,7 +1964,7 @@
           <p:cNvPr id="4" name="Title">
             <a:extLst xmlns:a="http://schemas.openxmlformats.org/drawingml/2006/main">
               <a:ext uri="{FF2B5EF4-FFF2-40B4-BE49-F238E27FC236}">
-                <a16:creationId xmlns:a16="http://schemas.microsoft.com/office/drawing/2014/main" id="{C8286F8E-EB5F-42D1-9E7A-9B38CA9E8F9D}"/>
+                <a16:creationId xmlns:a16="http://schemas.microsoft.com/office/drawing/2014/main" id="{F362E4DE-2E09-4D54-A559-6BFD34505FFC}"/>
               </a:ext>
             </a:extLst>
           </p:cNvPr>
@@ -2121,7 +2121,7 @@
           <p:cNvPr id="2" name="Left column">
             <a:extLst xmlns:a="http://schemas.openxmlformats.org/drawingml/2006/main">
               <a:ext uri="{FF2B5EF4-FFF2-40B4-BE49-F238E27FC236}">
-                <a16:creationId xmlns:a16="http://schemas.microsoft.com/office/drawing/2014/main" id="{E899841E-6C2B-4F90-90AE-1E108079588B}"/>
+                <a16:creationId xmlns:a16="http://schemas.microsoft.com/office/drawing/2014/main" id="{D088A5C6-3FF0-467E-8DA8-B3F4820431AF}"/>
               </a:ext>
             </a:extLst>
           </p:cNvPr>
@@ -2278,7 +2278,7 @@
           <p:cNvPr id="3" name="Right column">
             <a:extLst xmlns:a="http://schemas.openxmlformats.org/drawingml/2006/main">
               <a:ext uri="{FF2B5EF4-FFF2-40B4-BE49-F238E27FC236}">
-                <a16:creationId xmlns:a16="http://schemas.microsoft.com/office/drawing/2014/main" id="{958B843E-D442-44F0-98BF-43C279710758}"/>
+                <a16:creationId xmlns:a16="http://schemas.microsoft.com/office/drawing/2014/main" id="{A7A7DEEA-56C9-44F9-89CD-56357977CF22}"/>
               </a:ext>
             </a:extLst>
           </p:cNvPr>
@@ -2452,7 +2452,7 @@
           <p:cNvPr id="3" name="Title">
             <a:extLst xmlns:a="http://schemas.openxmlformats.org/drawingml/2006/main">
               <a:ext uri="{FF2B5EF4-FFF2-40B4-BE49-F238E27FC236}">
-                <a16:creationId xmlns:a16="http://schemas.microsoft.com/office/drawing/2014/main" id="{95D49251-FE48-459E-884F-B14EABE4FBDB}"/>
+                <a16:creationId xmlns:a16="http://schemas.microsoft.com/office/drawing/2014/main" id="{2951FA40-A34A-4D71-B2D4-D49B593188E0}"/>
               </a:ext>
             </a:extLst>
           </p:cNvPr>
@@ -2609,7 +2609,7 @@
           <p:cNvPr id="2" name="Left column">
             <a:extLst xmlns:a="http://schemas.openxmlformats.org/drawingml/2006/main">
               <a:ext uri="{FF2B5EF4-FFF2-40B4-BE49-F238E27FC236}">
-                <a16:creationId xmlns:a16="http://schemas.microsoft.com/office/drawing/2014/main" id="{1CB738FF-AF86-40E5-B716-E07A5A332AEE}"/>
+                <a16:creationId xmlns:a16="http://schemas.microsoft.com/office/drawing/2014/main" id="{952F33DD-05A0-4C0D-B28A-A71989DDEE3F}"/>
               </a:ext>
             </a:extLst>
           </p:cNvPr>
@@ -2804,12 +2804,12 @@
   </p:cSld>
   <p:clrMap bg1="lt1" tx1="dk1" bg2="lt2" tx2="dk2" accent1="accent1" accent2="accent2" accent3="accent3" accent4="accent4" accent5="accent5" accent6="accent6" hlink="hlink" folHlink="folHlink"/>
   <p:sldLayoutIdLst>
-    <p:sldLayoutId xmlns:r="http://schemas.openxmlformats.org/officeDocument/2006/relationships" id="2147483649" r:id="R9a0cbb46df71422d"/>
-    <p:sldLayoutId xmlns:r="http://schemas.openxmlformats.org/officeDocument/2006/relationships" id="2147483650" r:id="R6b3b14b997d74ab3"/>
-    <p:sldLayoutId xmlns:r="http://schemas.openxmlformats.org/officeDocument/2006/relationships" id="2147483651" r:id="R3777ca30b9504c58"/>
-    <p:sldLayoutId xmlns:r="http://schemas.openxmlformats.org/officeDocument/2006/relationships" id="2147483652" r:id="R65db334574084f5d"/>
-    <p:sldLayoutId xmlns:r="http://schemas.openxmlformats.org/officeDocument/2006/relationships" id="2147483653" r:id="Rd1d672b0668b46d4"/>
-    <p:sldLayoutId xmlns:r="http://schemas.openxmlformats.org/officeDocument/2006/relationships" id="2147483654" r:id="R437bc9a34f1a4ee9"/>
+    <p:sldLayoutId xmlns:r="http://schemas.openxmlformats.org/officeDocument/2006/relationships" id="2147483649" r:id="R7a61c9bc826a4bbc"/>
+    <p:sldLayoutId xmlns:r="http://schemas.openxmlformats.org/officeDocument/2006/relationships" id="2147483650" r:id="Ref5917c066c743e8"/>
+    <p:sldLayoutId xmlns:r="http://schemas.openxmlformats.org/officeDocument/2006/relationships" id="2147483651" r:id="R75245f2572b944b0"/>
+    <p:sldLayoutId xmlns:r="http://schemas.openxmlformats.org/officeDocument/2006/relationships" id="2147483652" r:id="Rc3c12ab4edc941e1"/>
+    <p:sldLayoutId xmlns:r="http://schemas.openxmlformats.org/officeDocument/2006/relationships" id="2147483653" r:id="R5e57d6a637be41da"/>
+    <p:sldLayoutId xmlns:r="http://schemas.openxmlformats.org/officeDocument/2006/relationships" id="2147483654" r:id="Ra3370f2a8dd940dd"/>
   </p:sldLayoutIdLst>
   <p:txStyles>
     <p:titleStyle>
@@ -3360,7 +3360,7 @@
           <p:cNvPr id="9" name="">
             <a:extLst xmlns:a="http://schemas.openxmlformats.org/drawingml/2006/main">
               <a:ext uri="{FF2B5EF4-FFF2-40B4-BE49-F238E27FC236}">
-                <a16:creationId xmlns:a16="http://schemas.microsoft.com/office/drawing/2014/main" id="{35F9427C-6CEC-4F86-AACF-EF1CA1D9EC2E}"/>
+                <a16:creationId xmlns:a16="http://schemas.microsoft.com/office/drawing/2014/main" id="{4FFCA1B0-B971-44D1-B397-A57B35D09334}"/>
               </a:ext>
             </a:extLst>
           </p:cNvPr>
@@ -3391,7 +3391,7 @@
           <p:cNvPr id="2" name="">
             <a:extLst xmlns:a="http://schemas.openxmlformats.org/drawingml/2006/main">
               <a:ext uri="{FF2B5EF4-FFF2-40B4-BE49-F238E27FC236}">
-                <a16:creationId xmlns:a16="http://schemas.microsoft.com/office/drawing/2014/main" id="{57A7C80A-A9A4-4C38-87BE-700BA6E95ECF}"/>
+                <a16:creationId xmlns:a16="http://schemas.microsoft.com/office/drawing/2014/main" id="{2E56FBFC-E0A3-49AE-AFCD-58726BAED1EE}"/>
               </a:ext>
             </a:extLst>
           </p:cNvPr>
@@ -3458,7 +3458,7 @@
           <p:cNvPr id="3" name="">
             <a:extLst xmlns:a="http://schemas.openxmlformats.org/drawingml/2006/main">
               <a:ext uri="{FF2B5EF4-FFF2-40B4-BE49-F238E27FC236}">
-                <a16:creationId xmlns:a16="http://schemas.microsoft.com/office/drawing/2014/main" id="{17DF0797-EEB4-4A5E-8A9B-51E26C59BBFE}"/>
+                <a16:creationId xmlns:a16="http://schemas.microsoft.com/office/drawing/2014/main" id="{C4A854DC-BB9D-49FB-8889-44E22DED053D}"/>
               </a:ext>
             </a:extLst>
           </p:cNvPr>
@@ -3548,7 +3548,7 @@
           <p:cNvPr id="4" name="">
             <a:extLst xmlns:a="http://schemas.openxmlformats.org/drawingml/2006/main">
               <a:ext uri="{FF2B5EF4-FFF2-40B4-BE49-F238E27FC236}">
-                <a16:creationId xmlns:a16="http://schemas.microsoft.com/office/drawing/2014/main" id="{A774AD5E-15B2-49C3-9BB8-62604BF69360}"/>
+                <a16:creationId xmlns:a16="http://schemas.microsoft.com/office/drawing/2014/main" id="{8F8C3E42-D91A-4126-903B-A6CDCB9A997C}"/>
               </a:ext>
             </a:extLst>
           </p:cNvPr>
@@ -3615,7 +3615,7 @@
           <p:cNvPr id="5" name="">
             <a:extLst xmlns:a="http://schemas.openxmlformats.org/drawingml/2006/main">
               <a:ext uri="{FF2B5EF4-FFF2-40B4-BE49-F238E27FC236}">
-                <a16:creationId xmlns:a16="http://schemas.microsoft.com/office/drawing/2014/main" id="{DA76EE2E-2CD8-49E7-B286-9FECE83331A4}"/>
+                <a16:creationId xmlns:a16="http://schemas.microsoft.com/office/drawing/2014/main" id="{0036EB3D-D055-45EE-9D68-8B5AB79620DF}"/>
               </a:ext>
             </a:extLst>
           </p:cNvPr>
@@ -3646,7 +3646,7 @@
           <p:cNvPr id="6" name="">
             <a:extLst xmlns:a="http://schemas.openxmlformats.org/drawingml/2006/main">
               <a:ext uri="{FF2B5EF4-FFF2-40B4-BE49-F238E27FC236}">
-                <a16:creationId xmlns:a16="http://schemas.microsoft.com/office/drawing/2014/main" id="{CF34C4D0-1A10-4639-BC41-0686103BA463}"/>
+                <a16:creationId xmlns:a16="http://schemas.microsoft.com/office/drawing/2014/main" id="{9D20AE4C-57C6-4B51-AF2E-A8398B05827F}"/>
               </a:ext>
             </a:extLst>
           </p:cNvPr>
@@ -3713,7 +3713,7 @@
           <p:cNvPr id="7" name="">
             <a:extLst xmlns:a="http://schemas.openxmlformats.org/drawingml/2006/main">
               <a:ext uri="{FF2B5EF4-FFF2-40B4-BE49-F238E27FC236}">
-                <a16:creationId xmlns:a16="http://schemas.microsoft.com/office/drawing/2014/main" id="{89674474-6953-48BE-BD8F-637EBF9DEF1E}"/>
+                <a16:creationId xmlns:a16="http://schemas.microsoft.com/office/drawing/2014/main" id="{A7ECFB8B-187E-4F75-8AA6-975F18990C9A}"/>
               </a:ext>
             </a:extLst>
           </p:cNvPr>
@@ -3780,7 +3780,7 @@
           <p:cNvPr id="8" name="">
             <a:extLst xmlns:a="http://schemas.openxmlformats.org/drawingml/2006/main">
               <a:ext uri="{FF2B5EF4-FFF2-40B4-BE49-F238E27FC236}">
-                <a16:creationId xmlns:a16="http://schemas.microsoft.com/office/drawing/2014/main" id="{50882F22-D487-4E6D-B83D-DA5ED30AC8D5}"/>
+                <a16:creationId xmlns:a16="http://schemas.microsoft.com/office/drawing/2014/main" id="{61691170-06CF-4EB4-BEA9-E6A17BE82337}"/>
               </a:ext>
             </a:extLst>
           </p:cNvPr>
@@ -3845,7 +3845,7 @@
     </p:spTree>
     <p:extLst>
       <p:ext uri="{BB962C8B-B14F-4D97-AF65-F5344CB8AC3E}">
-        <p14:creationId xmlns:p14="http://schemas.microsoft.com/office/powerpoint/2010/main" val="410118142"/>
+        <p14:creationId xmlns:p14="http://schemas.microsoft.com/office/powerpoint/2010/main" val="944847291"/>
       </p:ext>
     </p:extLst>
   </p:cSld>
@@ -3873,10 +3873,10 @@
       </p:grpSpPr>
       <p:sp>
         <p:nvSpPr>
-          <p:cNvPr id="15" name="">
-            <a:extLst xmlns:a="http://schemas.openxmlformats.org/drawingml/2006/main">
-              <a:ext uri="{FF2B5EF4-FFF2-40B4-BE49-F238E27FC236}">
-                <a16:creationId xmlns:a16="http://schemas.microsoft.com/office/drawing/2014/main" id="{83B122D1-73EF-47D0-9D7C-B1952132696D}"/>
+          <p:cNvPr id="19" name="">
+            <a:extLst xmlns:a="http://schemas.openxmlformats.org/drawingml/2006/main">
+              <a:ext uri="{FF2B5EF4-FFF2-40B4-BE49-F238E27FC236}">
+                <a16:creationId xmlns:a16="http://schemas.microsoft.com/office/drawing/2014/main" id="{094910F5-68AA-4504-8053-8681D01D17C2}"/>
               </a:ext>
             </a:extLst>
           </p:cNvPr>
@@ -3907,7 +3907,7 @@
           <p:cNvPr id="2" name="">
             <a:extLst xmlns:a="http://schemas.openxmlformats.org/drawingml/2006/main">
               <a:ext uri="{FF2B5EF4-FFF2-40B4-BE49-F238E27FC236}">
-                <a16:creationId xmlns:a16="http://schemas.microsoft.com/office/drawing/2014/main" id="{B80CD031-EE69-4B41-8A22-495F836D02C2}"/>
+                <a16:creationId xmlns:a16="http://schemas.microsoft.com/office/drawing/2014/main" id="{DEDDE863-FE8A-42E8-A281-898DD0366588}"/>
               </a:ext>
             </a:extLst>
           </p:cNvPr>
@@ -3964,7 +3964,7 @@
                 <a:ea typeface="Arial"/>
                 <a:cs typeface="Arial"/>
               </a:rPr>
-              <a:t>Current scope and limitations</a:t>
+              <a:t>Compile-time errors and current limits</a:t>
             </a:r>
           </a:p>
         </p:txBody>
@@ -3974,7 +3974,7 @@
           <p:cNvPr id="3" name="">
             <a:extLst xmlns:a="http://schemas.openxmlformats.org/drawingml/2006/main">
               <a:ext uri="{FF2B5EF4-FFF2-40B4-BE49-F238E27FC236}">
-                <a16:creationId xmlns:a16="http://schemas.microsoft.com/office/drawing/2014/main" id="{F23AA62A-DE5C-4CD2-A8A7-B77CF4A9235C}"/>
+                <a16:creationId xmlns:a16="http://schemas.microsoft.com/office/drawing/2014/main" id="{F236605C-DD49-4CAA-9027-47D6BBF3C126}"/>
               </a:ext>
             </a:extLst>
           </p:cNvPr>
@@ -4031,7 +4031,7 @@
                 <a:ea typeface="Arial"/>
                 <a:cs typeface="Arial"/>
               </a:rPr>
-              <a:t>These limits define what the present implementation actually accepts.</a:t>
+              <a:t>Invalid source is rejected before C generation; the translator stays within a defined grammar.</a:t>
             </a:r>
           </a:p>
         </p:txBody>
@@ -4041,7 +4041,7 @@
           <p:cNvPr id="4" name="">
             <a:extLst xmlns:a="http://schemas.openxmlformats.org/drawingml/2006/main">
               <a:ext uri="{FF2B5EF4-FFF2-40B4-BE49-F238E27FC236}">
-                <a16:creationId xmlns:a16="http://schemas.microsoft.com/office/drawing/2014/main" id="{685789DC-57AA-4897-B0BC-8C3B5FA65ED5}"/>
+                <a16:creationId xmlns:a16="http://schemas.microsoft.com/office/drawing/2014/main" id="{5157EC7D-5AA4-42D9-BF8E-ED4ABD563C30}"/>
               </a:ext>
             </a:extLst>
           </p:cNvPr>
@@ -4072,7 +4072,7 @@
           <p:cNvPr id="5" name="">
             <a:extLst xmlns:a="http://schemas.openxmlformats.org/drawingml/2006/main">
               <a:ext uri="{FF2B5EF4-FFF2-40B4-BE49-F238E27FC236}">
-                <a16:creationId xmlns:a16="http://schemas.microsoft.com/office/drawing/2014/main" id="{D8DF1323-F03C-4908-B59D-37C3346BE69F}"/>
+                <a16:creationId xmlns:a16="http://schemas.microsoft.com/office/drawing/2014/main" id="{8B6596F9-0609-488B-AD6B-FF17C72ABC07}"/>
               </a:ext>
             </a:extLst>
           </p:cNvPr>
@@ -4139,7 +4139,7 @@
           <p:cNvPr id="6" name="">
             <a:extLst xmlns:a="http://schemas.openxmlformats.org/drawingml/2006/main">
               <a:ext uri="{FF2B5EF4-FFF2-40B4-BE49-F238E27FC236}">
-                <a16:creationId xmlns:a16="http://schemas.microsoft.com/office/drawing/2014/main" id="{26AFB8BA-5328-4BDC-A599-ECF4E6BE5BB6}"/>
+                <a16:creationId xmlns:a16="http://schemas.microsoft.com/office/drawing/2014/main" id="{C8FB9A85-5F7A-4BA4-A9BE-15DD5B40F178}"/>
               </a:ext>
             </a:extLst>
           </p:cNvPr>
@@ -4206,19 +4206,19 @@
           <p:cNvPr id="7" name="">
             <a:extLst xmlns:a="http://schemas.openxmlformats.org/drawingml/2006/main">
               <a:ext uri="{FF2B5EF4-FFF2-40B4-BE49-F238E27FC236}">
-                <a16:creationId xmlns:a16="http://schemas.microsoft.com/office/drawing/2014/main" id="{A65DA5B6-50A2-48F0-BB54-2D71DDB91851}"/>
-              </a:ext>
-            </a:extLst>
-          </p:cNvPr>
-          <p:cNvSpPr>
-            <a:spLocks xmlns:a="http://schemas.openxmlformats.org/drawingml/2006/main" noGrp="1"/>
-          </p:cNvSpPr>
-          <p:nvPr/>
-        </p:nvSpPr>
-        <p:spPr>
-          <a:xfrm xmlns:a="http://schemas.openxmlformats.org/drawingml/2006/main">
-            <a:off x="628650" y="1600200"/>
-            <a:ext cx="5010150" cy="285750"/>
+                <a16:creationId xmlns:a16="http://schemas.microsoft.com/office/drawing/2014/main" id="{D9D5C3E1-0E92-4926-92DE-0DB18B5D796D}"/>
+              </a:ext>
+            </a:extLst>
+          </p:cNvPr>
+          <p:cNvSpPr>
+            <a:spLocks xmlns:a="http://schemas.openxmlformats.org/drawingml/2006/main" noGrp="1"/>
+          </p:cNvSpPr>
+          <p:nvPr/>
+        </p:nvSpPr>
+        <p:spPr>
+          <a:xfrm xmlns:a="http://schemas.openxmlformats.org/drawingml/2006/main">
+            <a:off x="628650" y="1476375"/>
+            <a:ext cx="4895850" cy="285750"/>
           </a:xfrm>
           <a:prstGeom xmlns:a="http://schemas.openxmlformats.org/drawingml/2006/main" prst="rect">
             <a:avLst/>
@@ -4235,7 +4235,7 @@
             <a:defPPr>
               <a:defRPr sz="1350" b="1">
                 <a:solidFill>
-                  <a:srgbClr val="33D69B"/>
+                  <a:srgbClr val="F6B94D"/>
                 </a:solidFill>
                 <a:latin typeface="Arial"/>
                 <a:ea typeface="Arial"/>
@@ -4247,7 +4247,7 @@
             <a:pPr>
               <a:defRPr sz="1350" b="1">
                 <a:solidFill>
-                  <a:srgbClr val="33D69B"/>
+                  <a:srgbClr val="F6B94D"/>
                 </a:solidFill>
                 <a:latin typeface="Arial"/>
                 <a:ea typeface="Arial"/>
@@ -4257,13 +4257,13 @@
             <a:r>
               <a:rPr sz="1350" b="1">
                 <a:solidFill>
-                  <a:srgbClr val="33D69B"/>
-                </a:solidFill>
-                <a:latin typeface="Arial"/>
-                <a:ea typeface="Arial"/>
-                <a:cs typeface="Arial"/>
-              </a:rPr>
-              <a:t>SUPPORTED NOW</a:t>
+                  <a:srgbClr val="F6B94D"/>
+                </a:solidFill>
+                <a:latin typeface="Arial"/>
+                <a:ea typeface="Arial"/>
+                <a:cs typeface="Arial"/>
+              </a:rPr>
+              <a:t>INVALID PSEUDOCODE</a:t>
             </a:r>
           </a:p>
         </p:txBody>
@@ -4273,25 +4273,25 @@
           <p:cNvPr id="8" name="">
             <a:extLst xmlns:a="http://schemas.openxmlformats.org/drawingml/2006/main">
               <a:ext uri="{FF2B5EF4-FFF2-40B4-BE49-F238E27FC236}">
-                <a16:creationId xmlns:a16="http://schemas.microsoft.com/office/drawing/2014/main" id="{30E28BB8-BBAC-4BD5-846B-D46E39C0B5D3}"/>
-              </a:ext>
-            </a:extLst>
-          </p:cNvPr>
-          <p:cNvSpPr>
-            <a:spLocks xmlns:a="http://schemas.openxmlformats.org/drawingml/2006/main" noGrp="1"/>
-          </p:cNvSpPr>
-          <p:nvPr/>
-        </p:nvSpPr>
-        <p:spPr>
-          <a:xfrm xmlns:a="http://schemas.openxmlformats.org/drawingml/2006/main">
-            <a:off x="628650" y="1943100"/>
-            <a:ext cx="5010150" cy="19050"/>
+                <a16:creationId xmlns:a16="http://schemas.microsoft.com/office/drawing/2014/main" id="{8C538E63-0B22-41C9-BE27-6D7F50CE99DE}"/>
+              </a:ext>
+            </a:extLst>
+          </p:cNvPr>
+          <p:cNvSpPr>
+            <a:spLocks xmlns:a="http://schemas.openxmlformats.org/drawingml/2006/main" noGrp="1"/>
+          </p:cNvSpPr>
+          <p:nvPr/>
+        </p:nvSpPr>
+        <p:spPr>
+          <a:xfrm xmlns:a="http://schemas.openxmlformats.org/drawingml/2006/main">
+            <a:off x="628650" y="1819275"/>
+            <a:ext cx="4895850" cy="19050"/>
           </a:xfrm>
           <a:prstGeom xmlns:a="http://schemas.openxmlformats.org/drawingml/2006/main" prst="rect">
             <a:avLst/>
           </a:prstGeom>
           <a:solidFill xmlns:a="http://schemas.openxmlformats.org/drawingml/2006/main">
-            <a:srgbClr val="33D69B"/>
+            <a:srgbClr val="F6B94D"/>
           </a:solidFill>
           <a:ln xmlns:a="http://schemas.openxmlformats.org/drawingml/2006/main" w="0">
             <a:noFill/>
@@ -4304,19 +4304,52 @@
           <p:cNvPr id="9" name="">
             <a:extLst xmlns:a="http://schemas.openxmlformats.org/drawingml/2006/main">
               <a:ext uri="{FF2B5EF4-FFF2-40B4-BE49-F238E27FC236}">
-                <a16:creationId xmlns:a16="http://schemas.microsoft.com/office/drawing/2014/main" id="{8F2D9D74-425D-471F-ABFA-2E5AE355EC96}"/>
-              </a:ext>
-            </a:extLst>
-          </p:cNvPr>
-          <p:cNvSpPr>
-            <a:spLocks xmlns:a="http://schemas.openxmlformats.org/drawingml/2006/main" noGrp="1"/>
-          </p:cNvSpPr>
-          <p:nvPr/>
-        </p:nvSpPr>
-        <p:spPr>
-          <a:xfrm xmlns:a="http://schemas.openxmlformats.org/drawingml/2006/main">
-            <a:off x="647700" y="2143125"/>
-            <a:ext cx="4972050" cy="2790825"/>
+                <a16:creationId xmlns:a16="http://schemas.microsoft.com/office/drawing/2014/main" id="{186C46D4-1EFC-447E-AF52-83C27A15FBAE}"/>
+              </a:ext>
+            </a:extLst>
+          </p:cNvPr>
+          <p:cNvSpPr>
+            <a:spLocks xmlns:a="http://schemas.openxmlformats.org/drawingml/2006/main" noGrp="1"/>
+          </p:cNvSpPr>
+          <p:nvPr/>
+        </p:nvSpPr>
+        <p:spPr>
+          <a:xfrm xmlns:a="http://schemas.openxmlformats.org/drawingml/2006/main">
+            <a:off x="619125" y="1943100"/>
+            <a:ext cx="4905375" cy="1866900"/>
+          </a:xfrm>
+          <a:prstGeom xmlns:a="http://schemas.openxmlformats.org/drawingml/2006/main" prst="roundRect">
+            <a:avLst>
+              <a:gd name="adj" fmla="val 5102"/>
+            </a:avLst>
+          </a:prstGeom>
+          <a:solidFill xmlns:a="http://schemas.openxmlformats.org/drawingml/2006/main">
+            <a:srgbClr val="101B2C"/>
+          </a:solidFill>
+          <a:ln xmlns:a="http://schemas.openxmlformats.org/drawingml/2006/main" w="0">
+            <a:noFill/>
+            <a:prstDash val="solid"/>
+          </a:ln>
+        </p:spPr>
+      </p:sp>
+      <p:sp>
+        <p:nvSpPr>
+          <p:cNvPr id="10" name="">
+            <a:extLst xmlns:a="http://schemas.openxmlformats.org/drawingml/2006/main">
+              <a:ext uri="{FF2B5EF4-FFF2-40B4-BE49-F238E27FC236}">
+                <a16:creationId xmlns:a16="http://schemas.microsoft.com/office/drawing/2014/main" id="{030AFCB7-74F0-4AF4-8B22-20C0B2483DDD}"/>
+              </a:ext>
+            </a:extLst>
+          </p:cNvPr>
+          <p:cNvSpPr>
+            <a:spLocks xmlns:a="http://schemas.openxmlformats.org/drawingml/2006/main" noGrp="1"/>
+          </p:cNvSpPr>
+          <p:nvPr/>
+        </p:nvSpPr>
+        <p:spPr>
+          <a:xfrm xmlns:a="http://schemas.openxmlformats.org/drawingml/2006/main">
+            <a:off x="828675" y="2105025"/>
+            <a:ext cx="4486275" cy="1543050"/>
           </a:xfrm>
           <a:prstGeom xmlns:a="http://schemas.openxmlformats.org/drawingml/2006/main" prst="rect">
             <a:avLst/>
@@ -4331,151 +4364,151 @@
           <a:bodyPr xmlns:a="http://schemas.openxmlformats.org/drawingml/2006/main" lIns="0" tIns="0" rIns="0" bIns="0"/>
           <a:lstStyle xmlns:a="http://schemas.openxmlformats.org/drawingml/2006/main">
             <a:defPPr>
-              <a:defRPr sz="1725" b="0">
-                <a:solidFill>
-                  <a:srgbClr val="F6F8FC"/>
-                </a:solidFill>
-                <a:latin typeface="Arial"/>
-                <a:ea typeface="Arial"/>
-                <a:cs typeface="Arial"/>
+              <a:defRPr sz="1500" b="0">
+                <a:solidFill>
+                  <a:srgbClr val="F6F8FC"/>
+                </a:solidFill>
+                <a:latin typeface="Consolas"/>
+                <a:ea typeface="Consolas"/>
+                <a:cs typeface="Consolas"/>
               </a:defRPr>
             </a:defPPr>
           </a:lstStyle>
           <a:p xmlns:a="http://schemas.openxmlformats.org/drawingml/2006/main">
             <a:pPr>
-              <a:defRPr sz="1725" b="0">
-                <a:solidFill>
-                  <a:srgbClr val="F6F8FC"/>
-                </a:solidFill>
-                <a:latin typeface="Arial"/>
-                <a:ea typeface="Arial"/>
-                <a:cs typeface="Arial"/>
-              </a:defRPr>
-            </a:pPr>
-            <a:r>
-              <a:rPr sz="1725" b="0">
-                <a:solidFill>
-                  <a:srgbClr val="F6F8FC"/>
-                </a:solidFill>
-                <a:latin typeface="Arial"/>
-                <a:ea typeface="Arial"/>
-                <a:cs typeface="Arial"/>
-              </a:rPr>
-              <a:t>Defined pseudocode grammar</a:t>
-            </a:r>
-          </a:p>
-          <a:p xmlns:a="http://schemas.openxmlformats.org/drawingml/2006/main">
-            <a:pPr>
-              <a:defRPr sz="1725" b="0">
-                <a:solidFill>
-                  <a:srgbClr val="F6F8FC"/>
-                </a:solidFill>
-                <a:latin typeface="Arial"/>
-                <a:ea typeface="Arial"/>
-                <a:cs typeface="Arial"/>
-              </a:defRPr>
-            </a:pPr>
-            <a:r>
-              <a:rPr sz="1725" b="0">
-                <a:solidFill>
-                  <a:srgbClr val="F6F8FC"/>
-                </a:solidFill>
-                <a:latin typeface="Arial"/>
-                <a:ea typeface="Arial"/>
-                <a:cs typeface="Arial"/>
-              </a:rPr>
-              <a:t>One-dimensional fixed-size arrays</a:t>
-            </a:r>
-          </a:p>
-          <a:p xmlns:a="http://schemas.openxmlformats.org/drawingml/2006/main">
-            <a:pPr>
-              <a:defRPr sz="1725" b="0">
-                <a:solidFill>
-                  <a:srgbClr val="F6F8FC"/>
-                </a:solidFill>
-                <a:latin typeface="Arial"/>
-                <a:ea typeface="Arial"/>
-                <a:cs typeface="Arial"/>
-              </a:defRPr>
-            </a:pPr>
-            <a:r>
-              <a:rPr sz="1725" b="0">
-                <a:solidFill>
-                  <a:srgbClr val="F6F8FC"/>
-                </a:solidFill>
-                <a:latin typeface="Arial"/>
-                <a:ea typeface="Arial"/>
-                <a:cs typeface="Arial"/>
-              </a:rPr>
-              <a:t>Basic INTEGER, REAL, CHAR and STRING</a:t>
-            </a:r>
-          </a:p>
-          <a:p xmlns:a="http://schemas.openxmlformats.org/drawingml/2006/main">
-            <a:pPr>
-              <a:defRPr sz="1725" b="0">
-                <a:solidFill>
-                  <a:srgbClr val="F6F8FC"/>
-                </a:solidFill>
-                <a:latin typeface="Arial"/>
-                <a:ea typeface="Arial"/>
-                <a:cs typeface="Arial"/>
-              </a:defRPr>
-            </a:pPr>
-            <a:r>
-              <a:rPr sz="1725" b="0">
-                <a:solidFill>
-                  <a:srgbClr val="F6F8FC"/>
-                </a:solidFill>
-                <a:latin typeface="Arial"/>
-                <a:ea typeface="Arial"/>
-                <a:cs typeface="Arial"/>
-              </a:rPr>
-              <a:t>Structured IF, WHILE and FOR</a:t>
-            </a:r>
-          </a:p>
-          <a:p xmlns:a="http://schemas.openxmlformats.org/drawingml/2006/main">
-            <a:pPr>
-              <a:defRPr sz="1725" b="0">
-                <a:solidFill>
-                  <a:srgbClr val="F6F8FC"/>
-                </a:solidFill>
-                <a:latin typeface="Arial"/>
-                <a:ea typeface="Arial"/>
-                <a:cs typeface="Arial"/>
-              </a:defRPr>
-            </a:pPr>
-            <a:r>
-              <a:rPr sz="1725" b="0">
-                <a:solidFill>
-                  <a:srgbClr val="F6F8FC"/>
-                </a:solidFill>
-                <a:latin typeface="Arial"/>
-                <a:ea typeface="Arial"/>
-                <a:cs typeface="Arial"/>
-              </a:rPr>
-              <a:t>Selected automatic runtime guards</a:t>
+              <a:defRPr sz="1500" b="0">
+                <a:solidFill>
+                  <a:srgbClr val="F6F8FC"/>
+                </a:solidFill>
+                <a:latin typeface="Consolas"/>
+                <a:ea typeface="Consolas"/>
+                <a:cs typeface="Consolas"/>
+              </a:defRPr>
+            </a:pPr>
+            <a:r>
+              <a:rPr sz="1500" b="0">
+                <a:solidFill>
+                  <a:srgbClr val="F6F8FC"/>
+                </a:solidFill>
+                <a:latin typeface="Consolas"/>
+                <a:ea typeface="Consolas"/>
+                <a:cs typeface="Consolas"/>
+              </a:rPr>
+              <a:t>BEGIN</a:t>
+            </a:r>
+          </a:p>
+          <a:p xmlns:a="http://schemas.openxmlformats.org/drawingml/2006/main">
+            <a:pPr>
+              <a:defRPr sz="1500" b="0">
+                <a:solidFill>
+                  <a:srgbClr val="F6F8FC"/>
+                </a:solidFill>
+                <a:latin typeface="Consolas"/>
+                <a:ea typeface="Consolas"/>
+                <a:cs typeface="Consolas"/>
+              </a:defRPr>
+            </a:pPr>
+            <a:r>
+              <a:rPr sz="1500" b="0">
+                <a:solidFill>
+                  <a:srgbClr val="F6F8FC"/>
+                </a:solidFill>
+                <a:latin typeface="Consolas"/>
+                <a:ea typeface="Consolas"/>
+                <a:cs typeface="Consolas"/>
+              </a:rPr>
+              <a:t>DECLARE x AS INTEGER</a:t>
+            </a:r>
+          </a:p>
+          <a:p xmlns:a="http://schemas.openxmlformats.org/drawingml/2006/main">
+            <a:pPr>
+              <a:defRPr sz="1500" b="0">
+                <a:solidFill>
+                  <a:srgbClr val="F6F8FC"/>
+                </a:solidFill>
+                <a:latin typeface="Consolas"/>
+                <a:ea typeface="Consolas"/>
+                <a:cs typeface="Consolas"/>
+              </a:defRPr>
+            </a:pPr>
+            <a:r>
+              <a:rPr sz="1500" b="0">
+                <a:solidFill>
+                  <a:srgbClr val="F6F8FC"/>
+                </a:solidFill>
+                <a:latin typeface="Consolas"/>
+                <a:ea typeface="Consolas"/>
+                <a:cs typeface="Consolas"/>
+              </a:rPr>
+              <a:t>SET y = 3</a:t>
+            </a:r>
+          </a:p>
+          <a:p xmlns:a="http://schemas.openxmlformats.org/drawingml/2006/main">
+            <a:pPr>
+              <a:defRPr sz="1500" b="0">
+                <a:solidFill>
+                  <a:srgbClr val="F6F8FC"/>
+                </a:solidFill>
+                <a:latin typeface="Consolas"/>
+                <a:ea typeface="Consolas"/>
+                <a:cs typeface="Consolas"/>
+              </a:defRPr>
+            </a:pPr>
+            <a:r>
+              <a:rPr sz="1500" b="0">
+                <a:solidFill>
+                  <a:srgbClr val="F6F8FC"/>
+                </a:solidFill>
+                <a:latin typeface="Consolas"/>
+                <a:ea typeface="Consolas"/>
+                <a:cs typeface="Consolas"/>
+              </a:rPr>
+              <a:t>SET x = 2.5</a:t>
+            </a:r>
+          </a:p>
+          <a:p xmlns:a="http://schemas.openxmlformats.org/drawingml/2006/main">
+            <a:pPr>
+              <a:defRPr sz="1500" b="0">
+                <a:solidFill>
+                  <a:srgbClr val="F6F8FC"/>
+                </a:solidFill>
+                <a:latin typeface="Consolas"/>
+                <a:ea typeface="Consolas"/>
+                <a:cs typeface="Consolas"/>
+              </a:defRPr>
+            </a:pPr>
+            <a:r>
+              <a:rPr sz="1500" b="0">
+                <a:solidFill>
+                  <a:srgbClr val="F6F8FC"/>
+                </a:solidFill>
+                <a:latin typeface="Consolas"/>
+                <a:ea typeface="Consolas"/>
+                <a:cs typeface="Consolas"/>
+              </a:rPr>
+              <a:t>END</a:t>
             </a:r>
           </a:p>
         </p:txBody>
       </p:sp>
       <p:sp>
         <p:nvSpPr>
-          <p:cNvPr id="10" name="">
-            <a:extLst xmlns:a="http://schemas.openxmlformats.org/drawingml/2006/main">
-              <a:ext uri="{FF2B5EF4-FFF2-40B4-BE49-F238E27FC236}">
-                <a16:creationId xmlns:a16="http://schemas.microsoft.com/office/drawing/2014/main" id="{04CFD49E-2B87-4212-AC4C-EFC6C14B2351}"/>
-              </a:ext>
-            </a:extLst>
-          </p:cNvPr>
-          <p:cNvSpPr>
-            <a:spLocks xmlns:a="http://schemas.openxmlformats.org/drawingml/2006/main" noGrp="1"/>
-          </p:cNvSpPr>
-          <p:nvPr/>
-        </p:nvSpPr>
-        <p:spPr>
-          <a:xfrm xmlns:a="http://schemas.openxmlformats.org/drawingml/2006/main">
-            <a:off x="6191250" y="1600200"/>
-            <a:ext cx="5276850" cy="285750"/>
+          <p:cNvPr id="11" name="">
+            <a:extLst xmlns:a="http://schemas.openxmlformats.org/drawingml/2006/main">
+              <a:ext uri="{FF2B5EF4-FFF2-40B4-BE49-F238E27FC236}">
+                <a16:creationId xmlns:a16="http://schemas.microsoft.com/office/drawing/2014/main" id="{DE0071A3-2E04-4455-A173-F04C19A61A13}"/>
+              </a:ext>
+            </a:extLst>
+          </p:cNvPr>
+          <p:cNvSpPr>
+            <a:spLocks xmlns:a="http://schemas.openxmlformats.org/drawingml/2006/main" noGrp="1"/>
+          </p:cNvSpPr>
+          <p:nvPr/>
+        </p:nvSpPr>
+        <p:spPr>
+          <a:xfrm xmlns:a="http://schemas.openxmlformats.org/drawingml/2006/main">
+            <a:off x="6000750" y="1476375"/>
+            <a:ext cx="5467350" cy="285750"/>
           </a:xfrm>
           <a:prstGeom xmlns:a="http://schemas.openxmlformats.org/drawingml/2006/main" prst="rect">
             <a:avLst/>
@@ -4492,7 +4525,7 @@
             <a:defPPr>
               <a:defRPr sz="1350" b="1">
                 <a:solidFill>
-                  <a:srgbClr val="F6B94D"/>
+                  <a:srgbClr val="20D5EA"/>
                 </a:solidFill>
                 <a:latin typeface="Arial"/>
                 <a:ea typeface="Arial"/>
@@ -4504,7 +4537,7 @@
             <a:pPr>
               <a:defRPr sz="1350" b="1">
                 <a:solidFill>
-                  <a:srgbClr val="F6B94D"/>
+                  <a:srgbClr val="20D5EA"/>
                 </a:solidFill>
                 <a:latin typeface="Arial"/>
                 <a:ea typeface="Arial"/>
@@ -4514,41 +4547,41 @@
             <a:r>
               <a:rPr sz="1350" b="1">
                 <a:solidFill>
-                  <a:srgbClr val="F6B94D"/>
-                </a:solidFill>
-                <a:latin typeface="Arial"/>
-                <a:ea typeface="Arial"/>
-                <a:cs typeface="Arial"/>
-              </a:rPr>
-              <a:t>NOT YET SUPPORTED</a:t>
+                  <a:srgbClr val="20D5EA"/>
+                </a:solidFill>
+                <a:latin typeface="Arial"/>
+                <a:ea typeface="Arial"/>
+                <a:cs typeface="Arial"/>
+              </a:rPr>
+              <a:t>COMPILER RESULT</a:t>
             </a:r>
           </a:p>
         </p:txBody>
       </p:sp>
       <p:sp>
         <p:nvSpPr>
-          <p:cNvPr id="11" name="">
-            <a:extLst xmlns:a="http://schemas.openxmlformats.org/drawingml/2006/main">
-              <a:ext uri="{FF2B5EF4-FFF2-40B4-BE49-F238E27FC236}">
-                <a16:creationId xmlns:a16="http://schemas.microsoft.com/office/drawing/2014/main" id="{B0322785-57EF-4A55-A51C-6E2C06EE76DA}"/>
-              </a:ext>
-            </a:extLst>
-          </p:cNvPr>
-          <p:cNvSpPr>
-            <a:spLocks xmlns:a="http://schemas.openxmlformats.org/drawingml/2006/main" noGrp="1"/>
-          </p:cNvSpPr>
-          <p:nvPr/>
-        </p:nvSpPr>
-        <p:spPr>
-          <a:xfrm xmlns:a="http://schemas.openxmlformats.org/drawingml/2006/main">
-            <a:off x="6191250" y="1943100"/>
-            <a:ext cx="5276850" cy="19050"/>
+          <p:cNvPr id="12" name="">
+            <a:extLst xmlns:a="http://schemas.openxmlformats.org/drawingml/2006/main">
+              <a:ext uri="{FF2B5EF4-FFF2-40B4-BE49-F238E27FC236}">
+                <a16:creationId xmlns:a16="http://schemas.microsoft.com/office/drawing/2014/main" id="{46B83DD8-2568-4851-AAD8-65061F0FF219}"/>
+              </a:ext>
+            </a:extLst>
+          </p:cNvPr>
+          <p:cNvSpPr>
+            <a:spLocks xmlns:a="http://schemas.openxmlformats.org/drawingml/2006/main" noGrp="1"/>
+          </p:cNvSpPr>
+          <p:nvPr/>
+        </p:nvSpPr>
+        <p:spPr>
+          <a:xfrm xmlns:a="http://schemas.openxmlformats.org/drawingml/2006/main">
+            <a:off x="6000750" y="1819275"/>
+            <a:ext cx="5467350" cy="19050"/>
           </a:xfrm>
           <a:prstGeom xmlns:a="http://schemas.openxmlformats.org/drawingml/2006/main" prst="rect">
             <a:avLst/>
           </a:prstGeom>
           <a:solidFill xmlns:a="http://schemas.openxmlformats.org/drawingml/2006/main">
-            <a:srgbClr val="F6B94D"/>
+            <a:srgbClr val="20D5EA"/>
           </a:solidFill>
           <a:ln xmlns:a="http://schemas.openxmlformats.org/drawingml/2006/main" w="0">
             <a:noFill/>
@@ -4558,22 +4591,55 @@
       </p:sp>
       <p:sp>
         <p:nvSpPr>
-          <p:cNvPr id="12" name="">
-            <a:extLst xmlns:a="http://schemas.openxmlformats.org/drawingml/2006/main">
-              <a:ext uri="{FF2B5EF4-FFF2-40B4-BE49-F238E27FC236}">
-                <a16:creationId xmlns:a16="http://schemas.microsoft.com/office/drawing/2014/main" id="{1C1DBDCC-604F-4BFC-8B0D-AC9A2C28C8D5}"/>
-              </a:ext>
-            </a:extLst>
-          </p:cNvPr>
-          <p:cNvSpPr>
-            <a:spLocks xmlns:a="http://schemas.openxmlformats.org/drawingml/2006/main" noGrp="1"/>
-          </p:cNvSpPr>
-          <p:nvPr/>
-        </p:nvSpPr>
-        <p:spPr>
-          <a:xfrm xmlns:a="http://schemas.openxmlformats.org/drawingml/2006/main">
-            <a:off x="6210300" y="2143125"/>
-            <a:ext cx="5219700" cy="2790825"/>
+          <p:cNvPr id="13" name="">
+            <a:extLst xmlns:a="http://schemas.openxmlformats.org/drawingml/2006/main">
+              <a:ext uri="{FF2B5EF4-FFF2-40B4-BE49-F238E27FC236}">
+                <a16:creationId xmlns:a16="http://schemas.microsoft.com/office/drawing/2014/main" id="{0079E5A5-11DD-4948-86FC-BD29911D04DD}"/>
+              </a:ext>
+            </a:extLst>
+          </p:cNvPr>
+          <p:cNvSpPr>
+            <a:spLocks xmlns:a="http://schemas.openxmlformats.org/drawingml/2006/main" noGrp="1"/>
+          </p:cNvSpPr>
+          <p:nvPr/>
+        </p:nvSpPr>
+        <p:spPr>
+          <a:xfrm xmlns:a="http://schemas.openxmlformats.org/drawingml/2006/main">
+            <a:off x="5991225" y="1943100"/>
+            <a:ext cx="5476875" cy="1866900"/>
+          </a:xfrm>
+          <a:prstGeom xmlns:a="http://schemas.openxmlformats.org/drawingml/2006/main" prst="roundRect">
+            <a:avLst>
+              <a:gd name="adj" fmla="val 5102"/>
+            </a:avLst>
+          </a:prstGeom>
+          <a:solidFill xmlns:a="http://schemas.openxmlformats.org/drawingml/2006/main">
+            <a:srgbClr val="101B2C"/>
+          </a:solidFill>
+          <a:ln xmlns:a="http://schemas.openxmlformats.org/drawingml/2006/main" w="0">
+            <a:noFill/>
+            <a:prstDash val="solid"/>
+          </a:ln>
+        </p:spPr>
+      </p:sp>
+      <p:sp>
+        <p:nvSpPr>
+          <p:cNvPr id="14" name="">
+            <a:extLst xmlns:a="http://schemas.openxmlformats.org/drawingml/2006/main">
+              <a:ext uri="{FF2B5EF4-FFF2-40B4-BE49-F238E27FC236}">
+                <a16:creationId xmlns:a16="http://schemas.microsoft.com/office/drawing/2014/main" id="{1D759F30-981D-4951-B852-4D1312B3BB3A}"/>
+              </a:ext>
+            </a:extLst>
+          </p:cNvPr>
+          <p:cNvSpPr>
+            <a:spLocks xmlns:a="http://schemas.openxmlformats.org/drawingml/2006/main" noGrp="1"/>
+          </p:cNvSpPr>
+          <p:nvPr/>
+        </p:nvSpPr>
+        <p:spPr>
+          <a:xfrm xmlns:a="http://schemas.openxmlformats.org/drawingml/2006/main">
+            <a:off x="6200775" y="2105025"/>
+            <a:ext cx="5057775" cy="1543050"/>
           </a:xfrm>
           <a:prstGeom xmlns:a="http://schemas.openxmlformats.org/drawingml/2006/main" prst="rect">
             <a:avLst/>
@@ -4588,157 +4654,183 @@
           <a:bodyPr xmlns:a="http://schemas.openxmlformats.org/drawingml/2006/main" lIns="0" tIns="0" rIns="0" bIns="0"/>
           <a:lstStyle xmlns:a="http://schemas.openxmlformats.org/drawingml/2006/main">
             <a:defPPr>
-              <a:defRPr sz="1725" b="0">
-                <a:solidFill>
-                  <a:srgbClr val="F6F8FC"/>
-                </a:solidFill>
-                <a:latin typeface="Arial"/>
-                <a:ea typeface="Arial"/>
-                <a:cs typeface="Arial"/>
+              <a:defRPr sz="1350" b="0">
+                <a:solidFill>
+                  <a:srgbClr val="F6F8FC"/>
+                </a:solidFill>
+                <a:latin typeface="Consolas"/>
+                <a:ea typeface="Consolas"/>
+                <a:cs typeface="Consolas"/>
               </a:defRPr>
             </a:defPPr>
           </a:lstStyle>
           <a:p xmlns:a="http://schemas.openxmlformats.org/drawingml/2006/main">
             <a:pPr>
-              <a:defRPr sz="1725" b="0">
-                <a:solidFill>
-                  <a:srgbClr val="F6F8FC"/>
-                </a:solidFill>
-                <a:latin typeface="Arial"/>
-                <a:ea typeface="Arial"/>
-                <a:cs typeface="Arial"/>
-              </a:defRPr>
-            </a:pPr>
-            <a:r>
-              <a:rPr sz="1725" b="0">
-                <a:solidFill>
-                  <a:srgbClr val="F6F8FC"/>
-                </a:solidFill>
-                <a:latin typeface="Arial"/>
-                <a:ea typeface="Arial"/>
-                <a:cs typeface="Arial"/>
-              </a:rPr>
-              <a:t>Free-form English input</a:t>
-            </a:r>
-          </a:p>
-          <a:p xmlns:a="http://schemas.openxmlformats.org/drawingml/2006/main">
-            <a:pPr>
-              <a:defRPr sz="1725" b="0">
-                <a:solidFill>
-                  <a:srgbClr val="F6F8FC"/>
-                </a:solidFill>
-                <a:latin typeface="Arial"/>
-                <a:ea typeface="Arial"/>
-                <a:cs typeface="Arial"/>
-              </a:defRPr>
-            </a:pPr>
-            <a:r>
-              <a:rPr sz="1725" b="0">
-                <a:solidFill>
-                  <a:srgbClr val="F6F8FC"/>
-                </a:solidFill>
-                <a:latin typeface="Arial"/>
-                <a:ea typeface="Arial"/>
-                <a:cs typeface="Arial"/>
-              </a:rPr>
-              <a:t>User-defined functions</a:t>
-            </a:r>
-          </a:p>
-          <a:p xmlns:a="http://schemas.openxmlformats.org/drawingml/2006/main">
-            <a:pPr>
-              <a:defRPr sz="1725" b="0">
-                <a:solidFill>
-                  <a:srgbClr val="F6F8FC"/>
-                </a:solidFill>
-                <a:latin typeface="Arial"/>
-                <a:ea typeface="Arial"/>
-                <a:cs typeface="Arial"/>
-              </a:defRPr>
-            </a:pPr>
-            <a:r>
-              <a:rPr sz="1725" b="0">
-                <a:solidFill>
-                  <a:srgbClr val="F6F8FC"/>
-                </a:solidFill>
-                <a:latin typeface="Arial"/>
-                <a:ea typeface="Arial"/>
-                <a:cs typeface="Arial"/>
-              </a:rPr>
-              <a:t>Multidimensional arrays</a:t>
-            </a:r>
-          </a:p>
-          <a:p xmlns:a="http://schemas.openxmlformats.org/drawingml/2006/main">
-            <a:pPr>
-              <a:defRPr sz="1725" b="0">
-                <a:solidFill>
-                  <a:srgbClr val="F6F8FC"/>
-                </a:solidFill>
-                <a:latin typeface="Arial"/>
-                <a:ea typeface="Arial"/>
-                <a:cs typeface="Arial"/>
-              </a:defRPr>
-            </a:pPr>
-            <a:r>
-              <a:rPr sz="1725" b="0">
-                <a:solidFill>
-                  <a:srgbClr val="F6F8FC"/>
-                </a:solidFill>
-                <a:latin typeface="Arial"/>
-                <a:ea typeface="Arial"/>
-                <a:cs typeface="Arial"/>
-              </a:rPr>
-              <a:t>Logical AND / OR</a:t>
-            </a:r>
-          </a:p>
-          <a:p xmlns:a="http://schemas.openxmlformats.org/drawingml/2006/main">
-            <a:pPr>
-              <a:defRPr sz="1725" b="0">
-                <a:solidFill>
-                  <a:srgbClr val="F6F8FC"/>
-                </a:solidFill>
-                <a:latin typeface="Arial"/>
-                <a:ea typeface="Arial"/>
-                <a:cs typeface="Arial"/>
-              </a:defRPr>
-            </a:pPr>
-            <a:r>
-              <a:rPr sz="1725" b="0">
-                <a:solidFill>
-                  <a:srgbClr val="F6F8FC"/>
-                </a:solidFill>
-                <a:latin typeface="Arial"/>
-                <a:ea typeface="Arial"/>
-                <a:cs typeface="Arial"/>
-              </a:rPr>
-              <a:t>General overflow or uninitialized-use analysis</a:t>
+              <a:defRPr sz="1350" b="0">
+                <a:solidFill>
+                  <a:srgbClr val="F6F8FC"/>
+                </a:solidFill>
+                <a:latin typeface="Consolas"/>
+                <a:ea typeface="Consolas"/>
+                <a:cs typeface="Consolas"/>
+              </a:defRPr>
+            </a:pPr>
+            <a:r>
+              <a:rPr sz="1350" b="0">
+                <a:solidFill>
+                  <a:srgbClr val="F6F8FC"/>
+                </a:solidFill>
+                <a:latin typeface="Consolas"/>
+                <a:ea typeface="Consolas"/>
+                <a:cs typeface="Consolas"/>
+              </a:rPr>
+              <a:t>Line 3: undeclared identifier y</a:t>
+            </a:r>
+          </a:p>
+          <a:p xmlns:a="http://schemas.openxmlformats.org/drawingml/2006/main">
+            <a:pPr>
+              <a:defRPr sz="1350" b="0">
+                <a:solidFill>
+                  <a:srgbClr val="F6F8FC"/>
+                </a:solidFill>
+                <a:latin typeface="Consolas"/>
+                <a:ea typeface="Consolas"/>
+                <a:cs typeface="Consolas"/>
+              </a:defRPr>
+            </a:pPr>
+            <a:r>
+              <a:rPr sz="1350" b="0">
+                <a:solidFill>
+                  <a:srgbClr val="F6F8FC"/>
+                </a:solidFill>
+                <a:latin typeface="Consolas"/>
+                <a:ea typeface="Consolas"/>
+                <a:cs typeface="Consolas"/>
+              </a:rPr>
+              <a:t>Line 4: cannot assign REAL to INTEGER</a:t>
+            </a:r>
+          </a:p>
+          <a:p xmlns:a="http://schemas.openxmlformats.org/drawingml/2006/main">
+            <a:r>
+              <a:t/>
+            </a:r>
+          </a:p>
+          <a:p xmlns:a="http://schemas.openxmlformats.org/drawingml/2006/main">
+            <a:pPr>
+              <a:defRPr sz="1350" b="0">
+                <a:solidFill>
+                  <a:srgbClr val="F6F8FC"/>
+                </a:solidFill>
+                <a:latin typeface="Consolas"/>
+                <a:ea typeface="Consolas"/>
+                <a:cs typeface="Consolas"/>
+              </a:defRPr>
+            </a:pPr>
+            <a:r>
+              <a:rPr sz="1350" b="0">
+                <a:solidFill>
+                  <a:srgbClr val="F6F8FC"/>
+                </a:solidFill>
+                <a:latin typeface="Consolas"/>
+                <a:ea typeface="Consolas"/>
+                <a:cs typeface="Consolas"/>
+              </a:rPr>
+              <a:t>No new C output is produced.</a:t>
             </a:r>
           </a:p>
         </p:txBody>
       </p:sp>
       <p:sp>
         <p:nvSpPr>
-          <p:cNvPr id="13" name="">
-            <a:extLst xmlns:a="http://schemas.openxmlformats.org/drawingml/2006/main">
-              <a:ext uri="{FF2B5EF4-FFF2-40B4-BE49-F238E27FC236}">
-                <a16:creationId xmlns:a16="http://schemas.microsoft.com/office/drawing/2014/main" id="{108DC26F-998E-4C25-A6D0-D50C6119ECFA}"/>
-              </a:ext>
-            </a:extLst>
-          </p:cNvPr>
-          <p:cNvSpPr>
-            <a:spLocks xmlns:a="http://schemas.openxmlformats.org/drawingml/2006/main" noGrp="1"/>
-          </p:cNvSpPr>
-          <p:nvPr/>
-        </p:nvSpPr>
-        <p:spPr>
-          <a:xfrm xmlns:a="http://schemas.openxmlformats.org/drawingml/2006/main">
-            <a:off x="628650" y="5238750"/>
+          <p:cNvPr id="15" name="">
+            <a:extLst xmlns:a="http://schemas.openxmlformats.org/drawingml/2006/main">
+              <a:ext uri="{FF2B5EF4-FFF2-40B4-BE49-F238E27FC236}">
+                <a16:creationId xmlns:a16="http://schemas.microsoft.com/office/drawing/2014/main" id="{6526C70E-5310-4DC5-BC28-12CB243108E2}"/>
+              </a:ext>
+            </a:extLst>
+          </p:cNvPr>
+          <p:cNvSpPr>
+            <a:spLocks xmlns:a="http://schemas.openxmlformats.org/drawingml/2006/main" noGrp="1"/>
+          </p:cNvSpPr>
+          <p:nvPr/>
+        </p:nvSpPr>
+        <p:spPr>
+          <a:xfrm xmlns:a="http://schemas.openxmlformats.org/drawingml/2006/main">
+            <a:off x="628650" y="4143375"/>
+            <a:ext cx="10839450" cy="285750"/>
+          </a:xfrm>
+          <a:prstGeom xmlns:a="http://schemas.openxmlformats.org/drawingml/2006/main" prst="rect">
+            <a:avLst/>
+          </a:prstGeom>
+          <a:noFill xmlns:a="http://schemas.openxmlformats.org/drawingml/2006/main"/>
+          <a:ln xmlns:a="http://schemas.openxmlformats.org/drawingml/2006/main" w="0">
+            <a:noFill/>
+            <a:prstDash val="solid"/>
+          </a:ln>
+        </p:spPr>
+        <p:txBody>
+          <a:bodyPr xmlns:a="http://schemas.openxmlformats.org/drawingml/2006/main" lIns="0" tIns="0" rIns="0" bIns="0"/>
+          <a:lstStyle xmlns:a="http://schemas.openxmlformats.org/drawingml/2006/main">
+            <a:defPPr>
+              <a:defRPr sz="1350" b="1">
+                <a:solidFill>
+                  <a:srgbClr val="33D69B"/>
+                </a:solidFill>
+                <a:latin typeface="Arial"/>
+                <a:ea typeface="Arial"/>
+                <a:cs typeface="Arial"/>
+              </a:defRPr>
+            </a:defPPr>
+          </a:lstStyle>
+          <a:p xmlns:a="http://schemas.openxmlformats.org/drawingml/2006/main">
+            <a:pPr>
+              <a:defRPr sz="1350" b="1">
+                <a:solidFill>
+                  <a:srgbClr val="33D69B"/>
+                </a:solidFill>
+                <a:latin typeface="Arial"/>
+                <a:ea typeface="Arial"/>
+                <a:cs typeface="Arial"/>
+              </a:defRPr>
+            </a:pPr>
+            <a:r>
+              <a:rPr sz="1350" b="1">
+                <a:solidFill>
+                  <a:srgbClr val="33D69B"/>
+                </a:solidFill>
+                <a:latin typeface="Arial"/>
+                <a:ea typeface="Arial"/>
+                <a:cs typeface="Arial"/>
+              </a:rPr>
+              <a:t>BOUNDARIES OF THE CURRENT LANGUAGE</a:t>
+            </a:r>
+          </a:p>
+        </p:txBody>
+      </p:sp>
+      <p:sp>
+        <p:nvSpPr>
+          <p:cNvPr id="16" name="">
+            <a:extLst xmlns:a="http://schemas.openxmlformats.org/drawingml/2006/main">
+              <a:ext uri="{FF2B5EF4-FFF2-40B4-BE49-F238E27FC236}">
+                <a16:creationId xmlns:a16="http://schemas.microsoft.com/office/drawing/2014/main" id="{FF13031F-B130-48A0-AEA4-94C7126909CB}"/>
+              </a:ext>
+            </a:extLst>
+          </p:cNvPr>
+          <p:cNvSpPr>
+            <a:spLocks xmlns:a="http://schemas.openxmlformats.org/drawingml/2006/main" noGrp="1"/>
+          </p:cNvSpPr>
+          <p:nvPr/>
+        </p:nvSpPr>
+        <p:spPr>
+          <a:xfrm xmlns:a="http://schemas.openxmlformats.org/drawingml/2006/main">
+            <a:off x="628650" y="4486275"/>
             <a:ext cx="10839450" cy="19050"/>
           </a:xfrm>
           <a:prstGeom xmlns:a="http://schemas.openxmlformats.org/drawingml/2006/main" prst="rect">
             <a:avLst/>
           </a:prstGeom>
           <a:solidFill xmlns:a="http://schemas.openxmlformats.org/drawingml/2006/main">
-            <a:srgbClr val="29405D"/>
+            <a:srgbClr val="33D69B"/>
           </a:solidFill>
           <a:ln xmlns:a="http://schemas.openxmlformats.org/drawingml/2006/main" w="0">
             <a:noFill/>
@@ -4748,22 +4840,22 @@
       </p:sp>
       <p:sp>
         <p:nvSpPr>
-          <p:cNvPr id="14" name="">
-            <a:extLst xmlns:a="http://schemas.openxmlformats.org/drawingml/2006/main">
-              <a:ext uri="{FF2B5EF4-FFF2-40B4-BE49-F238E27FC236}">
-                <a16:creationId xmlns:a16="http://schemas.microsoft.com/office/drawing/2014/main" id="{7E7EA372-C5F3-440B-98F1-CF96CFAF59E4}"/>
-              </a:ext>
-            </a:extLst>
-          </p:cNvPr>
-          <p:cNvSpPr>
-            <a:spLocks xmlns:a="http://schemas.openxmlformats.org/drawingml/2006/main" noGrp="1"/>
-          </p:cNvSpPr>
-          <p:nvPr/>
-        </p:nvSpPr>
-        <p:spPr>
-          <a:xfrm xmlns:a="http://schemas.openxmlformats.org/drawingml/2006/main">
-            <a:off x="647700" y="5429250"/>
-            <a:ext cx="10706100" cy="590550"/>
+          <p:cNvPr id="17" name="">
+            <a:extLst xmlns:a="http://schemas.openxmlformats.org/drawingml/2006/main">
+              <a:ext uri="{FF2B5EF4-FFF2-40B4-BE49-F238E27FC236}">
+                <a16:creationId xmlns:a16="http://schemas.microsoft.com/office/drawing/2014/main" id="{F96DDD5E-2E4F-42F0-960E-5CC07D809D21}"/>
+              </a:ext>
+            </a:extLst>
+          </p:cNvPr>
+          <p:cNvSpPr>
+            <a:spLocks xmlns:a="http://schemas.openxmlformats.org/drawingml/2006/main" noGrp="1"/>
+          </p:cNvSpPr>
+          <p:nvPr/>
+        </p:nvSpPr>
+        <p:spPr>
+          <a:xfrm xmlns:a="http://schemas.openxmlformats.org/drawingml/2006/main">
+            <a:off x="638175" y="4695825"/>
+            <a:ext cx="10839450" cy="457200"/>
           </a:xfrm>
           <a:prstGeom xmlns:a="http://schemas.openxmlformats.org/drawingml/2006/main" prst="rect">
             <a:avLst/>
@@ -4780,7 +4872,7 @@
             <a:defPPr>
               <a:defRPr sz="1650" b="0">
                 <a:solidFill>
-                  <a:srgbClr val="AEBBD0"/>
+                  <a:srgbClr val="F6F8FC"/>
                 </a:solidFill>
                 <a:latin typeface="Arial"/>
                 <a:ea typeface="Arial"/>
@@ -4792,23 +4884,90 @@
             <a:pPr>
               <a:defRPr sz="1650" b="0">
                 <a:solidFill>
+                  <a:srgbClr val="F6F8FC"/>
+                </a:solidFill>
+                <a:latin typeface="Arial"/>
+                <a:ea typeface="Arial"/>
+                <a:cs typeface="Arial"/>
+              </a:defRPr>
+            </a:pPr>
+            <a:r>
+              <a:rPr sz="1650" b="0">
+                <a:solidFill>
+                  <a:srgbClr val="F6F8FC"/>
+                </a:solidFill>
+                <a:latin typeface="Arial"/>
+                <a:ea typeface="Arial"/>
+                <a:cs typeface="Arial"/>
+              </a:rPr>
+              <a:t>No free-form English, functions, multidimensional arrays or logical AND / OR.</a:t>
+            </a:r>
+          </a:p>
+        </p:txBody>
+      </p:sp>
+      <p:sp>
+        <p:nvSpPr>
+          <p:cNvPr id="18" name="">
+            <a:extLst xmlns:a="http://schemas.openxmlformats.org/drawingml/2006/main">
+              <a:ext uri="{FF2B5EF4-FFF2-40B4-BE49-F238E27FC236}">
+                <a16:creationId xmlns:a16="http://schemas.microsoft.com/office/drawing/2014/main" id="{8FC02867-84C6-4A04-9D84-029B446E5810}"/>
+              </a:ext>
+            </a:extLst>
+          </p:cNvPr>
+          <p:cNvSpPr>
+            <a:spLocks xmlns:a="http://schemas.openxmlformats.org/drawingml/2006/main" noGrp="1"/>
+          </p:cNvSpPr>
+          <p:nvPr/>
+        </p:nvSpPr>
+        <p:spPr>
+          <a:xfrm xmlns:a="http://schemas.openxmlformats.org/drawingml/2006/main">
+            <a:off x="638175" y="5257800"/>
+            <a:ext cx="10839450" cy="628650"/>
+          </a:xfrm>
+          <a:prstGeom xmlns:a="http://schemas.openxmlformats.org/drawingml/2006/main" prst="rect">
+            <a:avLst/>
+          </a:prstGeom>
+          <a:noFill xmlns:a="http://schemas.openxmlformats.org/drawingml/2006/main"/>
+          <a:ln xmlns:a="http://schemas.openxmlformats.org/drawingml/2006/main" w="0">
+            <a:noFill/>
+            <a:prstDash val="solid"/>
+          </a:ln>
+        </p:spPr>
+        <p:txBody>
+          <a:bodyPr xmlns:a="http://schemas.openxmlformats.org/drawingml/2006/main" lIns="0" tIns="0" rIns="0" bIns="0"/>
+          <a:lstStyle xmlns:a="http://schemas.openxmlformats.org/drawingml/2006/main">
+            <a:defPPr>
+              <a:defRPr sz="1575" b="0">
+                <a:solidFill>
                   <a:srgbClr val="AEBBD0"/>
                 </a:solidFill>
                 <a:latin typeface="Arial"/>
                 <a:ea typeface="Arial"/>
                 <a:cs typeface="Arial"/>
               </a:defRPr>
-            </a:pPr>
-            <a:r>
-              <a:rPr sz="1650" b="0">
+            </a:defPPr>
+          </a:lstStyle>
+          <a:p xmlns:a="http://schemas.openxmlformats.org/drawingml/2006/main">
+            <a:pPr>
+              <a:defRPr sz="1575" b="0">
                 <a:solidFill>
                   <a:srgbClr val="AEBBD0"/>
                 </a:solidFill>
                 <a:latin typeface="Arial"/>
                 <a:ea typeface="Arial"/>
                 <a:cs typeface="Arial"/>
-              </a:rPr>
-              <a:t>STRING is limited to 255 ASCII characters; checks do not prove all programs safe.</a:t>
+              </a:defRPr>
+            </a:pPr>
+            <a:r>
+              <a:rPr sz="1575" b="0">
+                <a:solidFill>
+                  <a:srgbClr val="AEBBD0"/>
+                </a:solidFill>
+                <a:latin typeface="Arial"/>
+                <a:ea typeface="Arial"/>
+                <a:cs typeface="Arial"/>
+              </a:rPr>
+              <a:t>STRING holds at most 255 ASCII characters. General overflow and uninitialized use are not checked.</a:t>
             </a:r>
           </a:p>
         </p:txBody>
@@ -4816,7 +4975,7 @@
     </p:spTree>
     <p:extLst>
       <p:ext uri="{BB962C8B-B14F-4D97-AF65-F5344CB8AC3E}">
-        <p14:creationId xmlns:p14="http://schemas.microsoft.com/office/powerpoint/2010/main" val="168989965"/>
+        <p14:creationId xmlns:p14="http://schemas.microsoft.com/office/powerpoint/2010/main" val="279652060"/>
       </p:ext>
     </p:extLst>
   </p:cSld>
@@ -4847,7 +5006,7 @@
           <p:cNvPr id="21" name="">
             <a:extLst xmlns:a="http://schemas.openxmlformats.org/drawingml/2006/main">
               <a:ext uri="{FF2B5EF4-FFF2-40B4-BE49-F238E27FC236}">
-                <a16:creationId xmlns:a16="http://schemas.microsoft.com/office/drawing/2014/main" id="{8D81CC43-E765-433A-BDC9-8B012DA90134}"/>
+                <a16:creationId xmlns:a16="http://schemas.microsoft.com/office/drawing/2014/main" id="{E5756D38-1D4F-43DB-9B24-FE2D5A0513AA}"/>
               </a:ext>
             </a:extLst>
           </p:cNvPr>
@@ -4878,7 +5037,7 @@
           <p:cNvPr id="2" name="">
             <a:extLst xmlns:a="http://schemas.openxmlformats.org/drawingml/2006/main">
               <a:ext uri="{FF2B5EF4-FFF2-40B4-BE49-F238E27FC236}">
-                <a16:creationId xmlns:a16="http://schemas.microsoft.com/office/drawing/2014/main" id="{1E90D030-559C-4257-8F69-6C0A7AF89647}"/>
+                <a16:creationId xmlns:a16="http://schemas.microsoft.com/office/drawing/2014/main" id="{9A476617-5C57-4E42-AFAB-EBA215A22991}"/>
               </a:ext>
             </a:extLst>
           </p:cNvPr>
@@ -4945,7 +5104,7 @@
           <p:cNvPr id="3" name="">
             <a:extLst xmlns:a="http://schemas.openxmlformats.org/drawingml/2006/main">
               <a:ext uri="{FF2B5EF4-FFF2-40B4-BE49-F238E27FC236}">
-                <a16:creationId xmlns:a16="http://schemas.microsoft.com/office/drawing/2014/main" id="{5CD57080-CF18-4786-91BD-D74B6614F74F}"/>
+                <a16:creationId xmlns:a16="http://schemas.microsoft.com/office/drawing/2014/main" id="{BCA6E700-625E-494E-AF46-5E56A30472D0}"/>
               </a:ext>
             </a:extLst>
           </p:cNvPr>
@@ -5012,7 +5171,7 @@
           <p:cNvPr id="4" name="">
             <a:extLst xmlns:a="http://schemas.openxmlformats.org/drawingml/2006/main">
               <a:ext uri="{FF2B5EF4-FFF2-40B4-BE49-F238E27FC236}">
-                <a16:creationId xmlns:a16="http://schemas.microsoft.com/office/drawing/2014/main" id="{69C1B36A-6B20-47CA-B57B-63545F027ED0}"/>
+                <a16:creationId xmlns:a16="http://schemas.microsoft.com/office/drawing/2014/main" id="{4B58B4C4-602D-40C1-B4EA-C1B2A3DA63EC}"/>
               </a:ext>
             </a:extLst>
           </p:cNvPr>
@@ -5043,7 +5202,7 @@
           <p:cNvPr id="5" name="">
             <a:extLst xmlns:a="http://schemas.openxmlformats.org/drawingml/2006/main">
               <a:ext uri="{FF2B5EF4-FFF2-40B4-BE49-F238E27FC236}">
-                <a16:creationId xmlns:a16="http://schemas.microsoft.com/office/drawing/2014/main" id="{67A7FCA8-BA70-42A9-838C-8B39BA6DCFF8}"/>
+                <a16:creationId xmlns:a16="http://schemas.microsoft.com/office/drawing/2014/main" id="{D88EC033-770E-446F-90B2-31B315E31039}"/>
               </a:ext>
             </a:extLst>
           </p:cNvPr>
@@ -5110,7 +5269,7 @@
           <p:cNvPr id="6" name="">
             <a:extLst xmlns:a="http://schemas.openxmlformats.org/drawingml/2006/main">
               <a:ext uri="{FF2B5EF4-FFF2-40B4-BE49-F238E27FC236}">
-                <a16:creationId xmlns:a16="http://schemas.microsoft.com/office/drawing/2014/main" id="{277D166E-74E9-43C8-A22C-00DF814D863F}"/>
+                <a16:creationId xmlns:a16="http://schemas.microsoft.com/office/drawing/2014/main" id="{3DD408DD-FB82-41AF-AF5D-1CCAE15CE631}"/>
               </a:ext>
             </a:extLst>
           </p:cNvPr>
@@ -5177,7 +5336,7 @@
           <p:cNvPr id="7" name="">
             <a:extLst xmlns:a="http://schemas.openxmlformats.org/drawingml/2006/main">
               <a:ext uri="{FF2B5EF4-FFF2-40B4-BE49-F238E27FC236}">
-                <a16:creationId xmlns:a16="http://schemas.microsoft.com/office/drawing/2014/main" id="{28FBCFCB-ACCB-41EF-ADAC-3AF66F5AF6D2}"/>
+                <a16:creationId xmlns:a16="http://schemas.microsoft.com/office/drawing/2014/main" id="{A893CDD3-1046-442F-9D86-F5A1742938C2}"/>
               </a:ext>
             </a:extLst>
           </p:cNvPr>
@@ -5244,7 +5403,7 @@
           <p:cNvPr id="8" name="">
             <a:extLst xmlns:a="http://schemas.openxmlformats.org/drawingml/2006/main">
               <a:ext uri="{FF2B5EF4-FFF2-40B4-BE49-F238E27FC236}">
-                <a16:creationId xmlns:a16="http://schemas.microsoft.com/office/drawing/2014/main" id="{704E2AF6-1E4E-420C-B7E6-04CFED039D17}"/>
+                <a16:creationId xmlns:a16="http://schemas.microsoft.com/office/drawing/2014/main" id="{9DD03BF1-13D1-49DD-9EA8-08594B138038}"/>
               </a:ext>
             </a:extLst>
           </p:cNvPr>
@@ -5275,7 +5434,7 @@
           <p:cNvPr id="9" name="">
             <a:extLst xmlns:a="http://schemas.openxmlformats.org/drawingml/2006/main">
               <a:ext uri="{FF2B5EF4-FFF2-40B4-BE49-F238E27FC236}">
-                <a16:creationId xmlns:a16="http://schemas.microsoft.com/office/drawing/2014/main" id="{D702A4D2-F534-4855-B539-19B5E66116B2}"/>
+                <a16:creationId xmlns:a16="http://schemas.microsoft.com/office/drawing/2014/main" id="{83FB1922-F97B-4CC2-89E9-F8C636BEE734}"/>
               </a:ext>
             </a:extLst>
           </p:cNvPr>
@@ -5308,7 +5467,7 @@
           <p:cNvPr id="10" name="">
             <a:extLst xmlns:a="http://schemas.openxmlformats.org/drawingml/2006/main">
               <a:ext uri="{FF2B5EF4-FFF2-40B4-BE49-F238E27FC236}">
-                <a16:creationId xmlns:a16="http://schemas.microsoft.com/office/drawing/2014/main" id="{608B8E3D-BA93-4DBF-9C32-8CA0B45E9E88}"/>
+                <a16:creationId xmlns:a16="http://schemas.microsoft.com/office/drawing/2014/main" id="{88755F4D-3EDD-4837-A943-18F95021F211}"/>
               </a:ext>
             </a:extLst>
           </p:cNvPr>
@@ -5467,7 +5626,7 @@
           <p:cNvPr id="11" name="">
             <a:extLst xmlns:a="http://schemas.openxmlformats.org/drawingml/2006/main">
               <a:ext uri="{FF2B5EF4-FFF2-40B4-BE49-F238E27FC236}">
-                <a16:creationId xmlns:a16="http://schemas.microsoft.com/office/drawing/2014/main" id="{287EBFB3-D5D1-4744-A05F-A8B2FF3D3BE2}"/>
+                <a16:creationId xmlns:a16="http://schemas.microsoft.com/office/drawing/2014/main" id="{B695BDD5-11F9-49B1-B294-82050352481E}"/>
               </a:ext>
             </a:extLst>
           </p:cNvPr>
@@ -5534,7 +5693,7 @@
           <p:cNvPr id="12" name="">
             <a:extLst xmlns:a="http://schemas.openxmlformats.org/drawingml/2006/main">
               <a:ext uri="{FF2B5EF4-FFF2-40B4-BE49-F238E27FC236}">
-                <a16:creationId xmlns:a16="http://schemas.microsoft.com/office/drawing/2014/main" id="{8411A54F-B8F8-4947-AD4C-91E7CCBFCB3B}"/>
+                <a16:creationId xmlns:a16="http://schemas.microsoft.com/office/drawing/2014/main" id="{1E375A63-62AB-4D79-9396-69F9ABE50373}"/>
               </a:ext>
             </a:extLst>
           </p:cNvPr>
@@ -5565,7 +5724,7 @@
           <p:cNvPr id="13" name="">
             <a:extLst xmlns:a="http://schemas.openxmlformats.org/drawingml/2006/main">
               <a:ext uri="{FF2B5EF4-FFF2-40B4-BE49-F238E27FC236}">
-                <a16:creationId xmlns:a16="http://schemas.microsoft.com/office/drawing/2014/main" id="{07EC77EA-B465-4D9B-A5AD-7D3D50DB971C}"/>
+                <a16:creationId xmlns:a16="http://schemas.microsoft.com/office/drawing/2014/main" id="{3796B0EC-3B70-45DB-BAC1-6AC56139C9F2}"/>
               </a:ext>
             </a:extLst>
           </p:cNvPr>
@@ -5701,7 +5860,7 @@
           <p:cNvPr id="14" name="">
             <a:extLst xmlns:a="http://schemas.openxmlformats.org/drawingml/2006/main">
               <a:ext uri="{FF2B5EF4-FFF2-40B4-BE49-F238E27FC236}">
-                <a16:creationId xmlns:a16="http://schemas.microsoft.com/office/drawing/2014/main" id="{BDA59254-4628-45CE-98E7-3B33BF1C9997}"/>
+                <a16:creationId xmlns:a16="http://schemas.microsoft.com/office/drawing/2014/main" id="{51EB1519-6029-4CD0-B768-E38DBDE4A44F}"/>
               </a:ext>
             </a:extLst>
           </p:cNvPr>
@@ -5768,7 +5927,7 @@
           <p:cNvPr id="15" name="">
             <a:extLst xmlns:a="http://schemas.openxmlformats.org/drawingml/2006/main">
               <a:ext uri="{FF2B5EF4-FFF2-40B4-BE49-F238E27FC236}">
-                <a16:creationId xmlns:a16="http://schemas.microsoft.com/office/drawing/2014/main" id="{74C6A8A5-D629-439D-8DC1-6FC7EE83522D}"/>
+                <a16:creationId xmlns:a16="http://schemas.microsoft.com/office/drawing/2014/main" id="{075EFD6C-3617-4EE4-84AE-1EE440D4F1D0}"/>
               </a:ext>
             </a:extLst>
           </p:cNvPr>
@@ -5799,7 +5958,7 @@
           <p:cNvPr id="16" name="">
             <a:extLst xmlns:a="http://schemas.openxmlformats.org/drawingml/2006/main">
               <a:ext uri="{FF2B5EF4-FFF2-40B4-BE49-F238E27FC236}">
-                <a16:creationId xmlns:a16="http://schemas.microsoft.com/office/drawing/2014/main" id="{E9B2BA0B-D326-4F60-A3CA-F028ACC76F97}"/>
+                <a16:creationId xmlns:a16="http://schemas.microsoft.com/office/drawing/2014/main" id="{18D2A017-04CC-4854-888D-0DBE16544201}"/>
               </a:ext>
             </a:extLst>
           </p:cNvPr>
@@ -5832,7 +5991,7 @@
           <p:cNvPr id="17" name="">
             <a:extLst xmlns:a="http://schemas.openxmlformats.org/drawingml/2006/main">
               <a:ext uri="{FF2B5EF4-FFF2-40B4-BE49-F238E27FC236}">
-                <a16:creationId xmlns:a16="http://schemas.microsoft.com/office/drawing/2014/main" id="{5F0CE149-0F8C-4489-9261-6214A0A98B48}"/>
+                <a16:creationId xmlns:a16="http://schemas.microsoft.com/office/drawing/2014/main" id="{51DF11CB-F6A4-4D83-8605-76115D584D50}"/>
               </a:ext>
             </a:extLst>
           </p:cNvPr>
@@ -5945,7 +6104,7 @@
           <p:cNvPr id="18" name="">
             <a:extLst xmlns:a="http://schemas.openxmlformats.org/drawingml/2006/main">
               <a:ext uri="{FF2B5EF4-FFF2-40B4-BE49-F238E27FC236}">
-                <a16:creationId xmlns:a16="http://schemas.microsoft.com/office/drawing/2014/main" id="{068A967E-21AF-4B2B-A741-F7F9DE304CEE}"/>
+                <a16:creationId xmlns:a16="http://schemas.microsoft.com/office/drawing/2014/main" id="{84A48748-5814-4CEE-8008-17781805D2D5}"/>
               </a:ext>
             </a:extLst>
           </p:cNvPr>
@@ -5976,7 +6135,7 @@
           <p:cNvPr id="19" name="">
             <a:extLst xmlns:a="http://schemas.openxmlformats.org/drawingml/2006/main">
               <a:ext uri="{FF2B5EF4-FFF2-40B4-BE49-F238E27FC236}">
-                <a16:creationId xmlns:a16="http://schemas.microsoft.com/office/drawing/2014/main" id="{278CAD83-4EC2-4D1D-A9C9-06E05D585890}"/>
+                <a16:creationId xmlns:a16="http://schemas.microsoft.com/office/drawing/2014/main" id="{DAD7886C-ABBF-4301-84E4-88668FAEE440}"/>
               </a:ext>
             </a:extLst>
           </p:cNvPr>
@@ -6043,7 +6202,7 @@
           <p:cNvPr id="20" name="">
             <a:extLst xmlns:a="http://schemas.openxmlformats.org/drawingml/2006/main">
               <a:ext uri="{FF2B5EF4-FFF2-40B4-BE49-F238E27FC236}">
-                <a16:creationId xmlns:a16="http://schemas.microsoft.com/office/drawing/2014/main" id="{E8E40572-6154-4D5B-B6E7-ABEE1F00075C}"/>
+                <a16:creationId xmlns:a16="http://schemas.microsoft.com/office/drawing/2014/main" id="{2FE35484-4A13-41F0-B45C-0F27B89D2A2E}"/>
               </a:ext>
             </a:extLst>
           </p:cNvPr>
@@ -6108,7 +6267,7 @@
     </p:spTree>
     <p:extLst>
       <p:ext uri="{BB962C8B-B14F-4D97-AF65-F5344CB8AC3E}">
-        <p14:creationId xmlns:p14="http://schemas.microsoft.com/office/powerpoint/2010/main" val="1193060836"/>
+        <p14:creationId xmlns:p14="http://schemas.microsoft.com/office/powerpoint/2010/main" val="835353766"/>
       </p:ext>
     </p:extLst>
   </p:cSld>
@@ -6139,7 +6298,7 @@
           <p:cNvPr id="15" name="">
             <a:extLst xmlns:a="http://schemas.openxmlformats.org/drawingml/2006/main">
               <a:ext uri="{FF2B5EF4-FFF2-40B4-BE49-F238E27FC236}">
-                <a16:creationId xmlns:a16="http://schemas.microsoft.com/office/drawing/2014/main" id="{0141A511-ADA6-4F80-ACE7-62D9AC2CD5D0}"/>
+                <a16:creationId xmlns:a16="http://schemas.microsoft.com/office/drawing/2014/main" id="{F5A79EDB-A6DF-4619-93EE-1E20C8160162}"/>
               </a:ext>
             </a:extLst>
           </p:cNvPr>
@@ -6170,7 +6329,7 @@
           <p:cNvPr id="2" name="">
             <a:extLst xmlns:a="http://schemas.openxmlformats.org/drawingml/2006/main">
               <a:ext uri="{FF2B5EF4-FFF2-40B4-BE49-F238E27FC236}">
-                <a16:creationId xmlns:a16="http://schemas.microsoft.com/office/drawing/2014/main" id="{91C07BBE-0893-47B2-AD56-998E3AB96640}"/>
+                <a16:creationId xmlns:a16="http://schemas.microsoft.com/office/drawing/2014/main" id="{ED6A4185-5068-45EA-AE72-586C9C0C30F7}"/>
               </a:ext>
             </a:extLst>
           </p:cNvPr>
@@ -6237,7 +6396,7 @@
           <p:cNvPr id="3" name="">
             <a:extLst xmlns:a="http://schemas.openxmlformats.org/drawingml/2006/main">
               <a:ext uri="{FF2B5EF4-FFF2-40B4-BE49-F238E27FC236}">
-                <a16:creationId xmlns:a16="http://schemas.microsoft.com/office/drawing/2014/main" id="{5732EB42-366B-4DCE-BFB2-0DCA1B93AAC6}"/>
+                <a16:creationId xmlns:a16="http://schemas.microsoft.com/office/drawing/2014/main" id="{671011CC-8A90-40EC-964F-B5F0C4BDD84F}"/>
               </a:ext>
             </a:extLst>
           </p:cNvPr>
@@ -6304,7 +6463,7 @@
           <p:cNvPr id="4" name="">
             <a:extLst xmlns:a="http://schemas.openxmlformats.org/drawingml/2006/main">
               <a:ext uri="{FF2B5EF4-FFF2-40B4-BE49-F238E27FC236}">
-                <a16:creationId xmlns:a16="http://schemas.microsoft.com/office/drawing/2014/main" id="{36639B4D-9F7F-4BEF-8CEE-A218C9D09F3C}"/>
+                <a16:creationId xmlns:a16="http://schemas.microsoft.com/office/drawing/2014/main" id="{A0C7F3B8-BD9A-4CC5-A8C3-2BEE8685119D}"/>
               </a:ext>
             </a:extLst>
           </p:cNvPr>
@@ -6335,7 +6494,7 @@
           <p:cNvPr id="5" name="">
             <a:extLst xmlns:a="http://schemas.openxmlformats.org/drawingml/2006/main">
               <a:ext uri="{FF2B5EF4-FFF2-40B4-BE49-F238E27FC236}">
-                <a16:creationId xmlns:a16="http://schemas.microsoft.com/office/drawing/2014/main" id="{6FBD651F-C14A-4866-B923-50B7BE344E29}"/>
+                <a16:creationId xmlns:a16="http://schemas.microsoft.com/office/drawing/2014/main" id="{7C4E4B01-04DF-48AC-99A2-193C34A8B891}"/>
               </a:ext>
             </a:extLst>
           </p:cNvPr>
@@ -6402,7 +6561,7 @@
           <p:cNvPr id="6" name="">
             <a:extLst xmlns:a="http://schemas.openxmlformats.org/drawingml/2006/main">
               <a:ext uri="{FF2B5EF4-FFF2-40B4-BE49-F238E27FC236}">
-                <a16:creationId xmlns:a16="http://schemas.microsoft.com/office/drawing/2014/main" id="{C859E111-16B9-4941-A47E-C00C1D88BB7F}"/>
+                <a16:creationId xmlns:a16="http://schemas.microsoft.com/office/drawing/2014/main" id="{4A751F46-65B2-4E5D-911B-6D122060E5CE}"/>
               </a:ext>
             </a:extLst>
           </p:cNvPr>
@@ -6469,7 +6628,7 @@
           <p:cNvPr id="7" name="">
             <a:extLst xmlns:a="http://schemas.openxmlformats.org/drawingml/2006/main">
               <a:ext uri="{FF2B5EF4-FFF2-40B4-BE49-F238E27FC236}">
-                <a16:creationId xmlns:a16="http://schemas.microsoft.com/office/drawing/2014/main" id="{A90A9794-DFE9-497D-AD3B-7D4E4E67ACB7}"/>
+                <a16:creationId xmlns:a16="http://schemas.microsoft.com/office/drawing/2014/main" id="{8CEFD2CE-89C2-4428-848A-1D14BB6E6722}"/>
               </a:ext>
             </a:extLst>
           </p:cNvPr>
@@ -6536,7 +6695,7 @@
           <p:cNvPr id="8" name="">
             <a:extLst xmlns:a="http://schemas.openxmlformats.org/drawingml/2006/main">
               <a:ext uri="{FF2B5EF4-FFF2-40B4-BE49-F238E27FC236}">
-                <a16:creationId xmlns:a16="http://schemas.microsoft.com/office/drawing/2014/main" id="{3F399BEC-3084-4311-B59C-27B2EE031B9E}"/>
+                <a16:creationId xmlns:a16="http://schemas.microsoft.com/office/drawing/2014/main" id="{918540AC-07C0-486E-94BD-BED134A8DE22}"/>
               </a:ext>
             </a:extLst>
           </p:cNvPr>
@@ -6567,7 +6726,7 @@
           <p:cNvPr id="9" name="">
             <a:extLst xmlns:a="http://schemas.openxmlformats.org/drawingml/2006/main">
               <a:ext uri="{FF2B5EF4-FFF2-40B4-BE49-F238E27FC236}">
-                <a16:creationId xmlns:a16="http://schemas.microsoft.com/office/drawing/2014/main" id="{A0D278B4-AD99-44D3-917F-5CB8F9B9790D}"/>
+                <a16:creationId xmlns:a16="http://schemas.microsoft.com/office/drawing/2014/main" id="{3E5A023B-CBF4-41DA-B187-630192C0E296}"/>
               </a:ext>
             </a:extLst>
           </p:cNvPr>
@@ -6634,7 +6793,7 @@
           <p:cNvPr id="10" name="">
             <a:extLst xmlns:a="http://schemas.openxmlformats.org/drawingml/2006/main">
               <a:ext uri="{FF2B5EF4-FFF2-40B4-BE49-F238E27FC236}">
-                <a16:creationId xmlns:a16="http://schemas.microsoft.com/office/drawing/2014/main" id="{0649CA2F-E247-41B5-B1AE-995AB71BD1EA}"/>
+                <a16:creationId xmlns:a16="http://schemas.microsoft.com/office/drawing/2014/main" id="{EC20E3B2-99E9-4588-8C8F-2A07CF74F7A7}"/>
               </a:ext>
             </a:extLst>
           </p:cNvPr>
@@ -6665,7 +6824,7 @@
           <p:cNvPr id="11" name="">
             <a:extLst xmlns:a="http://schemas.openxmlformats.org/drawingml/2006/main">
               <a:ext uri="{FF2B5EF4-FFF2-40B4-BE49-F238E27FC236}">
-                <a16:creationId xmlns:a16="http://schemas.microsoft.com/office/drawing/2014/main" id="{9C388BA2-9A1A-420F-8C74-A6C287336C28}"/>
+                <a16:creationId xmlns:a16="http://schemas.microsoft.com/office/drawing/2014/main" id="{4D62460E-21D5-4C15-884D-BDBD172F419B}"/>
               </a:ext>
             </a:extLst>
           </p:cNvPr>
@@ -6801,7 +6960,7 @@
           <p:cNvPr id="12" name="">
             <a:extLst xmlns:a="http://schemas.openxmlformats.org/drawingml/2006/main">
               <a:ext uri="{FF2B5EF4-FFF2-40B4-BE49-F238E27FC236}">
-                <a16:creationId xmlns:a16="http://schemas.microsoft.com/office/drawing/2014/main" id="{D3E54679-FC13-4B03-A522-9F8770CCCB0A}"/>
+                <a16:creationId xmlns:a16="http://schemas.microsoft.com/office/drawing/2014/main" id="{DC5BAEBF-936D-4142-83BD-279F79BA036E}"/>
               </a:ext>
             </a:extLst>
           </p:cNvPr>
@@ -6950,7 +7109,7 @@
                 <a:ea typeface="Arial"/>
                 <a:cs typeface="Arial"/>
               </a:rPr>
-              <a:t>Optimizer comparison checks</a:t>
+              <a:t>Stage-by-stage compiler output</a:t>
             </a:r>
           </a:p>
         </p:txBody>
@@ -6960,7 +7119,7 @@
           <p:cNvPr id="13" name="">
             <a:extLst xmlns:a="http://schemas.openxmlformats.org/drawingml/2006/main">
               <a:ext uri="{FF2B5EF4-FFF2-40B4-BE49-F238E27FC236}">
-                <a16:creationId xmlns:a16="http://schemas.microsoft.com/office/drawing/2014/main" id="{F62C6508-1E18-469B-BD18-0CC82317ACE1}"/>
+                <a16:creationId xmlns:a16="http://schemas.microsoft.com/office/drawing/2014/main" id="{C020E6BA-9BBB-4B14-A06D-220B210FA797}"/>
               </a:ext>
             </a:extLst>
           </p:cNvPr>
@@ -6991,7 +7150,7 @@
           <p:cNvPr id="14" name="">
             <a:extLst xmlns:a="http://schemas.openxmlformats.org/drawingml/2006/main">
               <a:ext uri="{FF2B5EF4-FFF2-40B4-BE49-F238E27FC236}">
-                <a16:creationId xmlns:a16="http://schemas.microsoft.com/office/drawing/2014/main" id="{84A713ED-E1C8-42D9-A10F-61A749E84594}"/>
+                <a16:creationId xmlns:a16="http://schemas.microsoft.com/office/drawing/2014/main" id="{EB852D52-0EC4-420A-925E-302236CF717C}"/>
               </a:ext>
             </a:extLst>
           </p:cNvPr>
@@ -7056,7 +7215,7 @@
     </p:spTree>
     <p:extLst>
       <p:ext uri="{BB962C8B-B14F-4D97-AF65-F5344CB8AC3E}">
-        <p14:creationId xmlns:p14="http://schemas.microsoft.com/office/powerpoint/2010/main" val="79516343"/>
+        <p14:creationId xmlns:p14="http://schemas.microsoft.com/office/powerpoint/2010/main" val="876835451"/>
       </p:ext>
     </p:extLst>
   </p:cSld>
@@ -7087,7 +7246,7 @@
           <p:cNvPr id="41" name="">
             <a:extLst xmlns:a="http://schemas.openxmlformats.org/drawingml/2006/main">
               <a:ext uri="{FF2B5EF4-FFF2-40B4-BE49-F238E27FC236}">
-                <a16:creationId xmlns:a16="http://schemas.microsoft.com/office/drawing/2014/main" id="{47D73BD5-6C7B-408A-A7F3-CB8ED66D0354}"/>
+                <a16:creationId xmlns:a16="http://schemas.microsoft.com/office/drawing/2014/main" id="{84306C9E-A979-4D53-B403-B76BE983BD28}"/>
               </a:ext>
             </a:extLst>
           </p:cNvPr>
@@ -7118,7 +7277,7 @@
           <p:cNvPr id="2" name="">
             <a:extLst xmlns:a="http://schemas.openxmlformats.org/drawingml/2006/main">
               <a:ext uri="{FF2B5EF4-FFF2-40B4-BE49-F238E27FC236}">
-                <a16:creationId xmlns:a16="http://schemas.microsoft.com/office/drawing/2014/main" id="{4731224F-7CC2-42D5-B777-86FF6A0F6D2B}"/>
+                <a16:creationId xmlns:a16="http://schemas.microsoft.com/office/drawing/2014/main" id="{1789D5A4-B313-4F27-BE5A-64D0DA0D918B}"/>
               </a:ext>
             </a:extLst>
           </p:cNvPr>
@@ -7185,7 +7344,7 @@
           <p:cNvPr id="3" name="">
             <a:extLst xmlns:a="http://schemas.openxmlformats.org/drawingml/2006/main">
               <a:ext uri="{FF2B5EF4-FFF2-40B4-BE49-F238E27FC236}">
-                <a16:creationId xmlns:a16="http://schemas.microsoft.com/office/drawing/2014/main" id="{39D4656C-ECB4-4C43-9276-833EBC744ED3}"/>
+                <a16:creationId xmlns:a16="http://schemas.microsoft.com/office/drawing/2014/main" id="{74E367C0-048F-4903-BBF0-11D83DD15B8A}"/>
               </a:ext>
             </a:extLst>
           </p:cNvPr>
@@ -7252,7 +7411,7 @@
           <p:cNvPr id="4" name="">
             <a:extLst xmlns:a="http://schemas.openxmlformats.org/drawingml/2006/main">
               <a:ext uri="{FF2B5EF4-FFF2-40B4-BE49-F238E27FC236}">
-                <a16:creationId xmlns:a16="http://schemas.microsoft.com/office/drawing/2014/main" id="{0F1E8E08-81F9-46EC-9EA9-8DBAD06AE6AB}"/>
+                <a16:creationId xmlns:a16="http://schemas.microsoft.com/office/drawing/2014/main" id="{F4890003-2D2F-4BE2-81E3-F1890C2E6C2C}"/>
               </a:ext>
             </a:extLst>
           </p:cNvPr>
@@ -7283,7 +7442,7 @@
           <p:cNvPr id="5" name="">
             <a:extLst xmlns:a="http://schemas.openxmlformats.org/drawingml/2006/main">
               <a:ext uri="{FF2B5EF4-FFF2-40B4-BE49-F238E27FC236}">
-                <a16:creationId xmlns:a16="http://schemas.microsoft.com/office/drawing/2014/main" id="{254F1E3E-C89D-47CD-B5BF-D9A18B7738EE}"/>
+                <a16:creationId xmlns:a16="http://schemas.microsoft.com/office/drawing/2014/main" id="{E2DB1287-DD13-4086-9DC8-225F60BF037B}"/>
               </a:ext>
             </a:extLst>
           </p:cNvPr>
@@ -7350,7 +7509,7 @@
           <p:cNvPr id="6" name="">
             <a:extLst xmlns:a="http://schemas.openxmlformats.org/drawingml/2006/main">
               <a:ext uri="{FF2B5EF4-FFF2-40B4-BE49-F238E27FC236}">
-                <a16:creationId xmlns:a16="http://schemas.microsoft.com/office/drawing/2014/main" id="{EFCA6D30-997C-48F7-851D-2478781665B0}"/>
+                <a16:creationId xmlns:a16="http://schemas.microsoft.com/office/drawing/2014/main" id="{DD954E1F-14E6-4A26-B35C-77AC12892F32}"/>
               </a:ext>
             </a:extLst>
           </p:cNvPr>
@@ -7417,7 +7576,7 @@
           <p:cNvPr id="7" name="">
             <a:extLst xmlns:a="http://schemas.openxmlformats.org/drawingml/2006/main">
               <a:ext uri="{FF2B5EF4-FFF2-40B4-BE49-F238E27FC236}">
-                <a16:creationId xmlns:a16="http://schemas.microsoft.com/office/drawing/2014/main" id="{1B595EB3-9142-4698-B71F-D3733C4B186F}"/>
+                <a16:creationId xmlns:a16="http://schemas.microsoft.com/office/drawing/2014/main" id="{86E2BD3F-3FB1-4CD5-A0C1-756751FCBE6B}"/>
               </a:ext>
             </a:extLst>
           </p:cNvPr>
@@ -7450,7 +7609,7 @@
           <p:cNvPr id="8" name="">
             <a:extLst xmlns:a="http://schemas.openxmlformats.org/drawingml/2006/main">
               <a:ext uri="{FF2B5EF4-FFF2-40B4-BE49-F238E27FC236}">
-                <a16:creationId xmlns:a16="http://schemas.microsoft.com/office/drawing/2014/main" id="{039AF5B6-FB20-4131-B891-B733803952FC}"/>
+                <a16:creationId xmlns:a16="http://schemas.microsoft.com/office/drawing/2014/main" id="{4AC41850-3BD1-46F9-88D0-E7C3B0925960}"/>
               </a:ext>
             </a:extLst>
           </p:cNvPr>
@@ -7517,7 +7676,7 @@
           <p:cNvPr id="9" name="">
             <a:extLst xmlns:a="http://schemas.openxmlformats.org/drawingml/2006/main">
               <a:ext uri="{FF2B5EF4-FFF2-40B4-BE49-F238E27FC236}">
-                <a16:creationId xmlns:a16="http://schemas.microsoft.com/office/drawing/2014/main" id="{69250AC2-703C-4381-ADB0-99A1E483CC59}"/>
+                <a16:creationId xmlns:a16="http://schemas.microsoft.com/office/drawing/2014/main" id="{279BBE4F-64AC-4C32-9AB2-AB34F4D2F13A}"/>
               </a:ext>
             </a:extLst>
           </p:cNvPr>
@@ -7584,7 +7743,7 @@
           <p:cNvPr id="10" name="">
             <a:extLst xmlns:a="http://schemas.openxmlformats.org/drawingml/2006/main">
               <a:ext uri="{FF2B5EF4-FFF2-40B4-BE49-F238E27FC236}">
-                <a16:creationId xmlns:a16="http://schemas.microsoft.com/office/drawing/2014/main" id="{CEB8986F-6F0D-4A42-8611-B67A34D96B40}"/>
+                <a16:creationId xmlns:a16="http://schemas.microsoft.com/office/drawing/2014/main" id="{240A2D96-42FF-4FE8-B7A6-D3F2B83C0CF2}"/>
               </a:ext>
             </a:extLst>
           </p:cNvPr>
@@ -7651,7 +7810,7 @@
           <p:cNvPr id="11" name="">
             <a:extLst xmlns:a="http://schemas.openxmlformats.org/drawingml/2006/main">
               <a:ext uri="{FF2B5EF4-FFF2-40B4-BE49-F238E27FC236}">
-                <a16:creationId xmlns:a16="http://schemas.microsoft.com/office/drawing/2014/main" id="{59FBA043-1AC5-4169-AD91-54F206DD7CA5}"/>
+                <a16:creationId xmlns:a16="http://schemas.microsoft.com/office/drawing/2014/main" id="{003DEBDC-CE13-4735-9319-742DF895903F}"/>
               </a:ext>
             </a:extLst>
           </p:cNvPr>
@@ -7684,7 +7843,7 @@
           <p:cNvPr id="12" name="">
             <a:extLst xmlns:a="http://schemas.openxmlformats.org/drawingml/2006/main">
               <a:ext uri="{FF2B5EF4-FFF2-40B4-BE49-F238E27FC236}">
-                <a16:creationId xmlns:a16="http://schemas.microsoft.com/office/drawing/2014/main" id="{442D6019-E760-4B7C-86AD-BA618A963A1E}"/>
+                <a16:creationId xmlns:a16="http://schemas.microsoft.com/office/drawing/2014/main" id="{5279C6BC-6EC2-473B-BC14-043C1E7D2BE8}"/>
               </a:ext>
             </a:extLst>
           </p:cNvPr>
@@ -7751,7 +7910,7 @@
           <p:cNvPr id="13" name="">
             <a:extLst xmlns:a="http://schemas.openxmlformats.org/drawingml/2006/main">
               <a:ext uri="{FF2B5EF4-FFF2-40B4-BE49-F238E27FC236}">
-                <a16:creationId xmlns:a16="http://schemas.microsoft.com/office/drawing/2014/main" id="{E38FF1B0-F666-40A5-BCCE-4B6C101BCF7B}"/>
+                <a16:creationId xmlns:a16="http://schemas.microsoft.com/office/drawing/2014/main" id="{16744252-5352-43FA-B60D-AC71CB38B915}"/>
               </a:ext>
             </a:extLst>
           </p:cNvPr>
@@ -7818,7 +7977,7 @@
           <p:cNvPr id="14" name="">
             <a:extLst xmlns:a="http://schemas.openxmlformats.org/drawingml/2006/main">
               <a:ext uri="{FF2B5EF4-FFF2-40B4-BE49-F238E27FC236}">
-                <a16:creationId xmlns:a16="http://schemas.microsoft.com/office/drawing/2014/main" id="{EDC6D785-019F-4D53-84CA-12D5AA516E14}"/>
+                <a16:creationId xmlns:a16="http://schemas.microsoft.com/office/drawing/2014/main" id="{60376B97-A0AE-4DF0-8471-7D92ADF77B44}"/>
               </a:ext>
             </a:extLst>
           </p:cNvPr>
@@ -7885,7 +8044,7 @@
           <p:cNvPr id="15" name="">
             <a:extLst xmlns:a="http://schemas.openxmlformats.org/drawingml/2006/main">
               <a:ext uri="{FF2B5EF4-FFF2-40B4-BE49-F238E27FC236}">
-                <a16:creationId xmlns:a16="http://schemas.microsoft.com/office/drawing/2014/main" id="{95D4E4D6-DFA9-49FA-ABE7-EAB2F0F382CA}"/>
+                <a16:creationId xmlns:a16="http://schemas.microsoft.com/office/drawing/2014/main" id="{0B098E10-B83A-4D82-9742-69187B14A8A9}"/>
               </a:ext>
             </a:extLst>
           </p:cNvPr>
@@ -7918,7 +8077,7 @@
           <p:cNvPr id="16" name="">
             <a:extLst xmlns:a="http://schemas.openxmlformats.org/drawingml/2006/main">
               <a:ext uri="{FF2B5EF4-FFF2-40B4-BE49-F238E27FC236}">
-                <a16:creationId xmlns:a16="http://schemas.microsoft.com/office/drawing/2014/main" id="{D3804C34-3E27-4578-BADE-0E0A7F4B9CB8}"/>
+                <a16:creationId xmlns:a16="http://schemas.microsoft.com/office/drawing/2014/main" id="{306EBE33-4395-4EED-8E26-62DCCEA050FF}"/>
               </a:ext>
             </a:extLst>
           </p:cNvPr>
@@ -7985,7 +8144,7 @@
           <p:cNvPr id="17" name="">
             <a:extLst xmlns:a="http://schemas.openxmlformats.org/drawingml/2006/main">
               <a:ext uri="{FF2B5EF4-FFF2-40B4-BE49-F238E27FC236}">
-                <a16:creationId xmlns:a16="http://schemas.microsoft.com/office/drawing/2014/main" id="{17BFF701-19D6-407B-9618-BC3F96A75B71}"/>
+                <a16:creationId xmlns:a16="http://schemas.microsoft.com/office/drawing/2014/main" id="{1E5806D8-173B-4D2A-970F-A41F1A54DF91}"/>
               </a:ext>
             </a:extLst>
           </p:cNvPr>
@@ -8052,7 +8211,7 @@
           <p:cNvPr id="18" name="">
             <a:extLst xmlns:a="http://schemas.openxmlformats.org/drawingml/2006/main">
               <a:ext uri="{FF2B5EF4-FFF2-40B4-BE49-F238E27FC236}">
-                <a16:creationId xmlns:a16="http://schemas.microsoft.com/office/drawing/2014/main" id="{6CE7D07C-FE94-48BA-8D33-DB7FBDC58F37}"/>
+                <a16:creationId xmlns:a16="http://schemas.microsoft.com/office/drawing/2014/main" id="{17496840-FE02-43BA-8A51-A3AFDF19C05D}"/>
               </a:ext>
             </a:extLst>
           </p:cNvPr>
@@ -8119,7 +8278,7 @@
           <p:cNvPr id="19" name="">
             <a:extLst xmlns:a="http://schemas.openxmlformats.org/drawingml/2006/main">
               <a:ext uri="{FF2B5EF4-FFF2-40B4-BE49-F238E27FC236}">
-                <a16:creationId xmlns:a16="http://schemas.microsoft.com/office/drawing/2014/main" id="{00C43855-DE4F-4564-883D-01A175289F00}"/>
+                <a16:creationId xmlns:a16="http://schemas.microsoft.com/office/drawing/2014/main" id="{513F2C5F-7AF5-4F5B-A4EC-EC4116F46B0B}"/>
               </a:ext>
             </a:extLst>
           </p:cNvPr>
@@ -8152,7 +8311,7 @@
           <p:cNvPr id="20" name="">
             <a:extLst xmlns:a="http://schemas.openxmlformats.org/drawingml/2006/main">
               <a:ext uri="{FF2B5EF4-FFF2-40B4-BE49-F238E27FC236}">
-                <a16:creationId xmlns:a16="http://schemas.microsoft.com/office/drawing/2014/main" id="{E49B6E52-C406-4FD5-83AA-9F9F90A0EE98}"/>
+                <a16:creationId xmlns:a16="http://schemas.microsoft.com/office/drawing/2014/main" id="{042A3510-11D8-4A74-9C0B-CCC47B4363D0}"/>
               </a:ext>
             </a:extLst>
           </p:cNvPr>
@@ -8219,7 +8378,7 @@
           <p:cNvPr id="21" name="">
             <a:extLst xmlns:a="http://schemas.openxmlformats.org/drawingml/2006/main">
               <a:ext uri="{FF2B5EF4-FFF2-40B4-BE49-F238E27FC236}">
-                <a16:creationId xmlns:a16="http://schemas.microsoft.com/office/drawing/2014/main" id="{B72989A6-DC6B-45D5-BE74-F759886C21C3}"/>
+                <a16:creationId xmlns:a16="http://schemas.microsoft.com/office/drawing/2014/main" id="{F69D2A82-F752-41B7-98BD-1A62F8D11F85}"/>
               </a:ext>
             </a:extLst>
           </p:cNvPr>
@@ -8286,7 +8445,7 @@
           <p:cNvPr id="22" name="">
             <a:extLst xmlns:a="http://schemas.openxmlformats.org/drawingml/2006/main">
               <a:ext uri="{FF2B5EF4-FFF2-40B4-BE49-F238E27FC236}">
-                <a16:creationId xmlns:a16="http://schemas.microsoft.com/office/drawing/2014/main" id="{319D1E54-85A6-4AE6-9122-25613104EABB}"/>
+                <a16:creationId xmlns:a16="http://schemas.microsoft.com/office/drawing/2014/main" id="{6130C1C9-A6E4-4EB8-A4EC-5FB7E876A0E2}"/>
               </a:ext>
             </a:extLst>
           </p:cNvPr>
@@ -8319,7 +8478,7 @@
           <p:cNvPr id="23" name="">
             <a:extLst xmlns:a="http://schemas.openxmlformats.org/drawingml/2006/main">
               <a:ext uri="{FF2B5EF4-FFF2-40B4-BE49-F238E27FC236}">
-                <a16:creationId xmlns:a16="http://schemas.microsoft.com/office/drawing/2014/main" id="{BEF7F705-05D8-46E5-A344-BBDD6461BDF1}"/>
+                <a16:creationId xmlns:a16="http://schemas.microsoft.com/office/drawing/2014/main" id="{784B5D47-56A0-4CE3-9521-78743D9AACD2}"/>
               </a:ext>
             </a:extLst>
           </p:cNvPr>
@@ -8386,7 +8545,7 @@
           <p:cNvPr id="24" name="">
             <a:extLst xmlns:a="http://schemas.openxmlformats.org/drawingml/2006/main">
               <a:ext uri="{FF2B5EF4-FFF2-40B4-BE49-F238E27FC236}">
-                <a16:creationId xmlns:a16="http://schemas.microsoft.com/office/drawing/2014/main" id="{08F445A2-6567-4DAA-9644-747F5F76CF45}"/>
+                <a16:creationId xmlns:a16="http://schemas.microsoft.com/office/drawing/2014/main" id="{2C315F9F-B0F9-4D60-B65F-C1B13DC79CF3}"/>
               </a:ext>
             </a:extLst>
           </p:cNvPr>
@@ -8453,7 +8612,7 @@
           <p:cNvPr id="25" name="">
             <a:extLst xmlns:a="http://schemas.openxmlformats.org/drawingml/2006/main">
               <a:ext uri="{FF2B5EF4-FFF2-40B4-BE49-F238E27FC236}">
-                <a16:creationId xmlns:a16="http://schemas.microsoft.com/office/drawing/2014/main" id="{226F5F42-A467-47F1-AEA1-3D8B882741C3}"/>
+                <a16:creationId xmlns:a16="http://schemas.microsoft.com/office/drawing/2014/main" id="{75D8FB96-3C51-420B-B91D-4A8BE466B4D0}"/>
               </a:ext>
             </a:extLst>
           </p:cNvPr>
@@ -8520,7 +8679,7 @@
           <p:cNvPr id="26" name="">
             <a:extLst xmlns:a="http://schemas.openxmlformats.org/drawingml/2006/main">
               <a:ext uri="{FF2B5EF4-FFF2-40B4-BE49-F238E27FC236}">
-                <a16:creationId xmlns:a16="http://schemas.microsoft.com/office/drawing/2014/main" id="{644EC915-B444-451C-821C-DE74E1258E6D}"/>
+                <a16:creationId xmlns:a16="http://schemas.microsoft.com/office/drawing/2014/main" id="{A9E4B59C-C3E5-4907-A15E-36513858A39E}"/>
               </a:ext>
             </a:extLst>
           </p:cNvPr>
@@ -8553,7 +8712,7 @@
           <p:cNvPr id="27" name="">
             <a:extLst xmlns:a="http://schemas.openxmlformats.org/drawingml/2006/main">
               <a:ext uri="{FF2B5EF4-FFF2-40B4-BE49-F238E27FC236}">
-                <a16:creationId xmlns:a16="http://schemas.microsoft.com/office/drawing/2014/main" id="{4A2303F7-BAEA-4462-8F0A-9533D59A6853}"/>
+                <a16:creationId xmlns:a16="http://schemas.microsoft.com/office/drawing/2014/main" id="{E1FE1371-88E1-4D0A-9DF0-5FCC5C6C650D}"/>
               </a:ext>
             </a:extLst>
           </p:cNvPr>
@@ -8620,7 +8779,7 @@
           <p:cNvPr id="28" name="">
             <a:extLst xmlns:a="http://schemas.openxmlformats.org/drawingml/2006/main">
               <a:ext uri="{FF2B5EF4-FFF2-40B4-BE49-F238E27FC236}">
-                <a16:creationId xmlns:a16="http://schemas.microsoft.com/office/drawing/2014/main" id="{38209BCF-3BB2-49A8-A995-DCABAF47A1BB}"/>
+                <a16:creationId xmlns:a16="http://schemas.microsoft.com/office/drawing/2014/main" id="{56AE6E2E-6682-43FB-A95B-10975B27F117}"/>
               </a:ext>
             </a:extLst>
           </p:cNvPr>
@@ -8687,7 +8846,7 @@
           <p:cNvPr id="29" name="">
             <a:extLst xmlns:a="http://schemas.openxmlformats.org/drawingml/2006/main">
               <a:ext uri="{FF2B5EF4-FFF2-40B4-BE49-F238E27FC236}">
-                <a16:creationId xmlns:a16="http://schemas.microsoft.com/office/drawing/2014/main" id="{F7BF025F-9DD1-4B1A-80CF-9542F4BABE40}"/>
+                <a16:creationId xmlns:a16="http://schemas.microsoft.com/office/drawing/2014/main" id="{927864EE-79C1-4795-8E4E-37E7E4E00513}"/>
               </a:ext>
             </a:extLst>
           </p:cNvPr>
@@ -8754,7 +8913,7 @@
           <p:cNvPr id="30" name="">
             <a:extLst xmlns:a="http://schemas.openxmlformats.org/drawingml/2006/main">
               <a:ext uri="{FF2B5EF4-FFF2-40B4-BE49-F238E27FC236}">
-                <a16:creationId xmlns:a16="http://schemas.microsoft.com/office/drawing/2014/main" id="{AC89B954-0E95-4E27-BA85-1454C220EDFC}"/>
+                <a16:creationId xmlns:a16="http://schemas.microsoft.com/office/drawing/2014/main" id="{62E1F206-8D36-446E-AC4C-8BC453E25505}"/>
               </a:ext>
             </a:extLst>
           </p:cNvPr>
@@ -8787,7 +8946,7 @@
           <p:cNvPr id="31" name="">
             <a:extLst xmlns:a="http://schemas.openxmlformats.org/drawingml/2006/main">
               <a:ext uri="{FF2B5EF4-FFF2-40B4-BE49-F238E27FC236}">
-                <a16:creationId xmlns:a16="http://schemas.microsoft.com/office/drawing/2014/main" id="{A8FB4090-E9F3-49B2-B935-DA54149FF12C}"/>
+                <a16:creationId xmlns:a16="http://schemas.microsoft.com/office/drawing/2014/main" id="{A145F6BC-0727-4A33-8FA3-B243ED0C58D1}"/>
               </a:ext>
             </a:extLst>
           </p:cNvPr>
@@ -8854,7 +9013,7 @@
           <p:cNvPr id="32" name="">
             <a:extLst xmlns:a="http://schemas.openxmlformats.org/drawingml/2006/main">
               <a:ext uri="{FF2B5EF4-FFF2-40B4-BE49-F238E27FC236}">
-                <a16:creationId xmlns:a16="http://schemas.microsoft.com/office/drawing/2014/main" id="{101EBCE0-CA76-4A5B-A9BC-1E8AEA81ACFF}"/>
+                <a16:creationId xmlns:a16="http://schemas.microsoft.com/office/drawing/2014/main" id="{1DB1E798-43E6-48F9-814B-76913BB7454C}"/>
               </a:ext>
             </a:extLst>
           </p:cNvPr>
@@ -8921,7 +9080,7 @@
           <p:cNvPr id="33" name="">
             <a:extLst xmlns:a="http://schemas.openxmlformats.org/drawingml/2006/main">
               <a:ext uri="{FF2B5EF4-FFF2-40B4-BE49-F238E27FC236}">
-                <a16:creationId xmlns:a16="http://schemas.microsoft.com/office/drawing/2014/main" id="{2320DFF2-1228-4E61-B10F-19FE2B6DE0DD}"/>
+                <a16:creationId xmlns:a16="http://schemas.microsoft.com/office/drawing/2014/main" id="{F82A7B3C-7937-4004-A93B-D225E125909A}"/>
               </a:ext>
             </a:extLst>
           </p:cNvPr>
@@ -8988,7 +9147,7 @@
           <p:cNvPr id="34" name="">
             <a:extLst xmlns:a="http://schemas.openxmlformats.org/drawingml/2006/main">
               <a:ext uri="{FF2B5EF4-FFF2-40B4-BE49-F238E27FC236}">
-                <a16:creationId xmlns:a16="http://schemas.microsoft.com/office/drawing/2014/main" id="{74C9B2AD-C88C-4B37-855D-121A05329BC2}"/>
+                <a16:creationId xmlns:a16="http://schemas.microsoft.com/office/drawing/2014/main" id="{03610F0A-1787-412D-8B78-940660763352}"/>
               </a:ext>
             </a:extLst>
           </p:cNvPr>
@@ -9021,7 +9180,7 @@
           <p:cNvPr id="35" name="">
             <a:extLst xmlns:a="http://schemas.openxmlformats.org/drawingml/2006/main">
               <a:ext uri="{FF2B5EF4-FFF2-40B4-BE49-F238E27FC236}">
-                <a16:creationId xmlns:a16="http://schemas.microsoft.com/office/drawing/2014/main" id="{9EB242E5-D4CE-422B-A379-7D41828D8712}"/>
+                <a16:creationId xmlns:a16="http://schemas.microsoft.com/office/drawing/2014/main" id="{C8B1346E-AFD9-4949-AAC0-0771A0264547}"/>
               </a:ext>
             </a:extLst>
           </p:cNvPr>
@@ -9088,7 +9247,7 @@
           <p:cNvPr id="36" name="">
             <a:extLst xmlns:a="http://schemas.openxmlformats.org/drawingml/2006/main">
               <a:ext uri="{FF2B5EF4-FFF2-40B4-BE49-F238E27FC236}">
-                <a16:creationId xmlns:a16="http://schemas.microsoft.com/office/drawing/2014/main" id="{A051FB41-6570-47D0-A646-29A027392254}"/>
+                <a16:creationId xmlns:a16="http://schemas.microsoft.com/office/drawing/2014/main" id="{D1EF6D06-71F0-4DEC-AFA4-A7FEC5997EAB}"/>
               </a:ext>
             </a:extLst>
           </p:cNvPr>
@@ -9155,7 +9314,7 @@
           <p:cNvPr id="37" name="">
             <a:extLst xmlns:a="http://schemas.openxmlformats.org/drawingml/2006/main">
               <a:ext uri="{FF2B5EF4-FFF2-40B4-BE49-F238E27FC236}">
-                <a16:creationId xmlns:a16="http://schemas.microsoft.com/office/drawing/2014/main" id="{E7EF7D5A-0020-4BD6-9A45-C5B61BB68355}"/>
+                <a16:creationId xmlns:a16="http://schemas.microsoft.com/office/drawing/2014/main" id="{DD890AA9-A00B-44A9-98B2-DE63EFB844C8}"/>
               </a:ext>
             </a:extLst>
           </p:cNvPr>
@@ -9222,7 +9381,7 @@
           <p:cNvPr id="38" name="">
             <a:extLst xmlns:a="http://schemas.openxmlformats.org/drawingml/2006/main">
               <a:ext uri="{FF2B5EF4-FFF2-40B4-BE49-F238E27FC236}">
-                <a16:creationId xmlns:a16="http://schemas.microsoft.com/office/drawing/2014/main" id="{5914EA41-A727-4D56-91F7-80B6363D933B}"/>
+                <a16:creationId xmlns:a16="http://schemas.microsoft.com/office/drawing/2014/main" id="{51DE243D-7952-4F85-A4A9-C9DA4AC26E7A}"/>
               </a:ext>
             </a:extLst>
           </p:cNvPr>
@@ -9253,7 +9412,7 @@
           <p:cNvPr id="39" name="">
             <a:extLst xmlns:a="http://schemas.openxmlformats.org/drawingml/2006/main">
               <a:ext uri="{FF2B5EF4-FFF2-40B4-BE49-F238E27FC236}">
-                <a16:creationId xmlns:a16="http://schemas.microsoft.com/office/drawing/2014/main" id="{4282EDAC-0F7D-432B-BD3E-8073DD419D75}"/>
+                <a16:creationId xmlns:a16="http://schemas.microsoft.com/office/drawing/2014/main" id="{7DE388C1-D050-4F09-8D52-F7FD7B267D43}"/>
               </a:ext>
             </a:extLst>
           </p:cNvPr>
@@ -9320,7 +9479,7 @@
           <p:cNvPr id="40" name="">
             <a:extLst xmlns:a="http://schemas.openxmlformats.org/drawingml/2006/main">
               <a:ext uri="{FF2B5EF4-FFF2-40B4-BE49-F238E27FC236}">
-                <a16:creationId xmlns:a16="http://schemas.microsoft.com/office/drawing/2014/main" id="{75042F22-5672-49C2-960B-A2497D168501}"/>
+                <a16:creationId xmlns:a16="http://schemas.microsoft.com/office/drawing/2014/main" id="{8F559CBA-EF0F-43C9-A79E-927504388429}"/>
               </a:ext>
             </a:extLst>
           </p:cNvPr>
@@ -9385,7 +9544,7 @@
     </p:spTree>
     <p:extLst>
       <p:ext uri="{BB962C8B-B14F-4D97-AF65-F5344CB8AC3E}">
-        <p14:creationId xmlns:p14="http://schemas.microsoft.com/office/powerpoint/2010/main" val="1257722130"/>
+        <p14:creationId xmlns:p14="http://schemas.microsoft.com/office/powerpoint/2010/main" val="433097528"/>
       </p:ext>
     </p:extLst>
   </p:cSld>
@@ -9416,7 +9575,7 @@
           <p:cNvPr id="26" name="">
             <a:extLst xmlns:a="http://schemas.openxmlformats.org/drawingml/2006/main">
               <a:ext uri="{FF2B5EF4-FFF2-40B4-BE49-F238E27FC236}">
-                <a16:creationId xmlns:a16="http://schemas.microsoft.com/office/drawing/2014/main" id="{EA66B179-9C71-4863-B5F9-D56C3FA6085F}"/>
+                <a16:creationId xmlns:a16="http://schemas.microsoft.com/office/drawing/2014/main" id="{E0E26361-0B69-4596-B8E2-01B2CD2E4924}"/>
               </a:ext>
             </a:extLst>
           </p:cNvPr>
@@ -9447,7 +9606,7 @@
           <p:cNvPr id="2" name="">
             <a:extLst xmlns:a="http://schemas.openxmlformats.org/drawingml/2006/main">
               <a:ext uri="{FF2B5EF4-FFF2-40B4-BE49-F238E27FC236}">
-                <a16:creationId xmlns:a16="http://schemas.microsoft.com/office/drawing/2014/main" id="{B45E8A63-67ED-419C-839E-DCB949E74AF2}"/>
+                <a16:creationId xmlns:a16="http://schemas.microsoft.com/office/drawing/2014/main" id="{6227CEF4-77B7-49F6-951C-2012B1FEFCA7}"/>
               </a:ext>
             </a:extLst>
           </p:cNvPr>
@@ -9514,7 +9673,7 @@
           <p:cNvPr id="3" name="">
             <a:extLst xmlns:a="http://schemas.openxmlformats.org/drawingml/2006/main">
               <a:ext uri="{FF2B5EF4-FFF2-40B4-BE49-F238E27FC236}">
-                <a16:creationId xmlns:a16="http://schemas.microsoft.com/office/drawing/2014/main" id="{03594C1B-6F0E-4AA2-B7E6-F64E43D7538E}"/>
+                <a16:creationId xmlns:a16="http://schemas.microsoft.com/office/drawing/2014/main" id="{8A08320F-7EDA-4141-8636-72A5C56A7198}"/>
               </a:ext>
             </a:extLst>
           </p:cNvPr>
@@ -9581,7 +9740,7 @@
           <p:cNvPr id="4" name="">
             <a:extLst xmlns:a="http://schemas.openxmlformats.org/drawingml/2006/main">
               <a:ext uri="{FF2B5EF4-FFF2-40B4-BE49-F238E27FC236}">
-                <a16:creationId xmlns:a16="http://schemas.microsoft.com/office/drawing/2014/main" id="{5B01E9DF-F7EB-4E90-AF6E-C8CA9CC8F407}"/>
+                <a16:creationId xmlns:a16="http://schemas.microsoft.com/office/drawing/2014/main" id="{027BF03A-B2FA-4BB5-A492-3BF18D043F19}"/>
               </a:ext>
             </a:extLst>
           </p:cNvPr>
@@ -9612,7 +9771,7 @@
           <p:cNvPr id="5" name="">
             <a:extLst xmlns:a="http://schemas.openxmlformats.org/drawingml/2006/main">
               <a:ext uri="{FF2B5EF4-FFF2-40B4-BE49-F238E27FC236}">
-                <a16:creationId xmlns:a16="http://schemas.microsoft.com/office/drawing/2014/main" id="{CA6EF434-E8F2-4D1C-A67A-78E83DA2EF38}"/>
+                <a16:creationId xmlns:a16="http://schemas.microsoft.com/office/drawing/2014/main" id="{0A61E778-4690-4FFF-A34C-3FA2CD7131C7}"/>
               </a:ext>
             </a:extLst>
           </p:cNvPr>
@@ -9679,7 +9838,7 @@
           <p:cNvPr id="6" name="">
             <a:extLst xmlns:a="http://schemas.openxmlformats.org/drawingml/2006/main">
               <a:ext uri="{FF2B5EF4-FFF2-40B4-BE49-F238E27FC236}">
-                <a16:creationId xmlns:a16="http://schemas.microsoft.com/office/drawing/2014/main" id="{73D24DEA-9F5B-4619-BB64-92B4126043D7}"/>
+                <a16:creationId xmlns:a16="http://schemas.microsoft.com/office/drawing/2014/main" id="{E0705163-86D7-40B0-A373-8B2D2C8E9A5D}"/>
               </a:ext>
             </a:extLst>
           </p:cNvPr>
@@ -9746,7 +9905,7 @@
           <p:cNvPr id="7" name="">
             <a:extLst xmlns:a="http://schemas.openxmlformats.org/drawingml/2006/main">
               <a:ext uri="{FF2B5EF4-FFF2-40B4-BE49-F238E27FC236}">
-                <a16:creationId xmlns:a16="http://schemas.microsoft.com/office/drawing/2014/main" id="{141B09D2-235F-4663-A1D0-6DDFF9E54164}"/>
+                <a16:creationId xmlns:a16="http://schemas.microsoft.com/office/drawing/2014/main" id="{70593F4B-C17F-4D92-B890-E3BDB2D9EBE3}"/>
               </a:ext>
             </a:extLst>
           </p:cNvPr>
@@ -9813,7 +9972,7 @@
           <p:cNvPr id="8" name="">
             <a:extLst xmlns:a="http://schemas.openxmlformats.org/drawingml/2006/main">
               <a:ext uri="{FF2B5EF4-FFF2-40B4-BE49-F238E27FC236}">
-                <a16:creationId xmlns:a16="http://schemas.microsoft.com/office/drawing/2014/main" id="{7E8E64A9-F5D2-4BA9-B4F2-3495133B6134}"/>
+                <a16:creationId xmlns:a16="http://schemas.microsoft.com/office/drawing/2014/main" id="{E6D62C4B-F0A1-4B01-A45E-23DE25042B55}"/>
               </a:ext>
             </a:extLst>
           </p:cNvPr>
@@ -9844,7 +10003,7 @@
           <p:cNvPr id="9" name="">
             <a:extLst xmlns:a="http://schemas.openxmlformats.org/drawingml/2006/main">
               <a:ext uri="{FF2B5EF4-FFF2-40B4-BE49-F238E27FC236}">
-                <a16:creationId xmlns:a16="http://schemas.microsoft.com/office/drawing/2014/main" id="{FA01B71E-A9E5-48AE-96E5-9601D1248CB5}"/>
+                <a16:creationId xmlns:a16="http://schemas.microsoft.com/office/drawing/2014/main" id="{B5BEA795-B5F2-4A8A-86A6-6C90BC503630}"/>
               </a:ext>
             </a:extLst>
           </p:cNvPr>
@@ -9911,7 +10070,7 @@
           <p:cNvPr id="10" name="">
             <a:extLst xmlns:a="http://schemas.openxmlformats.org/drawingml/2006/main">
               <a:ext uri="{FF2B5EF4-FFF2-40B4-BE49-F238E27FC236}">
-                <a16:creationId xmlns:a16="http://schemas.microsoft.com/office/drawing/2014/main" id="{CC7F6D8E-6FBE-4887-BAAC-E0075F79F7A4}"/>
+                <a16:creationId xmlns:a16="http://schemas.microsoft.com/office/drawing/2014/main" id="{C2FE549F-7E2E-4D4B-A151-5296DDA262A2}"/>
               </a:ext>
             </a:extLst>
           </p:cNvPr>
@@ -9942,7 +10101,7 @@
           <p:cNvPr id="11" name="">
             <a:extLst xmlns:a="http://schemas.openxmlformats.org/drawingml/2006/main">
               <a:ext uri="{FF2B5EF4-FFF2-40B4-BE49-F238E27FC236}">
-                <a16:creationId xmlns:a16="http://schemas.microsoft.com/office/drawing/2014/main" id="{A12A7572-0B9A-4771-B9C6-85EAEAA2F33B}"/>
+                <a16:creationId xmlns:a16="http://schemas.microsoft.com/office/drawing/2014/main" id="{579BDCF7-308D-4548-997A-680B91E943DE}"/>
               </a:ext>
             </a:extLst>
           </p:cNvPr>
@@ -10009,7 +10168,7 @@
           <p:cNvPr id="12" name="">
             <a:extLst xmlns:a="http://schemas.openxmlformats.org/drawingml/2006/main">
               <a:ext uri="{FF2B5EF4-FFF2-40B4-BE49-F238E27FC236}">
-                <a16:creationId xmlns:a16="http://schemas.microsoft.com/office/drawing/2014/main" id="{6DB192C5-32E0-43B2-971F-75E20C67A2D9}"/>
+                <a16:creationId xmlns:a16="http://schemas.microsoft.com/office/drawing/2014/main" id="{EC882DAC-0B91-47F5-95D9-77E9805C8146}"/>
               </a:ext>
             </a:extLst>
           </p:cNvPr>
@@ -10040,7 +10199,7 @@
           <p:cNvPr id="13" name="">
             <a:extLst xmlns:a="http://schemas.openxmlformats.org/drawingml/2006/main">
               <a:ext uri="{FF2B5EF4-FFF2-40B4-BE49-F238E27FC236}">
-                <a16:creationId xmlns:a16="http://schemas.microsoft.com/office/drawing/2014/main" id="{830A0F4D-8A62-46FA-B728-42ED20402ABB}"/>
+                <a16:creationId xmlns:a16="http://schemas.microsoft.com/office/drawing/2014/main" id="{0912DE49-3A43-4EF4-B7FE-62C6AE157BAB}"/>
               </a:ext>
             </a:extLst>
           </p:cNvPr>
@@ -10107,7 +10266,7 @@
           <p:cNvPr id="14" name="">
             <a:extLst xmlns:a="http://schemas.openxmlformats.org/drawingml/2006/main">
               <a:ext uri="{FF2B5EF4-FFF2-40B4-BE49-F238E27FC236}">
-                <a16:creationId xmlns:a16="http://schemas.microsoft.com/office/drawing/2014/main" id="{11926FAC-FAF5-409D-A42F-03D6D58286A5}"/>
+                <a16:creationId xmlns:a16="http://schemas.microsoft.com/office/drawing/2014/main" id="{04F095D4-80C8-49A2-BC8A-7E1E9221B141}"/>
               </a:ext>
             </a:extLst>
           </p:cNvPr>
@@ -10138,7 +10297,7 @@
           <p:cNvPr id="15" name="">
             <a:extLst xmlns:a="http://schemas.openxmlformats.org/drawingml/2006/main">
               <a:ext uri="{FF2B5EF4-FFF2-40B4-BE49-F238E27FC236}">
-                <a16:creationId xmlns:a16="http://schemas.microsoft.com/office/drawing/2014/main" id="{DCD49321-6108-4971-BB4E-98DA274224D4}"/>
+                <a16:creationId xmlns:a16="http://schemas.microsoft.com/office/drawing/2014/main" id="{E2622E1A-F300-46C0-8588-49A40CD55691}"/>
               </a:ext>
             </a:extLst>
           </p:cNvPr>
@@ -10171,7 +10330,7 @@
           <p:cNvPr id="16" name="">
             <a:extLst xmlns:a="http://schemas.openxmlformats.org/drawingml/2006/main">
               <a:ext uri="{FF2B5EF4-FFF2-40B4-BE49-F238E27FC236}">
-                <a16:creationId xmlns:a16="http://schemas.microsoft.com/office/drawing/2014/main" id="{2B66DC1B-59A7-46AD-8473-5A7A4978DA64}"/>
+                <a16:creationId xmlns:a16="http://schemas.microsoft.com/office/drawing/2014/main" id="{52621DF3-86B5-4D27-80E1-A843B9EDCEAD}"/>
               </a:ext>
             </a:extLst>
           </p:cNvPr>
@@ -10330,7 +10489,7 @@
           <p:cNvPr id="17" name="">
             <a:extLst xmlns:a="http://schemas.openxmlformats.org/drawingml/2006/main">
               <a:ext uri="{FF2B5EF4-FFF2-40B4-BE49-F238E27FC236}">
-                <a16:creationId xmlns:a16="http://schemas.microsoft.com/office/drawing/2014/main" id="{433C0DAE-D5EC-4856-8E1D-7E0437F775BA}"/>
+                <a16:creationId xmlns:a16="http://schemas.microsoft.com/office/drawing/2014/main" id="{9D6BB478-49B4-4CD3-BDBE-C7AC11E1DE5D}"/>
               </a:ext>
             </a:extLst>
           </p:cNvPr>
@@ -10363,7 +10522,7 @@
           <p:cNvPr id="18" name="">
             <a:extLst xmlns:a="http://schemas.openxmlformats.org/drawingml/2006/main">
               <a:ext uri="{FF2B5EF4-FFF2-40B4-BE49-F238E27FC236}">
-                <a16:creationId xmlns:a16="http://schemas.microsoft.com/office/drawing/2014/main" id="{65933579-01AA-48C5-AECB-AF306DB30AF6}"/>
+                <a16:creationId xmlns:a16="http://schemas.microsoft.com/office/drawing/2014/main" id="{9BB507E5-8682-43CD-8B32-87FAC24F48E6}"/>
               </a:ext>
             </a:extLst>
           </p:cNvPr>
@@ -10499,7 +10658,7 @@
           <p:cNvPr id="19" name="">
             <a:extLst xmlns:a="http://schemas.openxmlformats.org/drawingml/2006/main">
               <a:ext uri="{FF2B5EF4-FFF2-40B4-BE49-F238E27FC236}">
-                <a16:creationId xmlns:a16="http://schemas.microsoft.com/office/drawing/2014/main" id="{DAC3FE79-CC15-4651-B689-3754491A0371}"/>
+                <a16:creationId xmlns:a16="http://schemas.microsoft.com/office/drawing/2014/main" id="{5B2AFDC9-594E-4A83-8FD6-F1EBAEDAB90C}"/>
               </a:ext>
             </a:extLst>
           </p:cNvPr>
@@ -10532,7 +10691,7 @@
           <p:cNvPr id="20" name="">
             <a:extLst xmlns:a="http://schemas.openxmlformats.org/drawingml/2006/main">
               <a:ext uri="{FF2B5EF4-FFF2-40B4-BE49-F238E27FC236}">
-                <a16:creationId xmlns:a16="http://schemas.microsoft.com/office/drawing/2014/main" id="{560E9F6D-DDF2-47ED-8877-C4A6630DEA2E}"/>
+                <a16:creationId xmlns:a16="http://schemas.microsoft.com/office/drawing/2014/main" id="{AE4293B4-F65D-4607-99A1-176C96E71763}"/>
               </a:ext>
             </a:extLst>
           </p:cNvPr>
@@ -10645,7 +10804,7 @@
           <p:cNvPr id="21" name="">
             <a:extLst xmlns:a="http://schemas.openxmlformats.org/drawingml/2006/main">
               <a:ext uri="{FF2B5EF4-FFF2-40B4-BE49-F238E27FC236}">
-                <a16:creationId xmlns:a16="http://schemas.microsoft.com/office/drawing/2014/main" id="{A52390AE-36F1-4AF0-A739-C60FC9DE33A0}"/>
+                <a16:creationId xmlns:a16="http://schemas.microsoft.com/office/drawing/2014/main" id="{59E3A76C-FDC6-489B-976B-A92EE0065E8A}"/>
               </a:ext>
             </a:extLst>
           </p:cNvPr>
@@ -10678,7 +10837,7 @@
           <p:cNvPr id="22" name="">
             <a:extLst xmlns:a="http://schemas.openxmlformats.org/drawingml/2006/main">
               <a:ext uri="{FF2B5EF4-FFF2-40B4-BE49-F238E27FC236}">
-                <a16:creationId xmlns:a16="http://schemas.microsoft.com/office/drawing/2014/main" id="{DCE59CB5-459C-4433-AA80-9B7A184BABA9}"/>
+                <a16:creationId xmlns:a16="http://schemas.microsoft.com/office/drawing/2014/main" id="{40EE87B4-AFFD-4DC4-839D-30D990EC7FA5}"/>
               </a:ext>
             </a:extLst>
           </p:cNvPr>
@@ -10791,7 +10950,7 @@
           <p:cNvPr id="23" name="">
             <a:extLst xmlns:a="http://schemas.openxmlformats.org/drawingml/2006/main">
               <a:ext uri="{FF2B5EF4-FFF2-40B4-BE49-F238E27FC236}">
-                <a16:creationId xmlns:a16="http://schemas.microsoft.com/office/drawing/2014/main" id="{02E53389-9701-47EE-9824-2D3B8AE0635F}"/>
+                <a16:creationId xmlns:a16="http://schemas.microsoft.com/office/drawing/2014/main" id="{7F9BADB0-843E-4E77-8A47-0B9E716CDD2B}"/>
               </a:ext>
             </a:extLst>
           </p:cNvPr>
@@ -10822,7 +10981,7 @@
           <p:cNvPr id="24" name="">
             <a:extLst xmlns:a="http://schemas.openxmlformats.org/drawingml/2006/main">
               <a:ext uri="{FF2B5EF4-FFF2-40B4-BE49-F238E27FC236}">
-                <a16:creationId xmlns:a16="http://schemas.microsoft.com/office/drawing/2014/main" id="{3DAB2E51-2AD1-4794-8EBB-EDBF32D43566}"/>
+                <a16:creationId xmlns:a16="http://schemas.microsoft.com/office/drawing/2014/main" id="{33CB7E7C-E9E8-4612-A417-2FE58374CEC7}"/>
               </a:ext>
             </a:extLst>
           </p:cNvPr>
@@ -10889,7 +11048,7 @@
           <p:cNvPr id="25" name="">
             <a:extLst xmlns:a="http://schemas.openxmlformats.org/drawingml/2006/main">
               <a:ext uri="{FF2B5EF4-FFF2-40B4-BE49-F238E27FC236}">
-                <a16:creationId xmlns:a16="http://schemas.microsoft.com/office/drawing/2014/main" id="{A1595FD7-A6D1-4B7C-A3A6-0A508BB00AA0}"/>
+                <a16:creationId xmlns:a16="http://schemas.microsoft.com/office/drawing/2014/main" id="{9BE2EEF9-A388-4950-A0EE-112657B3348D}"/>
               </a:ext>
             </a:extLst>
           </p:cNvPr>
@@ -10954,7 +11113,7 @@
     </p:spTree>
     <p:extLst>
       <p:ext uri="{BB962C8B-B14F-4D97-AF65-F5344CB8AC3E}">
-        <p14:creationId xmlns:p14="http://schemas.microsoft.com/office/powerpoint/2010/main" val="256930434"/>
+        <p14:creationId xmlns:p14="http://schemas.microsoft.com/office/powerpoint/2010/main" val="231393600"/>
       </p:ext>
     </p:extLst>
   </p:cSld>
@@ -10982,10 +11141,10 @@
       </p:grpSpPr>
       <p:sp>
         <p:nvSpPr>
-          <p:cNvPr id="17" name="">
-            <a:extLst xmlns:a="http://schemas.openxmlformats.org/drawingml/2006/main">
-              <a:ext uri="{FF2B5EF4-FFF2-40B4-BE49-F238E27FC236}">
-                <a16:creationId xmlns:a16="http://schemas.microsoft.com/office/drawing/2014/main" id="{DBC5A1E3-EEAE-46AD-850F-F2287C739FFE}"/>
+          <p:cNvPr id="20" name="">
+            <a:extLst xmlns:a="http://schemas.openxmlformats.org/drawingml/2006/main">
+              <a:ext uri="{FF2B5EF4-FFF2-40B4-BE49-F238E27FC236}">
+                <a16:creationId xmlns:a16="http://schemas.microsoft.com/office/drawing/2014/main" id="{3BA4B600-FF00-4D1D-8A83-CB43EB55C4DD}"/>
               </a:ext>
             </a:extLst>
           </p:cNvPr>
@@ -11016,7 +11175,7 @@
           <p:cNvPr id="2" name="">
             <a:extLst xmlns:a="http://schemas.openxmlformats.org/drawingml/2006/main">
               <a:ext uri="{FF2B5EF4-FFF2-40B4-BE49-F238E27FC236}">
-                <a16:creationId xmlns:a16="http://schemas.microsoft.com/office/drawing/2014/main" id="{3C643DFF-12FB-4113-9D9B-DEFB3EC42A18}"/>
+                <a16:creationId xmlns:a16="http://schemas.microsoft.com/office/drawing/2014/main" id="{46569546-B347-4885-A74B-334790CF6994}"/>
               </a:ext>
             </a:extLst>
           </p:cNvPr>
@@ -11073,7 +11232,7 @@
                 <a:ea typeface="Arial"/>
                 <a:cs typeface="Arial"/>
               </a:rPr>
-              <a:t>Phase 2 language coverage</a:t>
+              <a:t>Example 2: loop and branch</a:t>
             </a:r>
           </a:p>
         </p:txBody>
@@ -11083,7 +11242,7 @@
           <p:cNvPr id="3" name="">
             <a:extLst xmlns:a="http://schemas.openxmlformats.org/drawingml/2006/main">
               <a:ext uri="{FF2B5EF4-FFF2-40B4-BE49-F238E27FC236}">
-                <a16:creationId xmlns:a16="http://schemas.microsoft.com/office/drawing/2014/main" id="{A4F2CA4B-3256-4099-8DE8-4DD6EE6EA45A}"/>
+                <a16:creationId xmlns:a16="http://schemas.microsoft.com/office/drawing/2014/main" id="{3F7DDC18-BA29-49C2-BCE4-879924ABE44D}"/>
               </a:ext>
             </a:extLst>
           </p:cNvPr>
@@ -11140,7 +11299,7 @@
                 <a:ea typeface="Arial"/>
                 <a:cs typeface="Arial"/>
               </a:rPr>
-              <a:t>The current translator handles these restricted constructs end to end.</a:t>
+              <a:t>Complete pseudocode → loop IR → ordinary C for loop → observed result.</a:t>
             </a:r>
           </a:p>
         </p:txBody>
@@ -11150,7 +11309,7 @@
           <p:cNvPr id="4" name="">
             <a:extLst xmlns:a="http://schemas.openxmlformats.org/drawingml/2006/main">
               <a:ext uri="{FF2B5EF4-FFF2-40B4-BE49-F238E27FC236}">
-                <a16:creationId xmlns:a16="http://schemas.microsoft.com/office/drawing/2014/main" id="{A710B03B-0425-436D-86AB-30E2CF2A05FE}"/>
+                <a16:creationId xmlns:a16="http://schemas.microsoft.com/office/drawing/2014/main" id="{FC25DBA4-4761-496E-90B5-9A9D78EC63AB}"/>
               </a:ext>
             </a:extLst>
           </p:cNvPr>
@@ -11181,7 +11340,7 @@
           <p:cNvPr id="5" name="">
             <a:extLst xmlns:a="http://schemas.openxmlformats.org/drawingml/2006/main">
               <a:ext uri="{FF2B5EF4-FFF2-40B4-BE49-F238E27FC236}">
-                <a16:creationId xmlns:a16="http://schemas.microsoft.com/office/drawing/2014/main" id="{E38AA881-0841-4D9A-970D-AC3291A86381}"/>
+                <a16:creationId xmlns:a16="http://schemas.microsoft.com/office/drawing/2014/main" id="{A8F2AAFD-C874-4229-BFE2-A42425EFDCF3}"/>
               </a:ext>
             </a:extLst>
           </p:cNvPr>
@@ -11248,7 +11407,7 @@
           <p:cNvPr id="6" name="">
             <a:extLst xmlns:a="http://schemas.openxmlformats.org/drawingml/2006/main">
               <a:ext uri="{FF2B5EF4-FFF2-40B4-BE49-F238E27FC236}">
-                <a16:creationId xmlns:a16="http://schemas.microsoft.com/office/drawing/2014/main" id="{F6F89D47-A619-4213-9C3B-CCB507264ACD}"/>
+                <a16:creationId xmlns:a16="http://schemas.microsoft.com/office/drawing/2014/main" id="{8EDD490A-1C18-445F-9D11-FB81D39C68C7}"/>
               </a:ext>
             </a:extLst>
           </p:cNvPr>
@@ -11315,19 +11474,19 @@
           <p:cNvPr id="7" name="">
             <a:extLst xmlns:a="http://schemas.openxmlformats.org/drawingml/2006/main">
               <a:ext uri="{FF2B5EF4-FFF2-40B4-BE49-F238E27FC236}">
-                <a16:creationId xmlns:a16="http://schemas.microsoft.com/office/drawing/2014/main" id="{20FE5876-9BC5-41DB-93FE-A7EEA04E3DCC}"/>
-              </a:ext>
-            </a:extLst>
-          </p:cNvPr>
-          <p:cNvSpPr>
-            <a:spLocks xmlns:a="http://schemas.openxmlformats.org/drawingml/2006/main" noGrp="1"/>
-          </p:cNvSpPr>
-          <p:nvPr/>
-        </p:nvSpPr>
-        <p:spPr>
-          <a:xfrm xmlns:a="http://schemas.openxmlformats.org/drawingml/2006/main">
-            <a:off x="628650" y="1562100"/>
-            <a:ext cx="5000625" cy="285750"/>
+                <a16:creationId xmlns:a16="http://schemas.microsoft.com/office/drawing/2014/main" id="{5948F858-63EC-4518-8FD1-5085CCC27730}"/>
+              </a:ext>
+            </a:extLst>
+          </p:cNvPr>
+          <p:cNvSpPr>
+            <a:spLocks xmlns:a="http://schemas.openxmlformats.org/drawingml/2006/main" noGrp="1"/>
+          </p:cNvSpPr>
+          <p:nvPr/>
+        </p:nvSpPr>
+        <p:spPr>
+          <a:xfrm xmlns:a="http://schemas.openxmlformats.org/drawingml/2006/main">
+            <a:off x="628650" y="1466850"/>
+            <a:ext cx="4905375" cy="285750"/>
           </a:xfrm>
           <a:prstGeom xmlns:a="http://schemas.openxmlformats.org/drawingml/2006/main" prst="rect">
             <a:avLst/>
@@ -11344,7 +11503,7 @@
             <a:defPPr>
               <a:defRPr sz="1350" b="1">
                 <a:solidFill>
-                  <a:srgbClr val="4C82FF"/>
+                  <a:srgbClr val="20D5EA"/>
                 </a:solidFill>
                 <a:latin typeface="Arial"/>
                 <a:ea typeface="Arial"/>
@@ -11356,7 +11515,7 @@
             <a:pPr>
               <a:defRPr sz="1350" b="1">
                 <a:solidFill>
-                  <a:srgbClr val="4C82FF"/>
+                  <a:srgbClr val="20D5EA"/>
                 </a:solidFill>
                 <a:latin typeface="Arial"/>
                 <a:ea typeface="Arial"/>
@@ -11366,13 +11525,13 @@
             <a:r>
               <a:rPr sz="1350" b="1">
                 <a:solidFill>
-                  <a:srgbClr val="4C82FF"/>
-                </a:solidFill>
-                <a:latin typeface="Arial"/>
-                <a:ea typeface="Arial"/>
-                <a:cs typeface="Arial"/>
-              </a:rPr>
-              <a:t>CONTROL FLOW</a:t>
+                  <a:srgbClr val="20D5EA"/>
+                </a:solidFill>
+                <a:latin typeface="Arial"/>
+                <a:ea typeface="Arial"/>
+                <a:cs typeface="Arial"/>
+              </a:rPr>
+              <a:t>PSEUDOCODE</a:t>
             </a:r>
           </a:p>
         </p:txBody>
@@ -11382,25 +11541,25 @@
           <p:cNvPr id="8" name="">
             <a:extLst xmlns:a="http://schemas.openxmlformats.org/drawingml/2006/main">
               <a:ext uri="{FF2B5EF4-FFF2-40B4-BE49-F238E27FC236}">
-                <a16:creationId xmlns:a16="http://schemas.microsoft.com/office/drawing/2014/main" id="{E8F4D4A4-28DD-4D81-BAE0-A7BA5B3D0C12}"/>
-              </a:ext>
-            </a:extLst>
-          </p:cNvPr>
-          <p:cNvSpPr>
-            <a:spLocks xmlns:a="http://schemas.openxmlformats.org/drawingml/2006/main" noGrp="1"/>
-          </p:cNvSpPr>
-          <p:nvPr/>
-        </p:nvSpPr>
-        <p:spPr>
-          <a:xfrm xmlns:a="http://schemas.openxmlformats.org/drawingml/2006/main">
-            <a:off x="628650" y="1905000"/>
-            <a:ext cx="5000625" cy="19050"/>
+                <a16:creationId xmlns:a16="http://schemas.microsoft.com/office/drawing/2014/main" id="{13968A81-C027-4B3D-A83E-EDEDA801A88C}"/>
+              </a:ext>
+            </a:extLst>
+          </p:cNvPr>
+          <p:cNvSpPr>
+            <a:spLocks xmlns:a="http://schemas.openxmlformats.org/drawingml/2006/main" noGrp="1"/>
+          </p:cNvSpPr>
+          <p:nvPr/>
+        </p:nvSpPr>
+        <p:spPr>
+          <a:xfrm xmlns:a="http://schemas.openxmlformats.org/drawingml/2006/main">
+            <a:off x="628650" y="1809750"/>
+            <a:ext cx="4905375" cy="19050"/>
           </a:xfrm>
           <a:prstGeom xmlns:a="http://schemas.openxmlformats.org/drawingml/2006/main" prst="rect">
             <a:avLst/>
           </a:prstGeom>
           <a:solidFill xmlns:a="http://schemas.openxmlformats.org/drawingml/2006/main">
-            <a:srgbClr val="4C82FF"/>
+            <a:srgbClr val="20D5EA"/>
           </a:solidFill>
           <a:ln xmlns:a="http://schemas.openxmlformats.org/drawingml/2006/main" w="0">
             <a:noFill/>
@@ -11413,19 +11572,52 @@
           <p:cNvPr id="9" name="">
             <a:extLst xmlns:a="http://schemas.openxmlformats.org/drawingml/2006/main">
               <a:ext uri="{FF2B5EF4-FFF2-40B4-BE49-F238E27FC236}">
-                <a16:creationId xmlns:a16="http://schemas.microsoft.com/office/drawing/2014/main" id="{2B8A24D4-5B91-4F45-8C31-1B463CE8B1F4}"/>
-              </a:ext>
-            </a:extLst>
-          </p:cNvPr>
-          <p:cNvSpPr>
-            <a:spLocks xmlns:a="http://schemas.openxmlformats.org/drawingml/2006/main" noGrp="1"/>
-          </p:cNvSpPr>
-          <p:nvPr/>
-        </p:nvSpPr>
-        <p:spPr>
-          <a:xfrm xmlns:a="http://schemas.openxmlformats.org/drawingml/2006/main">
-            <a:off x="638175" y="2066925"/>
-            <a:ext cx="4714875" cy="2162175"/>
+                <a16:creationId xmlns:a16="http://schemas.microsoft.com/office/drawing/2014/main" id="{7EDD5967-93D3-4A2E-8237-1345FF099990}"/>
+              </a:ext>
+            </a:extLst>
+          </p:cNvPr>
+          <p:cNvSpPr>
+            <a:spLocks xmlns:a="http://schemas.openxmlformats.org/drawingml/2006/main" noGrp="1"/>
+          </p:cNvSpPr>
+          <p:nvPr/>
+        </p:nvSpPr>
+        <p:spPr>
+          <a:xfrm xmlns:a="http://schemas.openxmlformats.org/drawingml/2006/main">
+            <a:off x="619125" y="1924050"/>
+            <a:ext cx="4914900" cy="3419475"/>
+          </a:xfrm>
+          <a:prstGeom xmlns:a="http://schemas.openxmlformats.org/drawingml/2006/main" prst="roundRect">
+            <a:avLst>
+              <a:gd name="adj" fmla="val 2786"/>
+            </a:avLst>
+          </a:prstGeom>
+          <a:solidFill xmlns:a="http://schemas.openxmlformats.org/drawingml/2006/main">
+            <a:srgbClr val="101B2C"/>
+          </a:solidFill>
+          <a:ln xmlns:a="http://schemas.openxmlformats.org/drawingml/2006/main" w="0">
+            <a:noFill/>
+            <a:prstDash val="solid"/>
+          </a:ln>
+        </p:spPr>
+      </p:sp>
+      <p:sp>
+        <p:nvSpPr>
+          <p:cNvPr id="10" name="">
+            <a:extLst xmlns:a="http://schemas.openxmlformats.org/drawingml/2006/main">
+              <a:ext uri="{FF2B5EF4-FFF2-40B4-BE49-F238E27FC236}">
+                <a16:creationId xmlns:a16="http://schemas.microsoft.com/office/drawing/2014/main" id="{94A55CC3-65C9-4B2C-9CD2-C490F1C9C2EB}"/>
+              </a:ext>
+            </a:extLst>
+          </p:cNvPr>
+          <p:cNvSpPr>
+            <a:spLocks xmlns:a="http://schemas.openxmlformats.org/drawingml/2006/main" noGrp="1"/>
+          </p:cNvSpPr>
+          <p:nvPr/>
+        </p:nvSpPr>
+        <p:spPr>
+          <a:xfrm xmlns:a="http://schemas.openxmlformats.org/drawingml/2006/main">
+            <a:off x="828675" y="2085975"/>
+            <a:ext cx="4495800" cy="3095625"/>
           </a:xfrm>
           <a:prstGeom xmlns:a="http://schemas.openxmlformats.org/drawingml/2006/main" prst="rect">
             <a:avLst/>
@@ -11440,128 +11632,312 @@
           <a:bodyPr xmlns:a="http://schemas.openxmlformats.org/drawingml/2006/main" lIns="0" tIns="0" rIns="0" bIns="0"/>
           <a:lstStyle xmlns:a="http://schemas.openxmlformats.org/drawingml/2006/main">
             <a:defPPr>
-              <a:defRPr sz="1950" b="0">
-                <a:solidFill>
-                  <a:srgbClr val="F6F8FC"/>
-                </a:solidFill>
-                <a:latin typeface="Arial"/>
-                <a:ea typeface="Arial"/>
-                <a:cs typeface="Arial"/>
+              <a:defRPr sz="1275" b="0">
+                <a:solidFill>
+                  <a:srgbClr val="F6F8FC"/>
+                </a:solidFill>
+                <a:latin typeface="Consolas"/>
+                <a:ea typeface="Consolas"/>
+                <a:cs typeface="Consolas"/>
               </a:defRPr>
             </a:defPPr>
           </a:lstStyle>
           <a:p xmlns:a="http://schemas.openxmlformats.org/drawingml/2006/main">
             <a:pPr>
-              <a:defRPr sz="1950" b="0">
-                <a:solidFill>
-                  <a:srgbClr val="F6F8FC"/>
-                </a:solidFill>
-                <a:latin typeface="Arial"/>
-                <a:ea typeface="Arial"/>
-                <a:cs typeface="Arial"/>
-              </a:defRPr>
-            </a:pPr>
-            <a:r>
-              <a:rPr sz="1950" b="0">
-                <a:solidFill>
-                  <a:srgbClr val="F6F8FC"/>
-                </a:solidFill>
-                <a:latin typeface="Arial"/>
-                <a:ea typeface="Arial"/>
-                <a:cs typeface="Arial"/>
-              </a:rPr>
-              <a:t>IF / ELSE</a:t>
-            </a:r>
-          </a:p>
-          <a:p xmlns:a="http://schemas.openxmlformats.org/drawingml/2006/main">
-            <a:pPr>
-              <a:defRPr sz="1950" b="0">
-                <a:solidFill>
-                  <a:srgbClr val="F6F8FC"/>
-                </a:solidFill>
-                <a:latin typeface="Arial"/>
-                <a:ea typeface="Arial"/>
-                <a:cs typeface="Arial"/>
-              </a:defRPr>
-            </a:pPr>
-            <a:r>
-              <a:rPr sz="1950" b="0">
-                <a:solidFill>
-                  <a:srgbClr val="F6F8FC"/>
-                </a:solidFill>
-                <a:latin typeface="Arial"/>
-                <a:ea typeface="Arial"/>
-                <a:cs typeface="Arial"/>
-              </a:rPr>
-              <a:t>WHILE</a:t>
-            </a:r>
-          </a:p>
-          <a:p xmlns:a="http://schemas.openxmlformats.org/drawingml/2006/main">
-            <a:pPr>
-              <a:defRPr sz="1950" b="0">
-                <a:solidFill>
-                  <a:srgbClr val="F6F8FC"/>
-                </a:solidFill>
-                <a:latin typeface="Arial"/>
-                <a:ea typeface="Arial"/>
-                <a:cs typeface="Arial"/>
-              </a:defRPr>
-            </a:pPr>
-            <a:r>
-              <a:rPr sz="1950" b="0">
-                <a:solidFill>
-                  <a:srgbClr val="F6F8FC"/>
-                </a:solidFill>
-                <a:latin typeface="Arial"/>
-                <a:ea typeface="Arial"/>
-                <a:cs typeface="Arial"/>
-              </a:rPr>
-              <a:t>Inclusive FOR with STEP</a:t>
-            </a:r>
-          </a:p>
-          <a:p xmlns:a="http://schemas.openxmlformats.org/drawingml/2006/main">
-            <a:pPr>
-              <a:defRPr sz="1950" b="0">
-                <a:solidFill>
-                  <a:srgbClr val="F6F8FC"/>
-                </a:solidFill>
-                <a:latin typeface="Arial"/>
-                <a:ea typeface="Arial"/>
-                <a:cs typeface="Arial"/>
-              </a:defRPr>
-            </a:pPr>
-            <a:r>
-              <a:rPr sz="1950" b="0">
-                <a:solidFill>
-                  <a:srgbClr val="F6F8FC"/>
-                </a:solidFill>
-                <a:latin typeface="Arial"/>
-                <a:ea typeface="Arial"/>
-                <a:cs typeface="Arial"/>
-              </a:rPr>
-              <a:t>BREAK and CONTINUE</a:t>
+              <a:defRPr sz="1275" b="0">
+                <a:solidFill>
+                  <a:srgbClr val="F6F8FC"/>
+                </a:solidFill>
+                <a:latin typeface="Consolas"/>
+                <a:ea typeface="Consolas"/>
+                <a:cs typeface="Consolas"/>
+              </a:defRPr>
+            </a:pPr>
+            <a:r>
+              <a:rPr sz="1275" b="0">
+                <a:solidFill>
+                  <a:srgbClr val="F6F8FC"/>
+                </a:solidFill>
+                <a:latin typeface="Consolas"/>
+                <a:ea typeface="Consolas"/>
+                <a:cs typeface="Consolas"/>
+              </a:rPr>
+              <a:t>BEGIN</a:t>
+            </a:r>
+          </a:p>
+          <a:p xmlns:a="http://schemas.openxmlformats.org/drawingml/2006/main">
+            <a:pPr>
+              <a:defRPr sz="1275" b="0">
+                <a:solidFill>
+                  <a:srgbClr val="F6F8FC"/>
+                </a:solidFill>
+                <a:latin typeface="Consolas"/>
+                <a:ea typeface="Consolas"/>
+                <a:cs typeface="Consolas"/>
+              </a:defRPr>
+            </a:pPr>
+            <a:r>
+              <a:rPr sz="1275" b="0">
+                <a:solidFill>
+                  <a:srgbClr val="F6F8FC"/>
+                </a:solidFill>
+                <a:latin typeface="Consolas"/>
+                <a:ea typeface="Consolas"/>
+                <a:cs typeface="Consolas"/>
+              </a:rPr>
+              <a:t>DECLARE total AS INTEGER</a:t>
+            </a:r>
+          </a:p>
+          <a:p xmlns:a="http://schemas.openxmlformats.org/drawingml/2006/main">
+            <a:pPr>
+              <a:defRPr sz="1275" b="0">
+                <a:solidFill>
+                  <a:srgbClr val="F6F8FC"/>
+                </a:solidFill>
+                <a:latin typeface="Consolas"/>
+                <a:ea typeface="Consolas"/>
+                <a:cs typeface="Consolas"/>
+              </a:defRPr>
+            </a:pPr>
+            <a:r>
+              <a:rPr sz="1275" b="0">
+                <a:solidFill>
+                  <a:srgbClr val="F6F8FC"/>
+                </a:solidFill>
+                <a:latin typeface="Consolas"/>
+                <a:ea typeface="Consolas"/>
+                <a:cs typeface="Consolas"/>
+              </a:rPr>
+              <a:t>DECLARE i AS INTEGER</a:t>
+            </a:r>
+          </a:p>
+          <a:p xmlns:a="http://schemas.openxmlformats.org/drawingml/2006/main">
+            <a:pPr>
+              <a:defRPr sz="1275" b="0">
+                <a:solidFill>
+                  <a:srgbClr val="F6F8FC"/>
+                </a:solidFill>
+                <a:latin typeface="Consolas"/>
+                <a:ea typeface="Consolas"/>
+                <a:cs typeface="Consolas"/>
+              </a:defRPr>
+            </a:pPr>
+            <a:r>
+              <a:rPr sz="1275" b="0">
+                <a:solidFill>
+                  <a:srgbClr val="F6F8FC"/>
+                </a:solidFill>
+                <a:latin typeface="Consolas"/>
+                <a:ea typeface="Consolas"/>
+                <a:cs typeface="Consolas"/>
+              </a:rPr>
+              <a:t>SET total = 0</a:t>
+            </a:r>
+          </a:p>
+          <a:p xmlns:a="http://schemas.openxmlformats.org/drawingml/2006/main">
+            <a:pPr>
+              <a:defRPr sz="1275" b="0">
+                <a:solidFill>
+                  <a:srgbClr val="F6F8FC"/>
+                </a:solidFill>
+                <a:latin typeface="Consolas"/>
+                <a:ea typeface="Consolas"/>
+                <a:cs typeface="Consolas"/>
+              </a:defRPr>
+            </a:pPr>
+            <a:r>
+              <a:rPr sz="1275" b="0">
+                <a:solidFill>
+                  <a:srgbClr val="F6F8FC"/>
+                </a:solidFill>
+                <a:latin typeface="Consolas"/>
+                <a:ea typeface="Consolas"/>
+                <a:cs typeface="Consolas"/>
+              </a:rPr>
+              <a:t>FOR i = 1 TO 4 DO</a:t>
+            </a:r>
+          </a:p>
+          <a:p xmlns:a="http://schemas.openxmlformats.org/drawingml/2006/main">
+            <a:pPr>
+              <a:defRPr sz="1275" b="0">
+                <a:solidFill>
+                  <a:srgbClr val="F6F8FC"/>
+                </a:solidFill>
+                <a:latin typeface="Consolas"/>
+                <a:ea typeface="Consolas"/>
+                <a:cs typeface="Consolas"/>
+              </a:defRPr>
+            </a:pPr>
+            <a:r>
+              <a:rPr sz="1275" b="0">
+                <a:solidFill>
+                  <a:srgbClr val="F6F8FC"/>
+                </a:solidFill>
+                <a:latin typeface="Consolas"/>
+                <a:ea typeface="Consolas"/>
+                <a:cs typeface="Consolas"/>
+              </a:rPr>
+              <a:t>  IF i == 2 THEN</a:t>
+            </a:r>
+          </a:p>
+          <a:p xmlns:a="http://schemas.openxmlformats.org/drawingml/2006/main">
+            <a:pPr>
+              <a:defRPr sz="1275" b="0">
+                <a:solidFill>
+                  <a:srgbClr val="F6F8FC"/>
+                </a:solidFill>
+                <a:latin typeface="Consolas"/>
+                <a:ea typeface="Consolas"/>
+                <a:cs typeface="Consolas"/>
+              </a:defRPr>
+            </a:pPr>
+            <a:r>
+              <a:rPr sz="1275" b="0">
+                <a:solidFill>
+                  <a:srgbClr val="F6F8FC"/>
+                </a:solidFill>
+                <a:latin typeface="Consolas"/>
+                <a:ea typeface="Consolas"/>
+                <a:cs typeface="Consolas"/>
+              </a:rPr>
+              <a:t>    CONTINUE</a:t>
+            </a:r>
+          </a:p>
+          <a:p xmlns:a="http://schemas.openxmlformats.org/drawingml/2006/main">
+            <a:pPr>
+              <a:defRPr sz="1275" b="0">
+                <a:solidFill>
+                  <a:srgbClr val="F6F8FC"/>
+                </a:solidFill>
+                <a:latin typeface="Consolas"/>
+                <a:ea typeface="Consolas"/>
+                <a:cs typeface="Consolas"/>
+              </a:defRPr>
+            </a:pPr>
+            <a:r>
+              <a:rPr sz="1275" b="0">
+                <a:solidFill>
+                  <a:srgbClr val="F6F8FC"/>
+                </a:solidFill>
+                <a:latin typeface="Consolas"/>
+                <a:ea typeface="Consolas"/>
+                <a:cs typeface="Consolas"/>
+              </a:rPr>
+              <a:t>  ENDIF</a:t>
+            </a:r>
+          </a:p>
+          <a:p xmlns:a="http://schemas.openxmlformats.org/drawingml/2006/main">
+            <a:pPr>
+              <a:defRPr sz="1275" b="0">
+                <a:solidFill>
+                  <a:srgbClr val="F6F8FC"/>
+                </a:solidFill>
+                <a:latin typeface="Consolas"/>
+                <a:ea typeface="Consolas"/>
+                <a:cs typeface="Consolas"/>
+              </a:defRPr>
+            </a:pPr>
+            <a:r>
+              <a:rPr sz="1275" b="0">
+                <a:solidFill>
+                  <a:srgbClr val="F6F8FC"/>
+                </a:solidFill>
+                <a:latin typeface="Consolas"/>
+                <a:ea typeface="Consolas"/>
+                <a:cs typeface="Consolas"/>
+              </a:rPr>
+              <a:t>  SET total = total + i</a:t>
+            </a:r>
+          </a:p>
+          <a:p xmlns:a="http://schemas.openxmlformats.org/drawingml/2006/main">
+            <a:pPr>
+              <a:defRPr sz="1275" b="0">
+                <a:solidFill>
+                  <a:srgbClr val="F6F8FC"/>
+                </a:solidFill>
+                <a:latin typeface="Consolas"/>
+                <a:ea typeface="Consolas"/>
+                <a:cs typeface="Consolas"/>
+              </a:defRPr>
+            </a:pPr>
+            <a:r>
+              <a:rPr sz="1275" b="0">
+                <a:solidFill>
+                  <a:srgbClr val="F6F8FC"/>
+                </a:solidFill>
+                <a:latin typeface="Consolas"/>
+                <a:ea typeface="Consolas"/>
+                <a:cs typeface="Consolas"/>
+              </a:rPr>
+              <a:t>ENDFOR</a:t>
+            </a:r>
+          </a:p>
+          <a:p xmlns:a="http://schemas.openxmlformats.org/drawingml/2006/main">
+            <a:pPr>
+              <a:defRPr sz="1275" b="0">
+                <a:solidFill>
+                  <a:srgbClr val="F6F8FC"/>
+                </a:solidFill>
+                <a:latin typeface="Consolas"/>
+                <a:ea typeface="Consolas"/>
+                <a:cs typeface="Consolas"/>
+              </a:defRPr>
+            </a:pPr>
+            <a:r>
+              <a:rPr sz="1275" b="0">
+                <a:solidFill>
+                  <a:srgbClr val="F6F8FC"/>
+                </a:solidFill>
+                <a:latin typeface="Consolas"/>
+                <a:ea typeface="Consolas"/>
+                <a:cs typeface="Consolas"/>
+              </a:rPr>
+              <a:t>PRINT total</a:t>
+            </a:r>
+          </a:p>
+          <a:p xmlns:a="http://schemas.openxmlformats.org/drawingml/2006/main">
+            <a:pPr>
+              <a:defRPr sz="1275" b="0">
+                <a:solidFill>
+                  <a:srgbClr val="F6F8FC"/>
+                </a:solidFill>
+                <a:latin typeface="Consolas"/>
+                <a:ea typeface="Consolas"/>
+                <a:cs typeface="Consolas"/>
+              </a:defRPr>
+            </a:pPr>
+            <a:r>
+              <a:rPr sz="1275" b="0">
+                <a:solidFill>
+                  <a:srgbClr val="F6F8FC"/>
+                </a:solidFill>
+                <a:latin typeface="Consolas"/>
+                <a:ea typeface="Consolas"/>
+                <a:cs typeface="Consolas"/>
+              </a:rPr>
+              <a:t>END</a:t>
             </a:r>
           </a:p>
         </p:txBody>
       </p:sp>
       <p:sp>
         <p:nvSpPr>
-          <p:cNvPr id="10" name="">
-            <a:extLst xmlns:a="http://schemas.openxmlformats.org/drawingml/2006/main">
-              <a:ext uri="{FF2B5EF4-FFF2-40B4-BE49-F238E27FC236}">
-                <a16:creationId xmlns:a16="http://schemas.microsoft.com/office/drawing/2014/main" id="{F8F1CFEB-E406-4AF1-935E-4F64065A33F5}"/>
-              </a:ext>
-            </a:extLst>
-          </p:cNvPr>
-          <p:cNvSpPr>
-            <a:spLocks xmlns:a="http://schemas.openxmlformats.org/drawingml/2006/main" noGrp="1"/>
-          </p:cNvSpPr>
-          <p:nvPr/>
-        </p:nvSpPr>
-        <p:spPr>
-          <a:xfrm xmlns:a="http://schemas.openxmlformats.org/drawingml/2006/main">
-            <a:off x="6172200" y="1562100"/>
-            <a:ext cx="5286375" cy="285750"/>
+          <p:cNvPr id="11" name="">
+            <a:extLst xmlns:a="http://schemas.openxmlformats.org/drawingml/2006/main">
+              <a:ext uri="{FF2B5EF4-FFF2-40B4-BE49-F238E27FC236}">
+                <a16:creationId xmlns:a16="http://schemas.microsoft.com/office/drawing/2014/main" id="{426964A1-D138-45AA-AE14-A7C93F879034}"/>
+              </a:ext>
+            </a:extLst>
+          </p:cNvPr>
+          <p:cNvSpPr>
+            <a:spLocks xmlns:a="http://schemas.openxmlformats.org/drawingml/2006/main" noGrp="1"/>
+          </p:cNvSpPr>
+          <p:nvPr/>
+        </p:nvSpPr>
+        <p:spPr>
+          <a:xfrm xmlns:a="http://schemas.openxmlformats.org/drawingml/2006/main">
+            <a:off x="5991225" y="1466850"/>
+            <a:ext cx="5486400" cy="285750"/>
           </a:xfrm>
           <a:prstGeom xmlns:a="http://schemas.openxmlformats.org/drawingml/2006/main" prst="rect">
             <a:avLst/>
@@ -11578,7 +11954,7 @@
             <a:defPPr>
               <a:defRPr sz="1350" b="1">
                 <a:solidFill>
-                  <a:srgbClr val="33D69B"/>
+                  <a:srgbClr val="4C82FF"/>
                 </a:solidFill>
                 <a:latin typeface="Arial"/>
                 <a:ea typeface="Arial"/>
@@ -11590,7 +11966,7 @@
             <a:pPr>
               <a:defRPr sz="1350" b="1">
                 <a:solidFill>
-                  <a:srgbClr val="33D69B"/>
+                  <a:srgbClr val="4C82FF"/>
                 </a:solidFill>
                 <a:latin typeface="Arial"/>
                 <a:ea typeface="Arial"/>
@@ -11600,41 +11976,41 @@
             <a:r>
               <a:rPr sz="1350" b="1">
                 <a:solidFill>
-                  <a:srgbClr val="33D69B"/>
-                </a:solidFill>
-                <a:latin typeface="Arial"/>
-                <a:ea typeface="Arial"/>
-                <a:cs typeface="Arial"/>
-              </a:rPr>
-              <a:t>DATA AND OPERATIONS</a:t>
+                  <a:srgbClr val="4C82FF"/>
+                </a:solidFill>
+                <a:latin typeface="Arial"/>
+                <a:ea typeface="Arial"/>
+                <a:cs typeface="Arial"/>
+              </a:rPr>
+              <a:t>KEY IR</a:t>
             </a:r>
           </a:p>
         </p:txBody>
       </p:sp>
       <p:sp>
         <p:nvSpPr>
-          <p:cNvPr id="11" name="">
-            <a:extLst xmlns:a="http://schemas.openxmlformats.org/drawingml/2006/main">
-              <a:ext uri="{FF2B5EF4-FFF2-40B4-BE49-F238E27FC236}">
-                <a16:creationId xmlns:a16="http://schemas.microsoft.com/office/drawing/2014/main" id="{780D0078-2891-4EE4-B7EC-EFD9F6DFFF17}"/>
-              </a:ext>
-            </a:extLst>
-          </p:cNvPr>
-          <p:cNvSpPr>
-            <a:spLocks xmlns:a="http://schemas.openxmlformats.org/drawingml/2006/main" noGrp="1"/>
-          </p:cNvSpPr>
-          <p:nvPr/>
-        </p:nvSpPr>
-        <p:spPr>
-          <a:xfrm xmlns:a="http://schemas.openxmlformats.org/drawingml/2006/main">
-            <a:off x="6172200" y="1905000"/>
-            <a:ext cx="5286375" cy="19050"/>
+          <p:cNvPr id="12" name="">
+            <a:extLst xmlns:a="http://schemas.openxmlformats.org/drawingml/2006/main">
+              <a:ext uri="{FF2B5EF4-FFF2-40B4-BE49-F238E27FC236}">
+                <a16:creationId xmlns:a16="http://schemas.microsoft.com/office/drawing/2014/main" id="{CB2C23DE-C4D7-4775-BF04-F808009BE835}"/>
+              </a:ext>
+            </a:extLst>
+          </p:cNvPr>
+          <p:cNvSpPr>
+            <a:spLocks xmlns:a="http://schemas.openxmlformats.org/drawingml/2006/main" noGrp="1"/>
+          </p:cNvSpPr>
+          <p:nvPr/>
+        </p:nvSpPr>
+        <p:spPr>
+          <a:xfrm xmlns:a="http://schemas.openxmlformats.org/drawingml/2006/main">
+            <a:off x="5991225" y="1809750"/>
+            <a:ext cx="5486400" cy="19050"/>
           </a:xfrm>
           <a:prstGeom xmlns:a="http://schemas.openxmlformats.org/drawingml/2006/main" prst="rect">
             <a:avLst/>
           </a:prstGeom>
           <a:solidFill xmlns:a="http://schemas.openxmlformats.org/drawingml/2006/main">
-            <a:srgbClr val="33D69B"/>
+            <a:srgbClr val="4C82FF"/>
           </a:solidFill>
           <a:ln xmlns:a="http://schemas.openxmlformats.org/drawingml/2006/main" w="0">
             <a:noFill/>
@@ -11644,22 +12020,55 @@
       </p:sp>
       <p:sp>
         <p:nvSpPr>
-          <p:cNvPr id="12" name="">
-            <a:extLst xmlns:a="http://schemas.openxmlformats.org/drawingml/2006/main">
-              <a:ext uri="{FF2B5EF4-FFF2-40B4-BE49-F238E27FC236}">
-                <a16:creationId xmlns:a16="http://schemas.microsoft.com/office/drawing/2014/main" id="{442A92E1-AFBF-4F2F-AD1F-C75CA371515C}"/>
-              </a:ext>
-            </a:extLst>
-          </p:cNvPr>
-          <p:cNvSpPr>
-            <a:spLocks xmlns:a="http://schemas.openxmlformats.org/drawingml/2006/main" noGrp="1"/>
-          </p:cNvSpPr>
-          <p:nvPr/>
-        </p:nvSpPr>
-        <p:spPr>
-          <a:xfrm xmlns:a="http://schemas.openxmlformats.org/drawingml/2006/main">
-            <a:off x="6181725" y="2066925"/>
-            <a:ext cx="5238750" cy="2162175"/>
+          <p:cNvPr id="13" name="">
+            <a:extLst xmlns:a="http://schemas.openxmlformats.org/drawingml/2006/main">
+              <a:ext uri="{FF2B5EF4-FFF2-40B4-BE49-F238E27FC236}">
+                <a16:creationId xmlns:a16="http://schemas.microsoft.com/office/drawing/2014/main" id="{5C325468-8C3A-420D-BE03-CD3D1B12C01A}"/>
+              </a:ext>
+            </a:extLst>
+          </p:cNvPr>
+          <p:cNvSpPr>
+            <a:spLocks xmlns:a="http://schemas.openxmlformats.org/drawingml/2006/main" noGrp="1"/>
+          </p:cNvSpPr>
+          <p:nvPr/>
+        </p:nvSpPr>
+        <p:spPr>
+          <a:xfrm xmlns:a="http://schemas.openxmlformats.org/drawingml/2006/main">
+            <a:off x="5981700" y="1924050"/>
+            <a:ext cx="5495925" cy="1333500"/>
+          </a:xfrm>
+          <a:prstGeom xmlns:a="http://schemas.openxmlformats.org/drawingml/2006/main" prst="roundRect">
+            <a:avLst>
+              <a:gd name="adj" fmla="val 7143"/>
+            </a:avLst>
+          </a:prstGeom>
+          <a:solidFill xmlns:a="http://schemas.openxmlformats.org/drawingml/2006/main">
+            <a:srgbClr val="101B2C"/>
+          </a:solidFill>
+          <a:ln xmlns:a="http://schemas.openxmlformats.org/drawingml/2006/main" w="0">
+            <a:noFill/>
+            <a:prstDash val="solid"/>
+          </a:ln>
+        </p:spPr>
+      </p:sp>
+      <p:sp>
+        <p:nvSpPr>
+          <p:cNvPr id="14" name="">
+            <a:extLst xmlns:a="http://schemas.openxmlformats.org/drawingml/2006/main">
+              <a:ext uri="{FF2B5EF4-FFF2-40B4-BE49-F238E27FC236}">
+                <a16:creationId xmlns:a16="http://schemas.microsoft.com/office/drawing/2014/main" id="{EBA59C63-BB9A-424C-BE7E-7C514AEE07C8}"/>
+              </a:ext>
+            </a:extLst>
+          </p:cNvPr>
+          <p:cNvSpPr>
+            <a:spLocks xmlns:a="http://schemas.openxmlformats.org/drawingml/2006/main" noGrp="1"/>
+          </p:cNvSpPr>
+          <p:nvPr/>
+        </p:nvSpPr>
+        <p:spPr>
+          <a:xfrm xmlns:a="http://schemas.openxmlformats.org/drawingml/2006/main">
+            <a:off x="6191250" y="2085975"/>
+            <a:ext cx="5076825" cy="1009650"/>
           </a:xfrm>
           <a:prstGeom xmlns:a="http://schemas.openxmlformats.org/drawingml/2006/main" prst="rect">
             <a:avLst/>
@@ -11674,159 +12083,197 @@
           <a:bodyPr xmlns:a="http://schemas.openxmlformats.org/drawingml/2006/main" lIns="0" tIns="0" rIns="0" bIns="0"/>
           <a:lstStyle xmlns:a="http://schemas.openxmlformats.org/drawingml/2006/main">
             <a:defPPr>
-              <a:defRPr sz="1875" b="0">
-                <a:solidFill>
-                  <a:srgbClr val="F6F8FC"/>
-                </a:solidFill>
-                <a:latin typeface="Arial"/>
-                <a:ea typeface="Arial"/>
-                <a:cs typeface="Arial"/>
+              <a:defRPr sz="1050" b="0">
+                <a:solidFill>
+                  <a:srgbClr val="F6F8FC"/>
+                </a:solidFill>
+                <a:latin typeface="Consolas"/>
+                <a:ea typeface="Consolas"/>
+                <a:cs typeface="Consolas"/>
               </a:defRPr>
             </a:defPPr>
           </a:lstStyle>
           <a:p xmlns:a="http://schemas.openxmlformats.org/drawingml/2006/main">
             <a:pPr>
-              <a:defRPr sz="1875" b="0">
-                <a:solidFill>
-                  <a:srgbClr val="F6F8FC"/>
-                </a:solidFill>
-                <a:latin typeface="Arial"/>
-                <a:ea typeface="Arial"/>
-                <a:cs typeface="Arial"/>
-              </a:defRPr>
-            </a:pPr>
-            <a:r>
-              <a:rPr sz="1875" b="0">
-                <a:solidFill>
-                  <a:srgbClr val="F6F8FC"/>
-                </a:solidFill>
-                <a:latin typeface="Arial"/>
-                <a:ea typeface="Arial"/>
-                <a:cs typeface="Arial"/>
-              </a:rPr>
-              <a:t>INTEGER, REAL, CHAR, STRING</a:t>
-            </a:r>
-          </a:p>
-          <a:p xmlns:a="http://schemas.openxmlformats.org/drawingml/2006/main">
-            <a:pPr>
-              <a:defRPr sz="1875" b="0">
-                <a:solidFill>
-                  <a:srgbClr val="F6F8FC"/>
-                </a:solidFill>
-                <a:latin typeface="Arial"/>
-                <a:ea typeface="Arial"/>
-                <a:cs typeface="Arial"/>
-              </a:defRPr>
-            </a:pPr>
-            <a:r>
-              <a:rPr sz="1875" b="0">
-                <a:solidFill>
-                  <a:srgbClr val="F6F8FC"/>
-                </a:solidFill>
-                <a:latin typeface="Arial"/>
-                <a:ea typeface="Arial"/>
-                <a:cs typeface="Arial"/>
-              </a:rPr>
-              <a:t>Fixed-size 1D arrays</a:t>
-            </a:r>
-          </a:p>
-          <a:p xmlns:a="http://schemas.openxmlformats.org/drawingml/2006/main">
-            <a:pPr>
-              <a:defRPr sz="1875" b="0">
-                <a:solidFill>
-                  <a:srgbClr val="F6F8FC"/>
-                </a:solidFill>
-                <a:latin typeface="Arial"/>
-                <a:ea typeface="Arial"/>
-                <a:cs typeface="Arial"/>
-              </a:defRPr>
-            </a:pPr>
-            <a:r>
-              <a:rPr sz="1875" b="0">
-                <a:solidFill>
-                  <a:srgbClr val="F6F8FC"/>
-                </a:solidFill>
-                <a:latin typeface="Arial"/>
-                <a:ea typeface="Arial"/>
-                <a:cs typeface="Arial"/>
-              </a:rPr>
-              <a:t>Bitwise &amp;, |, ^, ~, &lt;&lt;, &gt;&gt;</a:t>
-            </a:r>
-          </a:p>
-          <a:p xmlns:a="http://schemas.openxmlformats.org/drawingml/2006/main">
-            <a:pPr>
-              <a:defRPr sz="1875" b="0">
-                <a:solidFill>
-                  <a:srgbClr val="F6F8FC"/>
-                </a:solidFill>
-                <a:latin typeface="Arial"/>
-                <a:ea typeface="Arial"/>
-                <a:cs typeface="Arial"/>
-              </a:defRPr>
-            </a:pPr>
-            <a:r>
-              <a:rPr sz="1875" b="0">
-                <a:solidFill>
-                  <a:srgbClr val="F6F8FC"/>
-                </a:solidFill>
-                <a:latin typeface="Arial"/>
-                <a:ea typeface="Arial"/>
-                <a:cs typeface="Arial"/>
-              </a:rPr>
-              <a:t>READ, PRINT and optional contracts</a:t>
+              <a:defRPr sz="1050" b="0">
+                <a:solidFill>
+                  <a:srgbClr val="F6F8FC"/>
+                </a:solidFill>
+                <a:latin typeface="Consolas"/>
+                <a:ea typeface="Consolas"/>
+                <a:cs typeface="Consolas"/>
+              </a:defRPr>
+            </a:pPr>
+            <a:r>
+              <a:rPr sz="1050" b="0">
+                <a:solidFill>
+                  <a:srgbClr val="F6F8FC"/>
+                </a:solidFill>
+                <a:latin typeface="Consolas"/>
+                <a:ea typeface="Consolas"/>
+                <a:cs typeface="Consolas"/>
+              </a:rPr>
+              <a:t>FOR i = 1 TO 4 STEP 1</a:t>
+            </a:r>
+          </a:p>
+          <a:p xmlns:a="http://schemas.openxmlformats.org/drawingml/2006/main">
+            <a:pPr>
+              <a:defRPr sz="1050" b="0">
+                <a:solidFill>
+                  <a:srgbClr val="F6F8FC"/>
+                </a:solidFill>
+                <a:latin typeface="Consolas"/>
+                <a:ea typeface="Consolas"/>
+                <a:cs typeface="Consolas"/>
+              </a:defRPr>
+            </a:pPr>
+            <a:r>
+              <a:rPr sz="1050" b="0">
+                <a:solidFill>
+                  <a:srgbClr val="F6F8FC"/>
+                </a:solidFill>
+                <a:latin typeface="Consolas"/>
+                <a:ea typeface="Consolas"/>
+                <a:cs typeface="Consolas"/>
+              </a:rPr>
+              <a:t>  t1 = i == 2</a:t>
+            </a:r>
+          </a:p>
+          <a:p xmlns:a="http://schemas.openxmlformats.org/drawingml/2006/main">
+            <a:pPr>
+              <a:defRPr sz="1050" b="0">
+                <a:solidFill>
+                  <a:srgbClr val="F6F8FC"/>
+                </a:solidFill>
+                <a:latin typeface="Consolas"/>
+                <a:ea typeface="Consolas"/>
+                <a:cs typeface="Consolas"/>
+              </a:defRPr>
+            </a:pPr>
+            <a:r>
+              <a:rPr sz="1050" b="0">
+                <a:solidFill>
+                  <a:srgbClr val="F6F8FC"/>
+                </a:solidFill>
+                <a:latin typeface="Consolas"/>
+                <a:ea typeface="Consolas"/>
+                <a:cs typeface="Consolas"/>
+              </a:rPr>
+              <a:t>  IF t1 THEN</a:t>
+            </a:r>
+          </a:p>
+          <a:p xmlns:a="http://schemas.openxmlformats.org/drawingml/2006/main">
+            <a:pPr>
+              <a:defRPr sz="1050" b="0">
+                <a:solidFill>
+                  <a:srgbClr val="F6F8FC"/>
+                </a:solidFill>
+                <a:latin typeface="Consolas"/>
+                <a:ea typeface="Consolas"/>
+                <a:cs typeface="Consolas"/>
+              </a:defRPr>
+            </a:pPr>
+            <a:r>
+              <a:rPr sz="1050" b="0">
+                <a:solidFill>
+                  <a:srgbClr val="F6F8FC"/>
+                </a:solidFill>
+                <a:latin typeface="Consolas"/>
+                <a:ea typeface="Consolas"/>
+                <a:cs typeface="Consolas"/>
+              </a:rPr>
+              <a:t>    CONTINUE</a:t>
+            </a:r>
+          </a:p>
+          <a:p xmlns:a="http://schemas.openxmlformats.org/drawingml/2006/main">
+            <a:pPr>
+              <a:defRPr sz="1050" b="0">
+                <a:solidFill>
+                  <a:srgbClr val="F6F8FC"/>
+                </a:solidFill>
+                <a:latin typeface="Consolas"/>
+                <a:ea typeface="Consolas"/>
+                <a:cs typeface="Consolas"/>
+              </a:defRPr>
+            </a:pPr>
+            <a:r>
+              <a:rPr sz="1050" b="0">
+                <a:solidFill>
+                  <a:srgbClr val="F6F8FC"/>
+                </a:solidFill>
+                <a:latin typeface="Consolas"/>
+                <a:ea typeface="Consolas"/>
+                <a:cs typeface="Consolas"/>
+              </a:rPr>
+              <a:t>  ENDIF</a:t>
+            </a:r>
+          </a:p>
+          <a:p xmlns:a="http://schemas.openxmlformats.org/drawingml/2006/main">
+            <a:pPr>
+              <a:defRPr sz="1050" b="0">
+                <a:solidFill>
+                  <a:srgbClr val="F6F8FC"/>
+                </a:solidFill>
+                <a:latin typeface="Consolas"/>
+                <a:ea typeface="Consolas"/>
+                <a:cs typeface="Consolas"/>
+              </a:defRPr>
+            </a:pPr>
+            <a:r>
+              <a:rPr sz="1050" b="0">
+                <a:solidFill>
+                  <a:srgbClr val="F6F8FC"/>
+                </a:solidFill>
+                <a:latin typeface="Consolas"/>
+                <a:ea typeface="Consolas"/>
+                <a:cs typeface="Consolas"/>
+              </a:rPr>
+              <a:t>  ...</a:t>
+            </a:r>
+          </a:p>
+          <a:p xmlns:a="http://schemas.openxmlformats.org/drawingml/2006/main">
+            <a:pPr>
+              <a:defRPr sz="1050" b="0">
+                <a:solidFill>
+                  <a:srgbClr val="F6F8FC"/>
+                </a:solidFill>
+                <a:latin typeface="Consolas"/>
+                <a:ea typeface="Consolas"/>
+                <a:cs typeface="Consolas"/>
+              </a:defRPr>
+            </a:pPr>
+            <a:r>
+              <a:rPr sz="1050" b="0">
+                <a:solidFill>
+                  <a:srgbClr val="F6F8FC"/>
+                </a:solidFill>
+                <a:latin typeface="Consolas"/>
+                <a:ea typeface="Consolas"/>
+                <a:cs typeface="Consolas"/>
+              </a:rPr>
+              <a:t>ENDFOR</a:t>
             </a:r>
           </a:p>
         </p:txBody>
       </p:sp>
       <p:sp>
         <p:nvSpPr>
-          <p:cNvPr id="13" name="">
-            <a:extLst xmlns:a="http://schemas.openxmlformats.org/drawingml/2006/main">
-              <a:ext uri="{FF2B5EF4-FFF2-40B4-BE49-F238E27FC236}">
-                <a16:creationId xmlns:a16="http://schemas.microsoft.com/office/drawing/2014/main" id="{A3C64A9B-AE33-4CB0-9F51-5E5DEFC1192B}"/>
-              </a:ext>
-            </a:extLst>
-          </p:cNvPr>
-          <p:cNvSpPr>
-            <a:spLocks xmlns:a="http://schemas.openxmlformats.org/drawingml/2006/main" noGrp="1"/>
-          </p:cNvSpPr>
-          <p:nvPr/>
-        </p:nvSpPr>
-        <p:spPr>
-          <a:xfrm xmlns:a="http://schemas.openxmlformats.org/drawingml/2006/main">
-            <a:off x="628650" y="4572000"/>
-            <a:ext cx="10839450" cy="19050"/>
-          </a:xfrm>
-          <a:prstGeom xmlns:a="http://schemas.openxmlformats.org/drawingml/2006/main" prst="rect">
-            <a:avLst/>
-          </a:prstGeom>
-          <a:solidFill xmlns:a="http://schemas.openxmlformats.org/drawingml/2006/main">
-            <a:srgbClr val="29405D"/>
-          </a:solidFill>
-          <a:ln xmlns:a="http://schemas.openxmlformats.org/drawingml/2006/main" w="0">
-            <a:noFill/>
-            <a:prstDash val="solid"/>
-          </a:ln>
-        </p:spPr>
-      </p:sp>
-      <p:sp>
-        <p:nvSpPr>
-          <p:cNvPr id="14" name="">
-            <a:extLst xmlns:a="http://schemas.openxmlformats.org/drawingml/2006/main">
-              <a:ext uri="{FF2B5EF4-FFF2-40B4-BE49-F238E27FC236}">
-                <a16:creationId xmlns:a16="http://schemas.microsoft.com/office/drawing/2014/main" id="{9F9A7B0E-794E-46C6-A1E7-6B06456A3FB9}"/>
-              </a:ext>
-            </a:extLst>
-          </p:cNvPr>
-          <p:cNvSpPr>
-            <a:spLocks xmlns:a="http://schemas.openxmlformats.org/drawingml/2006/main" noGrp="1"/>
-          </p:cNvSpPr>
-          <p:nvPr/>
-        </p:nvSpPr>
-        <p:spPr>
-          <a:xfrm xmlns:a="http://schemas.openxmlformats.org/drawingml/2006/main">
-            <a:off x="647700" y="4810125"/>
-            <a:ext cx="4191000" cy="342900"/>
+          <p:cNvPr id="15" name="">
+            <a:extLst xmlns:a="http://schemas.openxmlformats.org/drawingml/2006/main">
+              <a:ext uri="{FF2B5EF4-FFF2-40B4-BE49-F238E27FC236}">
+                <a16:creationId xmlns:a16="http://schemas.microsoft.com/office/drawing/2014/main" id="{8990A07A-5BC6-4D79-9F66-7CFD3379C8AB}"/>
+              </a:ext>
+            </a:extLst>
+          </p:cNvPr>
+          <p:cNvSpPr>
+            <a:spLocks xmlns:a="http://schemas.openxmlformats.org/drawingml/2006/main" noGrp="1"/>
+          </p:cNvSpPr>
+          <p:nvPr/>
+        </p:nvSpPr>
+        <p:spPr>
+          <a:xfrm xmlns:a="http://schemas.openxmlformats.org/drawingml/2006/main">
+            <a:off x="5991225" y="3419475"/>
+            <a:ext cx="5486400" cy="285750"/>
           </a:xfrm>
           <a:prstGeom xmlns:a="http://schemas.openxmlformats.org/drawingml/2006/main" prst="rect">
             <a:avLst/>
@@ -11841,59 +12288,123 @@
           <a:bodyPr xmlns:a="http://schemas.openxmlformats.org/drawingml/2006/main" lIns="0" tIns="0" rIns="0" bIns="0"/>
           <a:lstStyle xmlns:a="http://schemas.openxmlformats.org/drawingml/2006/main">
             <a:defPPr>
-              <a:defRPr sz="1650" b="0">
-                <a:solidFill>
-                  <a:srgbClr val="AEBBD0"/>
-                </a:solidFill>
-                <a:latin typeface="Consolas"/>
-                <a:ea typeface="Consolas"/>
-                <a:cs typeface="Consolas"/>
+              <a:defRPr sz="1350" b="1">
+                <a:solidFill>
+                  <a:srgbClr val="33D69B"/>
+                </a:solidFill>
+                <a:latin typeface="Arial"/>
+                <a:ea typeface="Arial"/>
+                <a:cs typeface="Arial"/>
               </a:defRPr>
             </a:defPPr>
           </a:lstStyle>
           <a:p xmlns:a="http://schemas.openxmlformats.org/drawingml/2006/main">
             <a:pPr>
-              <a:defRPr sz="1650" b="0">
-                <a:solidFill>
-                  <a:srgbClr val="AEBBD0"/>
-                </a:solidFill>
-                <a:latin typeface="Consolas"/>
-                <a:ea typeface="Consolas"/>
-                <a:cs typeface="Consolas"/>
-              </a:defRPr>
-            </a:pPr>
-            <a:r>
-              <a:rPr sz="1650" b="0">
-                <a:solidFill>
-                  <a:srgbClr val="AEBBD0"/>
-                </a:solidFill>
-                <a:latin typeface="Consolas"/>
-                <a:ea typeface="Consolas"/>
-                <a:cs typeface="Consolas"/>
-              </a:rPr>
-              <a:t>FOR i = 1 TO 4 DO</a:t>
+              <a:defRPr sz="1350" b="1">
+                <a:solidFill>
+                  <a:srgbClr val="33D69B"/>
+                </a:solidFill>
+                <a:latin typeface="Arial"/>
+                <a:ea typeface="Arial"/>
+                <a:cs typeface="Arial"/>
+              </a:defRPr>
+            </a:pPr>
+            <a:r>
+              <a:rPr sz="1350" b="1">
+                <a:solidFill>
+                  <a:srgbClr val="33D69B"/>
+                </a:solidFill>
+                <a:latin typeface="Arial"/>
+                <a:ea typeface="Arial"/>
+                <a:cs typeface="Arial"/>
+              </a:rPr>
+              <a:t>GENERATED C CORE</a:t>
             </a:r>
           </a:p>
         </p:txBody>
       </p:sp>
       <p:sp>
         <p:nvSpPr>
-          <p:cNvPr id="15" name="">
-            <a:extLst xmlns:a="http://schemas.openxmlformats.org/drawingml/2006/main">
-              <a:ext uri="{FF2B5EF4-FFF2-40B4-BE49-F238E27FC236}">
-                <a16:creationId xmlns:a16="http://schemas.microsoft.com/office/drawing/2014/main" id="{D276429C-B52E-4BE1-94E0-A34D288734D6}"/>
-              </a:ext>
-            </a:extLst>
-          </p:cNvPr>
-          <p:cNvSpPr>
-            <a:spLocks xmlns:a="http://schemas.openxmlformats.org/drawingml/2006/main" noGrp="1"/>
-          </p:cNvSpPr>
-          <p:nvPr/>
-        </p:nvSpPr>
-        <p:spPr>
-          <a:xfrm xmlns:a="http://schemas.openxmlformats.org/drawingml/2006/main">
-            <a:off x="5619750" y="4810125"/>
-            <a:ext cx="5810250" cy="342900"/>
+          <p:cNvPr id="16" name="">
+            <a:extLst xmlns:a="http://schemas.openxmlformats.org/drawingml/2006/main">
+              <a:ext uri="{FF2B5EF4-FFF2-40B4-BE49-F238E27FC236}">
+                <a16:creationId xmlns:a16="http://schemas.microsoft.com/office/drawing/2014/main" id="{1E1E89FE-1507-462F-8EDB-8792321457B0}"/>
+              </a:ext>
+            </a:extLst>
+          </p:cNvPr>
+          <p:cNvSpPr>
+            <a:spLocks xmlns:a="http://schemas.openxmlformats.org/drawingml/2006/main" noGrp="1"/>
+          </p:cNvSpPr>
+          <p:nvPr/>
+        </p:nvSpPr>
+        <p:spPr>
+          <a:xfrm xmlns:a="http://schemas.openxmlformats.org/drawingml/2006/main">
+            <a:off x="5991225" y="3762375"/>
+            <a:ext cx="5486400" cy="19050"/>
+          </a:xfrm>
+          <a:prstGeom xmlns:a="http://schemas.openxmlformats.org/drawingml/2006/main" prst="rect">
+            <a:avLst/>
+          </a:prstGeom>
+          <a:solidFill xmlns:a="http://schemas.openxmlformats.org/drawingml/2006/main">
+            <a:srgbClr val="33D69B"/>
+          </a:solidFill>
+          <a:ln xmlns:a="http://schemas.openxmlformats.org/drawingml/2006/main" w="0">
+            <a:noFill/>
+            <a:prstDash val="solid"/>
+          </a:ln>
+        </p:spPr>
+      </p:sp>
+      <p:sp>
+        <p:nvSpPr>
+          <p:cNvPr id="17" name="">
+            <a:extLst xmlns:a="http://schemas.openxmlformats.org/drawingml/2006/main">
+              <a:ext uri="{FF2B5EF4-FFF2-40B4-BE49-F238E27FC236}">
+                <a16:creationId xmlns:a16="http://schemas.microsoft.com/office/drawing/2014/main" id="{D8D55FFF-5F68-4681-B01B-8B081F976711}"/>
+              </a:ext>
+            </a:extLst>
+          </p:cNvPr>
+          <p:cNvSpPr>
+            <a:spLocks xmlns:a="http://schemas.openxmlformats.org/drawingml/2006/main" noGrp="1"/>
+          </p:cNvSpPr>
+          <p:nvPr/>
+        </p:nvSpPr>
+        <p:spPr>
+          <a:xfrm xmlns:a="http://schemas.openxmlformats.org/drawingml/2006/main">
+            <a:off x="5981700" y="3876675"/>
+            <a:ext cx="5495925" cy="1466850"/>
+          </a:xfrm>
+          <a:prstGeom xmlns:a="http://schemas.openxmlformats.org/drawingml/2006/main" prst="roundRect">
+            <a:avLst>
+              <a:gd name="adj" fmla="val 6494"/>
+            </a:avLst>
+          </a:prstGeom>
+          <a:solidFill xmlns:a="http://schemas.openxmlformats.org/drawingml/2006/main">
+            <a:srgbClr val="101B2C"/>
+          </a:solidFill>
+          <a:ln xmlns:a="http://schemas.openxmlformats.org/drawingml/2006/main" w="0">
+            <a:noFill/>
+            <a:prstDash val="solid"/>
+          </a:ln>
+        </p:spPr>
+      </p:sp>
+      <p:sp>
+        <p:nvSpPr>
+          <p:cNvPr id="18" name="">
+            <a:extLst xmlns:a="http://schemas.openxmlformats.org/drawingml/2006/main">
+              <a:ext uri="{FF2B5EF4-FFF2-40B4-BE49-F238E27FC236}">
+                <a16:creationId xmlns:a16="http://schemas.microsoft.com/office/drawing/2014/main" id="{1D7579BB-6D6A-497D-B932-8118932606C4}"/>
+              </a:ext>
+            </a:extLst>
+          </p:cNvPr>
+          <p:cNvSpPr>
+            <a:spLocks xmlns:a="http://schemas.openxmlformats.org/drawingml/2006/main" noGrp="1"/>
+          </p:cNvSpPr>
+          <p:nvPr/>
+        </p:nvSpPr>
+        <p:spPr>
+          <a:xfrm xmlns:a="http://schemas.openxmlformats.org/drawingml/2006/main">
+            <a:off x="6191250" y="4038600"/>
+            <a:ext cx="5076825" cy="1143000"/>
           </a:xfrm>
           <a:prstGeom xmlns:a="http://schemas.openxmlformats.org/drawingml/2006/main" prst="rect">
             <a:avLst/>
@@ -11908,9 +12419,9 @@
           <a:bodyPr xmlns:a="http://schemas.openxmlformats.org/drawingml/2006/main" lIns="0" tIns="0" rIns="0" bIns="0"/>
           <a:lstStyle xmlns:a="http://schemas.openxmlformats.org/drawingml/2006/main">
             <a:defPPr>
-              <a:defRPr sz="1650" b="1">
-                <a:solidFill>
-                  <a:srgbClr val="20D5EA"/>
+              <a:defRPr sz="1275" b="0">
+                <a:solidFill>
+                  <a:srgbClr val="F6F8FC"/>
                 </a:solidFill>
                 <a:latin typeface="Consolas"/>
                 <a:ea typeface="Consolas"/>
@@ -11920,47 +12431,139 @@
           </a:lstStyle>
           <a:p xmlns:a="http://schemas.openxmlformats.org/drawingml/2006/main">
             <a:pPr>
-              <a:defRPr sz="1650" b="1">
-                <a:solidFill>
-                  <a:srgbClr val="20D5EA"/>
-                </a:solidFill>
-                <a:latin typeface="Consolas"/>
-                <a:ea typeface="Consolas"/>
-                <a:cs typeface="Consolas"/>
-              </a:defRPr>
-            </a:pPr>
-            <a:r>
-              <a:rPr sz="1650" b="1">
-                <a:solidFill>
-                  <a:srgbClr val="20D5EA"/>
-                </a:solidFill>
-                <a:latin typeface="Consolas"/>
-                <a:ea typeface="Consolas"/>
-                <a:cs typeface="Consolas"/>
-              </a:rPr>
-              <a:t>for (i = 1; i &lt;= 4; i++) { ... }</a:t>
+              <a:defRPr sz="1275" b="0">
+                <a:solidFill>
+                  <a:srgbClr val="F6F8FC"/>
+                </a:solidFill>
+                <a:latin typeface="Consolas"/>
+                <a:ea typeface="Consolas"/>
+                <a:cs typeface="Consolas"/>
+              </a:defRPr>
+            </a:pPr>
+            <a:r>
+              <a:rPr sz="1275" b="0">
+                <a:solidFill>
+                  <a:srgbClr val="F6F8FC"/>
+                </a:solidFill>
+                <a:latin typeface="Consolas"/>
+                <a:ea typeface="Consolas"/>
+                <a:cs typeface="Consolas"/>
+              </a:rPr>
+              <a:t>for (i = 1; i &lt;= 4; i++) {</a:t>
+            </a:r>
+          </a:p>
+          <a:p xmlns:a="http://schemas.openxmlformats.org/drawingml/2006/main">
+            <a:pPr>
+              <a:defRPr sz="1275" b="0">
+                <a:solidFill>
+                  <a:srgbClr val="F6F8FC"/>
+                </a:solidFill>
+                <a:latin typeface="Consolas"/>
+                <a:ea typeface="Consolas"/>
+                <a:cs typeface="Consolas"/>
+              </a:defRPr>
+            </a:pPr>
+            <a:r>
+              <a:rPr sz="1275" b="0">
+                <a:solidFill>
+                  <a:srgbClr val="F6F8FC"/>
+                </a:solidFill>
+                <a:latin typeface="Consolas"/>
+                <a:ea typeface="Consolas"/>
+                <a:cs typeface="Consolas"/>
+              </a:rPr>
+              <a:t>  if (i == 2) continue;</a:t>
+            </a:r>
+          </a:p>
+          <a:p xmlns:a="http://schemas.openxmlformats.org/drawingml/2006/main">
+            <a:pPr>
+              <a:defRPr sz="1275" b="0">
+                <a:solidFill>
+                  <a:srgbClr val="F6F8FC"/>
+                </a:solidFill>
+                <a:latin typeface="Consolas"/>
+                <a:ea typeface="Consolas"/>
+                <a:cs typeface="Consolas"/>
+              </a:defRPr>
+            </a:pPr>
+            <a:r>
+              <a:rPr sz="1275" b="0">
+                <a:solidFill>
+                  <a:srgbClr val="F6F8FC"/>
+                </a:solidFill>
+                <a:latin typeface="Consolas"/>
+                <a:ea typeface="Consolas"/>
+                <a:cs typeface="Consolas"/>
+              </a:rPr>
+              <a:t>  total = total + i;</a:t>
+            </a:r>
+          </a:p>
+          <a:p xmlns:a="http://schemas.openxmlformats.org/drawingml/2006/main">
+            <a:pPr>
+              <a:defRPr sz="1275" b="0">
+                <a:solidFill>
+                  <a:srgbClr val="F6F8FC"/>
+                </a:solidFill>
+                <a:latin typeface="Consolas"/>
+                <a:ea typeface="Consolas"/>
+                <a:cs typeface="Consolas"/>
+              </a:defRPr>
+            </a:pPr>
+            <a:r>
+              <a:rPr sz="1275" b="0">
+                <a:solidFill>
+                  <a:srgbClr val="F6F8FC"/>
+                </a:solidFill>
+                <a:latin typeface="Consolas"/>
+                <a:ea typeface="Consolas"/>
+                <a:cs typeface="Consolas"/>
+              </a:rPr>
+              <a:t>}</a:t>
+            </a:r>
+          </a:p>
+          <a:p xmlns:a="http://schemas.openxmlformats.org/drawingml/2006/main">
+            <a:pPr>
+              <a:defRPr sz="1275" b="0">
+                <a:solidFill>
+                  <a:srgbClr val="F6F8FC"/>
+                </a:solidFill>
+                <a:latin typeface="Consolas"/>
+                <a:ea typeface="Consolas"/>
+                <a:cs typeface="Consolas"/>
+              </a:defRPr>
+            </a:pPr>
+            <a:r>
+              <a:rPr sz="1275" b="0">
+                <a:solidFill>
+                  <a:srgbClr val="F6F8FC"/>
+                </a:solidFill>
+                <a:latin typeface="Consolas"/>
+                <a:ea typeface="Consolas"/>
+                <a:cs typeface="Consolas"/>
+              </a:rPr>
+              <a:t>printf("%d\n", total);</a:t>
             </a:r>
           </a:p>
         </p:txBody>
       </p:sp>
       <p:sp>
         <p:nvSpPr>
-          <p:cNvPr id="16" name="">
-            <a:extLst xmlns:a="http://schemas.openxmlformats.org/drawingml/2006/main">
-              <a:ext uri="{FF2B5EF4-FFF2-40B4-BE49-F238E27FC236}">
-                <a16:creationId xmlns:a16="http://schemas.microsoft.com/office/drawing/2014/main" id="{5776F992-CEBF-43E5-AA2C-E544C4245733}"/>
-              </a:ext>
-            </a:extLst>
-          </p:cNvPr>
-          <p:cNvSpPr>
-            <a:spLocks xmlns:a="http://schemas.openxmlformats.org/drawingml/2006/main" noGrp="1"/>
-          </p:cNvSpPr>
-          <p:nvPr/>
-        </p:nvSpPr>
-        <p:spPr>
-          <a:xfrm xmlns:a="http://schemas.openxmlformats.org/drawingml/2006/main">
-            <a:off x="647700" y="5429250"/>
-            <a:ext cx="10668000" cy="381000"/>
+          <p:cNvPr id="19" name="">
+            <a:extLst xmlns:a="http://schemas.openxmlformats.org/drawingml/2006/main">
+              <a:ext uri="{FF2B5EF4-FFF2-40B4-BE49-F238E27FC236}">
+                <a16:creationId xmlns:a16="http://schemas.microsoft.com/office/drawing/2014/main" id="{79244D9D-79B2-48DA-AAF6-1D6955BB7606}"/>
+              </a:ext>
+            </a:extLst>
+          </p:cNvPr>
+          <p:cNvSpPr>
+            <a:spLocks xmlns:a="http://schemas.openxmlformats.org/drawingml/2006/main" noGrp="1"/>
+          </p:cNvSpPr>
+          <p:nvPr/>
+        </p:nvSpPr>
+        <p:spPr>
+          <a:xfrm xmlns:a="http://schemas.openxmlformats.org/drawingml/2006/main">
+            <a:off x="638175" y="5514975"/>
+            <a:ext cx="10839450" cy="466725"/>
           </a:xfrm>
           <a:prstGeom xmlns:a="http://schemas.openxmlformats.org/drawingml/2006/main" prst="rect">
             <a:avLst/>
@@ -11975,9 +12578,9 @@
           <a:bodyPr xmlns:a="http://schemas.openxmlformats.org/drawingml/2006/main" lIns="0" tIns="0" rIns="0" bIns="0"/>
           <a:lstStyle xmlns:a="http://schemas.openxmlformats.org/drawingml/2006/main">
             <a:defPPr>
-              <a:defRPr sz="1650" b="0">
-                <a:solidFill>
-                  <a:srgbClr val="F6F8FC"/>
+              <a:defRPr sz="1800" b="1">
+                <a:solidFill>
+                  <a:srgbClr val="33D69B"/>
                 </a:solidFill>
                 <a:latin typeface="Arial"/>
                 <a:ea typeface="Arial"/>
@@ -11987,25 +12590,25 @@
           </a:lstStyle>
           <a:p xmlns:a="http://schemas.openxmlformats.org/drawingml/2006/main">
             <a:pPr>
-              <a:defRPr sz="1650" b="0">
-                <a:solidFill>
-                  <a:srgbClr val="F6F8FC"/>
-                </a:solidFill>
-                <a:latin typeface="Arial"/>
-                <a:ea typeface="Arial"/>
-                <a:cs typeface="Arial"/>
-              </a:defRPr>
-            </a:pPr>
-            <a:r>
-              <a:rPr sz="1650" b="0">
-                <a:solidFill>
-                  <a:srgbClr val="F6F8FC"/>
-                </a:solidFill>
-                <a:latin typeface="Arial"/>
-                <a:ea typeface="Arial"/>
-                <a:cs typeface="Arial"/>
-              </a:rPr>
-              <a:t>The generated C uses a normal for loop and normal continue for this case.</a:t>
+              <a:defRPr sz="1800" b="1">
+                <a:solidFill>
+                  <a:srgbClr val="33D69B"/>
+                </a:solidFill>
+                <a:latin typeface="Arial"/>
+                <a:ea typeface="Arial"/>
+                <a:cs typeface="Arial"/>
+              </a:defRPr>
+            </a:pPr>
+            <a:r>
+              <a:rPr sz="1800" b="1">
+                <a:solidFill>
+                  <a:srgbClr val="33D69B"/>
+                </a:solidFill>
+                <a:latin typeface="Arial"/>
+                <a:ea typeface="Arial"/>
+                <a:cs typeface="Arial"/>
+              </a:rPr>
+              <a:t>RESULT: 8   (1 + 3 + 4)</a:t>
             </a:r>
           </a:p>
         </p:txBody>
@@ -12013,7 +12616,7 @@
     </p:spTree>
     <p:extLst>
       <p:ext uri="{BB962C8B-B14F-4D97-AF65-F5344CB8AC3E}">
-        <p14:creationId xmlns:p14="http://schemas.microsoft.com/office/powerpoint/2010/main" val="351888034"/>
+        <p14:creationId xmlns:p14="http://schemas.microsoft.com/office/powerpoint/2010/main" val="28052779"/>
       </p:ext>
     </p:extLst>
   </p:cSld>
@@ -12041,10 +12644,10 @@
       </p:grpSpPr>
       <p:sp>
         <p:nvSpPr>
-          <p:cNvPr id="19" name="">
-            <a:extLst xmlns:a="http://schemas.openxmlformats.org/drawingml/2006/main">
-              <a:ext uri="{FF2B5EF4-FFF2-40B4-BE49-F238E27FC236}">
-                <a16:creationId xmlns:a16="http://schemas.microsoft.com/office/drawing/2014/main" id="{AD2CDF05-A65D-4566-A4DC-AB2AE7F92647}"/>
+          <p:cNvPr id="20" name="">
+            <a:extLst xmlns:a="http://schemas.openxmlformats.org/drawingml/2006/main">
+              <a:ext uri="{FF2B5EF4-FFF2-40B4-BE49-F238E27FC236}">
+                <a16:creationId xmlns:a16="http://schemas.microsoft.com/office/drawing/2014/main" id="{BD791B73-79EF-4116-8318-77545BCE4CCF}"/>
               </a:ext>
             </a:extLst>
           </p:cNvPr>
@@ -12075,7 +12678,7 @@
           <p:cNvPr id="2" name="">
             <a:extLst xmlns:a="http://schemas.openxmlformats.org/drawingml/2006/main">
               <a:ext uri="{FF2B5EF4-FFF2-40B4-BE49-F238E27FC236}">
-                <a16:creationId xmlns:a16="http://schemas.microsoft.com/office/drawing/2014/main" id="{724DC36E-0087-46BB-A8C7-6F8D9D84619F}"/>
+                <a16:creationId xmlns:a16="http://schemas.microsoft.com/office/drawing/2014/main" id="{CADA4809-75A0-49F8-9693-480772A3B362}"/>
               </a:ext>
             </a:extLst>
           </p:cNvPr>
@@ -12132,7 +12735,7 @@
                 <a:ea typeface="Arial"/>
                 <a:cs typeface="Arial"/>
               </a:rPr>
-              <a:t>Error detection at two points</a:t>
+              <a:t>Example 3: STRING and bitwise data</a:t>
             </a:r>
           </a:p>
         </p:txBody>
@@ -12142,7 +12745,7 @@
           <p:cNvPr id="3" name="">
             <a:extLst xmlns:a="http://schemas.openxmlformats.org/drawingml/2006/main">
               <a:ext uri="{FF2B5EF4-FFF2-40B4-BE49-F238E27FC236}">
-                <a16:creationId xmlns:a16="http://schemas.microsoft.com/office/drawing/2014/main" id="{0FF5CBDF-ED0A-43FE-BF3D-B889B88C44AB}"/>
+                <a16:creationId xmlns:a16="http://schemas.microsoft.com/office/drawing/2014/main" id="{60400C99-A7E2-464D-9DEB-FF968358FD2D}"/>
               </a:ext>
             </a:extLst>
           </p:cNvPr>
@@ -12199,7 +12802,7 @@
                 <a:ea typeface="Arial"/>
                 <a:cs typeface="Arial"/>
               </a:rPr>
-              <a:t>The compiler rejects invalid source; generated C checks selected input-dependent faults.</a:t>
+              <a:t>Complete pseudocode → typed IR → C statements → observed output.</a:t>
             </a:r>
           </a:p>
         </p:txBody>
@@ -12209,7 +12812,7 @@
           <p:cNvPr id="4" name="">
             <a:extLst xmlns:a="http://schemas.openxmlformats.org/drawingml/2006/main">
               <a:ext uri="{FF2B5EF4-FFF2-40B4-BE49-F238E27FC236}">
-                <a16:creationId xmlns:a16="http://schemas.microsoft.com/office/drawing/2014/main" id="{4E9E0357-BA79-4D9A-A9D3-DEE66EC8421F}"/>
+                <a16:creationId xmlns:a16="http://schemas.microsoft.com/office/drawing/2014/main" id="{DE8CD2AA-DBFD-4F56-BEB1-7C088F170758}"/>
               </a:ext>
             </a:extLst>
           </p:cNvPr>
@@ -12240,7 +12843,7 @@
           <p:cNvPr id="5" name="">
             <a:extLst xmlns:a="http://schemas.openxmlformats.org/drawingml/2006/main">
               <a:ext uri="{FF2B5EF4-FFF2-40B4-BE49-F238E27FC236}">
-                <a16:creationId xmlns:a16="http://schemas.microsoft.com/office/drawing/2014/main" id="{F3572447-286C-4782-8A16-09514D7061EF}"/>
+                <a16:creationId xmlns:a16="http://schemas.microsoft.com/office/drawing/2014/main" id="{6A2A5835-8B77-4453-BC2E-D9925A0976E2}"/>
               </a:ext>
             </a:extLst>
           </p:cNvPr>
@@ -12307,7 +12910,7 @@
           <p:cNvPr id="6" name="">
             <a:extLst xmlns:a="http://schemas.openxmlformats.org/drawingml/2006/main">
               <a:ext uri="{FF2B5EF4-FFF2-40B4-BE49-F238E27FC236}">
-                <a16:creationId xmlns:a16="http://schemas.microsoft.com/office/drawing/2014/main" id="{B237F7E9-4BD7-4562-8ED9-6256093249FB}"/>
+                <a16:creationId xmlns:a16="http://schemas.microsoft.com/office/drawing/2014/main" id="{D6300010-4E38-4DF4-90B5-E3906E2C9D1E}"/>
               </a:ext>
             </a:extLst>
           </p:cNvPr>
@@ -12374,19 +12977,19 @@
           <p:cNvPr id="7" name="">
             <a:extLst xmlns:a="http://schemas.openxmlformats.org/drawingml/2006/main">
               <a:ext uri="{FF2B5EF4-FFF2-40B4-BE49-F238E27FC236}">
-                <a16:creationId xmlns:a16="http://schemas.microsoft.com/office/drawing/2014/main" id="{C5CEFBA8-8117-4981-9B3A-06871548A189}"/>
-              </a:ext>
-            </a:extLst>
-          </p:cNvPr>
-          <p:cNvSpPr>
-            <a:spLocks xmlns:a="http://schemas.openxmlformats.org/drawingml/2006/main" noGrp="1"/>
-          </p:cNvSpPr>
-          <p:nvPr/>
-        </p:nvSpPr>
-        <p:spPr>
-          <a:xfrm xmlns:a="http://schemas.openxmlformats.org/drawingml/2006/main">
-            <a:off x="628650" y="1524000"/>
-            <a:ext cx="5000625" cy="285750"/>
+                <a16:creationId xmlns:a16="http://schemas.microsoft.com/office/drawing/2014/main" id="{38233142-FE57-4C22-8CED-9385172D8F5D}"/>
+              </a:ext>
+            </a:extLst>
+          </p:cNvPr>
+          <p:cNvSpPr>
+            <a:spLocks xmlns:a="http://schemas.openxmlformats.org/drawingml/2006/main" noGrp="1"/>
+          </p:cNvSpPr>
+          <p:nvPr/>
+        </p:nvSpPr>
+        <p:spPr>
+          <a:xfrm xmlns:a="http://schemas.openxmlformats.org/drawingml/2006/main">
+            <a:off x="628650" y="1466850"/>
+            <a:ext cx="4905375" cy="285750"/>
           </a:xfrm>
           <a:prstGeom xmlns:a="http://schemas.openxmlformats.org/drawingml/2006/main" prst="rect">
             <a:avLst/>
@@ -12403,7 +13006,7 @@
             <a:defPPr>
               <a:defRPr sz="1350" b="1">
                 <a:solidFill>
-                  <a:srgbClr val="F6B94D"/>
+                  <a:srgbClr val="20D5EA"/>
                 </a:solidFill>
                 <a:latin typeface="Arial"/>
                 <a:ea typeface="Arial"/>
@@ -12415,7 +13018,7 @@
             <a:pPr>
               <a:defRPr sz="1350" b="1">
                 <a:solidFill>
-                  <a:srgbClr val="F6B94D"/>
+                  <a:srgbClr val="20D5EA"/>
                 </a:solidFill>
                 <a:latin typeface="Arial"/>
                 <a:ea typeface="Arial"/>
@@ -12425,13 +13028,13 @@
             <a:r>
               <a:rPr sz="1350" b="1">
                 <a:solidFill>
-                  <a:srgbClr val="F6B94D"/>
-                </a:solidFill>
-                <a:latin typeface="Arial"/>
-                <a:ea typeface="Arial"/>
-                <a:cs typeface="Arial"/>
-              </a:rPr>
-              <a:t>BEFORE C GENERATION</a:t>
+                  <a:srgbClr val="20D5EA"/>
+                </a:solidFill>
+                <a:latin typeface="Arial"/>
+                <a:ea typeface="Arial"/>
+                <a:cs typeface="Arial"/>
+              </a:rPr>
+              <a:t>PSEUDOCODE</a:t>
             </a:r>
           </a:p>
         </p:txBody>
@@ -12441,25 +13044,25 @@
           <p:cNvPr id="8" name="">
             <a:extLst xmlns:a="http://schemas.openxmlformats.org/drawingml/2006/main">
               <a:ext uri="{FF2B5EF4-FFF2-40B4-BE49-F238E27FC236}">
-                <a16:creationId xmlns:a16="http://schemas.microsoft.com/office/drawing/2014/main" id="{193F80B2-D87F-4594-B041-84B3FDDB8A71}"/>
-              </a:ext>
-            </a:extLst>
-          </p:cNvPr>
-          <p:cNvSpPr>
-            <a:spLocks xmlns:a="http://schemas.openxmlformats.org/drawingml/2006/main" noGrp="1"/>
-          </p:cNvSpPr>
-          <p:nvPr/>
-        </p:nvSpPr>
-        <p:spPr>
-          <a:xfrm xmlns:a="http://schemas.openxmlformats.org/drawingml/2006/main">
-            <a:off x="628650" y="1866900"/>
-            <a:ext cx="5000625" cy="19050"/>
+                <a16:creationId xmlns:a16="http://schemas.microsoft.com/office/drawing/2014/main" id="{D26E66BA-4DE5-498A-B7CE-3060472A2EDE}"/>
+              </a:ext>
+            </a:extLst>
+          </p:cNvPr>
+          <p:cNvSpPr>
+            <a:spLocks xmlns:a="http://schemas.openxmlformats.org/drawingml/2006/main" noGrp="1"/>
+          </p:cNvSpPr>
+          <p:nvPr/>
+        </p:nvSpPr>
+        <p:spPr>
+          <a:xfrm xmlns:a="http://schemas.openxmlformats.org/drawingml/2006/main">
+            <a:off x="628650" y="1809750"/>
+            <a:ext cx="4905375" cy="19050"/>
           </a:xfrm>
           <a:prstGeom xmlns:a="http://schemas.openxmlformats.org/drawingml/2006/main" prst="rect">
             <a:avLst/>
           </a:prstGeom>
           <a:solidFill xmlns:a="http://schemas.openxmlformats.org/drawingml/2006/main">
-            <a:srgbClr val="F6B94D"/>
+            <a:srgbClr val="20D5EA"/>
           </a:solidFill>
           <a:ln xmlns:a="http://schemas.openxmlformats.org/drawingml/2006/main" w="0">
             <a:noFill/>
@@ -12472,23 +13075,23 @@
           <p:cNvPr id="9" name="">
             <a:extLst xmlns:a="http://schemas.openxmlformats.org/drawingml/2006/main">
               <a:ext uri="{FF2B5EF4-FFF2-40B4-BE49-F238E27FC236}">
-                <a16:creationId xmlns:a16="http://schemas.microsoft.com/office/drawing/2014/main" id="{D83F1CC5-36ED-4532-ACA4-95CDD7AFC92F}"/>
-              </a:ext>
-            </a:extLst>
-          </p:cNvPr>
-          <p:cNvSpPr>
-            <a:spLocks xmlns:a="http://schemas.openxmlformats.org/drawingml/2006/main" noGrp="1"/>
-          </p:cNvSpPr>
-          <p:nvPr/>
-        </p:nvSpPr>
-        <p:spPr>
-          <a:xfrm xmlns:a="http://schemas.openxmlformats.org/drawingml/2006/main">
-            <a:off x="619125" y="2009775"/>
-            <a:ext cx="5010150" cy="1695450"/>
+                <a16:creationId xmlns:a16="http://schemas.microsoft.com/office/drawing/2014/main" id="{8254505B-CBC3-4E4A-A727-B466265CDF77}"/>
+              </a:ext>
+            </a:extLst>
+          </p:cNvPr>
+          <p:cNvSpPr>
+            <a:spLocks xmlns:a="http://schemas.openxmlformats.org/drawingml/2006/main" noGrp="1"/>
+          </p:cNvSpPr>
+          <p:nvPr/>
+        </p:nvSpPr>
+        <p:spPr>
+          <a:xfrm xmlns:a="http://schemas.openxmlformats.org/drawingml/2006/main">
+            <a:off x="619125" y="1924050"/>
+            <a:ext cx="4914900" cy="3219450"/>
           </a:xfrm>
           <a:prstGeom xmlns:a="http://schemas.openxmlformats.org/drawingml/2006/main" prst="roundRect">
             <a:avLst>
-              <a:gd name="adj" fmla="val 5618"/>
+              <a:gd name="adj" fmla="val 2959"/>
             </a:avLst>
           </a:prstGeom>
           <a:solidFill xmlns:a="http://schemas.openxmlformats.org/drawingml/2006/main">
@@ -12505,19 +13108,19 @@
           <p:cNvPr id="10" name="">
             <a:extLst xmlns:a="http://schemas.openxmlformats.org/drawingml/2006/main">
               <a:ext uri="{FF2B5EF4-FFF2-40B4-BE49-F238E27FC236}">
-                <a16:creationId xmlns:a16="http://schemas.microsoft.com/office/drawing/2014/main" id="{ACF58E3D-7ABD-40CE-A082-77F21E6A81B0}"/>
-              </a:ext>
-            </a:extLst>
-          </p:cNvPr>
-          <p:cNvSpPr>
-            <a:spLocks xmlns:a="http://schemas.openxmlformats.org/drawingml/2006/main" noGrp="1"/>
-          </p:cNvSpPr>
-          <p:nvPr/>
-        </p:nvSpPr>
-        <p:spPr>
-          <a:xfrm xmlns:a="http://schemas.openxmlformats.org/drawingml/2006/main">
-            <a:off x="828675" y="2171700"/>
-            <a:ext cx="4591050" cy="1371600"/>
+                <a16:creationId xmlns:a16="http://schemas.microsoft.com/office/drawing/2014/main" id="{B5ABD819-5348-4113-B34B-08FA0DD9B800}"/>
+              </a:ext>
+            </a:extLst>
+          </p:cNvPr>
+          <p:cNvSpPr>
+            <a:spLocks xmlns:a="http://schemas.openxmlformats.org/drawingml/2006/main" noGrp="1"/>
+          </p:cNvSpPr>
+          <p:nvPr/>
+        </p:nvSpPr>
+        <p:spPr>
+          <a:xfrm xmlns:a="http://schemas.openxmlformats.org/drawingml/2006/main">
+            <a:off x="828675" y="2085975"/>
+            <a:ext cx="4495800" cy="2895600"/>
           </a:xfrm>
           <a:prstGeom xmlns:a="http://schemas.openxmlformats.org/drawingml/2006/main" prst="rect">
             <a:avLst/>
@@ -12532,7 +13135,7 @@
           <a:bodyPr xmlns:a="http://schemas.openxmlformats.org/drawingml/2006/main" lIns="0" tIns="0" rIns="0" bIns="0"/>
           <a:lstStyle xmlns:a="http://schemas.openxmlformats.org/drawingml/2006/main">
             <a:defPPr>
-              <a:defRPr sz="1575" b="0">
+              <a:defRPr sz="1350" b="0">
                 <a:solidFill>
                   <a:srgbClr val="F6F8FC"/>
                 </a:solidFill>
@@ -12544,71 +13147,209 @@
           </a:lstStyle>
           <a:p xmlns:a="http://schemas.openxmlformats.org/drawingml/2006/main">
             <a:pPr>
-              <a:defRPr sz="1575" b="0">
-                <a:solidFill>
-                  <a:srgbClr val="F6F8FC"/>
-                </a:solidFill>
-                <a:latin typeface="Consolas"/>
-                <a:ea typeface="Consolas"/>
-                <a:cs typeface="Consolas"/>
-              </a:defRPr>
-            </a:pPr>
-            <a:r>
-              <a:rPr sz="1575" b="0">
-                <a:solidFill>
-                  <a:srgbClr val="F6F8FC"/>
-                </a:solidFill>
-                <a:latin typeface="Consolas"/>
-                <a:ea typeface="Consolas"/>
-                <a:cs typeface="Consolas"/>
-              </a:rPr>
-              <a:t>DECLARE x AS INTEGER</a:t>
-            </a:r>
-          </a:p>
-          <a:p xmlns:a="http://schemas.openxmlformats.org/drawingml/2006/main">
-            <a:pPr>
-              <a:defRPr sz="1575" b="0">
-                <a:solidFill>
-                  <a:srgbClr val="F6F8FC"/>
-                </a:solidFill>
-                <a:latin typeface="Consolas"/>
-                <a:ea typeface="Consolas"/>
-                <a:cs typeface="Consolas"/>
-              </a:defRPr>
-            </a:pPr>
-            <a:r>
-              <a:rPr sz="1575" b="0">
-                <a:solidFill>
-                  <a:srgbClr val="F6F8FC"/>
-                </a:solidFill>
-                <a:latin typeface="Consolas"/>
-                <a:ea typeface="Consolas"/>
-                <a:cs typeface="Consolas"/>
-              </a:rPr>
-              <a:t>SET y = 3</a:t>
-            </a:r>
-          </a:p>
-          <a:p xmlns:a="http://schemas.openxmlformats.org/drawingml/2006/main">
-            <a:pPr>
-              <a:defRPr sz="1575" b="0">
-                <a:solidFill>
-                  <a:srgbClr val="F6F8FC"/>
-                </a:solidFill>
-                <a:latin typeface="Consolas"/>
-                <a:ea typeface="Consolas"/>
-                <a:cs typeface="Consolas"/>
-              </a:defRPr>
-            </a:pPr>
-            <a:r>
-              <a:rPr sz="1575" b="0">
-                <a:solidFill>
-                  <a:srgbClr val="F6F8FC"/>
-                </a:solidFill>
-                <a:latin typeface="Consolas"/>
-                <a:ea typeface="Consolas"/>
-                <a:cs typeface="Consolas"/>
-              </a:rPr>
-              <a:t>SET x = 2.5</a:t>
+              <a:defRPr sz="1350" b="0">
+                <a:solidFill>
+                  <a:srgbClr val="F6F8FC"/>
+                </a:solidFill>
+                <a:latin typeface="Consolas"/>
+                <a:ea typeface="Consolas"/>
+                <a:cs typeface="Consolas"/>
+              </a:defRPr>
+            </a:pPr>
+            <a:r>
+              <a:rPr sz="1350" b="0">
+                <a:solidFill>
+                  <a:srgbClr val="F6F8FC"/>
+                </a:solidFill>
+                <a:latin typeface="Consolas"/>
+                <a:ea typeface="Consolas"/>
+                <a:cs typeface="Consolas"/>
+              </a:rPr>
+              <a:t>BEGIN</a:t>
+            </a:r>
+          </a:p>
+          <a:p xmlns:a="http://schemas.openxmlformats.org/drawingml/2006/main">
+            <a:pPr>
+              <a:defRPr sz="1350" b="0">
+                <a:solidFill>
+                  <a:srgbClr val="F6F8FC"/>
+                </a:solidFill>
+                <a:latin typeface="Consolas"/>
+                <a:ea typeface="Consolas"/>
+                <a:cs typeface="Consolas"/>
+              </a:defRPr>
+            </a:pPr>
+            <a:r>
+              <a:rPr sz="1350" b="0">
+                <a:solidFill>
+                  <a:srgbClr val="F6F8FC"/>
+                </a:solidFill>
+                <a:latin typeface="Consolas"/>
+                <a:ea typeface="Consolas"/>
+                <a:cs typeface="Consolas"/>
+              </a:rPr>
+              <a:t>DECLARE name AS STRING</a:t>
+            </a:r>
+          </a:p>
+          <a:p xmlns:a="http://schemas.openxmlformats.org/drawingml/2006/main">
+            <a:pPr>
+              <a:defRPr sz="1350" b="0">
+                <a:solidFill>
+                  <a:srgbClr val="F6F8FC"/>
+                </a:solidFill>
+                <a:latin typeface="Consolas"/>
+                <a:ea typeface="Consolas"/>
+                <a:cs typeface="Consolas"/>
+              </a:defRPr>
+            </a:pPr>
+            <a:r>
+              <a:rPr sz="1350" b="0">
+                <a:solidFill>
+                  <a:srgbClr val="F6F8FC"/>
+                </a:solidFill>
+                <a:latin typeface="Consolas"/>
+                <a:ea typeface="Consolas"/>
+                <a:cs typeface="Consolas"/>
+              </a:rPr>
+              <a:t>DECLARE bits AS INTEGER</a:t>
+            </a:r>
+          </a:p>
+          <a:p xmlns:a="http://schemas.openxmlformats.org/drawingml/2006/main">
+            <a:pPr>
+              <a:defRPr sz="1350" b="0">
+                <a:solidFill>
+                  <a:srgbClr val="F6F8FC"/>
+                </a:solidFill>
+                <a:latin typeface="Consolas"/>
+                <a:ea typeface="Consolas"/>
+                <a:cs typeface="Consolas"/>
+              </a:defRPr>
+            </a:pPr>
+            <a:r>
+              <a:rPr sz="1350" b="0">
+                <a:solidFill>
+                  <a:srgbClr val="F6F8FC"/>
+                </a:solidFill>
+                <a:latin typeface="Consolas"/>
+                <a:ea typeface="Consolas"/>
+                <a:cs typeface="Consolas"/>
+              </a:rPr>
+              <a:t>SET name = "Mira"</a:t>
+            </a:r>
+          </a:p>
+          <a:p xmlns:a="http://schemas.openxmlformats.org/drawingml/2006/main">
+            <a:pPr>
+              <a:defRPr sz="1350" b="0">
+                <a:solidFill>
+                  <a:srgbClr val="F6F8FC"/>
+                </a:solidFill>
+                <a:latin typeface="Consolas"/>
+                <a:ea typeface="Consolas"/>
+                <a:cs typeface="Consolas"/>
+              </a:defRPr>
+            </a:pPr>
+            <a:r>
+              <a:rPr sz="1350" b="0">
+                <a:solidFill>
+                  <a:srgbClr val="F6F8FC"/>
+                </a:solidFill>
+                <a:latin typeface="Consolas"/>
+                <a:ea typeface="Consolas"/>
+                <a:cs typeface="Consolas"/>
+              </a:rPr>
+              <a:t>READ bits</a:t>
+            </a:r>
+          </a:p>
+          <a:p xmlns:a="http://schemas.openxmlformats.org/drawingml/2006/main">
+            <a:pPr>
+              <a:defRPr sz="1350" b="0">
+                <a:solidFill>
+                  <a:srgbClr val="F6F8FC"/>
+                </a:solidFill>
+                <a:latin typeface="Consolas"/>
+                <a:ea typeface="Consolas"/>
+                <a:cs typeface="Consolas"/>
+              </a:defRPr>
+            </a:pPr>
+            <a:r>
+              <a:rPr sz="1350" b="0">
+                <a:solidFill>
+                  <a:srgbClr val="F6F8FC"/>
+                </a:solidFill>
+                <a:latin typeface="Consolas"/>
+                <a:ea typeface="Consolas"/>
+                <a:cs typeface="Consolas"/>
+              </a:rPr>
+              <a:t>SET bits = bits &amp; 3</a:t>
+            </a:r>
+          </a:p>
+          <a:p xmlns:a="http://schemas.openxmlformats.org/drawingml/2006/main">
+            <a:pPr>
+              <a:defRPr sz="1350" b="0">
+                <a:solidFill>
+                  <a:srgbClr val="F6F8FC"/>
+                </a:solidFill>
+                <a:latin typeface="Consolas"/>
+                <a:ea typeface="Consolas"/>
+                <a:cs typeface="Consolas"/>
+              </a:defRPr>
+            </a:pPr>
+            <a:r>
+              <a:rPr sz="1350" b="0">
+                <a:solidFill>
+                  <a:srgbClr val="F6F8FC"/>
+                </a:solidFill>
+                <a:latin typeface="Consolas"/>
+                <a:ea typeface="Consolas"/>
+                <a:cs typeface="Consolas"/>
+              </a:rPr>
+              <a:t>PRINT name</a:t>
+            </a:r>
+          </a:p>
+          <a:p xmlns:a="http://schemas.openxmlformats.org/drawingml/2006/main">
+            <a:pPr>
+              <a:defRPr sz="1350" b="0">
+                <a:solidFill>
+                  <a:srgbClr val="F6F8FC"/>
+                </a:solidFill>
+                <a:latin typeface="Consolas"/>
+                <a:ea typeface="Consolas"/>
+                <a:cs typeface="Consolas"/>
+              </a:defRPr>
+            </a:pPr>
+            <a:r>
+              <a:rPr sz="1350" b="0">
+                <a:solidFill>
+                  <a:srgbClr val="F6F8FC"/>
+                </a:solidFill>
+                <a:latin typeface="Consolas"/>
+                <a:ea typeface="Consolas"/>
+                <a:cs typeface="Consolas"/>
+              </a:rPr>
+              <a:t>PRINT bits</a:t>
+            </a:r>
+          </a:p>
+          <a:p xmlns:a="http://schemas.openxmlformats.org/drawingml/2006/main">
+            <a:pPr>
+              <a:defRPr sz="1350" b="0">
+                <a:solidFill>
+                  <a:srgbClr val="F6F8FC"/>
+                </a:solidFill>
+                <a:latin typeface="Consolas"/>
+                <a:ea typeface="Consolas"/>
+                <a:cs typeface="Consolas"/>
+              </a:defRPr>
+            </a:pPr>
+            <a:r>
+              <a:rPr sz="1350" b="0">
+                <a:solidFill>
+                  <a:srgbClr val="F6F8FC"/>
+                </a:solidFill>
+                <a:latin typeface="Consolas"/>
+                <a:ea typeface="Consolas"/>
+                <a:cs typeface="Consolas"/>
+              </a:rPr>
+              <a:t>END</a:t>
             </a:r>
           </a:p>
         </p:txBody>
@@ -12618,86 +13359,19 @@
           <p:cNvPr id="11" name="">
             <a:extLst xmlns:a="http://schemas.openxmlformats.org/drawingml/2006/main">
               <a:ext uri="{FF2B5EF4-FFF2-40B4-BE49-F238E27FC236}">
-                <a16:creationId xmlns:a16="http://schemas.microsoft.com/office/drawing/2014/main" id="{13B622EF-E585-422F-A1A6-F4C849C0A14D}"/>
-              </a:ext>
-            </a:extLst>
-          </p:cNvPr>
-          <p:cNvSpPr>
-            <a:spLocks xmlns:a="http://schemas.openxmlformats.org/drawingml/2006/main" noGrp="1"/>
-          </p:cNvSpPr>
-          <p:nvPr/>
-        </p:nvSpPr>
-        <p:spPr>
-          <a:xfrm xmlns:a="http://schemas.openxmlformats.org/drawingml/2006/main">
-            <a:off x="647700" y="3876675"/>
-            <a:ext cx="4953000" cy="1019175"/>
-          </a:xfrm>
-          <a:prstGeom xmlns:a="http://schemas.openxmlformats.org/drawingml/2006/main" prst="rect">
-            <a:avLst/>
-          </a:prstGeom>
-          <a:noFill xmlns:a="http://schemas.openxmlformats.org/drawingml/2006/main"/>
-          <a:ln xmlns:a="http://schemas.openxmlformats.org/drawingml/2006/main" w="0">
-            <a:noFill/>
-            <a:prstDash val="solid"/>
-          </a:ln>
-        </p:spPr>
-        <p:txBody>
-          <a:bodyPr xmlns:a="http://schemas.openxmlformats.org/drawingml/2006/main" lIns="0" tIns="0" rIns="0" bIns="0"/>
-          <a:lstStyle xmlns:a="http://schemas.openxmlformats.org/drawingml/2006/main">
-            <a:defPPr>
-              <a:defRPr sz="1500" b="0">
-                <a:solidFill>
-                  <a:srgbClr val="F6F8FC"/>
-                </a:solidFill>
-                <a:latin typeface="Arial"/>
-                <a:ea typeface="Arial"/>
-                <a:cs typeface="Arial"/>
-              </a:defRPr>
-            </a:defPPr>
-          </a:lstStyle>
-          <a:p xmlns:a="http://schemas.openxmlformats.org/drawingml/2006/main">
-            <a:pPr>
-              <a:defRPr sz="1500" b="0">
-                <a:solidFill>
-                  <a:srgbClr val="F6F8FC"/>
-                </a:solidFill>
-                <a:latin typeface="Arial"/>
-                <a:ea typeface="Arial"/>
-                <a:cs typeface="Arial"/>
-              </a:defRPr>
-            </a:pPr>
-            <a:r>
-              <a:rPr sz="1500" b="0">
-                <a:solidFill>
-                  <a:srgbClr val="F6F8FC"/>
-                </a:solidFill>
-                <a:latin typeface="Arial"/>
-                <a:ea typeface="Arial"/>
-                <a:cs typeface="Arial"/>
-              </a:rPr>
-              <a:t>Undeclared y stops compilation. The last line is a separate type-error example.</a:t>
-            </a:r>
-          </a:p>
-        </p:txBody>
-      </p:sp>
-      <p:sp>
-        <p:nvSpPr>
-          <p:cNvPr id="12" name="">
-            <a:extLst xmlns:a="http://schemas.openxmlformats.org/drawingml/2006/main">
-              <a:ext uri="{FF2B5EF4-FFF2-40B4-BE49-F238E27FC236}">
-                <a16:creationId xmlns:a16="http://schemas.microsoft.com/office/drawing/2014/main" id="{54111E35-1E42-44EC-9746-8974F6E132D7}"/>
-              </a:ext>
-            </a:extLst>
-          </p:cNvPr>
-          <p:cNvSpPr>
-            <a:spLocks xmlns:a="http://schemas.openxmlformats.org/drawingml/2006/main" noGrp="1"/>
-          </p:cNvSpPr>
-          <p:nvPr/>
-        </p:nvSpPr>
-        <p:spPr>
-          <a:xfrm xmlns:a="http://schemas.openxmlformats.org/drawingml/2006/main">
-            <a:off x="6191250" y="1524000"/>
-            <a:ext cx="5286375" cy="285750"/>
+                <a16:creationId xmlns:a16="http://schemas.microsoft.com/office/drawing/2014/main" id="{38876CC7-F73E-48F7-9312-CA9B582FD95B}"/>
+              </a:ext>
+            </a:extLst>
+          </p:cNvPr>
+          <p:cNvSpPr>
+            <a:spLocks xmlns:a="http://schemas.openxmlformats.org/drawingml/2006/main" noGrp="1"/>
+          </p:cNvSpPr>
+          <p:nvPr/>
+        </p:nvSpPr>
+        <p:spPr>
+          <a:xfrm xmlns:a="http://schemas.openxmlformats.org/drawingml/2006/main">
+            <a:off x="5991225" y="1466850"/>
+            <a:ext cx="5486400" cy="285750"/>
           </a:xfrm>
           <a:prstGeom xmlns:a="http://schemas.openxmlformats.org/drawingml/2006/main" prst="rect">
             <a:avLst/>
@@ -12714,7 +13388,7 @@
             <a:defPPr>
               <a:defRPr sz="1350" b="1">
                 <a:solidFill>
-                  <a:srgbClr val="33D69B"/>
+                  <a:srgbClr val="4C82FF"/>
                 </a:solidFill>
                 <a:latin typeface="Arial"/>
                 <a:ea typeface="Arial"/>
@@ -12726,7 +13400,7 @@
             <a:pPr>
               <a:defRPr sz="1350" b="1">
                 <a:solidFill>
-                  <a:srgbClr val="33D69B"/>
+                  <a:srgbClr val="4C82FF"/>
                 </a:solidFill>
                 <a:latin typeface="Arial"/>
                 <a:ea typeface="Arial"/>
@@ -12736,70 +13410,70 @@
             <a:r>
               <a:rPr sz="1350" b="1">
                 <a:solidFill>
-                  <a:srgbClr val="33D69B"/>
-                </a:solidFill>
-                <a:latin typeface="Arial"/>
-                <a:ea typeface="Arial"/>
-                <a:cs typeface="Arial"/>
-              </a:rPr>
-              <a:t>WHEN GENERATED C RUNS</a:t>
+                  <a:srgbClr val="4C82FF"/>
+                </a:solidFill>
+                <a:latin typeface="Arial"/>
+                <a:ea typeface="Arial"/>
+                <a:cs typeface="Arial"/>
+              </a:rPr>
+              <a:t>KEY IR</a:t>
             </a:r>
           </a:p>
         </p:txBody>
       </p:sp>
       <p:sp>
         <p:nvSpPr>
+          <p:cNvPr id="12" name="">
+            <a:extLst xmlns:a="http://schemas.openxmlformats.org/drawingml/2006/main">
+              <a:ext uri="{FF2B5EF4-FFF2-40B4-BE49-F238E27FC236}">
+                <a16:creationId xmlns:a16="http://schemas.microsoft.com/office/drawing/2014/main" id="{F30257B1-79E7-4F85-BABA-48B5814D7FCF}"/>
+              </a:ext>
+            </a:extLst>
+          </p:cNvPr>
+          <p:cNvSpPr>
+            <a:spLocks xmlns:a="http://schemas.openxmlformats.org/drawingml/2006/main" noGrp="1"/>
+          </p:cNvSpPr>
+          <p:nvPr/>
+        </p:nvSpPr>
+        <p:spPr>
+          <a:xfrm xmlns:a="http://schemas.openxmlformats.org/drawingml/2006/main">
+            <a:off x="5991225" y="1809750"/>
+            <a:ext cx="5486400" cy="19050"/>
+          </a:xfrm>
+          <a:prstGeom xmlns:a="http://schemas.openxmlformats.org/drawingml/2006/main" prst="rect">
+            <a:avLst/>
+          </a:prstGeom>
+          <a:solidFill xmlns:a="http://schemas.openxmlformats.org/drawingml/2006/main">
+            <a:srgbClr val="4C82FF"/>
+          </a:solidFill>
+          <a:ln xmlns:a="http://schemas.openxmlformats.org/drawingml/2006/main" w="0">
+            <a:noFill/>
+            <a:prstDash val="solid"/>
+          </a:ln>
+        </p:spPr>
+      </p:sp>
+      <p:sp>
+        <p:nvSpPr>
           <p:cNvPr id="13" name="">
             <a:extLst xmlns:a="http://schemas.openxmlformats.org/drawingml/2006/main">
               <a:ext uri="{FF2B5EF4-FFF2-40B4-BE49-F238E27FC236}">
-                <a16:creationId xmlns:a16="http://schemas.microsoft.com/office/drawing/2014/main" id="{1FBF3B2E-F166-4F96-A7EE-6E543E87CF05}"/>
-              </a:ext>
-            </a:extLst>
-          </p:cNvPr>
-          <p:cNvSpPr>
-            <a:spLocks xmlns:a="http://schemas.openxmlformats.org/drawingml/2006/main" noGrp="1"/>
-          </p:cNvSpPr>
-          <p:nvPr/>
-        </p:nvSpPr>
-        <p:spPr>
-          <a:xfrm xmlns:a="http://schemas.openxmlformats.org/drawingml/2006/main">
-            <a:off x="6191250" y="1866900"/>
-            <a:ext cx="5286375" cy="19050"/>
-          </a:xfrm>
-          <a:prstGeom xmlns:a="http://schemas.openxmlformats.org/drawingml/2006/main" prst="rect">
-            <a:avLst/>
-          </a:prstGeom>
-          <a:solidFill xmlns:a="http://schemas.openxmlformats.org/drawingml/2006/main">
-            <a:srgbClr val="33D69B"/>
-          </a:solidFill>
-          <a:ln xmlns:a="http://schemas.openxmlformats.org/drawingml/2006/main" w="0">
-            <a:noFill/>
-            <a:prstDash val="solid"/>
-          </a:ln>
-        </p:spPr>
-      </p:sp>
-      <p:sp>
-        <p:nvSpPr>
-          <p:cNvPr id="14" name="">
-            <a:extLst xmlns:a="http://schemas.openxmlformats.org/drawingml/2006/main">
-              <a:ext uri="{FF2B5EF4-FFF2-40B4-BE49-F238E27FC236}">
-                <a16:creationId xmlns:a16="http://schemas.microsoft.com/office/drawing/2014/main" id="{1822E09E-4533-488E-AEAE-3751051F0C6B}"/>
-              </a:ext>
-            </a:extLst>
-          </p:cNvPr>
-          <p:cNvSpPr>
-            <a:spLocks xmlns:a="http://schemas.openxmlformats.org/drawingml/2006/main" noGrp="1"/>
-          </p:cNvSpPr>
-          <p:nvPr/>
-        </p:nvSpPr>
-        <p:spPr>
-          <a:xfrm xmlns:a="http://schemas.openxmlformats.org/drawingml/2006/main">
-            <a:off x="6181725" y="2009775"/>
-            <a:ext cx="5286375" cy="1695450"/>
+                <a16:creationId xmlns:a16="http://schemas.microsoft.com/office/drawing/2014/main" id="{61CDE4DE-6045-4C2B-BA00-700572EB7CDD}"/>
+              </a:ext>
+            </a:extLst>
+          </p:cNvPr>
+          <p:cNvSpPr>
+            <a:spLocks xmlns:a="http://schemas.openxmlformats.org/drawingml/2006/main" noGrp="1"/>
+          </p:cNvSpPr>
+          <p:nvPr/>
+        </p:nvSpPr>
+        <p:spPr>
+          <a:xfrm xmlns:a="http://schemas.openxmlformats.org/drawingml/2006/main">
+            <a:off x="5981700" y="1924050"/>
+            <a:ext cx="5495925" cy="1333500"/>
           </a:xfrm>
           <a:prstGeom xmlns:a="http://schemas.openxmlformats.org/drawingml/2006/main" prst="roundRect">
             <a:avLst>
-              <a:gd name="adj" fmla="val 5618"/>
+              <a:gd name="adj" fmla="val 7143"/>
             </a:avLst>
           </a:prstGeom>
           <a:solidFill xmlns:a="http://schemas.openxmlformats.org/drawingml/2006/main">
@@ -12813,22 +13487,22 @@
       </p:sp>
       <p:sp>
         <p:nvSpPr>
-          <p:cNvPr id="15" name="">
-            <a:extLst xmlns:a="http://schemas.openxmlformats.org/drawingml/2006/main">
-              <a:ext uri="{FF2B5EF4-FFF2-40B4-BE49-F238E27FC236}">
-                <a16:creationId xmlns:a16="http://schemas.microsoft.com/office/drawing/2014/main" id="{0BE07E21-0A9D-450F-95DA-70CAD47F6B4B}"/>
-              </a:ext>
-            </a:extLst>
-          </p:cNvPr>
-          <p:cNvSpPr>
-            <a:spLocks xmlns:a="http://schemas.openxmlformats.org/drawingml/2006/main" noGrp="1"/>
-          </p:cNvSpPr>
-          <p:nvPr/>
-        </p:nvSpPr>
-        <p:spPr>
-          <a:xfrm xmlns:a="http://schemas.openxmlformats.org/drawingml/2006/main">
-            <a:off x="6391275" y="2171700"/>
-            <a:ext cx="4867275" cy="1371600"/>
+          <p:cNvPr id="14" name="">
+            <a:extLst xmlns:a="http://schemas.openxmlformats.org/drawingml/2006/main">
+              <a:ext uri="{FF2B5EF4-FFF2-40B4-BE49-F238E27FC236}">
+                <a16:creationId xmlns:a16="http://schemas.microsoft.com/office/drawing/2014/main" id="{35FEB4B4-609F-4D62-94F6-8B00F6917D75}"/>
+              </a:ext>
+            </a:extLst>
+          </p:cNvPr>
+          <p:cNvSpPr>
+            <a:spLocks xmlns:a="http://schemas.openxmlformats.org/drawingml/2006/main" noGrp="1"/>
+          </p:cNvSpPr>
+          <p:nvPr/>
+        </p:nvSpPr>
+        <p:spPr>
+          <a:xfrm xmlns:a="http://schemas.openxmlformats.org/drawingml/2006/main">
+            <a:off x="6191250" y="2085975"/>
+            <a:ext cx="5076825" cy="1009650"/>
           </a:xfrm>
           <a:prstGeom xmlns:a="http://schemas.openxmlformats.org/drawingml/2006/main" prst="rect">
             <a:avLst/>
@@ -12843,7 +13517,7 @@
           <a:bodyPr xmlns:a="http://schemas.openxmlformats.org/drawingml/2006/main" lIns="0" tIns="0" rIns="0" bIns="0"/>
           <a:lstStyle xmlns:a="http://schemas.openxmlformats.org/drawingml/2006/main">
             <a:defPPr>
-              <a:defRPr sz="1575" b="0">
+              <a:defRPr sz="1350" b="0">
                 <a:solidFill>
                   <a:srgbClr val="F6F8FC"/>
                 </a:solidFill>
@@ -12855,98 +13529,116 @@
           </a:lstStyle>
           <a:p xmlns:a="http://schemas.openxmlformats.org/drawingml/2006/main">
             <a:pPr>
-              <a:defRPr sz="1575" b="0">
-                <a:solidFill>
-                  <a:srgbClr val="F6F8FC"/>
-                </a:solidFill>
-                <a:latin typeface="Consolas"/>
-                <a:ea typeface="Consolas"/>
-                <a:cs typeface="Consolas"/>
-              </a:defRPr>
-            </a:pPr>
-            <a:r>
-              <a:rPr sz="1575" b="0">
-                <a:solidFill>
-                  <a:srgbClr val="F6F8FC"/>
-                </a:solidFill>
-                <a:latin typeface="Consolas"/>
-                <a:ea typeface="Consolas"/>
-                <a:cs typeface="Consolas"/>
-              </a:rPr>
-              <a:t>READ divisor</a:t>
-            </a:r>
-          </a:p>
-          <a:p xmlns:a="http://schemas.openxmlformats.org/drawingml/2006/main">
-            <a:pPr>
-              <a:defRPr sz="1575" b="0">
-                <a:solidFill>
-                  <a:srgbClr val="F6F8FC"/>
-                </a:solidFill>
-                <a:latin typeface="Consolas"/>
-                <a:ea typeface="Consolas"/>
-                <a:cs typeface="Consolas"/>
-              </a:defRPr>
-            </a:pPr>
-            <a:r>
-              <a:rPr sz="1575" b="0">
-                <a:solidFill>
-                  <a:srgbClr val="F6F8FC"/>
-                </a:solidFill>
-                <a:latin typeface="Consolas"/>
-                <a:ea typeface="Consolas"/>
-                <a:cs typeface="Consolas"/>
-              </a:rPr>
-              <a:t>PRINT 10 / divisor</a:t>
-            </a:r>
-          </a:p>
-          <a:p xmlns:a="http://schemas.openxmlformats.org/drawingml/2006/main">
-            <a:r>
-              <a:t/>
-            </a:r>
-          </a:p>
-          <a:p xmlns:a="http://schemas.openxmlformats.org/drawingml/2006/main">
-            <a:pPr>
-              <a:defRPr sz="1575" b="0">
-                <a:solidFill>
-                  <a:srgbClr val="F6F8FC"/>
-                </a:solidFill>
-                <a:latin typeface="Consolas"/>
-                <a:ea typeface="Consolas"/>
-                <a:cs typeface="Consolas"/>
-              </a:defRPr>
-            </a:pPr>
-            <a:r>
-              <a:rPr sz="1575" b="0">
-                <a:solidFill>
-                  <a:srgbClr val="F6F8FC"/>
-                </a:solidFill>
-                <a:latin typeface="Consolas"/>
-                <a:ea typeface="Consolas"/>
-                <a:cs typeface="Consolas"/>
-              </a:rPr>
-              <a:t>Input: 0</a:t>
+              <a:defRPr sz="1350" b="0">
+                <a:solidFill>
+                  <a:srgbClr val="F6F8FC"/>
+                </a:solidFill>
+                <a:latin typeface="Consolas"/>
+                <a:ea typeface="Consolas"/>
+                <a:cs typeface="Consolas"/>
+              </a:defRPr>
+            </a:pPr>
+            <a:r>
+              <a:rPr sz="1350" b="0">
+                <a:solidFill>
+                  <a:srgbClr val="F6F8FC"/>
+                </a:solidFill>
+                <a:latin typeface="Consolas"/>
+                <a:ea typeface="Consolas"/>
+                <a:cs typeface="Consolas"/>
+              </a:rPr>
+              <a:t>name = "Mira"</a:t>
+            </a:r>
+          </a:p>
+          <a:p xmlns:a="http://schemas.openxmlformats.org/drawingml/2006/main">
+            <a:pPr>
+              <a:defRPr sz="1350" b="0">
+                <a:solidFill>
+                  <a:srgbClr val="F6F8FC"/>
+                </a:solidFill>
+                <a:latin typeface="Consolas"/>
+                <a:ea typeface="Consolas"/>
+                <a:cs typeface="Consolas"/>
+              </a:defRPr>
+            </a:pPr>
+            <a:r>
+              <a:rPr sz="1350" b="0">
+                <a:solidFill>
+                  <a:srgbClr val="F6F8FC"/>
+                </a:solidFill>
+                <a:latin typeface="Consolas"/>
+                <a:ea typeface="Consolas"/>
+                <a:cs typeface="Consolas"/>
+              </a:rPr>
+              <a:t>READ bits</a:t>
+            </a:r>
+          </a:p>
+          <a:p xmlns:a="http://schemas.openxmlformats.org/drawingml/2006/main">
+            <a:pPr>
+              <a:defRPr sz="1350" b="0">
+                <a:solidFill>
+                  <a:srgbClr val="F6F8FC"/>
+                </a:solidFill>
+                <a:latin typeface="Consolas"/>
+                <a:ea typeface="Consolas"/>
+                <a:cs typeface="Consolas"/>
+              </a:defRPr>
+            </a:pPr>
+            <a:r>
+              <a:rPr sz="1350" b="0">
+                <a:solidFill>
+                  <a:srgbClr val="F6F8FC"/>
+                </a:solidFill>
+                <a:latin typeface="Consolas"/>
+                <a:ea typeface="Consolas"/>
+                <a:cs typeface="Consolas"/>
+              </a:rPr>
+              <a:t>t1 = bits &amp; 3</a:t>
+            </a:r>
+          </a:p>
+          <a:p xmlns:a="http://schemas.openxmlformats.org/drawingml/2006/main">
+            <a:pPr>
+              <a:defRPr sz="1350" b="0">
+                <a:solidFill>
+                  <a:srgbClr val="F6F8FC"/>
+                </a:solidFill>
+                <a:latin typeface="Consolas"/>
+                <a:ea typeface="Consolas"/>
+                <a:cs typeface="Consolas"/>
+              </a:defRPr>
+            </a:pPr>
+            <a:r>
+              <a:rPr sz="1350" b="0">
+                <a:solidFill>
+                  <a:srgbClr val="F6F8FC"/>
+                </a:solidFill>
+                <a:latin typeface="Consolas"/>
+                <a:ea typeface="Consolas"/>
+                <a:cs typeface="Consolas"/>
+              </a:rPr>
+              <a:t>bits = t1</a:t>
             </a:r>
           </a:p>
         </p:txBody>
       </p:sp>
       <p:sp>
         <p:nvSpPr>
-          <p:cNvPr id="16" name="">
-            <a:extLst xmlns:a="http://schemas.openxmlformats.org/drawingml/2006/main">
-              <a:ext uri="{FF2B5EF4-FFF2-40B4-BE49-F238E27FC236}">
-                <a16:creationId xmlns:a16="http://schemas.microsoft.com/office/drawing/2014/main" id="{7FB3607B-8CC5-481C-8060-0882335A27EB}"/>
-              </a:ext>
-            </a:extLst>
-          </p:cNvPr>
-          <p:cNvSpPr>
-            <a:spLocks xmlns:a="http://schemas.openxmlformats.org/drawingml/2006/main" noGrp="1"/>
-          </p:cNvSpPr>
-          <p:nvPr/>
-        </p:nvSpPr>
-        <p:spPr>
-          <a:xfrm xmlns:a="http://schemas.openxmlformats.org/drawingml/2006/main">
-            <a:off x="6210300" y="3886200"/>
-            <a:ext cx="5191125" cy="857250"/>
+          <p:cNvPr id="15" name="">
+            <a:extLst xmlns:a="http://schemas.openxmlformats.org/drawingml/2006/main">
+              <a:ext uri="{FF2B5EF4-FFF2-40B4-BE49-F238E27FC236}">
+                <a16:creationId xmlns:a16="http://schemas.microsoft.com/office/drawing/2014/main" id="{0E28BE76-A7D9-4ABF-B46D-83820C17B61F}"/>
+              </a:ext>
+            </a:extLst>
+          </p:cNvPr>
+          <p:cNvSpPr>
+            <a:spLocks xmlns:a="http://schemas.openxmlformats.org/drawingml/2006/main" noGrp="1"/>
+          </p:cNvSpPr>
+          <p:nvPr/>
+        </p:nvSpPr>
+        <p:spPr>
+          <a:xfrm xmlns:a="http://schemas.openxmlformats.org/drawingml/2006/main">
+            <a:off x="5991225" y="3419475"/>
+            <a:ext cx="5486400" cy="285750"/>
           </a:xfrm>
           <a:prstGeom xmlns:a="http://schemas.openxmlformats.org/drawingml/2006/main" prst="rect">
             <a:avLst/>
@@ -12961,9 +13653,9 @@
           <a:bodyPr xmlns:a="http://schemas.openxmlformats.org/drawingml/2006/main" lIns="0" tIns="0" rIns="0" bIns="0"/>
           <a:lstStyle xmlns:a="http://schemas.openxmlformats.org/drawingml/2006/main">
             <a:defPPr>
-              <a:defRPr sz="1575" b="0">
-                <a:solidFill>
-                  <a:srgbClr val="F6F8FC"/>
+              <a:defRPr sz="1350" b="1">
+                <a:solidFill>
+                  <a:srgbClr val="33D69B"/>
                 </a:solidFill>
                 <a:latin typeface="Arial"/>
                 <a:ea typeface="Arial"/>
@@ -12973,53 +13665,86 @@
           </a:lstStyle>
           <a:p xmlns:a="http://schemas.openxmlformats.org/drawingml/2006/main">
             <a:pPr>
-              <a:defRPr sz="1575" b="0">
-                <a:solidFill>
-                  <a:srgbClr val="F6F8FC"/>
-                </a:solidFill>
-                <a:latin typeface="Arial"/>
-                <a:ea typeface="Arial"/>
-                <a:cs typeface="Arial"/>
-              </a:defRPr>
-            </a:pPr>
-            <a:r>
-              <a:rPr sz="1575" b="0">
-                <a:solidFill>
-                  <a:srgbClr val="F6F8FC"/>
-                </a:solidFill>
-                <a:latin typeface="Arial"/>
-                <a:ea typeface="Arial"/>
-                <a:cs typeface="Arial"/>
-              </a:rPr>
-              <a:t>Inserted divisor check reports the pseudocode line.</a:t>
+              <a:defRPr sz="1350" b="1">
+                <a:solidFill>
+                  <a:srgbClr val="33D69B"/>
+                </a:solidFill>
+                <a:latin typeface="Arial"/>
+                <a:ea typeface="Arial"/>
+                <a:cs typeface="Arial"/>
+              </a:defRPr>
+            </a:pPr>
+            <a:r>
+              <a:rPr sz="1350" b="1">
+                <a:solidFill>
+                  <a:srgbClr val="33D69B"/>
+                </a:solidFill>
+                <a:latin typeface="Arial"/>
+                <a:ea typeface="Arial"/>
+                <a:cs typeface="Arial"/>
+              </a:rPr>
+              <a:t>GENERATED C CORE</a:t>
             </a:r>
           </a:p>
         </p:txBody>
       </p:sp>
       <p:sp>
         <p:nvSpPr>
+          <p:cNvPr id="16" name="">
+            <a:extLst xmlns:a="http://schemas.openxmlformats.org/drawingml/2006/main">
+              <a:ext uri="{FF2B5EF4-FFF2-40B4-BE49-F238E27FC236}">
+                <a16:creationId xmlns:a16="http://schemas.microsoft.com/office/drawing/2014/main" id="{5AEF979F-400C-49E6-AC9B-B7BA79EF0E93}"/>
+              </a:ext>
+            </a:extLst>
+          </p:cNvPr>
+          <p:cNvSpPr>
+            <a:spLocks xmlns:a="http://schemas.openxmlformats.org/drawingml/2006/main" noGrp="1"/>
+          </p:cNvSpPr>
+          <p:nvPr/>
+        </p:nvSpPr>
+        <p:spPr>
+          <a:xfrm xmlns:a="http://schemas.openxmlformats.org/drawingml/2006/main">
+            <a:off x="5991225" y="3762375"/>
+            <a:ext cx="5486400" cy="19050"/>
+          </a:xfrm>
+          <a:prstGeom xmlns:a="http://schemas.openxmlformats.org/drawingml/2006/main" prst="rect">
+            <a:avLst/>
+          </a:prstGeom>
+          <a:solidFill xmlns:a="http://schemas.openxmlformats.org/drawingml/2006/main">
+            <a:srgbClr val="33D69B"/>
+          </a:solidFill>
+          <a:ln xmlns:a="http://schemas.openxmlformats.org/drawingml/2006/main" w="0">
+            <a:noFill/>
+            <a:prstDash val="solid"/>
+          </a:ln>
+        </p:spPr>
+      </p:sp>
+      <p:sp>
+        <p:nvSpPr>
           <p:cNvPr id="17" name="">
             <a:extLst xmlns:a="http://schemas.openxmlformats.org/drawingml/2006/main">
               <a:ext uri="{FF2B5EF4-FFF2-40B4-BE49-F238E27FC236}">
-                <a16:creationId xmlns:a16="http://schemas.microsoft.com/office/drawing/2014/main" id="{497A03CD-6E72-46D8-8C4C-0257AACF47F3}"/>
-              </a:ext>
-            </a:extLst>
-          </p:cNvPr>
-          <p:cNvSpPr>
-            <a:spLocks xmlns:a="http://schemas.openxmlformats.org/drawingml/2006/main" noGrp="1"/>
-          </p:cNvSpPr>
-          <p:nvPr/>
-        </p:nvSpPr>
-        <p:spPr>
-          <a:xfrm xmlns:a="http://schemas.openxmlformats.org/drawingml/2006/main">
-            <a:off x="628650" y="5048250"/>
-            <a:ext cx="10839450" cy="19050"/>
-          </a:xfrm>
-          <a:prstGeom xmlns:a="http://schemas.openxmlformats.org/drawingml/2006/main" prst="rect">
-            <a:avLst/>
+                <a16:creationId xmlns:a16="http://schemas.microsoft.com/office/drawing/2014/main" id="{9D7481B7-230D-4B0A-B05B-E52D6C18C8CE}"/>
+              </a:ext>
+            </a:extLst>
+          </p:cNvPr>
+          <p:cNvSpPr>
+            <a:spLocks xmlns:a="http://schemas.openxmlformats.org/drawingml/2006/main" noGrp="1"/>
+          </p:cNvSpPr>
+          <p:nvPr/>
+        </p:nvSpPr>
+        <p:spPr>
+          <a:xfrm xmlns:a="http://schemas.openxmlformats.org/drawingml/2006/main">
+            <a:off x="5981700" y="3876675"/>
+            <a:ext cx="5495925" cy="1466850"/>
+          </a:xfrm>
+          <a:prstGeom xmlns:a="http://schemas.openxmlformats.org/drawingml/2006/main" prst="roundRect">
+            <a:avLst>
+              <a:gd name="adj" fmla="val 6494"/>
+            </a:avLst>
           </a:prstGeom>
           <a:solidFill xmlns:a="http://schemas.openxmlformats.org/drawingml/2006/main">
-            <a:srgbClr val="29405D"/>
+            <a:srgbClr val="101B2C"/>
           </a:solidFill>
           <a:ln xmlns:a="http://schemas.openxmlformats.org/drawingml/2006/main" w="0">
             <a:noFill/>
@@ -13032,19 +13757,19 @@
           <p:cNvPr id="18" name="">
             <a:extLst xmlns:a="http://schemas.openxmlformats.org/drawingml/2006/main">
               <a:ext uri="{FF2B5EF4-FFF2-40B4-BE49-F238E27FC236}">
-                <a16:creationId xmlns:a16="http://schemas.microsoft.com/office/drawing/2014/main" id="{5DABAE36-85D2-4A62-A6A7-0C423B35A966}"/>
-              </a:ext>
-            </a:extLst>
-          </p:cNvPr>
-          <p:cNvSpPr>
-            <a:spLocks xmlns:a="http://schemas.openxmlformats.org/drawingml/2006/main" noGrp="1"/>
-          </p:cNvSpPr>
-          <p:nvPr/>
-        </p:nvSpPr>
-        <p:spPr>
-          <a:xfrm xmlns:a="http://schemas.openxmlformats.org/drawingml/2006/main">
-            <a:off x="638175" y="5248275"/>
-            <a:ext cx="10810875" cy="609600"/>
+                <a16:creationId xmlns:a16="http://schemas.microsoft.com/office/drawing/2014/main" id="{A71A4C25-7E51-4542-AAB6-2CB95A5EB887}"/>
+              </a:ext>
+            </a:extLst>
+          </p:cNvPr>
+          <p:cNvSpPr>
+            <a:spLocks xmlns:a="http://schemas.openxmlformats.org/drawingml/2006/main" noGrp="1"/>
+          </p:cNvSpPr>
+          <p:nvPr/>
+        </p:nvSpPr>
+        <p:spPr>
+          <a:xfrm xmlns:a="http://schemas.openxmlformats.org/drawingml/2006/main">
+            <a:off x="6191250" y="4038600"/>
+            <a:ext cx="5076825" cy="1143000"/>
           </a:xfrm>
           <a:prstGeom xmlns:a="http://schemas.openxmlformats.org/drawingml/2006/main" prst="rect">
             <a:avLst/>
@@ -13059,37 +13784,196 @@
           <a:bodyPr xmlns:a="http://schemas.openxmlformats.org/drawingml/2006/main" lIns="0" tIns="0" rIns="0" bIns="0"/>
           <a:lstStyle xmlns:a="http://schemas.openxmlformats.org/drawingml/2006/main">
             <a:defPPr>
-              <a:defRPr sz="1650" b="1">
-                <a:solidFill>
-                  <a:srgbClr val="20D5EA"/>
-                </a:solidFill>
-                <a:latin typeface="Arial"/>
-                <a:ea typeface="Arial"/>
-                <a:cs typeface="Arial"/>
+              <a:defRPr sz="1275" b="0">
+                <a:solidFill>
+                  <a:srgbClr val="F6F8FC"/>
+                </a:solidFill>
+                <a:latin typeface="Consolas"/>
+                <a:ea typeface="Consolas"/>
+                <a:cs typeface="Consolas"/>
               </a:defRPr>
             </a:defPPr>
           </a:lstStyle>
           <a:p xmlns:a="http://schemas.openxmlformats.org/drawingml/2006/main">
             <a:pPr>
-              <a:defRPr sz="1650" b="1">
-                <a:solidFill>
-                  <a:srgbClr val="20D5EA"/>
-                </a:solidFill>
-                <a:latin typeface="Arial"/>
-                <a:ea typeface="Arial"/>
-                <a:cs typeface="Arial"/>
-              </a:defRPr>
-            </a:pPr>
-            <a:r>
-              <a:rPr sz="1650" b="1">
-                <a:solidFill>
-                  <a:srgbClr val="20D5EA"/>
-                </a:solidFill>
-                <a:latin typeface="Arial"/>
-                <a:ea typeface="Arial"/>
-                <a:cs typeface="Arial"/>
-              </a:rPr>
-              <a:t>Other checks: array bounds, invalid shifts and optional REQUIRE / ENSURE.</a:t>
+              <a:defRPr sz="1275" b="0">
+                <a:solidFill>
+                  <a:srgbClr val="F6F8FC"/>
+                </a:solidFill>
+                <a:latin typeface="Consolas"/>
+                <a:ea typeface="Consolas"/>
+                <a:cs typeface="Consolas"/>
+              </a:defRPr>
+            </a:pPr>
+            <a:r>
+              <a:rPr sz="1275" b="0">
+                <a:solidFill>
+                  <a:srgbClr val="F6F8FC"/>
+                </a:solidFill>
+                <a:latin typeface="Consolas"/>
+                <a:ea typeface="Consolas"/>
+                <a:cs typeface="Consolas"/>
+              </a:rPr>
+              <a:t>strcpy(name, "Mira");</a:t>
+            </a:r>
+          </a:p>
+          <a:p xmlns:a="http://schemas.openxmlformats.org/drawingml/2006/main">
+            <a:pPr>
+              <a:defRPr sz="1275" b="0">
+                <a:solidFill>
+                  <a:srgbClr val="F6F8FC"/>
+                </a:solidFill>
+                <a:latin typeface="Consolas"/>
+                <a:ea typeface="Consolas"/>
+                <a:cs typeface="Consolas"/>
+              </a:defRPr>
+            </a:pPr>
+            <a:r>
+              <a:rPr sz="1275" b="0">
+                <a:solidFill>
+                  <a:srgbClr val="F6F8FC"/>
+                </a:solidFill>
+                <a:latin typeface="Consolas"/>
+                <a:ea typeface="Consolas"/>
+                <a:cs typeface="Consolas"/>
+              </a:rPr>
+              <a:t>scanf("%d", &amp;bits);</a:t>
+            </a:r>
+          </a:p>
+          <a:p xmlns:a="http://schemas.openxmlformats.org/drawingml/2006/main">
+            <a:pPr>
+              <a:defRPr sz="1275" b="0">
+                <a:solidFill>
+                  <a:srgbClr val="F6F8FC"/>
+                </a:solidFill>
+                <a:latin typeface="Consolas"/>
+                <a:ea typeface="Consolas"/>
+                <a:cs typeface="Consolas"/>
+              </a:defRPr>
+            </a:pPr>
+            <a:r>
+              <a:rPr sz="1275" b="0">
+                <a:solidFill>
+                  <a:srgbClr val="F6F8FC"/>
+                </a:solidFill>
+                <a:latin typeface="Consolas"/>
+                <a:ea typeface="Consolas"/>
+                <a:cs typeface="Consolas"/>
+              </a:rPr>
+              <a:t>bits = (bits &amp; 3);</a:t>
+            </a:r>
+          </a:p>
+          <a:p xmlns:a="http://schemas.openxmlformats.org/drawingml/2006/main">
+            <a:pPr>
+              <a:defRPr sz="1275" b="0">
+                <a:solidFill>
+                  <a:srgbClr val="F6F8FC"/>
+                </a:solidFill>
+                <a:latin typeface="Consolas"/>
+                <a:ea typeface="Consolas"/>
+                <a:cs typeface="Consolas"/>
+              </a:defRPr>
+            </a:pPr>
+            <a:r>
+              <a:rPr sz="1275" b="0">
+                <a:solidFill>
+                  <a:srgbClr val="F6F8FC"/>
+                </a:solidFill>
+                <a:latin typeface="Consolas"/>
+                <a:ea typeface="Consolas"/>
+                <a:cs typeface="Consolas"/>
+              </a:rPr>
+              <a:t>printf("%s\n", name);</a:t>
+            </a:r>
+          </a:p>
+          <a:p xmlns:a="http://schemas.openxmlformats.org/drawingml/2006/main">
+            <a:pPr>
+              <a:defRPr sz="1275" b="0">
+                <a:solidFill>
+                  <a:srgbClr val="F6F8FC"/>
+                </a:solidFill>
+                <a:latin typeface="Consolas"/>
+                <a:ea typeface="Consolas"/>
+                <a:cs typeface="Consolas"/>
+              </a:defRPr>
+            </a:pPr>
+            <a:r>
+              <a:rPr sz="1275" b="0">
+                <a:solidFill>
+                  <a:srgbClr val="F6F8FC"/>
+                </a:solidFill>
+                <a:latin typeface="Consolas"/>
+                <a:ea typeface="Consolas"/>
+                <a:cs typeface="Consolas"/>
+              </a:rPr>
+              <a:t>printf("%d\n", bits);</a:t>
+            </a:r>
+          </a:p>
+        </p:txBody>
+      </p:sp>
+      <p:sp>
+        <p:nvSpPr>
+          <p:cNvPr id="19" name="">
+            <a:extLst xmlns:a="http://schemas.openxmlformats.org/drawingml/2006/main">
+              <a:ext uri="{FF2B5EF4-FFF2-40B4-BE49-F238E27FC236}">
+                <a16:creationId xmlns:a16="http://schemas.microsoft.com/office/drawing/2014/main" id="{424B9EE4-4941-47A8-B86B-66B543085502}"/>
+              </a:ext>
+            </a:extLst>
+          </p:cNvPr>
+          <p:cNvSpPr>
+            <a:spLocks xmlns:a="http://schemas.openxmlformats.org/drawingml/2006/main" noGrp="1"/>
+          </p:cNvSpPr>
+          <p:nvPr/>
+        </p:nvSpPr>
+        <p:spPr>
+          <a:xfrm xmlns:a="http://schemas.openxmlformats.org/drawingml/2006/main">
+            <a:off x="638175" y="5514975"/>
+            <a:ext cx="10839450" cy="466725"/>
+          </a:xfrm>
+          <a:prstGeom xmlns:a="http://schemas.openxmlformats.org/drawingml/2006/main" prst="rect">
+            <a:avLst/>
+          </a:prstGeom>
+          <a:noFill xmlns:a="http://schemas.openxmlformats.org/drawingml/2006/main"/>
+          <a:ln xmlns:a="http://schemas.openxmlformats.org/drawingml/2006/main" w="0">
+            <a:noFill/>
+            <a:prstDash val="solid"/>
+          </a:ln>
+        </p:spPr>
+        <p:txBody>
+          <a:bodyPr xmlns:a="http://schemas.openxmlformats.org/drawingml/2006/main" lIns="0" tIns="0" rIns="0" bIns="0"/>
+          <a:lstStyle xmlns:a="http://schemas.openxmlformats.org/drawingml/2006/main">
+            <a:defPPr>
+              <a:defRPr sz="1800" b="1">
+                <a:solidFill>
+                  <a:srgbClr val="33D69B"/>
+                </a:solidFill>
+                <a:latin typeface="Arial"/>
+                <a:ea typeface="Arial"/>
+                <a:cs typeface="Arial"/>
+              </a:defRPr>
+            </a:defPPr>
+          </a:lstStyle>
+          <a:p xmlns:a="http://schemas.openxmlformats.org/drawingml/2006/main">
+            <a:pPr>
+              <a:defRPr sz="1800" b="1">
+                <a:solidFill>
+                  <a:srgbClr val="33D69B"/>
+                </a:solidFill>
+                <a:latin typeface="Arial"/>
+                <a:ea typeface="Arial"/>
+                <a:cs typeface="Arial"/>
+              </a:defRPr>
+            </a:pPr>
+            <a:r>
+              <a:rPr sz="1800" b="1">
+                <a:solidFill>
+                  <a:srgbClr val="33D69B"/>
+                </a:solidFill>
+                <a:latin typeface="Arial"/>
+                <a:ea typeface="Arial"/>
+                <a:cs typeface="Arial"/>
+              </a:rPr>
+              <a:t>INPUT: 5     RESULT: Mira, then 1</a:t>
             </a:r>
           </a:p>
         </p:txBody>
@@ -13097,7 +13981,7 @@
     </p:spTree>
     <p:extLst>
       <p:ext uri="{BB962C8B-B14F-4D97-AF65-F5344CB8AC3E}">
-        <p14:creationId xmlns:p14="http://schemas.microsoft.com/office/powerpoint/2010/main" val="393484313"/>
+        <p14:creationId xmlns:p14="http://schemas.microsoft.com/office/powerpoint/2010/main" val="547599961"/>
       </p:ext>
     </p:extLst>
   </p:cSld>
@@ -13125,10 +14009,10 @@
       </p:grpSpPr>
       <p:sp>
         <p:nvSpPr>
-          <p:cNvPr id="17" name="">
-            <a:extLst xmlns:a="http://schemas.openxmlformats.org/drawingml/2006/main">
-              <a:ext uri="{FF2B5EF4-FFF2-40B4-BE49-F238E27FC236}">
-                <a16:creationId xmlns:a16="http://schemas.microsoft.com/office/drawing/2014/main" id="{F65F571F-D246-46F8-A03D-641EA8E97AED}"/>
+          <p:cNvPr id="20" name="">
+            <a:extLst xmlns:a="http://schemas.openxmlformats.org/drawingml/2006/main">
+              <a:ext uri="{FF2B5EF4-FFF2-40B4-BE49-F238E27FC236}">
+                <a16:creationId xmlns:a16="http://schemas.microsoft.com/office/drawing/2014/main" id="{5D4EE660-63C4-479C-8315-68F9EC638317}"/>
               </a:ext>
             </a:extLst>
           </p:cNvPr>
@@ -13159,7 +14043,7 @@
           <p:cNvPr id="2" name="">
             <a:extLst xmlns:a="http://schemas.openxmlformats.org/drawingml/2006/main">
               <a:ext uri="{FF2B5EF4-FFF2-40B4-BE49-F238E27FC236}">
-                <a16:creationId xmlns:a16="http://schemas.microsoft.com/office/drawing/2014/main" id="{27330140-70AE-4E1A-A992-18FF031D6B05}"/>
+                <a16:creationId xmlns:a16="http://schemas.microsoft.com/office/drawing/2014/main" id="{60F13424-B02B-4FDD-82E8-1A61C4B6E814}"/>
               </a:ext>
             </a:extLst>
           </p:cNvPr>
@@ -13216,7 +14100,7 @@
                 <a:ea typeface="Arial"/>
                 <a:cs typeface="Arial"/>
               </a:rPr>
-              <a:t>Project improvement and novelty</a:t>
+              <a:t>Example 4: automatic division check</a:t>
             </a:r>
           </a:p>
         </p:txBody>
@@ -13226,7 +14110,7 @@
           <p:cNvPr id="3" name="">
             <a:extLst xmlns:a="http://schemas.openxmlformats.org/drawingml/2006/main">
               <a:ext uri="{FF2B5EF4-FFF2-40B4-BE49-F238E27FC236}">
-                <a16:creationId xmlns:a16="http://schemas.microsoft.com/office/drawing/2014/main" id="{F21F95B6-304A-4F74-B665-C26D1C14CEC0}"/>
+                <a16:creationId xmlns:a16="http://schemas.microsoft.com/office/drawing/2014/main" id="{F96799A9-E2D7-48CB-BDFC-0923C3F796AE}"/>
               </a:ext>
             </a:extLst>
           </p:cNvPr>
@@ -13283,7 +14167,7 @@
                 <a:ea typeface="Arial"/>
                 <a:cs typeface="Arial"/>
               </a:rPr>
-              <a:t>A project-specific combination of readable translation, targeted guards and optimizer checking.</a:t>
+              <a:t>The source has no REQUIRE; the generated C guards the divisor.</a:t>
             </a:r>
           </a:p>
         </p:txBody>
@@ -13293,7 +14177,7 @@
           <p:cNvPr id="4" name="">
             <a:extLst xmlns:a="http://schemas.openxmlformats.org/drawingml/2006/main">
               <a:ext uri="{FF2B5EF4-FFF2-40B4-BE49-F238E27FC236}">
-                <a16:creationId xmlns:a16="http://schemas.microsoft.com/office/drawing/2014/main" id="{CF0BBA6B-B100-46EE-A2B7-4F87EF3B6615}"/>
+                <a16:creationId xmlns:a16="http://schemas.microsoft.com/office/drawing/2014/main" id="{C204CF0F-FAA6-4DA3-8E59-B29B307E2C68}"/>
               </a:ext>
             </a:extLst>
           </p:cNvPr>
@@ -13324,7 +14208,7 @@
           <p:cNvPr id="5" name="">
             <a:extLst xmlns:a="http://schemas.openxmlformats.org/drawingml/2006/main">
               <a:ext uri="{FF2B5EF4-FFF2-40B4-BE49-F238E27FC236}">
-                <a16:creationId xmlns:a16="http://schemas.microsoft.com/office/drawing/2014/main" id="{5CAA5E45-7270-4BE3-93D7-28F300E9D9EE}"/>
+                <a16:creationId xmlns:a16="http://schemas.microsoft.com/office/drawing/2014/main" id="{E70D5190-F3FD-428F-BF3D-78205F000923}"/>
               </a:ext>
             </a:extLst>
           </p:cNvPr>
@@ -13391,7 +14275,7 @@
           <p:cNvPr id="6" name="">
             <a:extLst xmlns:a="http://schemas.openxmlformats.org/drawingml/2006/main">
               <a:ext uri="{FF2B5EF4-FFF2-40B4-BE49-F238E27FC236}">
-                <a16:creationId xmlns:a16="http://schemas.microsoft.com/office/drawing/2014/main" id="{378C80E0-E0D1-4CE2-89CA-05FE250C5609}"/>
+                <a16:creationId xmlns:a16="http://schemas.microsoft.com/office/drawing/2014/main" id="{27663099-8080-4E21-B742-F3DE95A89EF1}"/>
               </a:ext>
             </a:extLst>
           </p:cNvPr>
@@ -13458,19 +14342,19 @@
           <p:cNvPr id="7" name="">
             <a:extLst xmlns:a="http://schemas.openxmlformats.org/drawingml/2006/main">
               <a:ext uri="{FF2B5EF4-FFF2-40B4-BE49-F238E27FC236}">
-                <a16:creationId xmlns:a16="http://schemas.microsoft.com/office/drawing/2014/main" id="{8B8C985B-9482-4AA2-A586-09419C869293}"/>
-              </a:ext>
-            </a:extLst>
-          </p:cNvPr>
-          <p:cNvSpPr>
-            <a:spLocks xmlns:a="http://schemas.openxmlformats.org/drawingml/2006/main" noGrp="1"/>
-          </p:cNvSpPr>
-          <p:nvPr/>
-        </p:nvSpPr>
-        <p:spPr>
-          <a:xfrm xmlns:a="http://schemas.openxmlformats.org/drawingml/2006/main">
-            <a:off x="628650" y="1562100"/>
-            <a:ext cx="5010150" cy="285750"/>
+                <a16:creationId xmlns:a16="http://schemas.microsoft.com/office/drawing/2014/main" id="{8A426F60-8CF4-4A57-9226-4A7E9DBA756B}"/>
+              </a:ext>
+            </a:extLst>
+          </p:cNvPr>
+          <p:cNvSpPr>
+            <a:spLocks xmlns:a="http://schemas.openxmlformats.org/drawingml/2006/main" noGrp="1"/>
+          </p:cNvSpPr>
+          <p:nvPr/>
+        </p:nvSpPr>
+        <p:spPr>
+          <a:xfrm xmlns:a="http://schemas.openxmlformats.org/drawingml/2006/main">
+            <a:off x="628650" y="1466850"/>
+            <a:ext cx="4905375" cy="285750"/>
           </a:xfrm>
           <a:prstGeom xmlns:a="http://schemas.openxmlformats.org/drawingml/2006/main" prst="rect">
             <a:avLst/>
@@ -13487,7 +14371,7 @@
             <a:defPPr>
               <a:defRPr sz="1350" b="1">
                 <a:solidFill>
-                  <a:srgbClr val="33D69B"/>
+                  <a:srgbClr val="20D5EA"/>
                 </a:solidFill>
                 <a:latin typeface="Arial"/>
                 <a:ea typeface="Arial"/>
@@ -13499,7 +14383,7 @@
             <a:pPr>
               <a:defRPr sz="1350" b="1">
                 <a:solidFill>
-                  <a:srgbClr val="33D69B"/>
+                  <a:srgbClr val="20D5EA"/>
                 </a:solidFill>
                 <a:latin typeface="Arial"/>
                 <a:ea typeface="Arial"/>
@@ -13509,13 +14393,13 @@
             <a:r>
               <a:rPr sz="1350" b="1">
                 <a:solidFill>
-                  <a:srgbClr val="33D69B"/>
-                </a:solidFill>
-                <a:latin typeface="Arial"/>
-                <a:ea typeface="Arial"/>
-                <a:cs typeface="Arial"/>
-              </a:rPr>
-              <a:t>OPERATION-AWARE GUARDS</a:t>
+                  <a:srgbClr val="20D5EA"/>
+                </a:solidFill>
+                <a:latin typeface="Arial"/>
+                <a:ea typeface="Arial"/>
+                <a:cs typeface="Arial"/>
+              </a:rPr>
+              <a:t>PSEUDOCODE</a:t>
             </a:r>
           </a:p>
         </p:txBody>
@@ -13525,25 +14409,25 @@
           <p:cNvPr id="8" name="">
             <a:extLst xmlns:a="http://schemas.openxmlformats.org/drawingml/2006/main">
               <a:ext uri="{FF2B5EF4-FFF2-40B4-BE49-F238E27FC236}">
-                <a16:creationId xmlns:a16="http://schemas.microsoft.com/office/drawing/2014/main" id="{051D0C86-DD80-4BE2-9E65-DA74BE764C47}"/>
-              </a:ext>
-            </a:extLst>
-          </p:cNvPr>
-          <p:cNvSpPr>
-            <a:spLocks xmlns:a="http://schemas.openxmlformats.org/drawingml/2006/main" noGrp="1"/>
-          </p:cNvSpPr>
-          <p:nvPr/>
-        </p:nvSpPr>
-        <p:spPr>
-          <a:xfrm xmlns:a="http://schemas.openxmlformats.org/drawingml/2006/main">
-            <a:off x="628650" y="1905000"/>
-            <a:ext cx="5010150" cy="19050"/>
+                <a16:creationId xmlns:a16="http://schemas.microsoft.com/office/drawing/2014/main" id="{723BDF3B-C97C-44DE-8F6C-DD8E54C9A7CF}"/>
+              </a:ext>
+            </a:extLst>
+          </p:cNvPr>
+          <p:cNvSpPr>
+            <a:spLocks xmlns:a="http://schemas.openxmlformats.org/drawingml/2006/main" noGrp="1"/>
+          </p:cNvSpPr>
+          <p:nvPr/>
+        </p:nvSpPr>
+        <p:spPr>
+          <a:xfrm xmlns:a="http://schemas.openxmlformats.org/drawingml/2006/main">
+            <a:off x="628650" y="1809750"/>
+            <a:ext cx="4905375" cy="19050"/>
           </a:xfrm>
           <a:prstGeom xmlns:a="http://schemas.openxmlformats.org/drawingml/2006/main" prst="rect">
             <a:avLst/>
           </a:prstGeom>
           <a:solidFill xmlns:a="http://schemas.openxmlformats.org/drawingml/2006/main">
-            <a:srgbClr val="33D69B"/>
+            <a:srgbClr val="20D5EA"/>
           </a:solidFill>
           <a:ln xmlns:a="http://schemas.openxmlformats.org/drawingml/2006/main" w="0">
             <a:noFill/>
@@ -13556,23 +14440,23 @@
           <p:cNvPr id="9" name="">
             <a:extLst xmlns:a="http://schemas.openxmlformats.org/drawingml/2006/main">
               <a:ext uri="{FF2B5EF4-FFF2-40B4-BE49-F238E27FC236}">
-                <a16:creationId xmlns:a16="http://schemas.microsoft.com/office/drawing/2014/main" id="{20769ECC-4727-4F63-B400-8379D8C91F51}"/>
-              </a:ext>
-            </a:extLst>
-          </p:cNvPr>
-          <p:cNvSpPr>
-            <a:spLocks xmlns:a="http://schemas.openxmlformats.org/drawingml/2006/main" noGrp="1"/>
-          </p:cNvSpPr>
-          <p:nvPr/>
-        </p:nvSpPr>
-        <p:spPr>
-          <a:xfrm xmlns:a="http://schemas.openxmlformats.org/drawingml/2006/main">
-            <a:off x="619125" y="2038350"/>
-            <a:ext cx="5019675" cy="1657350"/>
+                <a16:creationId xmlns:a16="http://schemas.microsoft.com/office/drawing/2014/main" id="{80D7C96E-5E63-4959-A1E6-353445B7621D}"/>
+              </a:ext>
+            </a:extLst>
+          </p:cNvPr>
+          <p:cNvSpPr>
+            <a:spLocks xmlns:a="http://schemas.openxmlformats.org/drawingml/2006/main" noGrp="1"/>
+          </p:cNvSpPr>
+          <p:nvPr/>
+        </p:nvSpPr>
+        <p:spPr>
+          <a:xfrm xmlns:a="http://schemas.openxmlformats.org/drawingml/2006/main">
+            <a:off x="619125" y="1924050"/>
+            <a:ext cx="4914900" cy="3219450"/>
           </a:xfrm>
           <a:prstGeom xmlns:a="http://schemas.openxmlformats.org/drawingml/2006/main" prst="roundRect">
             <a:avLst>
-              <a:gd name="adj" fmla="val 5747"/>
+              <a:gd name="adj" fmla="val 2959"/>
             </a:avLst>
           </a:prstGeom>
           <a:solidFill xmlns:a="http://schemas.openxmlformats.org/drawingml/2006/main">
@@ -13589,19 +14473,19 @@
           <p:cNvPr id="10" name="">
             <a:extLst xmlns:a="http://schemas.openxmlformats.org/drawingml/2006/main">
               <a:ext uri="{FF2B5EF4-FFF2-40B4-BE49-F238E27FC236}">
-                <a16:creationId xmlns:a16="http://schemas.microsoft.com/office/drawing/2014/main" id="{3A2F1C2E-8F5E-4ABA-97ED-8B33D6441428}"/>
-              </a:ext>
-            </a:extLst>
-          </p:cNvPr>
-          <p:cNvSpPr>
-            <a:spLocks xmlns:a="http://schemas.openxmlformats.org/drawingml/2006/main" noGrp="1"/>
-          </p:cNvSpPr>
-          <p:nvPr/>
-        </p:nvSpPr>
-        <p:spPr>
-          <a:xfrm xmlns:a="http://schemas.openxmlformats.org/drawingml/2006/main">
-            <a:off x="828675" y="2200275"/>
-            <a:ext cx="4600575" cy="1333500"/>
+                <a16:creationId xmlns:a16="http://schemas.microsoft.com/office/drawing/2014/main" id="{0EEF2254-4D78-412A-9AA3-6221B5ACAE24}"/>
+              </a:ext>
+            </a:extLst>
+          </p:cNvPr>
+          <p:cNvSpPr>
+            <a:spLocks xmlns:a="http://schemas.openxmlformats.org/drawingml/2006/main" noGrp="1"/>
+          </p:cNvSpPr>
+          <p:nvPr/>
+        </p:nvSpPr>
+        <p:spPr>
+          <a:xfrm xmlns:a="http://schemas.openxmlformats.org/drawingml/2006/main">
+            <a:off x="828675" y="2085975"/>
+            <a:ext cx="4495800" cy="2895600"/>
           </a:xfrm>
           <a:prstGeom xmlns:a="http://schemas.openxmlformats.org/drawingml/2006/main" prst="rect">
             <a:avLst/>
@@ -13616,7 +14500,7 @@
           <a:bodyPr xmlns:a="http://schemas.openxmlformats.org/drawingml/2006/main" lIns="0" tIns="0" rIns="0" bIns="0"/>
           <a:lstStyle xmlns:a="http://schemas.openxmlformats.org/drawingml/2006/main">
             <a:defPPr>
-              <a:defRPr sz="1650" b="0">
+              <a:defRPr sz="1350" b="0">
                 <a:solidFill>
                   <a:srgbClr val="F6F8FC"/>
                 </a:solidFill>
@@ -13628,17 +14512,86 @@
           </a:lstStyle>
           <a:p xmlns:a="http://schemas.openxmlformats.org/drawingml/2006/main">
             <a:pPr>
-              <a:defRPr sz="1650" b="0">
-                <a:solidFill>
-                  <a:srgbClr val="F6F8FC"/>
-                </a:solidFill>
-                <a:latin typeface="Consolas"/>
-                <a:ea typeface="Consolas"/>
-                <a:cs typeface="Consolas"/>
-              </a:defRPr>
-            </a:pPr>
-            <a:r>
-              <a:rPr sz="1650" b="0">
+              <a:defRPr sz="1350" b="0">
+                <a:solidFill>
+                  <a:srgbClr val="F6F8FC"/>
+                </a:solidFill>
+                <a:latin typeface="Consolas"/>
+                <a:ea typeface="Consolas"/>
+                <a:cs typeface="Consolas"/>
+              </a:defRPr>
+            </a:pPr>
+            <a:r>
+              <a:rPr sz="1350" b="0">
+                <a:solidFill>
+                  <a:srgbClr val="F6F8FC"/>
+                </a:solidFill>
+                <a:latin typeface="Consolas"/>
+                <a:ea typeface="Consolas"/>
+                <a:cs typeface="Consolas"/>
+              </a:rPr>
+              <a:t>BEGIN</a:t>
+            </a:r>
+          </a:p>
+          <a:p xmlns:a="http://schemas.openxmlformats.org/drawingml/2006/main">
+            <a:pPr>
+              <a:defRPr sz="1350" b="0">
+                <a:solidFill>
+                  <a:srgbClr val="F6F8FC"/>
+                </a:solidFill>
+                <a:latin typeface="Consolas"/>
+                <a:ea typeface="Consolas"/>
+                <a:cs typeface="Consolas"/>
+              </a:defRPr>
+            </a:pPr>
+            <a:r>
+              <a:rPr sz="1350" b="0">
+                <a:solidFill>
+                  <a:srgbClr val="F6F8FC"/>
+                </a:solidFill>
+                <a:latin typeface="Consolas"/>
+                <a:ea typeface="Consolas"/>
+                <a:cs typeface="Consolas"/>
+              </a:rPr>
+              <a:t>DECLARE dividend AS INTEGER</a:t>
+            </a:r>
+          </a:p>
+          <a:p xmlns:a="http://schemas.openxmlformats.org/drawingml/2006/main">
+            <a:pPr>
+              <a:defRPr sz="1350" b="0">
+                <a:solidFill>
+                  <a:srgbClr val="F6F8FC"/>
+                </a:solidFill>
+                <a:latin typeface="Consolas"/>
+                <a:ea typeface="Consolas"/>
+                <a:cs typeface="Consolas"/>
+              </a:defRPr>
+            </a:pPr>
+            <a:r>
+              <a:rPr sz="1350" b="0">
+                <a:solidFill>
+                  <a:srgbClr val="F6F8FC"/>
+                </a:solidFill>
+                <a:latin typeface="Consolas"/>
+                <a:ea typeface="Consolas"/>
+                <a:cs typeface="Consolas"/>
+              </a:rPr>
+              <a:t>DECLARE divisor AS INTEGER</a:t>
+            </a:r>
+          </a:p>
+          <a:p xmlns:a="http://schemas.openxmlformats.org/drawingml/2006/main">
+            <a:pPr>
+              <a:defRPr sz="1350" b="0">
+                <a:solidFill>
+                  <a:srgbClr val="F6F8FC"/>
+                </a:solidFill>
+                <a:latin typeface="Consolas"/>
+                <a:ea typeface="Consolas"/>
+                <a:cs typeface="Consolas"/>
+              </a:defRPr>
+            </a:pPr>
+            <a:r>
+              <a:rPr sz="1350" b="0">
                 <a:solidFill>
                   <a:srgbClr val="F6F8FC"/>
                 </a:solidFill>
@@ -13651,17 +14604,17 @@
           </a:p>
           <a:p xmlns:a="http://schemas.openxmlformats.org/drawingml/2006/main">
             <a:pPr>
-              <a:defRPr sz="1650" b="0">
-                <a:solidFill>
-                  <a:srgbClr val="F6F8FC"/>
-                </a:solidFill>
-                <a:latin typeface="Consolas"/>
-                <a:ea typeface="Consolas"/>
-                <a:cs typeface="Consolas"/>
-              </a:defRPr>
-            </a:pPr>
-            <a:r>
-              <a:rPr sz="1650" b="0">
+              <a:defRPr sz="1350" b="0">
+                <a:solidFill>
+                  <a:srgbClr val="F6F8FC"/>
+                </a:solidFill>
+                <a:latin typeface="Consolas"/>
+                <a:ea typeface="Consolas"/>
+                <a:cs typeface="Consolas"/>
+              </a:defRPr>
+            </a:pPr>
+            <a:r>
+              <a:rPr sz="1350" b="0">
                 <a:solidFill>
                   <a:srgbClr val="F6F8FC"/>
                 </a:solidFill>
@@ -13674,17 +14627,17 @@
           </a:p>
           <a:p xmlns:a="http://schemas.openxmlformats.org/drawingml/2006/main">
             <a:pPr>
-              <a:defRPr sz="1650" b="0">
-                <a:solidFill>
-                  <a:srgbClr val="F6F8FC"/>
-                </a:solidFill>
-                <a:latin typeface="Consolas"/>
-                <a:ea typeface="Consolas"/>
-                <a:cs typeface="Consolas"/>
-              </a:defRPr>
-            </a:pPr>
-            <a:r>
-              <a:rPr sz="1650" b="0">
+              <a:defRPr sz="1350" b="0">
+                <a:solidFill>
+                  <a:srgbClr val="F6F8FC"/>
+                </a:solidFill>
+                <a:latin typeface="Consolas"/>
+                <a:ea typeface="Consolas"/>
+                <a:cs typeface="Consolas"/>
+              </a:defRPr>
+            </a:pPr>
+            <a:r>
+              <a:rPr sz="1350" b="0">
                 <a:solidFill>
                   <a:srgbClr val="F6F8FC"/>
                 </a:solidFill>
@@ -13695,6 +14648,29 @@
               <a:t>PRINT dividend / divisor</a:t>
             </a:r>
           </a:p>
+          <a:p xmlns:a="http://schemas.openxmlformats.org/drawingml/2006/main">
+            <a:pPr>
+              <a:defRPr sz="1350" b="0">
+                <a:solidFill>
+                  <a:srgbClr val="F6F8FC"/>
+                </a:solidFill>
+                <a:latin typeface="Consolas"/>
+                <a:ea typeface="Consolas"/>
+                <a:cs typeface="Consolas"/>
+              </a:defRPr>
+            </a:pPr>
+            <a:r>
+              <a:rPr sz="1350" b="0">
+                <a:solidFill>
+                  <a:srgbClr val="F6F8FC"/>
+                </a:solidFill>
+                <a:latin typeface="Consolas"/>
+                <a:ea typeface="Consolas"/>
+                <a:cs typeface="Consolas"/>
+              </a:rPr>
+              <a:t>END</a:t>
+            </a:r>
+          </a:p>
         </p:txBody>
       </p:sp>
       <p:sp>
@@ -13702,86 +14678,19 @@
           <p:cNvPr id="11" name="">
             <a:extLst xmlns:a="http://schemas.openxmlformats.org/drawingml/2006/main">
               <a:ext uri="{FF2B5EF4-FFF2-40B4-BE49-F238E27FC236}">
-                <a16:creationId xmlns:a16="http://schemas.microsoft.com/office/drawing/2014/main" id="{9C592A79-39E9-4B7D-9EAD-EE6320E71877}"/>
-              </a:ext>
-            </a:extLst>
-          </p:cNvPr>
-          <p:cNvSpPr>
-            <a:spLocks xmlns:a="http://schemas.openxmlformats.org/drawingml/2006/main" noGrp="1"/>
-          </p:cNvSpPr>
-          <p:nvPr/>
-        </p:nvSpPr>
-        <p:spPr>
-          <a:xfrm xmlns:a="http://schemas.openxmlformats.org/drawingml/2006/main">
-            <a:off x="638175" y="3876675"/>
-            <a:ext cx="5000625" cy="1085850"/>
-          </a:xfrm>
-          <a:prstGeom xmlns:a="http://schemas.openxmlformats.org/drawingml/2006/main" prst="rect">
-            <a:avLst/>
-          </a:prstGeom>
-          <a:noFill xmlns:a="http://schemas.openxmlformats.org/drawingml/2006/main"/>
-          <a:ln xmlns:a="http://schemas.openxmlformats.org/drawingml/2006/main" w="0">
-            <a:noFill/>
-            <a:prstDash val="solid"/>
-          </a:ln>
-        </p:spPr>
-        <p:txBody>
-          <a:bodyPr xmlns:a="http://schemas.openxmlformats.org/drawingml/2006/main" lIns="0" tIns="0" rIns="0" bIns="0"/>
-          <a:lstStyle xmlns:a="http://schemas.openxmlformats.org/drawingml/2006/main">
-            <a:defPPr>
-              <a:defRPr sz="1650" b="0">
-                <a:solidFill>
-                  <a:srgbClr val="F6F8FC"/>
-                </a:solidFill>
-                <a:latin typeface="Arial"/>
-                <a:ea typeface="Arial"/>
-                <a:cs typeface="Arial"/>
-              </a:defRPr>
-            </a:defPPr>
-          </a:lstStyle>
-          <a:p xmlns:a="http://schemas.openxmlformats.org/drawingml/2006/main">
-            <a:pPr>
-              <a:defRPr sz="1650" b="0">
-                <a:solidFill>
-                  <a:srgbClr val="F6F8FC"/>
-                </a:solidFill>
-                <a:latin typeface="Arial"/>
-                <a:ea typeface="Arial"/>
-                <a:cs typeface="Arial"/>
-              </a:defRPr>
-            </a:pPr>
-            <a:r>
-              <a:rPr sz="1650" b="0">
-                <a:solidFill>
-                  <a:srgbClr val="F6F8FC"/>
-                </a:solidFill>
-                <a:latin typeface="Arial"/>
-                <a:ea typeface="Arial"/>
-                <a:cs typeface="Arial"/>
-              </a:rPr>
-              <a:t>The C generator adds a zero-divisor check even when no REQUIRE is written.</a:t>
-            </a:r>
-          </a:p>
-        </p:txBody>
-      </p:sp>
-      <p:sp>
-        <p:nvSpPr>
-          <p:cNvPr id="12" name="">
-            <a:extLst xmlns:a="http://schemas.openxmlformats.org/drawingml/2006/main">
-              <a:ext uri="{FF2B5EF4-FFF2-40B4-BE49-F238E27FC236}">
-                <a16:creationId xmlns:a16="http://schemas.microsoft.com/office/drawing/2014/main" id="{22F6BFA3-CC1B-4ED9-A3E2-1FB1B939C7C5}"/>
-              </a:ext>
-            </a:extLst>
-          </p:cNvPr>
-          <p:cNvSpPr>
-            <a:spLocks xmlns:a="http://schemas.openxmlformats.org/drawingml/2006/main" noGrp="1"/>
-          </p:cNvSpPr>
-          <p:nvPr/>
-        </p:nvSpPr>
-        <p:spPr>
-          <a:xfrm xmlns:a="http://schemas.openxmlformats.org/drawingml/2006/main">
-            <a:off x="6191250" y="1562100"/>
-            <a:ext cx="5286375" cy="285750"/>
+                <a16:creationId xmlns:a16="http://schemas.microsoft.com/office/drawing/2014/main" id="{4D8B5293-5C18-4C8F-B858-3A538EE2F30E}"/>
+              </a:ext>
+            </a:extLst>
+          </p:cNvPr>
+          <p:cNvSpPr>
+            <a:spLocks xmlns:a="http://schemas.openxmlformats.org/drawingml/2006/main" noGrp="1"/>
+          </p:cNvSpPr>
+          <p:nvPr/>
+        </p:nvSpPr>
+        <p:spPr>
+          <a:xfrm xmlns:a="http://schemas.openxmlformats.org/drawingml/2006/main">
+            <a:off x="5991225" y="1466850"/>
+            <a:ext cx="5486400" cy="285750"/>
           </a:xfrm>
           <a:prstGeom xmlns:a="http://schemas.openxmlformats.org/drawingml/2006/main" prst="rect">
             <a:avLst/>
@@ -13798,7 +14707,7 @@
             <a:defPPr>
               <a:defRPr sz="1350" b="1">
                 <a:solidFill>
-                  <a:srgbClr val="20D5EA"/>
+                  <a:srgbClr val="4C82FF"/>
                 </a:solidFill>
                 <a:latin typeface="Arial"/>
                 <a:ea typeface="Arial"/>
@@ -13810,7 +14719,7 @@
             <a:pPr>
               <a:defRPr sz="1350" b="1">
                 <a:solidFill>
-                  <a:srgbClr val="20D5EA"/>
+                  <a:srgbClr val="4C82FF"/>
                 </a:solidFill>
                 <a:latin typeface="Arial"/>
                 <a:ea typeface="Arial"/>
@@ -13820,41 +14729,74 @@
             <a:r>
               <a:rPr sz="1350" b="1">
                 <a:solidFill>
-                  <a:srgbClr val="20D5EA"/>
-                </a:solidFill>
-                <a:latin typeface="Arial"/>
-                <a:ea typeface="Arial"/>
-                <a:cs typeface="Arial"/>
-              </a:rPr>
-              <a:t>OPTIMIZER COMPARISON</a:t>
+                  <a:srgbClr val="4C82FF"/>
+                </a:solidFill>
+                <a:latin typeface="Arial"/>
+                <a:ea typeface="Arial"/>
+                <a:cs typeface="Arial"/>
+              </a:rPr>
+              <a:t>KEY IR</a:t>
             </a:r>
           </a:p>
         </p:txBody>
       </p:sp>
       <p:sp>
         <p:nvSpPr>
+          <p:cNvPr id="12" name="">
+            <a:extLst xmlns:a="http://schemas.openxmlformats.org/drawingml/2006/main">
+              <a:ext uri="{FF2B5EF4-FFF2-40B4-BE49-F238E27FC236}">
+                <a16:creationId xmlns:a16="http://schemas.microsoft.com/office/drawing/2014/main" id="{7250870E-27ED-4BCB-9188-367273B32DD9}"/>
+              </a:ext>
+            </a:extLst>
+          </p:cNvPr>
+          <p:cNvSpPr>
+            <a:spLocks xmlns:a="http://schemas.openxmlformats.org/drawingml/2006/main" noGrp="1"/>
+          </p:cNvSpPr>
+          <p:nvPr/>
+        </p:nvSpPr>
+        <p:spPr>
+          <a:xfrm xmlns:a="http://schemas.openxmlformats.org/drawingml/2006/main">
+            <a:off x="5991225" y="1809750"/>
+            <a:ext cx="5486400" cy="19050"/>
+          </a:xfrm>
+          <a:prstGeom xmlns:a="http://schemas.openxmlformats.org/drawingml/2006/main" prst="rect">
+            <a:avLst/>
+          </a:prstGeom>
+          <a:solidFill xmlns:a="http://schemas.openxmlformats.org/drawingml/2006/main">
+            <a:srgbClr val="4C82FF"/>
+          </a:solidFill>
+          <a:ln xmlns:a="http://schemas.openxmlformats.org/drawingml/2006/main" w="0">
+            <a:noFill/>
+            <a:prstDash val="solid"/>
+          </a:ln>
+        </p:spPr>
+      </p:sp>
+      <p:sp>
+        <p:nvSpPr>
           <p:cNvPr id="13" name="">
             <a:extLst xmlns:a="http://schemas.openxmlformats.org/drawingml/2006/main">
               <a:ext uri="{FF2B5EF4-FFF2-40B4-BE49-F238E27FC236}">
-                <a16:creationId xmlns:a16="http://schemas.microsoft.com/office/drawing/2014/main" id="{4657361E-BA0A-4097-8A04-53CE25920C54}"/>
-              </a:ext>
-            </a:extLst>
-          </p:cNvPr>
-          <p:cNvSpPr>
-            <a:spLocks xmlns:a="http://schemas.openxmlformats.org/drawingml/2006/main" noGrp="1"/>
-          </p:cNvSpPr>
-          <p:nvPr/>
-        </p:nvSpPr>
-        <p:spPr>
-          <a:xfrm xmlns:a="http://schemas.openxmlformats.org/drawingml/2006/main">
-            <a:off x="6191250" y="1905000"/>
-            <a:ext cx="5286375" cy="19050"/>
-          </a:xfrm>
-          <a:prstGeom xmlns:a="http://schemas.openxmlformats.org/drawingml/2006/main" prst="rect">
-            <a:avLst/>
+                <a16:creationId xmlns:a16="http://schemas.microsoft.com/office/drawing/2014/main" id="{8D661BCA-BE99-4713-AAA2-EA4217231191}"/>
+              </a:ext>
+            </a:extLst>
+          </p:cNvPr>
+          <p:cNvSpPr>
+            <a:spLocks xmlns:a="http://schemas.openxmlformats.org/drawingml/2006/main" noGrp="1"/>
+          </p:cNvSpPr>
+          <p:nvPr/>
+        </p:nvSpPr>
+        <p:spPr>
+          <a:xfrm xmlns:a="http://schemas.openxmlformats.org/drawingml/2006/main">
+            <a:off x="5981700" y="1924050"/>
+            <a:ext cx="5495925" cy="1333500"/>
+          </a:xfrm>
+          <a:prstGeom xmlns:a="http://schemas.openxmlformats.org/drawingml/2006/main" prst="roundRect">
+            <a:avLst>
+              <a:gd name="adj" fmla="val 7143"/>
+            </a:avLst>
           </a:prstGeom>
           <a:solidFill xmlns:a="http://schemas.openxmlformats.org/drawingml/2006/main">
-            <a:srgbClr val="20D5EA"/>
+            <a:srgbClr val="101B2C"/>
           </a:solidFill>
           <a:ln xmlns:a="http://schemas.openxmlformats.org/drawingml/2006/main" w="0">
             <a:noFill/>
@@ -13867,19 +14809,19 @@
           <p:cNvPr id="14" name="">
             <a:extLst xmlns:a="http://schemas.openxmlformats.org/drawingml/2006/main">
               <a:ext uri="{FF2B5EF4-FFF2-40B4-BE49-F238E27FC236}">
-                <a16:creationId xmlns:a16="http://schemas.microsoft.com/office/drawing/2014/main" id="{2D061576-57FE-4079-A222-BF4AF75EB232}"/>
-              </a:ext>
-            </a:extLst>
-          </p:cNvPr>
-          <p:cNvSpPr>
-            <a:spLocks xmlns:a="http://schemas.openxmlformats.org/drawingml/2006/main" noGrp="1"/>
-          </p:cNvSpPr>
-          <p:nvPr/>
-        </p:nvSpPr>
-        <p:spPr>
-          <a:xfrm xmlns:a="http://schemas.openxmlformats.org/drawingml/2006/main">
-            <a:off x="6200775" y="2105025"/>
-            <a:ext cx="5191125" cy="1924050"/>
+                <a16:creationId xmlns:a16="http://schemas.microsoft.com/office/drawing/2014/main" id="{1D6BF0E7-4832-4FE4-8DF6-B2637DDB8494}"/>
+              </a:ext>
+            </a:extLst>
+          </p:cNvPr>
+          <p:cNvSpPr>
+            <a:spLocks xmlns:a="http://schemas.openxmlformats.org/drawingml/2006/main" noGrp="1"/>
+          </p:cNvSpPr>
+          <p:nvPr/>
+        </p:nvSpPr>
+        <p:spPr>
+          <a:xfrm xmlns:a="http://schemas.openxmlformats.org/drawingml/2006/main">
+            <a:off x="6191250" y="2085975"/>
+            <a:ext cx="5076825" cy="1009650"/>
           </a:xfrm>
           <a:prstGeom xmlns:a="http://schemas.openxmlformats.org/drawingml/2006/main" prst="rect">
             <a:avLst/>
@@ -13894,83 +14836,106 @@
           <a:bodyPr xmlns:a="http://schemas.openxmlformats.org/drawingml/2006/main" lIns="0" tIns="0" rIns="0" bIns="0"/>
           <a:lstStyle xmlns:a="http://schemas.openxmlformats.org/drawingml/2006/main">
             <a:defPPr>
-              <a:defRPr sz="1725" b="0">
-                <a:solidFill>
-                  <a:srgbClr val="F6F8FC"/>
-                </a:solidFill>
-                <a:latin typeface="Arial"/>
-                <a:ea typeface="Arial"/>
-                <a:cs typeface="Arial"/>
+              <a:defRPr sz="1350" b="0">
+                <a:solidFill>
+                  <a:srgbClr val="F6F8FC"/>
+                </a:solidFill>
+                <a:latin typeface="Consolas"/>
+                <a:ea typeface="Consolas"/>
+                <a:cs typeface="Consolas"/>
               </a:defRPr>
             </a:defPPr>
           </a:lstStyle>
           <a:p xmlns:a="http://schemas.openxmlformats.org/drawingml/2006/main">
             <a:pPr>
-              <a:defRPr sz="1725" b="0">
-                <a:solidFill>
-                  <a:srgbClr val="F6F8FC"/>
-                </a:solidFill>
-                <a:latin typeface="Arial"/>
-                <a:ea typeface="Arial"/>
-                <a:cs typeface="Arial"/>
-              </a:defRPr>
-            </a:pPr>
-            <a:r>
-              <a:rPr sz="1725" b="0">
-                <a:solidFill>
-                  <a:srgbClr val="F6F8FC"/>
-                </a:solidFill>
-                <a:latin typeface="Arial"/>
-                <a:ea typeface="Arial"/>
-                <a:cs typeface="Arial"/>
-              </a:rPr>
-              <a:t>Generate bounded programs</a:t>
-            </a:r>
-          </a:p>
-          <a:p xmlns:a="http://schemas.openxmlformats.org/drawingml/2006/main">
-            <a:pPr>
-              <a:defRPr sz="1725" b="0">
-                <a:solidFill>
-                  <a:srgbClr val="F6F8FC"/>
-                </a:solidFill>
-                <a:latin typeface="Arial"/>
-                <a:ea typeface="Arial"/>
-                <a:cs typeface="Arial"/>
-              </a:defRPr>
-            </a:pPr>
-            <a:r>
-              <a:rPr sz="1725" b="0">
-                <a:solidFill>
-                  <a:srgbClr val="F6F8FC"/>
-                </a:solidFill>
-                <a:latin typeface="Arial"/>
-                <a:ea typeface="Arial"/>
-                <a:cs typeface="Arial"/>
-              </a:rPr>
-              <a:t>Compile optimized and unoptimized C</a:t>
-            </a:r>
-          </a:p>
-          <a:p xmlns:a="http://schemas.openxmlformats.org/drawingml/2006/main">
-            <a:pPr>
-              <a:defRPr sz="1725" b="0">
-                <a:solidFill>
-                  <a:srgbClr val="F6F8FC"/>
-                </a:solidFill>
-                <a:latin typeface="Arial"/>
-                <a:ea typeface="Arial"/>
-                <a:cs typeface="Arial"/>
-              </a:defRPr>
-            </a:pPr>
-            <a:r>
-              <a:rPr sz="1725" b="0">
-                <a:solidFill>
-                  <a:srgbClr val="F6F8FC"/>
-                </a:solidFill>
-                <a:latin typeface="Arial"/>
-                <a:ea typeface="Arial"/>
-                <a:cs typeface="Arial"/>
-              </a:rPr>
-              <a:t>Compare output, errors and exit status</a:t>
+              <a:defRPr sz="1350" b="0">
+                <a:solidFill>
+                  <a:srgbClr val="F6F8FC"/>
+                </a:solidFill>
+                <a:latin typeface="Consolas"/>
+                <a:ea typeface="Consolas"/>
+                <a:cs typeface="Consolas"/>
+              </a:defRPr>
+            </a:pPr>
+            <a:r>
+              <a:rPr sz="1350" b="0">
+                <a:solidFill>
+                  <a:srgbClr val="F6F8FC"/>
+                </a:solidFill>
+                <a:latin typeface="Consolas"/>
+                <a:ea typeface="Consolas"/>
+                <a:cs typeface="Consolas"/>
+              </a:rPr>
+              <a:t>READ dividend</a:t>
+            </a:r>
+          </a:p>
+          <a:p xmlns:a="http://schemas.openxmlformats.org/drawingml/2006/main">
+            <a:pPr>
+              <a:defRPr sz="1350" b="0">
+                <a:solidFill>
+                  <a:srgbClr val="F6F8FC"/>
+                </a:solidFill>
+                <a:latin typeface="Consolas"/>
+                <a:ea typeface="Consolas"/>
+                <a:cs typeface="Consolas"/>
+              </a:defRPr>
+            </a:pPr>
+            <a:r>
+              <a:rPr sz="1350" b="0">
+                <a:solidFill>
+                  <a:srgbClr val="F6F8FC"/>
+                </a:solidFill>
+                <a:latin typeface="Consolas"/>
+                <a:ea typeface="Consolas"/>
+                <a:cs typeface="Consolas"/>
+              </a:rPr>
+              <a:t>READ divisor</a:t>
+            </a:r>
+          </a:p>
+          <a:p xmlns:a="http://schemas.openxmlformats.org/drawingml/2006/main">
+            <a:pPr>
+              <a:defRPr sz="1350" b="0">
+                <a:solidFill>
+                  <a:srgbClr val="F6F8FC"/>
+                </a:solidFill>
+                <a:latin typeface="Consolas"/>
+                <a:ea typeface="Consolas"/>
+                <a:cs typeface="Consolas"/>
+              </a:defRPr>
+            </a:pPr>
+            <a:r>
+              <a:rPr sz="1350" b="0">
+                <a:solidFill>
+                  <a:srgbClr val="F6F8FC"/>
+                </a:solidFill>
+                <a:latin typeface="Consolas"/>
+                <a:ea typeface="Consolas"/>
+                <a:cs typeface="Consolas"/>
+              </a:rPr>
+              <a:t>t1 = dividend / divisor</a:t>
+            </a:r>
+          </a:p>
+          <a:p xmlns:a="http://schemas.openxmlformats.org/drawingml/2006/main">
+            <a:pPr>
+              <a:defRPr sz="1350" b="0">
+                <a:solidFill>
+                  <a:srgbClr val="F6F8FC"/>
+                </a:solidFill>
+                <a:latin typeface="Consolas"/>
+                <a:ea typeface="Consolas"/>
+                <a:cs typeface="Consolas"/>
+              </a:defRPr>
+            </a:pPr>
+            <a:r>
+              <a:rPr sz="1350" b="0">
+                <a:solidFill>
+                  <a:srgbClr val="F6F8FC"/>
+                </a:solidFill>
+                <a:latin typeface="Consolas"/>
+                <a:ea typeface="Consolas"/>
+                <a:cs typeface="Consolas"/>
+              </a:rPr>
+              <a:t>PRINT t1</a:t>
             </a:r>
           </a:p>
         </p:txBody>
@@ -13980,50 +14945,19 @@
           <p:cNvPr id="15" name="">
             <a:extLst xmlns:a="http://schemas.openxmlformats.org/drawingml/2006/main">
               <a:ext uri="{FF2B5EF4-FFF2-40B4-BE49-F238E27FC236}">
-                <a16:creationId xmlns:a16="http://schemas.microsoft.com/office/drawing/2014/main" id="{A02DDB95-42E4-42FD-B3B6-6646764D3207}"/>
-              </a:ext>
-            </a:extLst>
-          </p:cNvPr>
-          <p:cNvSpPr>
-            <a:spLocks xmlns:a="http://schemas.openxmlformats.org/drawingml/2006/main" noGrp="1"/>
-          </p:cNvSpPr>
-          <p:nvPr/>
-        </p:nvSpPr>
-        <p:spPr>
-          <a:xfrm xmlns:a="http://schemas.openxmlformats.org/drawingml/2006/main">
-            <a:off x="628650" y="5114925"/>
-            <a:ext cx="10839450" cy="19050"/>
-          </a:xfrm>
-          <a:prstGeom xmlns:a="http://schemas.openxmlformats.org/drawingml/2006/main" prst="rect">
-            <a:avLst/>
-          </a:prstGeom>
-          <a:solidFill xmlns:a="http://schemas.openxmlformats.org/drawingml/2006/main">
-            <a:srgbClr val="29405D"/>
-          </a:solidFill>
-          <a:ln xmlns:a="http://schemas.openxmlformats.org/drawingml/2006/main" w="0">
-            <a:noFill/>
-            <a:prstDash val="solid"/>
-          </a:ln>
-        </p:spPr>
-      </p:sp>
-      <p:sp>
-        <p:nvSpPr>
-          <p:cNvPr id="16" name="">
-            <a:extLst xmlns:a="http://schemas.openxmlformats.org/drawingml/2006/main">
-              <a:ext uri="{FF2B5EF4-FFF2-40B4-BE49-F238E27FC236}">
-                <a16:creationId xmlns:a16="http://schemas.microsoft.com/office/drawing/2014/main" id="{6C526030-8EB4-4CF4-806E-95C9848D195D}"/>
-              </a:ext>
-            </a:extLst>
-          </p:cNvPr>
-          <p:cNvSpPr>
-            <a:spLocks xmlns:a="http://schemas.openxmlformats.org/drawingml/2006/main" noGrp="1"/>
-          </p:cNvSpPr>
-          <p:nvPr/>
-        </p:nvSpPr>
-        <p:spPr>
-          <a:xfrm xmlns:a="http://schemas.openxmlformats.org/drawingml/2006/main">
-            <a:off x="638175" y="5295900"/>
-            <a:ext cx="10715625" cy="590550"/>
+                <a16:creationId xmlns:a16="http://schemas.microsoft.com/office/drawing/2014/main" id="{2367BF18-95C6-4255-99F5-C14C49B84882}"/>
+              </a:ext>
+            </a:extLst>
+          </p:cNvPr>
+          <p:cNvSpPr>
+            <a:spLocks xmlns:a="http://schemas.openxmlformats.org/drawingml/2006/main" noGrp="1"/>
+          </p:cNvSpPr>
+          <p:nvPr/>
+        </p:nvSpPr>
+        <p:spPr>
+          <a:xfrm xmlns:a="http://schemas.openxmlformats.org/drawingml/2006/main">
+            <a:off x="5991225" y="3419475"/>
+            <a:ext cx="5486400" cy="285750"/>
           </a:xfrm>
           <a:prstGeom xmlns:a="http://schemas.openxmlformats.org/drawingml/2006/main" prst="rect">
             <a:avLst/>
@@ -14038,9 +14972,9 @@
           <a:bodyPr xmlns:a="http://schemas.openxmlformats.org/drawingml/2006/main" lIns="0" tIns="0" rIns="0" bIns="0"/>
           <a:lstStyle xmlns:a="http://schemas.openxmlformats.org/drawingml/2006/main">
             <a:defPPr>
-              <a:defRPr sz="1575" b="0">
-                <a:solidFill>
-                  <a:srgbClr val="AEBBD0"/>
+              <a:defRPr sz="1350" b="1">
+                <a:solidFill>
+                  <a:srgbClr val="33D69B"/>
                 </a:solidFill>
                 <a:latin typeface="Arial"/>
                 <a:ea typeface="Arial"/>
@@ -14050,25 +14984,315 @@
           </a:lstStyle>
           <a:p xmlns:a="http://schemas.openxmlformats.org/drawingml/2006/main">
             <a:pPr>
-              <a:defRPr sz="1575" b="0">
-                <a:solidFill>
-                  <a:srgbClr val="AEBBD0"/>
-                </a:solidFill>
-                <a:latin typeface="Arial"/>
-                <a:ea typeface="Arial"/>
-                <a:cs typeface="Arial"/>
-              </a:defRPr>
-            </a:pPr>
-            <a:r>
-              <a:rPr sz="1575" b="0">
-                <a:solidFill>
-                  <a:srgbClr val="AEBBD0"/>
-                </a:solidFill>
-                <a:latin typeface="Arial"/>
-                <a:ea typeface="Arial"/>
-                <a:cs typeface="Arial"/>
-              </a:rPr>
-              <a:t>The checks are rule-based. The comparison is test evidence, not a proof for every program.</a:t>
+              <a:defRPr sz="1350" b="1">
+                <a:solidFill>
+                  <a:srgbClr val="33D69B"/>
+                </a:solidFill>
+                <a:latin typeface="Arial"/>
+                <a:ea typeface="Arial"/>
+                <a:cs typeface="Arial"/>
+              </a:defRPr>
+            </a:pPr>
+            <a:r>
+              <a:rPr sz="1350" b="1">
+                <a:solidFill>
+                  <a:srgbClr val="33D69B"/>
+                </a:solidFill>
+                <a:latin typeface="Arial"/>
+                <a:ea typeface="Arial"/>
+                <a:cs typeface="Arial"/>
+              </a:rPr>
+              <a:t>GENERATED C CHECK</a:t>
+            </a:r>
+          </a:p>
+        </p:txBody>
+      </p:sp>
+      <p:sp>
+        <p:nvSpPr>
+          <p:cNvPr id="16" name="">
+            <a:extLst xmlns:a="http://schemas.openxmlformats.org/drawingml/2006/main">
+              <a:ext uri="{FF2B5EF4-FFF2-40B4-BE49-F238E27FC236}">
+                <a16:creationId xmlns:a16="http://schemas.microsoft.com/office/drawing/2014/main" id="{205F206D-F343-4F05-A085-A39D6E457878}"/>
+              </a:ext>
+            </a:extLst>
+          </p:cNvPr>
+          <p:cNvSpPr>
+            <a:spLocks xmlns:a="http://schemas.openxmlformats.org/drawingml/2006/main" noGrp="1"/>
+          </p:cNvSpPr>
+          <p:nvPr/>
+        </p:nvSpPr>
+        <p:spPr>
+          <a:xfrm xmlns:a="http://schemas.openxmlformats.org/drawingml/2006/main">
+            <a:off x="5991225" y="3762375"/>
+            <a:ext cx="5486400" cy="19050"/>
+          </a:xfrm>
+          <a:prstGeom xmlns:a="http://schemas.openxmlformats.org/drawingml/2006/main" prst="rect">
+            <a:avLst/>
+          </a:prstGeom>
+          <a:solidFill xmlns:a="http://schemas.openxmlformats.org/drawingml/2006/main">
+            <a:srgbClr val="33D69B"/>
+          </a:solidFill>
+          <a:ln xmlns:a="http://schemas.openxmlformats.org/drawingml/2006/main" w="0">
+            <a:noFill/>
+            <a:prstDash val="solid"/>
+          </a:ln>
+        </p:spPr>
+      </p:sp>
+      <p:sp>
+        <p:nvSpPr>
+          <p:cNvPr id="17" name="">
+            <a:extLst xmlns:a="http://schemas.openxmlformats.org/drawingml/2006/main">
+              <a:ext uri="{FF2B5EF4-FFF2-40B4-BE49-F238E27FC236}">
+                <a16:creationId xmlns:a16="http://schemas.microsoft.com/office/drawing/2014/main" id="{CF4272DD-C162-440D-864C-6E21A502F150}"/>
+              </a:ext>
+            </a:extLst>
+          </p:cNvPr>
+          <p:cNvSpPr>
+            <a:spLocks xmlns:a="http://schemas.openxmlformats.org/drawingml/2006/main" noGrp="1"/>
+          </p:cNvSpPr>
+          <p:nvPr/>
+        </p:nvSpPr>
+        <p:spPr>
+          <a:xfrm xmlns:a="http://schemas.openxmlformats.org/drawingml/2006/main">
+            <a:off x="5981700" y="3876675"/>
+            <a:ext cx="5495925" cy="1466850"/>
+          </a:xfrm>
+          <a:prstGeom xmlns:a="http://schemas.openxmlformats.org/drawingml/2006/main" prst="roundRect">
+            <a:avLst>
+              <a:gd name="adj" fmla="val 6494"/>
+            </a:avLst>
+          </a:prstGeom>
+          <a:solidFill xmlns:a="http://schemas.openxmlformats.org/drawingml/2006/main">
+            <a:srgbClr val="101B2C"/>
+          </a:solidFill>
+          <a:ln xmlns:a="http://schemas.openxmlformats.org/drawingml/2006/main" w="0">
+            <a:noFill/>
+            <a:prstDash val="solid"/>
+          </a:ln>
+        </p:spPr>
+      </p:sp>
+      <p:sp>
+        <p:nvSpPr>
+          <p:cNvPr id="18" name="">
+            <a:extLst xmlns:a="http://schemas.openxmlformats.org/drawingml/2006/main">
+              <a:ext uri="{FF2B5EF4-FFF2-40B4-BE49-F238E27FC236}">
+                <a16:creationId xmlns:a16="http://schemas.microsoft.com/office/drawing/2014/main" id="{A79F5D15-7F3E-4C6A-99A5-F29BAB0E922F}"/>
+              </a:ext>
+            </a:extLst>
+          </p:cNvPr>
+          <p:cNvSpPr>
+            <a:spLocks xmlns:a="http://schemas.openxmlformats.org/drawingml/2006/main" noGrp="1"/>
+          </p:cNvSpPr>
+          <p:nvPr/>
+        </p:nvSpPr>
+        <p:spPr>
+          <a:xfrm xmlns:a="http://schemas.openxmlformats.org/drawingml/2006/main">
+            <a:off x="6191250" y="4038600"/>
+            <a:ext cx="5076825" cy="1143000"/>
+          </a:xfrm>
+          <a:prstGeom xmlns:a="http://schemas.openxmlformats.org/drawingml/2006/main" prst="rect">
+            <a:avLst/>
+          </a:prstGeom>
+          <a:noFill xmlns:a="http://schemas.openxmlformats.org/drawingml/2006/main"/>
+          <a:ln xmlns:a="http://schemas.openxmlformats.org/drawingml/2006/main" w="0">
+            <a:noFill/>
+            <a:prstDash val="solid"/>
+          </a:ln>
+        </p:spPr>
+        <p:txBody>
+          <a:bodyPr xmlns:a="http://schemas.openxmlformats.org/drawingml/2006/main" lIns="0" tIns="0" rIns="0" bIns="0"/>
+          <a:lstStyle xmlns:a="http://schemas.openxmlformats.org/drawingml/2006/main">
+            <a:defPPr>
+              <a:defRPr sz="1125" b="0">
+                <a:solidFill>
+                  <a:srgbClr val="F6F8FC"/>
+                </a:solidFill>
+                <a:latin typeface="Consolas"/>
+                <a:ea typeface="Consolas"/>
+                <a:cs typeface="Consolas"/>
+              </a:defRPr>
+            </a:defPPr>
+          </a:lstStyle>
+          <a:p xmlns:a="http://schemas.openxmlformats.org/drawingml/2006/main">
+            <a:pPr>
+              <a:defRPr sz="1125" b="0">
+                <a:solidFill>
+                  <a:srgbClr val="F6F8FC"/>
+                </a:solidFill>
+                <a:latin typeface="Consolas"/>
+                <a:ea typeface="Consolas"/>
+                <a:cs typeface="Consolas"/>
+              </a:defRPr>
+            </a:pPr>
+            <a:r>
+              <a:rPr sz="1125" b="0">
+                <a:solidFill>
+                  <a:srgbClr val="F6F8FC"/>
+                </a:solidFill>
+                <a:latin typeface="Consolas"/>
+                <a:ea typeface="Consolas"/>
+                <a:cs typeface="Consolas"/>
+              </a:rPr>
+              <a:t>if (divisor == 0) {</a:t>
+            </a:r>
+          </a:p>
+          <a:p xmlns:a="http://schemas.openxmlformats.org/drawingml/2006/main">
+            <a:pPr>
+              <a:defRPr sz="1125" b="0">
+                <a:solidFill>
+                  <a:srgbClr val="F6F8FC"/>
+                </a:solidFill>
+                <a:latin typeface="Consolas"/>
+                <a:ea typeface="Consolas"/>
+                <a:cs typeface="Consolas"/>
+              </a:defRPr>
+            </a:pPr>
+            <a:r>
+              <a:rPr sz="1125" b="0">
+                <a:solidFill>
+                  <a:srgbClr val="F6F8FC"/>
+                </a:solidFill>
+                <a:latin typeface="Consolas"/>
+                <a:ea typeface="Consolas"/>
+                <a:cs typeface="Consolas"/>
+              </a:rPr>
+              <a:t>  fprintf(stderr, "Division or remainder by zero"</a:t>
+            </a:r>
+          </a:p>
+          <a:p xmlns:a="http://schemas.openxmlformats.org/drawingml/2006/main">
+            <a:pPr>
+              <a:defRPr sz="1125" b="0">
+                <a:solidFill>
+                  <a:srgbClr val="F6F8FC"/>
+                </a:solidFill>
+                <a:latin typeface="Consolas"/>
+                <a:ea typeface="Consolas"/>
+                <a:cs typeface="Consolas"/>
+              </a:defRPr>
+            </a:pPr>
+            <a:r>
+              <a:rPr sz="1125" b="0">
+                <a:solidFill>
+                  <a:srgbClr val="F6F8FC"/>
+                </a:solidFill>
+                <a:latin typeface="Consolas"/>
+                <a:ea typeface="Consolas"/>
+                <a:cs typeface="Consolas"/>
+              </a:rPr>
+              <a:t>          " at pseudocode line 6\n");</a:t>
+            </a:r>
+          </a:p>
+          <a:p xmlns:a="http://schemas.openxmlformats.org/drawingml/2006/main">
+            <a:pPr>
+              <a:defRPr sz="1125" b="0">
+                <a:solidFill>
+                  <a:srgbClr val="F6F8FC"/>
+                </a:solidFill>
+                <a:latin typeface="Consolas"/>
+                <a:ea typeface="Consolas"/>
+                <a:cs typeface="Consolas"/>
+              </a:defRPr>
+            </a:pPr>
+            <a:r>
+              <a:rPr sz="1125" b="0">
+                <a:solidFill>
+                  <a:srgbClr val="F6F8FC"/>
+                </a:solidFill>
+                <a:latin typeface="Consolas"/>
+                <a:ea typeface="Consolas"/>
+                <a:cs typeface="Consolas"/>
+              </a:rPr>
+              <a:t>  return 1;</a:t>
+            </a:r>
+          </a:p>
+          <a:p xmlns:a="http://schemas.openxmlformats.org/drawingml/2006/main">
+            <a:pPr>
+              <a:defRPr sz="1125" b="0">
+                <a:solidFill>
+                  <a:srgbClr val="F6F8FC"/>
+                </a:solidFill>
+                <a:latin typeface="Consolas"/>
+                <a:ea typeface="Consolas"/>
+                <a:cs typeface="Consolas"/>
+              </a:defRPr>
+            </a:pPr>
+            <a:r>
+              <a:rPr sz="1125" b="0">
+                <a:solidFill>
+                  <a:srgbClr val="F6F8FC"/>
+                </a:solidFill>
+                <a:latin typeface="Consolas"/>
+                <a:ea typeface="Consolas"/>
+                <a:cs typeface="Consolas"/>
+              </a:rPr>
+              <a:t>}</a:t>
+            </a:r>
+          </a:p>
+        </p:txBody>
+      </p:sp>
+      <p:sp>
+        <p:nvSpPr>
+          <p:cNvPr id="19" name="">
+            <a:extLst xmlns:a="http://schemas.openxmlformats.org/drawingml/2006/main">
+              <a:ext uri="{FF2B5EF4-FFF2-40B4-BE49-F238E27FC236}">
+                <a16:creationId xmlns:a16="http://schemas.microsoft.com/office/drawing/2014/main" id="{65076064-34F5-4E96-B864-2F8FFA68D772}"/>
+              </a:ext>
+            </a:extLst>
+          </p:cNvPr>
+          <p:cNvSpPr>
+            <a:spLocks xmlns:a="http://schemas.openxmlformats.org/drawingml/2006/main" noGrp="1"/>
+          </p:cNvSpPr>
+          <p:nvPr/>
+        </p:nvSpPr>
+        <p:spPr>
+          <a:xfrm xmlns:a="http://schemas.openxmlformats.org/drawingml/2006/main">
+            <a:off x="638175" y="5514975"/>
+            <a:ext cx="10839450" cy="466725"/>
+          </a:xfrm>
+          <a:prstGeom xmlns:a="http://schemas.openxmlformats.org/drawingml/2006/main" prst="rect">
+            <a:avLst/>
+          </a:prstGeom>
+          <a:noFill xmlns:a="http://schemas.openxmlformats.org/drawingml/2006/main"/>
+          <a:ln xmlns:a="http://schemas.openxmlformats.org/drawingml/2006/main" w="0">
+            <a:noFill/>
+            <a:prstDash val="solid"/>
+          </a:ln>
+        </p:spPr>
+        <p:txBody>
+          <a:bodyPr xmlns:a="http://schemas.openxmlformats.org/drawingml/2006/main" lIns="0" tIns="0" rIns="0" bIns="0"/>
+          <a:lstStyle xmlns:a="http://schemas.openxmlformats.org/drawingml/2006/main">
+            <a:defPPr>
+              <a:defRPr sz="1575" b="1">
+                <a:solidFill>
+                  <a:srgbClr val="F6B94D"/>
+                </a:solidFill>
+                <a:latin typeface="Arial"/>
+                <a:ea typeface="Arial"/>
+                <a:cs typeface="Arial"/>
+              </a:defRPr>
+            </a:defPPr>
+          </a:lstStyle>
+          <a:p xmlns:a="http://schemas.openxmlformats.org/drawingml/2006/main">
+            <a:pPr>
+              <a:defRPr sz="1575" b="1">
+                <a:solidFill>
+                  <a:srgbClr val="F6B94D"/>
+                </a:solidFill>
+                <a:latin typeface="Arial"/>
+                <a:ea typeface="Arial"/>
+                <a:cs typeface="Arial"/>
+              </a:defRPr>
+            </a:pPr>
+            <a:r>
+              <a:rPr sz="1575" b="1">
+                <a:solidFill>
+                  <a:srgbClr val="F6B94D"/>
+                </a:solidFill>
+                <a:latin typeface="Arial"/>
+                <a:ea typeface="Arial"/>
+                <a:cs typeface="Arial"/>
+              </a:rPr>
+              <a:t>INPUT: 20 0     RESULT: source-line error, exit status 1</a:t>
             </a:r>
           </a:p>
         </p:txBody>
@@ -14076,7 +15300,7 @@
     </p:spTree>
     <p:extLst>
       <p:ext uri="{BB962C8B-B14F-4D97-AF65-F5344CB8AC3E}">
-        <p14:creationId xmlns:p14="http://schemas.microsoft.com/office/powerpoint/2010/main" val="932356199"/>
+        <p14:creationId xmlns:p14="http://schemas.microsoft.com/office/powerpoint/2010/main" val="927347500"/>
       </p:ext>
     </p:extLst>
   </p:cSld>
@@ -14104,10 +15328,10 @@
       </p:grpSpPr>
       <p:sp>
         <p:nvSpPr>
-          <p:cNvPr id="30" name="">
-            <a:extLst xmlns:a="http://schemas.openxmlformats.org/drawingml/2006/main">
-              <a:ext uri="{FF2B5EF4-FFF2-40B4-BE49-F238E27FC236}">
-                <a16:creationId xmlns:a16="http://schemas.microsoft.com/office/drawing/2014/main" id="{7CA4976E-0259-4751-A4E0-29CC47C57FED}"/>
+          <p:cNvPr id="20" name="">
+            <a:extLst xmlns:a="http://schemas.openxmlformats.org/drawingml/2006/main">
+              <a:ext uri="{FF2B5EF4-FFF2-40B4-BE49-F238E27FC236}">
+                <a16:creationId xmlns:a16="http://schemas.microsoft.com/office/drawing/2014/main" id="{719B805F-3080-407C-B5EB-14A220AC0AF8}"/>
               </a:ext>
             </a:extLst>
           </p:cNvPr>
@@ -14138,7 +15362,7 @@
           <p:cNvPr id="2" name="">
             <a:extLst xmlns:a="http://schemas.openxmlformats.org/drawingml/2006/main">
               <a:ext uri="{FF2B5EF4-FFF2-40B4-BE49-F238E27FC236}">
-                <a16:creationId xmlns:a16="http://schemas.microsoft.com/office/drawing/2014/main" id="{3E52810F-49A7-4C1C-B70C-E9A3C07B79EF}"/>
+                <a16:creationId xmlns:a16="http://schemas.microsoft.com/office/drawing/2014/main" id="{4FE67307-E648-4F65-806C-A58C6092458D}"/>
               </a:ext>
             </a:extLst>
           </p:cNvPr>
@@ -14195,7 +15419,7 @@
                 <a:ea typeface="Arial"/>
                 <a:cs typeface="Arial"/>
               </a:rPr>
-              <a:t>Testing and observed results</a:t>
+              <a:t>Example 5: automatic array bounds</a:t>
             </a:r>
           </a:p>
         </p:txBody>
@@ -14205,7 +15429,7 @@
           <p:cNvPr id="3" name="">
             <a:extLst xmlns:a="http://schemas.openxmlformats.org/drawingml/2006/main">
               <a:ext uri="{FF2B5EF4-FFF2-40B4-BE49-F238E27FC236}">
-                <a16:creationId xmlns:a16="http://schemas.microsoft.com/office/drawing/2014/main" id="{BA6FB039-7A2F-4867-BCCE-196E90D6B3F7}"/>
+                <a16:creationId xmlns:a16="http://schemas.microsoft.com/office/drawing/2014/main" id="{46C111E4-BBFF-415C-926F-3142248FC9E5}"/>
               </a:ext>
             </a:extLst>
           </p:cNvPr>
@@ -14262,7 +15486,7 @@
                 <a:ea typeface="Arial"/>
                 <a:cs typeface="Arial"/>
               </a:rPr>
-              <a:t>Tests cover successful translation, rejected source and selected executions of generated C.</a:t>
+              <a:t>A dynamic array index is checked before reading or writing C memory.</a:t>
             </a:r>
           </a:p>
         </p:txBody>
@@ -14272,7 +15496,7 @@
           <p:cNvPr id="4" name="">
             <a:extLst xmlns:a="http://schemas.openxmlformats.org/drawingml/2006/main">
               <a:ext uri="{FF2B5EF4-FFF2-40B4-BE49-F238E27FC236}">
-                <a16:creationId xmlns:a16="http://schemas.microsoft.com/office/drawing/2014/main" id="{0CF87197-9262-4E66-9DCC-47090FA70139}"/>
+                <a16:creationId xmlns:a16="http://schemas.microsoft.com/office/drawing/2014/main" id="{ED0F6852-C424-42E9-8E45-58168897D982}"/>
               </a:ext>
             </a:extLst>
           </p:cNvPr>
@@ -14303,7 +15527,7 @@
           <p:cNvPr id="5" name="">
             <a:extLst xmlns:a="http://schemas.openxmlformats.org/drawingml/2006/main">
               <a:ext uri="{FF2B5EF4-FFF2-40B4-BE49-F238E27FC236}">
-                <a16:creationId xmlns:a16="http://schemas.microsoft.com/office/drawing/2014/main" id="{7758F884-FE2C-48BE-B305-B7321E88CBD7}"/>
+                <a16:creationId xmlns:a16="http://schemas.microsoft.com/office/drawing/2014/main" id="{C51BC57B-54B2-4125-BFE4-60993AB6B5CB}"/>
               </a:ext>
             </a:extLst>
           </p:cNvPr>
@@ -14370,7 +15594,7 @@
           <p:cNvPr id="6" name="">
             <a:extLst xmlns:a="http://schemas.openxmlformats.org/drawingml/2006/main">
               <a:ext uri="{FF2B5EF4-FFF2-40B4-BE49-F238E27FC236}">
-                <a16:creationId xmlns:a16="http://schemas.microsoft.com/office/drawing/2014/main" id="{8DACD935-DA2D-4EF3-8761-1B1C461712F5}"/>
+                <a16:creationId xmlns:a16="http://schemas.microsoft.com/office/drawing/2014/main" id="{0E727B7B-A1AA-438B-AF29-DCD3EFCC6AD3}"/>
               </a:ext>
             </a:extLst>
           </p:cNvPr>
@@ -14437,184 +15661,19 @@
           <p:cNvPr id="7" name="">
             <a:extLst xmlns:a="http://schemas.openxmlformats.org/drawingml/2006/main">
               <a:ext uri="{FF2B5EF4-FFF2-40B4-BE49-F238E27FC236}">
-                <a16:creationId xmlns:a16="http://schemas.microsoft.com/office/drawing/2014/main" id="{883CC864-D2B5-45FD-A627-C3178A093B96}"/>
-              </a:ext>
-            </a:extLst>
-          </p:cNvPr>
-          <p:cNvSpPr>
-            <a:spLocks xmlns:a="http://schemas.openxmlformats.org/drawingml/2006/main" noGrp="1"/>
-          </p:cNvSpPr>
-          <p:nvPr/>
-        </p:nvSpPr>
-        <p:spPr>
-          <a:xfrm xmlns:a="http://schemas.openxmlformats.org/drawingml/2006/main">
-            <a:off x="638175" y="1533525"/>
-            <a:ext cx="1952625" cy="981075"/>
-          </a:xfrm>
-          <a:prstGeom xmlns:a="http://schemas.openxmlformats.org/drawingml/2006/main" prst="rect">
-            <a:avLst/>
-          </a:prstGeom>
-          <a:noFill xmlns:a="http://schemas.openxmlformats.org/drawingml/2006/main"/>
-          <a:ln xmlns:a="http://schemas.openxmlformats.org/drawingml/2006/main" w="0">
-            <a:noFill/>
-            <a:prstDash val="solid"/>
-          </a:ln>
-        </p:spPr>
-        <p:txBody>
-          <a:bodyPr xmlns:a="http://schemas.openxmlformats.org/drawingml/2006/main" lIns="0" tIns="0" rIns="0" bIns="0"/>
-          <a:lstStyle xmlns:a="http://schemas.openxmlformats.org/drawingml/2006/main">
-            <a:defPPr>
-              <a:defRPr sz="5250" b="1">
-                <a:solidFill>
-                  <a:srgbClr val="33D69B"/>
-                </a:solidFill>
-                <a:latin typeface="Arial"/>
-                <a:ea typeface="Arial"/>
-                <a:cs typeface="Arial"/>
-              </a:defRPr>
-            </a:defPPr>
-          </a:lstStyle>
-          <a:p xmlns:a="http://schemas.openxmlformats.org/drawingml/2006/main">
-            <a:pPr>
-              <a:defRPr sz="5250" b="1">
-                <a:solidFill>
-                  <a:srgbClr val="33D69B"/>
-                </a:solidFill>
-                <a:latin typeface="Arial"/>
-                <a:ea typeface="Arial"/>
-                <a:cs typeface="Arial"/>
-              </a:defRPr>
-            </a:pPr>
-            <a:r>
-              <a:rPr sz="5250" b="1">
-                <a:solidFill>
-                  <a:srgbClr val="33D69B"/>
-                </a:solidFill>
-                <a:latin typeface="Arial"/>
-                <a:ea typeface="Arial"/>
-                <a:cs typeface="Arial"/>
-              </a:rPr>
-              <a:t>111</a:t>
-            </a:r>
-          </a:p>
-        </p:txBody>
-      </p:sp>
-      <p:sp>
-        <p:nvSpPr>
-          <p:cNvPr id="8" name="">
-            <a:extLst xmlns:a="http://schemas.openxmlformats.org/drawingml/2006/main">
-              <a:ext uri="{FF2B5EF4-FFF2-40B4-BE49-F238E27FC236}">
-                <a16:creationId xmlns:a16="http://schemas.microsoft.com/office/drawing/2014/main" id="{B8A64B4A-7DC9-4B6B-AC00-AED91A3CB1E4}"/>
-              </a:ext>
-            </a:extLst>
-          </p:cNvPr>
-          <p:cNvSpPr>
-            <a:spLocks xmlns:a="http://schemas.openxmlformats.org/drawingml/2006/main" noGrp="1"/>
-          </p:cNvSpPr>
-          <p:nvPr/>
-        </p:nvSpPr>
-        <p:spPr>
-          <a:xfrm xmlns:a="http://schemas.openxmlformats.org/drawingml/2006/main">
-            <a:off x="2333625" y="1752600"/>
-            <a:ext cx="9096375" cy="571500"/>
-          </a:xfrm>
-          <a:prstGeom xmlns:a="http://schemas.openxmlformats.org/drawingml/2006/main" prst="rect">
-            <a:avLst/>
-          </a:prstGeom>
-          <a:noFill xmlns:a="http://schemas.openxmlformats.org/drawingml/2006/main"/>
-          <a:ln xmlns:a="http://schemas.openxmlformats.org/drawingml/2006/main" w="0">
-            <a:noFill/>
-            <a:prstDash val="solid"/>
-          </a:ln>
-        </p:spPr>
-        <p:txBody>
-          <a:bodyPr xmlns:a="http://schemas.openxmlformats.org/drawingml/2006/main" lIns="0" tIns="0" rIns="0" bIns="0"/>
-          <a:lstStyle xmlns:a="http://schemas.openxmlformats.org/drawingml/2006/main">
-            <a:defPPr>
-              <a:defRPr sz="2250" b="1">
-                <a:solidFill>
-                  <a:srgbClr val="F6F8FC"/>
-                </a:solidFill>
-                <a:latin typeface="Arial"/>
-                <a:ea typeface="Arial"/>
-                <a:cs typeface="Arial"/>
-              </a:defRPr>
-            </a:defPPr>
-          </a:lstStyle>
-          <a:p xmlns:a="http://schemas.openxmlformats.org/drawingml/2006/main">
-            <a:pPr>
-              <a:defRPr sz="2250" b="1">
-                <a:solidFill>
-                  <a:srgbClr val="F6F8FC"/>
-                </a:solidFill>
-                <a:latin typeface="Arial"/>
-                <a:ea typeface="Arial"/>
-                <a:cs typeface="Arial"/>
-              </a:defRPr>
-            </a:pPr>
-            <a:r>
-              <a:rPr sz="2250" b="1">
-                <a:solidFill>
-                  <a:srgbClr val="F6F8FC"/>
-                </a:solidFill>
-                <a:latin typeface="Arial"/>
-                <a:ea typeface="Arial"/>
-                <a:cs typeface="Arial"/>
-              </a:rPr>
-              <a:t>automated tests passed</a:t>
-            </a:r>
-          </a:p>
-        </p:txBody>
-      </p:sp>
-      <p:sp>
-        <p:nvSpPr>
-          <p:cNvPr id="9" name="">
-            <a:extLst xmlns:a="http://schemas.openxmlformats.org/drawingml/2006/main">
-              <a:ext uri="{FF2B5EF4-FFF2-40B4-BE49-F238E27FC236}">
-                <a16:creationId xmlns:a16="http://schemas.microsoft.com/office/drawing/2014/main" id="{095103CE-5108-43F7-A924-CA0CDCAC2D4B}"/>
-              </a:ext>
-            </a:extLst>
-          </p:cNvPr>
-          <p:cNvSpPr>
-            <a:spLocks xmlns:a="http://schemas.openxmlformats.org/drawingml/2006/main" noGrp="1"/>
-          </p:cNvSpPr>
-          <p:nvPr/>
-        </p:nvSpPr>
-        <p:spPr>
-          <a:xfrm xmlns:a="http://schemas.openxmlformats.org/drawingml/2006/main">
-            <a:off x="628650" y="2676525"/>
-            <a:ext cx="10839450" cy="19050"/>
-          </a:xfrm>
-          <a:prstGeom xmlns:a="http://schemas.openxmlformats.org/drawingml/2006/main" prst="rect">
-            <a:avLst/>
-          </a:prstGeom>
-          <a:solidFill xmlns:a="http://schemas.openxmlformats.org/drawingml/2006/main">
-            <a:srgbClr val="29405D"/>
-          </a:solidFill>
-          <a:ln xmlns:a="http://schemas.openxmlformats.org/drawingml/2006/main" w="0">
-            <a:noFill/>
-            <a:prstDash val="solid"/>
-          </a:ln>
-        </p:spPr>
-      </p:sp>
-      <p:sp>
-        <p:nvSpPr>
-          <p:cNvPr id="10" name="">
-            <a:extLst xmlns:a="http://schemas.openxmlformats.org/drawingml/2006/main">
-              <a:ext uri="{FF2B5EF4-FFF2-40B4-BE49-F238E27FC236}">
-                <a16:creationId xmlns:a16="http://schemas.microsoft.com/office/drawing/2014/main" id="{8CA7F3A9-116D-4D11-B9CB-759BC14031EE}"/>
-              </a:ext>
-            </a:extLst>
-          </p:cNvPr>
-          <p:cNvSpPr>
-            <a:spLocks xmlns:a="http://schemas.openxmlformats.org/drawingml/2006/main" noGrp="1"/>
-          </p:cNvSpPr>
-          <p:nvPr/>
-        </p:nvSpPr>
-        <p:spPr>
-          <a:xfrm xmlns:a="http://schemas.openxmlformats.org/drawingml/2006/main">
-            <a:off x="638175" y="2895600"/>
-            <a:ext cx="2857500" cy="285750"/>
+                <a16:creationId xmlns:a16="http://schemas.microsoft.com/office/drawing/2014/main" id="{2C927764-1CC4-432C-9471-5B25BD3D3847}"/>
+              </a:ext>
+            </a:extLst>
+          </p:cNvPr>
+          <p:cNvSpPr>
+            <a:spLocks xmlns:a="http://schemas.openxmlformats.org/drawingml/2006/main" noGrp="1"/>
+          </p:cNvSpPr>
+          <p:nvPr/>
+        </p:nvSpPr>
+        <p:spPr>
+          <a:xfrm xmlns:a="http://schemas.openxmlformats.org/drawingml/2006/main">
+            <a:off x="628650" y="1466850"/>
+            <a:ext cx="4905375" cy="285750"/>
           </a:xfrm>
           <a:prstGeom xmlns:a="http://schemas.openxmlformats.org/drawingml/2006/main" prst="rect">
             <a:avLst/>
@@ -14659,29 +15718,344 @@
                 <a:ea typeface="Arial"/>
                 <a:cs typeface="Arial"/>
               </a:rPr>
-              <a:t>CASE</a:t>
+              <a:t>PSEUDOCODE</a:t>
             </a:r>
           </a:p>
         </p:txBody>
       </p:sp>
       <p:sp>
         <p:nvSpPr>
+          <p:cNvPr id="8" name="">
+            <a:extLst xmlns:a="http://schemas.openxmlformats.org/drawingml/2006/main">
+              <a:ext uri="{FF2B5EF4-FFF2-40B4-BE49-F238E27FC236}">
+                <a16:creationId xmlns:a16="http://schemas.microsoft.com/office/drawing/2014/main" id="{4D09CA07-CA55-4D84-A2BE-BC300737960C}"/>
+              </a:ext>
+            </a:extLst>
+          </p:cNvPr>
+          <p:cNvSpPr>
+            <a:spLocks xmlns:a="http://schemas.openxmlformats.org/drawingml/2006/main" noGrp="1"/>
+          </p:cNvSpPr>
+          <p:nvPr/>
+        </p:nvSpPr>
+        <p:spPr>
+          <a:xfrm xmlns:a="http://schemas.openxmlformats.org/drawingml/2006/main">
+            <a:off x="628650" y="1809750"/>
+            <a:ext cx="4905375" cy="19050"/>
+          </a:xfrm>
+          <a:prstGeom xmlns:a="http://schemas.openxmlformats.org/drawingml/2006/main" prst="rect">
+            <a:avLst/>
+          </a:prstGeom>
+          <a:solidFill xmlns:a="http://schemas.openxmlformats.org/drawingml/2006/main">
+            <a:srgbClr val="20D5EA"/>
+          </a:solidFill>
+          <a:ln xmlns:a="http://schemas.openxmlformats.org/drawingml/2006/main" w="0">
+            <a:noFill/>
+            <a:prstDash val="solid"/>
+          </a:ln>
+        </p:spPr>
+      </p:sp>
+      <p:sp>
+        <p:nvSpPr>
+          <p:cNvPr id="9" name="">
+            <a:extLst xmlns:a="http://schemas.openxmlformats.org/drawingml/2006/main">
+              <a:ext uri="{FF2B5EF4-FFF2-40B4-BE49-F238E27FC236}">
+                <a16:creationId xmlns:a16="http://schemas.microsoft.com/office/drawing/2014/main" id="{60C94FBA-F3DA-4A13-995B-BF696CDEBCFC}"/>
+              </a:ext>
+            </a:extLst>
+          </p:cNvPr>
+          <p:cNvSpPr>
+            <a:spLocks xmlns:a="http://schemas.openxmlformats.org/drawingml/2006/main" noGrp="1"/>
+          </p:cNvSpPr>
+          <p:nvPr/>
+        </p:nvSpPr>
+        <p:spPr>
+          <a:xfrm xmlns:a="http://schemas.openxmlformats.org/drawingml/2006/main">
+            <a:off x="619125" y="1924050"/>
+            <a:ext cx="4914900" cy="3219450"/>
+          </a:xfrm>
+          <a:prstGeom xmlns:a="http://schemas.openxmlformats.org/drawingml/2006/main" prst="roundRect">
+            <a:avLst>
+              <a:gd name="adj" fmla="val 2959"/>
+            </a:avLst>
+          </a:prstGeom>
+          <a:solidFill xmlns:a="http://schemas.openxmlformats.org/drawingml/2006/main">
+            <a:srgbClr val="101B2C"/>
+          </a:solidFill>
+          <a:ln xmlns:a="http://schemas.openxmlformats.org/drawingml/2006/main" w="0">
+            <a:noFill/>
+            <a:prstDash val="solid"/>
+          </a:ln>
+        </p:spPr>
+      </p:sp>
+      <p:sp>
+        <p:nvSpPr>
+          <p:cNvPr id="10" name="">
+            <a:extLst xmlns:a="http://schemas.openxmlformats.org/drawingml/2006/main">
+              <a:ext uri="{FF2B5EF4-FFF2-40B4-BE49-F238E27FC236}">
+                <a16:creationId xmlns:a16="http://schemas.microsoft.com/office/drawing/2014/main" id="{2C96300D-2564-47C2-AECC-46554F69A086}"/>
+              </a:ext>
+            </a:extLst>
+          </p:cNvPr>
+          <p:cNvSpPr>
+            <a:spLocks xmlns:a="http://schemas.openxmlformats.org/drawingml/2006/main" noGrp="1"/>
+          </p:cNvSpPr>
+          <p:nvPr/>
+        </p:nvSpPr>
+        <p:spPr>
+          <a:xfrm xmlns:a="http://schemas.openxmlformats.org/drawingml/2006/main">
+            <a:off x="828675" y="2085975"/>
+            <a:ext cx="4495800" cy="2895600"/>
+          </a:xfrm>
+          <a:prstGeom xmlns:a="http://schemas.openxmlformats.org/drawingml/2006/main" prst="rect">
+            <a:avLst/>
+          </a:prstGeom>
+          <a:noFill xmlns:a="http://schemas.openxmlformats.org/drawingml/2006/main"/>
+          <a:ln xmlns:a="http://schemas.openxmlformats.org/drawingml/2006/main" w="0">
+            <a:noFill/>
+            <a:prstDash val="solid"/>
+          </a:ln>
+        </p:spPr>
+        <p:txBody>
+          <a:bodyPr xmlns:a="http://schemas.openxmlformats.org/drawingml/2006/main" lIns="0" tIns="0" rIns="0" bIns="0"/>
+          <a:lstStyle xmlns:a="http://schemas.openxmlformats.org/drawingml/2006/main">
+            <a:defPPr>
+              <a:defRPr sz="1275" b="0">
+                <a:solidFill>
+                  <a:srgbClr val="F6F8FC"/>
+                </a:solidFill>
+                <a:latin typeface="Consolas"/>
+                <a:ea typeface="Consolas"/>
+                <a:cs typeface="Consolas"/>
+              </a:defRPr>
+            </a:defPPr>
+          </a:lstStyle>
+          <a:p xmlns:a="http://schemas.openxmlformats.org/drawingml/2006/main">
+            <a:pPr>
+              <a:defRPr sz="1275" b="0">
+                <a:solidFill>
+                  <a:srgbClr val="F6F8FC"/>
+                </a:solidFill>
+                <a:latin typeface="Consolas"/>
+                <a:ea typeface="Consolas"/>
+                <a:cs typeface="Consolas"/>
+              </a:defRPr>
+            </a:pPr>
+            <a:r>
+              <a:rPr sz="1275" b="0">
+                <a:solidFill>
+                  <a:srgbClr val="F6F8FC"/>
+                </a:solidFill>
+                <a:latin typeface="Consolas"/>
+                <a:ea typeface="Consolas"/>
+                <a:cs typeface="Consolas"/>
+              </a:rPr>
+              <a:t>BEGIN</a:t>
+            </a:r>
+          </a:p>
+          <a:p xmlns:a="http://schemas.openxmlformats.org/drawingml/2006/main">
+            <a:pPr>
+              <a:defRPr sz="1275" b="0">
+                <a:solidFill>
+                  <a:srgbClr val="F6F8FC"/>
+                </a:solidFill>
+                <a:latin typeface="Consolas"/>
+                <a:ea typeface="Consolas"/>
+                <a:cs typeface="Consolas"/>
+              </a:defRPr>
+            </a:pPr>
+            <a:r>
+              <a:rPr sz="1275" b="0">
+                <a:solidFill>
+                  <a:srgbClr val="F6F8FC"/>
+                </a:solidFill>
+                <a:latin typeface="Consolas"/>
+                <a:ea typeface="Consolas"/>
+                <a:cs typeface="Consolas"/>
+              </a:rPr>
+              <a:t>DECLARE values[3] AS INTEGER</a:t>
+            </a:r>
+          </a:p>
+          <a:p xmlns:a="http://schemas.openxmlformats.org/drawingml/2006/main">
+            <a:pPr>
+              <a:defRPr sz="1275" b="0">
+                <a:solidFill>
+                  <a:srgbClr val="F6F8FC"/>
+                </a:solidFill>
+                <a:latin typeface="Consolas"/>
+                <a:ea typeface="Consolas"/>
+                <a:cs typeface="Consolas"/>
+              </a:defRPr>
+            </a:pPr>
+            <a:r>
+              <a:rPr sz="1275" b="0">
+                <a:solidFill>
+                  <a:srgbClr val="F6F8FC"/>
+                </a:solidFill>
+                <a:latin typeface="Consolas"/>
+                <a:ea typeface="Consolas"/>
+                <a:cs typeface="Consolas"/>
+              </a:rPr>
+              <a:t>DECLARE index AS INTEGER</a:t>
+            </a:r>
+          </a:p>
+          <a:p xmlns:a="http://schemas.openxmlformats.org/drawingml/2006/main">
+            <a:pPr>
+              <a:defRPr sz="1275" b="0">
+                <a:solidFill>
+                  <a:srgbClr val="F6F8FC"/>
+                </a:solidFill>
+                <a:latin typeface="Consolas"/>
+                <a:ea typeface="Consolas"/>
+                <a:cs typeface="Consolas"/>
+              </a:defRPr>
+            </a:pPr>
+            <a:r>
+              <a:rPr sz="1275" b="0">
+                <a:solidFill>
+                  <a:srgbClr val="F6F8FC"/>
+                </a:solidFill>
+                <a:latin typeface="Consolas"/>
+                <a:ea typeface="Consolas"/>
+                <a:cs typeface="Consolas"/>
+              </a:rPr>
+              <a:t>DECLARE value AS INTEGER</a:t>
+            </a:r>
+          </a:p>
+          <a:p xmlns:a="http://schemas.openxmlformats.org/drawingml/2006/main">
+            <a:pPr>
+              <a:defRPr sz="1275" b="0">
+                <a:solidFill>
+                  <a:srgbClr val="F6F8FC"/>
+                </a:solidFill>
+                <a:latin typeface="Consolas"/>
+                <a:ea typeface="Consolas"/>
+                <a:cs typeface="Consolas"/>
+              </a:defRPr>
+            </a:pPr>
+            <a:r>
+              <a:rPr sz="1275" b="0">
+                <a:solidFill>
+                  <a:srgbClr val="F6F8FC"/>
+                </a:solidFill>
+                <a:latin typeface="Consolas"/>
+                <a:ea typeface="Consolas"/>
+                <a:cs typeface="Consolas"/>
+              </a:rPr>
+              <a:t>READ index</a:t>
+            </a:r>
+          </a:p>
+          <a:p xmlns:a="http://schemas.openxmlformats.org/drawingml/2006/main">
+            <a:pPr>
+              <a:defRPr sz="1275" b="0">
+                <a:solidFill>
+                  <a:srgbClr val="F6F8FC"/>
+                </a:solidFill>
+                <a:latin typeface="Consolas"/>
+                <a:ea typeface="Consolas"/>
+                <a:cs typeface="Consolas"/>
+              </a:defRPr>
+            </a:pPr>
+            <a:r>
+              <a:rPr sz="1275" b="0">
+                <a:solidFill>
+                  <a:srgbClr val="F6F8FC"/>
+                </a:solidFill>
+                <a:latin typeface="Consolas"/>
+                <a:ea typeface="Consolas"/>
+                <a:cs typeface="Consolas"/>
+              </a:rPr>
+              <a:t>READ value</a:t>
+            </a:r>
+          </a:p>
+          <a:p xmlns:a="http://schemas.openxmlformats.org/drawingml/2006/main">
+            <a:pPr>
+              <a:defRPr sz="1275" b="0">
+                <a:solidFill>
+                  <a:srgbClr val="F6F8FC"/>
+                </a:solidFill>
+                <a:latin typeface="Consolas"/>
+                <a:ea typeface="Consolas"/>
+                <a:cs typeface="Consolas"/>
+              </a:defRPr>
+            </a:pPr>
+            <a:r>
+              <a:rPr sz="1275" b="0">
+                <a:solidFill>
+                  <a:srgbClr val="F6F8FC"/>
+                </a:solidFill>
+                <a:latin typeface="Consolas"/>
+                <a:ea typeface="Consolas"/>
+                <a:cs typeface="Consolas"/>
+              </a:rPr>
+              <a:t>SET values[index] = value</a:t>
+            </a:r>
+          </a:p>
+          <a:p xmlns:a="http://schemas.openxmlformats.org/drawingml/2006/main">
+            <a:pPr>
+              <a:defRPr sz="1275" b="0">
+                <a:solidFill>
+                  <a:srgbClr val="F6F8FC"/>
+                </a:solidFill>
+                <a:latin typeface="Consolas"/>
+                <a:ea typeface="Consolas"/>
+                <a:cs typeface="Consolas"/>
+              </a:defRPr>
+            </a:pPr>
+            <a:r>
+              <a:rPr sz="1275" b="0">
+                <a:solidFill>
+                  <a:srgbClr val="F6F8FC"/>
+                </a:solidFill>
+                <a:latin typeface="Consolas"/>
+                <a:ea typeface="Consolas"/>
+                <a:cs typeface="Consolas"/>
+              </a:rPr>
+              <a:t>PRINT values[index]</a:t>
+            </a:r>
+          </a:p>
+          <a:p xmlns:a="http://schemas.openxmlformats.org/drawingml/2006/main">
+            <a:pPr>
+              <a:defRPr sz="1275" b="0">
+                <a:solidFill>
+                  <a:srgbClr val="F6F8FC"/>
+                </a:solidFill>
+                <a:latin typeface="Consolas"/>
+                <a:ea typeface="Consolas"/>
+                <a:cs typeface="Consolas"/>
+              </a:defRPr>
+            </a:pPr>
+            <a:r>
+              <a:rPr sz="1275" b="0">
+                <a:solidFill>
+                  <a:srgbClr val="F6F8FC"/>
+                </a:solidFill>
+                <a:latin typeface="Consolas"/>
+                <a:ea typeface="Consolas"/>
+                <a:cs typeface="Consolas"/>
+              </a:rPr>
+              <a:t>END</a:t>
+            </a:r>
+          </a:p>
+        </p:txBody>
+      </p:sp>
+      <p:sp>
+        <p:nvSpPr>
           <p:cNvPr id="11" name="">
             <a:extLst xmlns:a="http://schemas.openxmlformats.org/drawingml/2006/main">
               <a:ext uri="{FF2B5EF4-FFF2-40B4-BE49-F238E27FC236}">
-                <a16:creationId xmlns:a16="http://schemas.microsoft.com/office/drawing/2014/main" id="{AE69633F-CC30-4277-B4F8-1E8540DD30FE}"/>
-              </a:ext>
-            </a:extLst>
-          </p:cNvPr>
-          <p:cNvSpPr>
-            <a:spLocks xmlns:a="http://schemas.openxmlformats.org/drawingml/2006/main" noGrp="1"/>
-          </p:cNvSpPr>
-          <p:nvPr/>
-        </p:nvSpPr>
-        <p:spPr>
-          <a:xfrm xmlns:a="http://schemas.openxmlformats.org/drawingml/2006/main">
-            <a:off x="3905250" y="2895600"/>
-            <a:ext cx="4333875" cy="285750"/>
+                <a16:creationId xmlns:a16="http://schemas.microsoft.com/office/drawing/2014/main" id="{B4F4D95E-5EEB-45DA-87EB-34E58BF478CD}"/>
+              </a:ext>
+            </a:extLst>
+          </p:cNvPr>
+          <p:cNvSpPr>
+            <a:spLocks xmlns:a="http://schemas.openxmlformats.org/drawingml/2006/main" noGrp="1"/>
+          </p:cNvSpPr>
+          <p:nvPr/>
+        </p:nvSpPr>
+        <p:spPr>
+          <a:xfrm xmlns:a="http://schemas.openxmlformats.org/drawingml/2006/main">
+            <a:off x="5991225" y="1466850"/>
+            <a:ext cx="5486400" cy="285750"/>
           </a:xfrm>
           <a:prstGeom xmlns:a="http://schemas.openxmlformats.org/drawingml/2006/main" prst="rect">
             <a:avLst/>
@@ -14698,7 +16072,7 @@
             <a:defPPr>
               <a:defRPr sz="1350" b="1">
                 <a:solidFill>
-                  <a:srgbClr val="20D5EA"/>
+                  <a:srgbClr val="4C82FF"/>
                 </a:solidFill>
                 <a:latin typeface="Arial"/>
                 <a:ea typeface="Arial"/>
@@ -14710,7 +16084,7 @@
             <a:pPr>
               <a:defRPr sz="1350" b="1">
                 <a:solidFill>
-                  <a:srgbClr val="20D5EA"/>
+                  <a:srgbClr val="4C82FF"/>
                 </a:solidFill>
                 <a:latin typeface="Arial"/>
                 <a:ea typeface="Arial"/>
@@ -14720,13 +16094,13 @@
             <a:r>
               <a:rPr sz="1350" b="1">
                 <a:solidFill>
-                  <a:srgbClr val="20D5EA"/>
-                </a:solidFill>
-                <a:latin typeface="Arial"/>
-                <a:ea typeface="Arial"/>
-                <a:cs typeface="Arial"/>
-              </a:rPr>
-              <a:t>CONDITION</a:t>
+                  <a:srgbClr val="4C82FF"/>
+                </a:solidFill>
+                <a:latin typeface="Arial"/>
+                <a:ea typeface="Arial"/>
+                <a:cs typeface="Arial"/>
+              </a:rPr>
+              <a:t>KEY IR</a:t>
             </a:r>
           </a:p>
         </p:txBody>
@@ -14736,19 +16110,242 @@
           <p:cNvPr id="12" name="">
             <a:extLst xmlns:a="http://schemas.openxmlformats.org/drawingml/2006/main">
               <a:ext uri="{FF2B5EF4-FFF2-40B4-BE49-F238E27FC236}">
-                <a16:creationId xmlns:a16="http://schemas.microsoft.com/office/drawing/2014/main" id="{64DCDDAD-2D8A-4F01-B714-42EDED509F65}"/>
-              </a:ext>
-            </a:extLst>
-          </p:cNvPr>
-          <p:cNvSpPr>
-            <a:spLocks xmlns:a="http://schemas.openxmlformats.org/drawingml/2006/main" noGrp="1"/>
-          </p:cNvSpPr>
-          <p:nvPr/>
-        </p:nvSpPr>
-        <p:spPr>
-          <a:xfrm xmlns:a="http://schemas.openxmlformats.org/drawingml/2006/main">
-            <a:off x="9334500" y="2895600"/>
-            <a:ext cx="2095500" cy="285750"/>
+                <a16:creationId xmlns:a16="http://schemas.microsoft.com/office/drawing/2014/main" id="{A456EA19-FBCB-41A7-BAC9-26EDD2BBBB45}"/>
+              </a:ext>
+            </a:extLst>
+          </p:cNvPr>
+          <p:cNvSpPr>
+            <a:spLocks xmlns:a="http://schemas.openxmlformats.org/drawingml/2006/main" noGrp="1"/>
+          </p:cNvSpPr>
+          <p:nvPr/>
+        </p:nvSpPr>
+        <p:spPr>
+          <a:xfrm xmlns:a="http://schemas.openxmlformats.org/drawingml/2006/main">
+            <a:off x="5991225" y="1809750"/>
+            <a:ext cx="5486400" cy="19050"/>
+          </a:xfrm>
+          <a:prstGeom xmlns:a="http://schemas.openxmlformats.org/drawingml/2006/main" prst="rect">
+            <a:avLst/>
+          </a:prstGeom>
+          <a:solidFill xmlns:a="http://schemas.openxmlformats.org/drawingml/2006/main">
+            <a:srgbClr val="4C82FF"/>
+          </a:solidFill>
+          <a:ln xmlns:a="http://schemas.openxmlformats.org/drawingml/2006/main" w="0">
+            <a:noFill/>
+            <a:prstDash val="solid"/>
+          </a:ln>
+        </p:spPr>
+      </p:sp>
+      <p:sp>
+        <p:nvSpPr>
+          <p:cNvPr id="13" name="">
+            <a:extLst xmlns:a="http://schemas.openxmlformats.org/drawingml/2006/main">
+              <a:ext uri="{FF2B5EF4-FFF2-40B4-BE49-F238E27FC236}">
+                <a16:creationId xmlns:a16="http://schemas.microsoft.com/office/drawing/2014/main" id="{80CB960C-9533-41BE-A461-777F270BB967}"/>
+              </a:ext>
+            </a:extLst>
+          </p:cNvPr>
+          <p:cNvSpPr>
+            <a:spLocks xmlns:a="http://schemas.openxmlformats.org/drawingml/2006/main" noGrp="1"/>
+          </p:cNvSpPr>
+          <p:nvPr/>
+        </p:nvSpPr>
+        <p:spPr>
+          <a:xfrm xmlns:a="http://schemas.openxmlformats.org/drawingml/2006/main">
+            <a:off x="5981700" y="1924050"/>
+            <a:ext cx="5495925" cy="1333500"/>
+          </a:xfrm>
+          <a:prstGeom xmlns:a="http://schemas.openxmlformats.org/drawingml/2006/main" prst="roundRect">
+            <a:avLst>
+              <a:gd name="adj" fmla="val 7143"/>
+            </a:avLst>
+          </a:prstGeom>
+          <a:solidFill xmlns:a="http://schemas.openxmlformats.org/drawingml/2006/main">
+            <a:srgbClr val="101B2C"/>
+          </a:solidFill>
+          <a:ln xmlns:a="http://schemas.openxmlformats.org/drawingml/2006/main" w="0">
+            <a:noFill/>
+            <a:prstDash val="solid"/>
+          </a:ln>
+        </p:spPr>
+      </p:sp>
+      <p:sp>
+        <p:nvSpPr>
+          <p:cNvPr id="14" name="">
+            <a:extLst xmlns:a="http://schemas.openxmlformats.org/drawingml/2006/main">
+              <a:ext uri="{FF2B5EF4-FFF2-40B4-BE49-F238E27FC236}">
+                <a16:creationId xmlns:a16="http://schemas.microsoft.com/office/drawing/2014/main" id="{0AACF360-094B-40E2-9A28-D3E1E8001C9B}"/>
+              </a:ext>
+            </a:extLst>
+          </p:cNvPr>
+          <p:cNvSpPr>
+            <a:spLocks xmlns:a="http://schemas.openxmlformats.org/drawingml/2006/main" noGrp="1"/>
+          </p:cNvSpPr>
+          <p:nvPr/>
+        </p:nvSpPr>
+        <p:spPr>
+          <a:xfrm xmlns:a="http://schemas.openxmlformats.org/drawingml/2006/main">
+            <a:off x="6191250" y="2085975"/>
+            <a:ext cx="5076825" cy="1009650"/>
+          </a:xfrm>
+          <a:prstGeom xmlns:a="http://schemas.openxmlformats.org/drawingml/2006/main" prst="rect">
+            <a:avLst/>
+          </a:prstGeom>
+          <a:noFill xmlns:a="http://schemas.openxmlformats.org/drawingml/2006/main"/>
+          <a:ln xmlns:a="http://schemas.openxmlformats.org/drawingml/2006/main" w="0">
+            <a:noFill/>
+            <a:prstDash val="solid"/>
+          </a:ln>
+        </p:spPr>
+        <p:txBody>
+          <a:bodyPr xmlns:a="http://schemas.openxmlformats.org/drawingml/2006/main" lIns="0" tIns="0" rIns="0" bIns="0"/>
+          <a:lstStyle xmlns:a="http://schemas.openxmlformats.org/drawingml/2006/main">
+            <a:defPPr>
+              <a:defRPr sz="1125" b="0">
+                <a:solidFill>
+                  <a:srgbClr val="F6F8FC"/>
+                </a:solidFill>
+                <a:latin typeface="Consolas"/>
+                <a:ea typeface="Consolas"/>
+                <a:cs typeface="Consolas"/>
+              </a:defRPr>
+            </a:defPPr>
+          </a:lstStyle>
+          <a:p xmlns:a="http://schemas.openxmlformats.org/drawingml/2006/main">
+            <a:pPr>
+              <a:defRPr sz="1125" b="0">
+                <a:solidFill>
+                  <a:srgbClr val="F6F8FC"/>
+                </a:solidFill>
+                <a:latin typeface="Consolas"/>
+                <a:ea typeface="Consolas"/>
+                <a:cs typeface="Consolas"/>
+              </a:defRPr>
+            </a:pPr>
+            <a:r>
+              <a:rPr sz="1125" b="0">
+                <a:solidFill>
+                  <a:srgbClr val="F6F8FC"/>
+                </a:solidFill>
+                <a:latin typeface="Consolas"/>
+                <a:ea typeface="Consolas"/>
+                <a:cs typeface="Consolas"/>
+              </a:rPr>
+              <a:t>BOUNDS_CHECK values[index] IN 0..2</a:t>
+            </a:r>
+          </a:p>
+          <a:p xmlns:a="http://schemas.openxmlformats.org/drawingml/2006/main">
+            <a:pPr>
+              <a:defRPr sz="1125" b="0">
+                <a:solidFill>
+                  <a:srgbClr val="F6F8FC"/>
+                </a:solidFill>
+                <a:latin typeface="Consolas"/>
+                <a:ea typeface="Consolas"/>
+                <a:cs typeface="Consolas"/>
+              </a:defRPr>
+            </a:pPr>
+            <a:r>
+              <a:rPr sz="1125" b="0">
+                <a:solidFill>
+                  <a:srgbClr val="F6F8FC"/>
+                </a:solidFill>
+                <a:latin typeface="Consolas"/>
+                <a:ea typeface="Consolas"/>
+                <a:cs typeface="Consolas"/>
+              </a:rPr>
+              <a:t>values[index] = value</a:t>
+            </a:r>
+          </a:p>
+          <a:p xmlns:a="http://schemas.openxmlformats.org/drawingml/2006/main">
+            <a:pPr>
+              <a:defRPr sz="1125" b="0">
+                <a:solidFill>
+                  <a:srgbClr val="F6F8FC"/>
+                </a:solidFill>
+                <a:latin typeface="Consolas"/>
+                <a:ea typeface="Consolas"/>
+                <a:cs typeface="Consolas"/>
+              </a:defRPr>
+            </a:pPr>
+            <a:r>
+              <a:rPr sz="1125" b="0">
+                <a:solidFill>
+                  <a:srgbClr val="F6F8FC"/>
+                </a:solidFill>
+                <a:latin typeface="Consolas"/>
+                <a:ea typeface="Consolas"/>
+                <a:cs typeface="Consolas"/>
+              </a:rPr>
+              <a:t>BOUNDS_CHECK values[index] IN 0..2</a:t>
+            </a:r>
+          </a:p>
+          <a:p xmlns:a="http://schemas.openxmlformats.org/drawingml/2006/main">
+            <a:pPr>
+              <a:defRPr sz="1125" b="0">
+                <a:solidFill>
+                  <a:srgbClr val="F6F8FC"/>
+                </a:solidFill>
+                <a:latin typeface="Consolas"/>
+                <a:ea typeface="Consolas"/>
+                <a:cs typeface="Consolas"/>
+              </a:defRPr>
+            </a:pPr>
+            <a:r>
+              <a:rPr sz="1125" b="0">
+                <a:solidFill>
+                  <a:srgbClr val="F6F8FC"/>
+                </a:solidFill>
+                <a:latin typeface="Consolas"/>
+                <a:ea typeface="Consolas"/>
+                <a:cs typeface="Consolas"/>
+              </a:rPr>
+              <a:t>t1 = values[index]</a:t>
+            </a:r>
+          </a:p>
+          <a:p xmlns:a="http://schemas.openxmlformats.org/drawingml/2006/main">
+            <a:pPr>
+              <a:defRPr sz="1125" b="0">
+                <a:solidFill>
+                  <a:srgbClr val="F6F8FC"/>
+                </a:solidFill>
+                <a:latin typeface="Consolas"/>
+                <a:ea typeface="Consolas"/>
+                <a:cs typeface="Consolas"/>
+              </a:defRPr>
+            </a:pPr>
+            <a:r>
+              <a:rPr sz="1125" b="0">
+                <a:solidFill>
+                  <a:srgbClr val="F6F8FC"/>
+                </a:solidFill>
+                <a:latin typeface="Consolas"/>
+                <a:ea typeface="Consolas"/>
+                <a:cs typeface="Consolas"/>
+              </a:rPr>
+              <a:t>PRINT t1</a:t>
+            </a:r>
+          </a:p>
+        </p:txBody>
+      </p:sp>
+      <p:sp>
+        <p:nvSpPr>
+          <p:cNvPr id="15" name="">
+            <a:extLst xmlns:a="http://schemas.openxmlformats.org/drawingml/2006/main">
+              <a:ext uri="{FF2B5EF4-FFF2-40B4-BE49-F238E27FC236}">
+                <a16:creationId xmlns:a16="http://schemas.microsoft.com/office/drawing/2014/main" id="{63936D57-DB7F-41C3-A65E-6C1D8C3EAC1C}"/>
+              </a:ext>
+            </a:extLst>
+          </p:cNvPr>
+          <p:cNvSpPr>
+            <a:spLocks xmlns:a="http://schemas.openxmlformats.org/drawingml/2006/main" noGrp="1"/>
+          </p:cNvSpPr>
+          <p:nvPr/>
+        </p:nvSpPr>
+        <p:spPr>
+          <a:xfrm xmlns:a="http://schemas.openxmlformats.org/drawingml/2006/main">
+            <a:off x="5991225" y="3419475"/>
+            <a:ext cx="5486400" cy="285750"/>
           </a:xfrm>
           <a:prstGeom xmlns:a="http://schemas.openxmlformats.org/drawingml/2006/main" prst="rect">
             <a:avLst/>
@@ -14765,7 +16362,7 @@
             <a:defPPr>
               <a:defRPr sz="1350" b="1">
                 <a:solidFill>
-                  <a:srgbClr val="20D5EA"/>
+                  <a:srgbClr val="33D69B"/>
                 </a:solidFill>
                 <a:latin typeface="Arial"/>
                 <a:ea typeface="Arial"/>
@@ -14777,7 +16374,7 @@
             <a:pPr>
               <a:defRPr sz="1350" b="1">
                 <a:solidFill>
-                  <a:srgbClr val="20D5EA"/>
+                  <a:srgbClr val="33D69B"/>
                 </a:solidFill>
                 <a:latin typeface="Arial"/>
                 <a:ea typeface="Arial"/>
@@ -14787,35 +16384,99 @@
             <a:r>
               <a:rPr sz="1350" b="1">
                 <a:solidFill>
-                  <a:srgbClr val="20D5EA"/>
-                </a:solidFill>
-                <a:latin typeface="Arial"/>
-                <a:ea typeface="Arial"/>
-                <a:cs typeface="Arial"/>
-              </a:rPr>
-              <a:t>RESULT</a:t>
+                  <a:srgbClr val="33D69B"/>
+                </a:solidFill>
+                <a:latin typeface="Arial"/>
+                <a:ea typeface="Arial"/>
+                <a:cs typeface="Arial"/>
+              </a:rPr>
+              <a:t>GENERATED C CHECK</a:t>
             </a:r>
           </a:p>
         </p:txBody>
       </p:sp>
       <p:sp>
         <p:nvSpPr>
-          <p:cNvPr id="13" name="">
-            <a:extLst xmlns:a="http://schemas.openxmlformats.org/drawingml/2006/main">
-              <a:ext uri="{FF2B5EF4-FFF2-40B4-BE49-F238E27FC236}">
-                <a16:creationId xmlns:a16="http://schemas.microsoft.com/office/drawing/2014/main" id="{0643FFC0-986E-4FD4-8853-B4BC8E51016E}"/>
-              </a:ext>
-            </a:extLst>
-          </p:cNvPr>
-          <p:cNvSpPr>
-            <a:spLocks xmlns:a="http://schemas.openxmlformats.org/drawingml/2006/main" noGrp="1"/>
-          </p:cNvSpPr>
-          <p:nvPr/>
-        </p:nvSpPr>
-        <p:spPr>
-          <a:xfrm xmlns:a="http://schemas.openxmlformats.org/drawingml/2006/main">
-            <a:off x="638175" y="3286125"/>
-            <a:ext cx="3048000" cy="381000"/>
+          <p:cNvPr id="16" name="">
+            <a:extLst xmlns:a="http://schemas.openxmlformats.org/drawingml/2006/main">
+              <a:ext uri="{FF2B5EF4-FFF2-40B4-BE49-F238E27FC236}">
+                <a16:creationId xmlns:a16="http://schemas.microsoft.com/office/drawing/2014/main" id="{41FA16C0-38A7-4AC4-A9F2-123567F6430C}"/>
+              </a:ext>
+            </a:extLst>
+          </p:cNvPr>
+          <p:cNvSpPr>
+            <a:spLocks xmlns:a="http://schemas.openxmlformats.org/drawingml/2006/main" noGrp="1"/>
+          </p:cNvSpPr>
+          <p:nvPr/>
+        </p:nvSpPr>
+        <p:spPr>
+          <a:xfrm xmlns:a="http://schemas.openxmlformats.org/drawingml/2006/main">
+            <a:off x="5991225" y="3762375"/>
+            <a:ext cx="5486400" cy="19050"/>
+          </a:xfrm>
+          <a:prstGeom xmlns:a="http://schemas.openxmlformats.org/drawingml/2006/main" prst="rect">
+            <a:avLst/>
+          </a:prstGeom>
+          <a:solidFill xmlns:a="http://schemas.openxmlformats.org/drawingml/2006/main">
+            <a:srgbClr val="33D69B"/>
+          </a:solidFill>
+          <a:ln xmlns:a="http://schemas.openxmlformats.org/drawingml/2006/main" w="0">
+            <a:noFill/>
+            <a:prstDash val="solid"/>
+          </a:ln>
+        </p:spPr>
+      </p:sp>
+      <p:sp>
+        <p:nvSpPr>
+          <p:cNvPr id="17" name="">
+            <a:extLst xmlns:a="http://schemas.openxmlformats.org/drawingml/2006/main">
+              <a:ext uri="{FF2B5EF4-FFF2-40B4-BE49-F238E27FC236}">
+                <a16:creationId xmlns:a16="http://schemas.microsoft.com/office/drawing/2014/main" id="{7B1D2206-9DA3-42C7-8AD0-A81EAAA829D3}"/>
+              </a:ext>
+            </a:extLst>
+          </p:cNvPr>
+          <p:cNvSpPr>
+            <a:spLocks xmlns:a="http://schemas.openxmlformats.org/drawingml/2006/main" noGrp="1"/>
+          </p:cNvSpPr>
+          <p:nvPr/>
+        </p:nvSpPr>
+        <p:spPr>
+          <a:xfrm xmlns:a="http://schemas.openxmlformats.org/drawingml/2006/main">
+            <a:off x="5981700" y="3876675"/>
+            <a:ext cx="5495925" cy="1466850"/>
+          </a:xfrm>
+          <a:prstGeom xmlns:a="http://schemas.openxmlformats.org/drawingml/2006/main" prst="roundRect">
+            <a:avLst>
+              <a:gd name="adj" fmla="val 6494"/>
+            </a:avLst>
+          </a:prstGeom>
+          <a:solidFill xmlns:a="http://schemas.openxmlformats.org/drawingml/2006/main">
+            <a:srgbClr val="101B2C"/>
+          </a:solidFill>
+          <a:ln xmlns:a="http://schemas.openxmlformats.org/drawingml/2006/main" w="0">
+            <a:noFill/>
+            <a:prstDash val="solid"/>
+          </a:ln>
+        </p:spPr>
+      </p:sp>
+      <p:sp>
+        <p:nvSpPr>
+          <p:cNvPr id="18" name="">
+            <a:extLst xmlns:a="http://schemas.openxmlformats.org/drawingml/2006/main">
+              <a:ext uri="{FF2B5EF4-FFF2-40B4-BE49-F238E27FC236}">
+                <a16:creationId xmlns:a16="http://schemas.microsoft.com/office/drawing/2014/main" id="{61268E3A-2532-437B-97BB-32FBE13BCA0F}"/>
+              </a:ext>
+            </a:extLst>
+          </p:cNvPr>
+          <p:cNvSpPr>
+            <a:spLocks xmlns:a="http://schemas.openxmlformats.org/drawingml/2006/main" noGrp="1"/>
+          </p:cNvSpPr>
+          <p:nvPr/>
+        </p:nvSpPr>
+        <p:spPr>
+          <a:xfrm xmlns:a="http://schemas.openxmlformats.org/drawingml/2006/main">
+            <a:off x="6191250" y="4038600"/>
+            <a:ext cx="5076825" cy="1143000"/>
           </a:xfrm>
           <a:prstGeom xmlns:a="http://schemas.openxmlformats.org/drawingml/2006/main" prst="rect">
             <a:avLst/>
@@ -14830,126 +16491,151 @@
           <a:bodyPr xmlns:a="http://schemas.openxmlformats.org/drawingml/2006/main" lIns="0" tIns="0" rIns="0" bIns="0"/>
           <a:lstStyle xmlns:a="http://schemas.openxmlformats.org/drawingml/2006/main">
             <a:defPPr>
-              <a:defRPr sz="1575" b="0">
-                <a:solidFill>
-                  <a:srgbClr val="F6F8FC"/>
-                </a:solidFill>
-                <a:latin typeface="Arial"/>
-                <a:ea typeface="Arial"/>
-                <a:cs typeface="Arial"/>
+              <a:defRPr sz="1125" b="0">
+                <a:solidFill>
+                  <a:srgbClr val="F6F8FC"/>
+                </a:solidFill>
+                <a:latin typeface="Consolas"/>
+                <a:ea typeface="Consolas"/>
+                <a:cs typeface="Consolas"/>
               </a:defRPr>
             </a:defPPr>
           </a:lstStyle>
           <a:p xmlns:a="http://schemas.openxmlformats.org/drawingml/2006/main">
             <a:pPr>
-              <a:defRPr sz="1575" b="0">
-                <a:solidFill>
-                  <a:srgbClr val="F6F8FC"/>
-                </a:solidFill>
-                <a:latin typeface="Arial"/>
-                <a:ea typeface="Arial"/>
-                <a:cs typeface="Arial"/>
-              </a:defRPr>
-            </a:pPr>
-            <a:r>
-              <a:rPr sz="1575" b="0">
-                <a:solidFill>
-                  <a:srgbClr val="F6F8FC"/>
-                </a:solidFill>
-                <a:latin typeface="Arial"/>
-                <a:ea typeface="Arial"/>
-                <a:cs typeface="Arial"/>
-              </a:rPr>
-              <a:t>Arithmetic</a:t>
+              <a:defRPr sz="1125" b="0">
+                <a:solidFill>
+                  <a:srgbClr val="F6F8FC"/>
+                </a:solidFill>
+                <a:latin typeface="Consolas"/>
+                <a:ea typeface="Consolas"/>
+                <a:cs typeface="Consolas"/>
+              </a:defRPr>
+            </a:pPr>
+            <a:r>
+              <a:rPr sz="1125" b="0">
+                <a:solidFill>
+                  <a:srgbClr val="F6F8FC"/>
+                </a:solidFill>
+                <a:latin typeface="Consolas"/>
+                <a:ea typeface="Consolas"/>
+                <a:cs typeface="Consolas"/>
+              </a:rPr>
+              <a:t>if (index &lt; 0 || index &gt;= 3) {</a:t>
+            </a:r>
+          </a:p>
+          <a:p xmlns:a="http://schemas.openxmlformats.org/drawingml/2006/main">
+            <a:pPr>
+              <a:defRPr sz="1125" b="0">
+                <a:solidFill>
+                  <a:srgbClr val="F6F8FC"/>
+                </a:solidFill>
+                <a:latin typeface="Consolas"/>
+                <a:ea typeface="Consolas"/>
+                <a:cs typeface="Consolas"/>
+              </a:defRPr>
+            </a:pPr>
+            <a:r>
+              <a:rPr sz="1125" b="0">
+                <a:solidFill>
+                  <a:srgbClr val="F6F8FC"/>
+                </a:solidFill>
+                <a:latin typeface="Consolas"/>
+                <a:ea typeface="Consolas"/>
+                <a:cs typeface="Consolas"/>
+              </a:rPr>
+              <a:t>  fprintf(stderr, "Array index out of bounds"</a:t>
+            </a:r>
+          </a:p>
+          <a:p xmlns:a="http://schemas.openxmlformats.org/drawingml/2006/main">
+            <a:pPr>
+              <a:defRPr sz="1125" b="0">
+                <a:solidFill>
+                  <a:srgbClr val="F6F8FC"/>
+                </a:solidFill>
+                <a:latin typeface="Consolas"/>
+                <a:ea typeface="Consolas"/>
+                <a:cs typeface="Consolas"/>
+              </a:defRPr>
+            </a:pPr>
+            <a:r>
+              <a:rPr sz="1125" b="0">
+                <a:solidFill>
+                  <a:srgbClr val="F6F8FC"/>
+                </a:solidFill>
+                <a:latin typeface="Consolas"/>
+                <a:ea typeface="Consolas"/>
+                <a:cs typeface="Consolas"/>
+              </a:rPr>
+              <a:t>          " at pseudocode line 7\n");</a:t>
+            </a:r>
+          </a:p>
+          <a:p xmlns:a="http://schemas.openxmlformats.org/drawingml/2006/main">
+            <a:pPr>
+              <a:defRPr sz="1125" b="0">
+                <a:solidFill>
+                  <a:srgbClr val="F6F8FC"/>
+                </a:solidFill>
+                <a:latin typeface="Consolas"/>
+                <a:ea typeface="Consolas"/>
+                <a:cs typeface="Consolas"/>
+              </a:defRPr>
+            </a:pPr>
+            <a:r>
+              <a:rPr sz="1125" b="0">
+                <a:solidFill>
+                  <a:srgbClr val="F6F8FC"/>
+                </a:solidFill>
+                <a:latin typeface="Consolas"/>
+                <a:ea typeface="Consolas"/>
+                <a:cs typeface="Consolas"/>
+              </a:rPr>
+              <a:t>  return 1;</a:t>
+            </a:r>
+          </a:p>
+          <a:p xmlns:a="http://schemas.openxmlformats.org/drawingml/2006/main">
+            <a:pPr>
+              <a:defRPr sz="1125" b="0">
+                <a:solidFill>
+                  <a:srgbClr val="F6F8FC"/>
+                </a:solidFill>
+                <a:latin typeface="Consolas"/>
+                <a:ea typeface="Consolas"/>
+                <a:cs typeface="Consolas"/>
+              </a:defRPr>
+            </a:pPr>
+            <a:r>
+              <a:rPr sz="1125" b="0">
+                <a:solidFill>
+                  <a:srgbClr val="F6F8FC"/>
+                </a:solidFill>
+                <a:latin typeface="Consolas"/>
+                <a:ea typeface="Consolas"/>
+                <a:cs typeface="Consolas"/>
+              </a:rPr>
+              <a:t>}</a:t>
             </a:r>
           </a:p>
         </p:txBody>
       </p:sp>
       <p:sp>
         <p:nvSpPr>
-          <p:cNvPr id="14" name="">
-            <a:extLst xmlns:a="http://schemas.openxmlformats.org/drawingml/2006/main">
-              <a:ext uri="{FF2B5EF4-FFF2-40B4-BE49-F238E27FC236}">
-                <a16:creationId xmlns:a16="http://schemas.microsoft.com/office/drawing/2014/main" id="{5510C4BE-F820-41B9-9E49-8BA733B35F74}"/>
-              </a:ext>
-            </a:extLst>
-          </p:cNvPr>
-          <p:cNvSpPr>
-            <a:spLocks xmlns:a="http://schemas.openxmlformats.org/drawingml/2006/main" noGrp="1"/>
-          </p:cNvSpPr>
-          <p:nvPr/>
-        </p:nvSpPr>
-        <p:spPr>
-          <a:xfrm xmlns:a="http://schemas.openxmlformats.org/drawingml/2006/main">
-            <a:off x="3905250" y="3286125"/>
-            <a:ext cx="5000625" cy="381000"/>
-          </a:xfrm>
-          <a:prstGeom xmlns:a="http://schemas.openxmlformats.org/drawingml/2006/main" prst="rect">
-            <a:avLst/>
-          </a:prstGeom>
-          <a:noFill xmlns:a="http://schemas.openxmlformats.org/drawingml/2006/main"/>
-          <a:ln xmlns:a="http://schemas.openxmlformats.org/drawingml/2006/main" w="0">
-            <a:noFill/>
-            <a:prstDash val="solid"/>
-          </a:ln>
-        </p:spPr>
-        <p:txBody>
-          <a:bodyPr xmlns:a="http://schemas.openxmlformats.org/drawingml/2006/main" lIns="0" tIns="0" rIns="0" bIns="0"/>
-          <a:lstStyle xmlns:a="http://schemas.openxmlformats.org/drawingml/2006/main">
-            <a:defPPr>
-              <a:defRPr sz="1575" b="0">
-                <a:solidFill>
-                  <a:srgbClr val="AEBBD0"/>
-                </a:solidFill>
-                <a:latin typeface="Arial"/>
-                <a:ea typeface="Arial"/>
-                <a:cs typeface="Arial"/>
-              </a:defRPr>
-            </a:defPPr>
-          </a:lstStyle>
-          <a:p xmlns:a="http://schemas.openxmlformats.org/drawingml/2006/main">
-            <a:pPr>
-              <a:defRPr sz="1575" b="0">
-                <a:solidFill>
-                  <a:srgbClr val="AEBBD0"/>
-                </a:solidFill>
-                <a:latin typeface="Arial"/>
-                <a:ea typeface="Arial"/>
-                <a:cs typeface="Arial"/>
-              </a:defRPr>
-            </a:pPr>
-            <a:r>
-              <a:rPr sz="1575" b="0">
-                <a:solidFill>
-                  <a:srgbClr val="AEBBD0"/>
-                </a:solidFill>
-                <a:latin typeface="Arial"/>
-                <a:ea typeface="Arial"/>
-                <a:cs typeface="Arial"/>
-              </a:rPr>
-              <a:t>2 + 3 × 4</a:t>
-            </a:r>
-          </a:p>
-        </p:txBody>
-      </p:sp>
-      <p:sp>
-        <p:nvSpPr>
-          <p:cNvPr id="15" name="">
-            <a:extLst xmlns:a="http://schemas.openxmlformats.org/drawingml/2006/main">
-              <a:ext uri="{FF2B5EF4-FFF2-40B4-BE49-F238E27FC236}">
-                <a16:creationId xmlns:a16="http://schemas.microsoft.com/office/drawing/2014/main" id="{49135FD6-04CD-4E6A-836B-E51172D0BAA3}"/>
-              </a:ext>
-            </a:extLst>
-          </p:cNvPr>
-          <p:cNvSpPr>
-            <a:spLocks xmlns:a="http://schemas.openxmlformats.org/drawingml/2006/main" noGrp="1"/>
-          </p:cNvSpPr>
-          <p:nvPr/>
-        </p:nvSpPr>
-        <p:spPr>
-          <a:xfrm xmlns:a="http://schemas.openxmlformats.org/drawingml/2006/main">
-            <a:off x="9334500" y="3286125"/>
-            <a:ext cx="2095500" cy="381000"/>
+          <p:cNvPr id="19" name="">
+            <a:extLst xmlns:a="http://schemas.openxmlformats.org/drawingml/2006/main">
+              <a:ext uri="{FF2B5EF4-FFF2-40B4-BE49-F238E27FC236}">
+                <a16:creationId xmlns:a16="http://schemas.microsoft.com/office/drawing/2014/main" id="{3AEA2476-2957-4AC1-9DEB-D50950FB3327}"/>
+              </a:ext>
+            </a:extLst>
+          </p:cNvPr>
+          <p:cNvSpPr>
+            <a:spLocks xmlns:a="http://schemas.openxmlformats.org/drawingml/2006/main" noGrp="1"/>
+          </p:cNvSpPr>
+          <p:nvPr/>
+        </p:nvSpPr>
+        <p:spPr>
+          <a:xfrm xmlns:a="http://schemas.openxmlformats.org/drawingml/2006/main">
+            <a:off x="638175" y="5514975"/>
+            <a:ext cx="10839450" cy="466725"/>
           </a:xfrm>
           <a:prstGeom xmlns:a="http://schemas.openxmlformats.org/drawingml/2006/main" prst="rect">
             <a:avLst/>
@@ -14966,7 +16652,7 @@
             <a:defPPr>
               <a:defRPr sz="1575" b="1">
                 <a:solidFill>
-                  <a:srgbClr val="33D69B"/>
+                  <a:srgbClr val="F6B94D"/>
                 </a:solidFill>
                 <a:latin typeface="Arial"/>
                 <a:ea typeface="Arial"/>
@@ -14978,7 +16664,7 @@
             <a:pPr>
               <a:defRPr sz="1575" b="1">
                 <a:solidFill>
-                  <a:srgbClr val="33D69B"/>
+                  <a:srgbClr val="F6B94D"/>
                 </a:solidFill>
                 <a:latin typeface="Arial"/>
                 <a:ea typeface="Arial"/>
@@ -14988,807 +16674,13 @@
             <a:r>
               <a:rPr sz="1575" b="1">
                 <a:solidFill>
-                  <a:srgbClr val="33D69B"/>
-                </a:solidFill>
-                <a:latin typeface="Arial"/>
-                <a:ea typeface="Arial"/>
-                <a:cs typeface="Arial"/>
-              </a:rPr>
-              <a:t>14</a:t>
-            </a:r>
-          </a:p>
-        </p:txBody>
-      </p:sp>
-      <p:sp>
-        <p:nvSpPr>
-          <p:cNvPr id="16" name="">
-            <a:extLst xmlns:a="http://schemas.openxmlformats.org/drawingml/2006/main">
-              <a:ext uri="{FF2B5EF4-FFF2-40B4-BE49-F238E27FC236}">
-                <a16:creationId xmlns:a16="http://schemas.microsoft.com/office/drawing/2014/main" id="{BBC810B1-364C-469F-8F68-B3955A2E958E}"/>
-              </a:ext>
-            </a:extLst>
-          </p:cNvPr>
-          <p:cNvSpPr>
-            <a:spLocks xmlns:a="http://schemas.openxmlformats.org/drawingml/2006/main" noGrp="1"/>
-          </p:cNvSpPr>
-          <p:nvPr/>
-        </p:nvSpPr>
-        <p:spPr>
-          <a:xfrm xmlns:a="http://schemas.openxmlformats.org/drawingml/2006/main">
-            <a:off x="628650" y="3695700"/>
-            <a:ext cx="10839450" cy="9525"/>
-          </a:xfrm>
-          <a:prstGeom xmlns:a="http://schemas.openxmlformats.org/drawingml/2006/main" prst="rect">
-            <a:avLst/>
-          </a:prstGeom>
-          <a:solidFill xmlns:a="http://schemas.openxmlformats.org/drawingml/2006/main">
-            <a:srgbClr val="29405D"/>
-          </a:solidFill>
-          <a:ln xmlns:a="http://schemas.openxmlformats.org/drawingml/2006/main" w="0">
-            <a:noFill/>
-            <a:prstDash val="solid"/>
-          </a:ln>
-        </p:spPr>
-      </p:sp>
-      <p:sp>
-        <p:nvSpPr>
-          <p:cNvPr id="17" name="">
-            <a:extLst xmlns:a="http://schemas.openxmlformats.org/drawingml/2006/main">
-              <a:ext uri="{FF2B5EF4-FFF2-40B4-BE49-F238E27FC236}">
-                <a16:creationId xmlns:a16="http://schemas.microsoft.com/office/drawing/2014/main" id="{2499FF83-70E7-4FCF-B2B9-D308F06152F6}"/>
-              </a:ext>
-            </a:extLst>
-          </p:cNvPr>
-          <p:cNvSpPr>
-            <a:spLocks xmlns:a="http://schemas.openxmlformats.org/drawingml/2006/main" noGrp="1"/>
-          </p:cNvSpPr>
-          <p:nvPr/>
-        </p:nvSpPr>
-        <p:spPr>
-          <a:xfrm xmlns:a="http://schemas.openxmlformats.org/drawingml/2006/main">
-            <a:off x="638175" y="3829050"/>
-            <a:ext cx="3048000" cy="381000"/>
-          </a:xfrm>
-          <a:prstGeom xmlns:a="http://schemas.openxmlformats.org/drawingml/2006/main" prst="rect">
-            <a:avLst/>
-          </a:prstGeom>
-          <a:noFill xmlns:a="http://schemas.openxmlformats.org/drawingml/2006/main"/>
-          <a:ln xmlns:a="http://schemas.openxmlformats.org/drawingml/2006/main" w="0">
-            <a:noFill/>
-            <a:prstDash val="solid"/>
-          </a:ln>
-        </p:spPr>
-        <p:txBody>
-          <a:bodyPr xmlns:a="http://schemas.openxmlformats.org/drawingml/2006/main" lIns="0" tIns="0" rIns="0" bIns="0"/>
-          <a:lstStyle xmlns:a="http://schemas.openxmlformats.org/drawingml/2006/main">
-            <a:defPPr>
-              <a:defRPr sz="1575" b="0">
-                <a:solidFill>
-                  <a:srgbClr val="F6F8FC"/>
-                </a:solidFill>
-                <a:latin typeface="Arial"/>
-                <a:ea typeface="Arial"/>
-                <a:cs typeface="Arial"/>
-              </a:defRPr>
-            </a:defPPr>
-          </a:lstStyle>
-          <a:p xmlns:a="http://schemas.openxmlformats.org/drawingml/2006/main">
-            <a:pPr>
-              <a:defRPr sz="1575" b="0">
-                <a:solidFill>
-                  <a:srgbClr val="F6F8FC"/>
-                </a:solidFill>
-                <a:latin typeface="Arial"/>
-                <a:ea typeface="Arial"/>
-                <a:cs typeface="Arial"/>
-              </a:defRPr>
-            </a:pPr>
-            <a:r>
-              <a:rPr sz="1575" b="0">
-                <a:solidFill>
-                  <a:srgbClr val="F6F8FC"/>
-                </a:solidFill>
-                <a:latin typeface="Arial"/>
-                <a:ea typeface="Arial"/>
-                <a:cs typeface="Arial"/>
-              </a:rPr>
-              <a:t>FOR + CONTINUE</a:t>
-            </a:r>
-          </a:p>
-        </p:txBody>
-      </p:sp>
-      <p:sp>
-        <p:nvSpPr>
-          <p:cNvPr id="18" name="">
-            <a:extLst xmlns:a="http://schemas.openxmlformats.org/drawingml/2006/main">
-              <a:ext uri="{FF2B5EF4-FFF2-40B4-BE49-F238E27FC236}">
-                <a16:creationId xmlns:a16="http://schemas.microsoft.com/office/drawing/2014/main" id="{6EB47B99-7A7C-44C0-988D-D5CEA07807E7}"/>
-              </a:ext>
-            </a:extLst>
-          </p:cNvPr>
-          <p:cNvSpPr>
-            <a:spLocks xmlns:a="http://schemas.openxmlformats.org/drawingml/2006/main" noGrp="1"/>
-          </p:cNvSpPr>
-          <p:nvPr/>
-        </p:nvSpPr>
-        <p:spPr>
-          <a:xfrm xmlns:a="http://schemas.openxmlformats.org/drawingml/2006/main">
-            <a:off x="3905250" y="3829050"/>
-            <a:ext cx="5000625" cy="381000"/>
-          </a:xfrm>
-          <a:prstGeom xmlns:a="http://schemas.openxmlformats.org/drawingml/2006/main" prst="rect">
-            <a:avLst/>
-          </a:prstGeom>
-          <a:noFill xmlns:a="http://schemas.openxmlformats.org/drawingml/2006/main"/>
-          <a:ln xmlns:a="http://schemas.openxmlformats.org/drawingml/2006/main" w="0">
-            <a:noFill/>
-            <a:prstDash val="solid"/>
-          </a:ln>
-        </p:spPr>
-        <p:txBody>
-          <a:bodyPr xmlns:a="http://schemas.openxmlformats.org/drawingml/2006/main" lIns="0" tIns="0" rIns="0" bIns="0"/>
-          <a:lstStyle xmlns:a="http://schemas.openxmlformats.org/drawingml/2006/main">
-            <a:defPPr>
-              <a:defRPr sz="1575" b="0">
-                <a:solidFill>
-                  <a:srgbClr val="AEBBD0"/>
-                </a:solidFill>
-                <a:latin typeface="Arial"/>
-                <a:ea typeface="Arial"/>
-                <a:cs typeface="Arial"/>
-              </a:defRPr>
-            </a:defPPr>
-          </a:lstStyle>
-          <a:p xmlns:a="http://schemas.openxmlformats.org/drawingml/2006/main">
-            <a:pPr>
-              <a:defRPr sz="1575" b="0">
-                <a:solidFill>
-                  <a:srgbClr val="AEBBD0"/>
-                </a:solidFill>
-                <a:latin typeface="Arial"/>
-                <a:ea typeface="Arial"/>
-                <a:cs typeface="Arial"/>
-              </a:defRPr>
-            </a:pPr>
-            <a:r>
-              <a:rPr sz="1575" b="0">
-                <a:solidFill>
-                  <a:srgbClr val="AEBBD0"/>
-                </a:solidFill>
-                <a:latin typeface="Arial"/>
-                <a:ea typeface="Arial"/>
-                <a:cs typeface="Arial"/>
-              </a:rPr>
-              <a:t>skip 2 from 1 to 4</a:t>
-            </a:r>
-          </a:p>
-        </p:txBody>
-      </p:sp>
-      <p:sp>
-        <p:nvSpPr>
-          <p:cNvPr id="19" name="">
-            <a:extLst xmlns:a="http://schemas.openxmlformats.org/drawingml/2006/main">
-              <a:ext uri="{FF2B5EF4-FFF2-40B4-BE49-F238E27FC236}">
-                <a16:creationId xmlns:a16="http://schemas.microsoft.com/office/drawing/2014/main" id="{DADFD0DD-1607-4E79-BF94-99DA503655F7}"/>
-              </a:ext>
-            </a:extLst>
-          </p:cNvPr>
-          <p:cNvSpPr>
-            <a:spLocks xmlns:a="http://schemas.openxmlformats.org/drawingml/2006/main" noGrp="1"/>
-          </p:cNvSpPr>
-          <p:nvPr/>
-        </p:nvSpPr>
-        <p:spPr>
-          <a:xfrm xmlns:a="http://schemas.openxmlformats.org/drawingml/2006/main">
-            <a:off x="9334500" y="3829050"/>
-            <a:ext cx="2095500" cy="381000"/>
-          </a:xfrm>
-          <a:prstGeom xmlns:a="http://schemas.openxmlformats.org/drawingml/2006/main" prst="rect">
-            <a:avLst/>
-          </a:prstGeom>
-          <a:noFill xmlns:a="http://schemas.openxmlformats.org/drawingml/2006/main"/>
-          <a:ln xmlns:a="http://schemas.openxmlformats.org/drawingml/2006/main" w="0">
-            <a:noFill/>
-            <a:prstDash val="solid"/>
-          </a:ln>
-        </p:spPr>
-        <p:txBody>
-          <a:bodyPr xmlns:a="http://schemas.openxmlformats.org/drawingml/2006/main" lIns="0" tIns="0" rIns="0" bIns="0"/>
-          <a:lstStyle xmlns:a="http://schemas.openxmlformats.org/drawingml/2006/main">
-            <a:defPPr>
-              <a:defRPr sz="1575" b="1">
-                <a:solidFill>
-                  <a:srgbClr val="33D69B"/>
-                </a:solidFill>
-                <a:latin typeface="Arial"/>
-                <a:ea typeface="Arial"/>
-                <a:cs typeface="Arial"/>
-              </a:defRPr>
-            </a:defPPr>
-          </a:lstStyle>
-          <a:p xmlns:a="http://schemas.openxmlformats.org/drawingml/2006/main">
-            <a:pPr>
-              <a:defRPr sz="1575" b="1">
-                <a:solidFill>
-                  <a:srgbClr val="33D69B"/>
-                </a:solidFill>
-                <a:latin typeface="Arial"/>
-                <a:ea typeface="Arial"/>
-                <a:cs typeface="Arial"/>
-              </a:defRPr>
-            </a:pPr>
-            <a:r>
-              <a:rPr sz="1575" b="1">
-                <a:solidFill>
-                  <a:srgbClr val="33D69B"/>
-                </a:solidFill>
-                <a:latin typeface="Arial"/>
-                <a:ea typeface="Arial"/>
-                <a:cs typeface="Arial"/>
-              </a:rPr>
-              <a:t>8</a:t>
-            </a:r>
-          </a:p>
-        </p:txBody>
-      </p:sp>
-      <p:sp>
-        <p:nvSpPr>
-          <p:cNvPr id="20" name="">
-            <a:extLst xmlns:a="http://schemas.openxmlformats.org/drawingml/2006/main">
-              <a:ext uri="{FF2B5EF4-FFF2-40B4-BE49-F238E27FC236}">
-                <a16:creationId xmlns:a16="http://schemas.microsoft.com/office/drawing/2014/main" id="{1BAF2382-2315-43A1-8B65-6F7205A94329}"/>
-              </a:ext>
-            </a:extLst>
-          </p:cNvPr>
-          <p:cNvSpPr>
-            <a:spLocks xmlns:a="http://schemas.openxmlformats.org/drawingml/2006/main" noGrp="1"/>
-          </p:cNvSpPr>
-          <p:nvPr/>
-        </p:nvSpPr>
-        <p:spPr>
-          <a:xfrm xmlns:a="http://schemas.openxmlformats.org/drawingml/2006/main">
-            <a:off x="628650" y="4238625"/>
-            <a:ext cx="10839450" cy="9525"/>
-          </a:xfrm>
-          <a:prstGeom xmlns:a="http://schemas.openxmlformats.org/drawingml/2006/main" prst="rect">
-            <a:avLst/>
-          </a:prstGeom>
-          <a:solidFill xmlns:a="http://schemas.openxmlformats.org/drawingml/2006/main">
-            <a:srgbClr val="29405D"/>
-          </a:solidFill>
-          <a:ln xmlns:a="http://schemas.openxmlformats.org/drawingml/2006/main" w="0">
-            <a:noFill/>
-            <a:prstDash val="solid"/>
-          </a:ln>
-        </p:spPr>
-      </p:sp>
-      <p:sp>
-        <p:nvSpPr>
-          <p:cNvPr id="21" name="">
-            <a:extLst xmlns:a="http://schemas.openxmlformats.org/drawingml/2006/main">
-              <a:ext uri="{FF2B5EF4-FFF2-40B4-BE49-F238E27FC236}">
-                <a16:creationId xmlns:a16="http://schemas.microsoft.com/office/drawing/2014/main" id="{F8434F5E-30E5-4877-AE27-E5C4419AD53F}"/>
-              </a:ext>
-            </a:extLst>
-          </p:cNvPr>
-          <p:cNvSpPr>
-            <a:spLocks xmlns:a="http://schemas.openxmlformats.org/drawingml/2006/main" noGrp="1"/>
-          </p:cNvSpPr>
-          <p:nvPr/>
-        </p:nvSpPr>
-        <p:spPr>
-          <a:xfrm xmlns:a="http://schemas.openxmlformats.org/drawingml/2006/main">
-            <a:off x="638175" y="4371975"/>
-            <a:ext cx="3048000" cy="381000"/>
-          </a:xfrm>
-          <a:prstGeom xmlns:a="http://schemas.openxmlformats.org/drawingml/2006/main" prst="rect">
-            <a:avLst/>
-          </a:prstGeom>
-          <a:noFill xmlns:a="http://schemas.openxmlformats.org/drawingml/2006/main"/>
-          <a:ln xmlns:a="http://schemas.openxmlformats.org/drawingml/2006/main" w="0">
-            <a:noFill/>
-            <a:prstDash val="solid"/>
-          </a:ln>
-        </p:spPr>
-        <p:txBody>
-          <a:bodyPr xmlns:a="http://schemas.openxmlformats.org/drawingml/2006/main" lIns="0" tIns="0" rIns="0" bIns="0"/>
-          <a:lstStyle xmlns:a="http://schemas.openxmlformats.org/drawingml/2006/main">
-            <a:defPPr>
-              <a:defRPr sz="1575" b="0">
-                <a:solidFill>
-                  <a:srgbClr val="F6F8FC"/>
-                </a:solidFill>
-                <a:latin typeface="Arial"/>
-                <a:ea typeface="Arial"/>
-                <a:cs typeface="Arial"/>
-              </a:defRPr>
-            </a:defPPr>
-          </a:lstStyle>
-          <a:p xmlns:a="http://schemas.openxmlformats.org/drawingml/2006/main">
-            <a:pPr>
-              <a:defRPr sz="1575" b="0">
-                <a:solidFill>
-                  <a:srgbClr val="F6F8FC"/>
-                </a:solidFill>
-                <a:latin typeface="Arial"/>
-                <a:ea typeface="Arial"/>
-                <a:cs typeface="Arial"/>
-              </a:defRPr>
-            </a:pPr>
-            <a:r>
-              <a:rPr sz="1575" b="0">
-                <a:solidFill>
-                  <a:srgbClr val="F6F8FC"/>
-                </a:solidFill>
-                <a:latin typeface="Arial"/>
-                <a:ea typeface="Arial"/>
-                <a:cs typeface="Arial"/>
-              </a:rPr>
-              <a:t>Division guard</a:t>
-            </a:r>
-          </a:p>
-        </p:txBody>
-      </p:sp>
-      <p:sp>
-        <p:nvSpPr>
-          <p:cNvPr id="22" name="">
-            <a:extLst xmlns:a="http://schemas.openxmlformats.org/drawingml/2006/main">
-              <a:ext uri="{FF2B5EF4-FFF2-40B4-BE49-F238E27FC236}">
-                <a16:creationId xmlns:a16="http://schemas.microsoft.com/office/drawing/2014/main" id="{B85B123D-F8AA-413E-BC96-BEA427CC1E68}"/>
-              </a:ext>
-            </a:extLst>
-          </p:cNvPr>
-          <p:cNvSpPr>
-            <a:spLocks xmlns:a="http://schemas.openxmlformats.org/drawingml/2006/main" noGrp="1"/>
-          </p:cNvSpPr>
-          <p:nvPr/>
-        </p:nvSpPr>
-        <p:spPr>
-          <a:xfrm xmlns:a="http://schemas.openxmlformats.org/drawingml/2006/main">
-            <a:off x="3905250" y="4371975"/>
-            <a:ext cx="5000625" cy="381000"/>
-          </a:xfrm>
-          <a:prstGeom xmlns:a="http://schemas.openxmlformats.org/drawingml/2006/main" prst="rect">
-            <a:avLst/>
-          </a:prstGeom>
-          <a:noFill xmlns:a="http://schemas.openxmlformats.org/drawingml/2006/main"/>
-          <a:ln xmlns:a="http://schemas.openxmlformats.org/drawingml/2006/main" w="0">
-            <a:noFill/>
-            <a:prstDash val="solid"/>
-          </a:ln>
-        </p:spPr>
-        <p:txBody>
-          <a:bodyPr xmlns:a="http://schemas.openxmlformats.org/drawingml/2006/main" lIns="0" tIns="0" rIns="0" bIns="0"/>
-          <a:lstStyle xmlns:a="http://schemas.openxmlformats.org/drawingml/2006/main">
-            <a:defPPr>
-              <a:defRPr sz="1575" b="0">
-                <a:solidFill>
-                  <a:srgbClr val="AEBBD0"/>
-                </a:solidFill>
-                <a:latin typeface="Arial"/>
-                <a:ea typeface="Arial"/>
-                <a:cs typeface="Arial"/>
-              </a:defRPr>
-            </a:defPPr>
-          </a:lstStyle>
-          <a:p xmlns:a="http://schemas.openxmlformats.org/drawingml/2006/main">
-            <a:pPr>
-              <a:defRPr sz="1575" b="0">
-                <a:solidFill>
-                  <a:srgbClr val="AEBBD0"/>
-                </a:solidFill>
-                <a:latin typeface="Arial"/>
-                <a:ea typeface="Arial"/>
-                <a:cs typeface="Arial"/>
-              </a:defRPr>
-            </a:pPr>
-            <a:r>
-              <a:rPr sz="1575" b="0">
-                <a:solidFill>
-                  <a:srgbClr val="AEBBD0"/>
-                </a:solidFill>
-                <a:latin typeface="Arial"/>
-                <a:ea typeface="Arial"/>
-                <a:cs typeface="Arial"/>
-              </a:rPr>
-              <a:t>zero divisor</a:t>
-            </a:r>
-          </a:p>
-        </p:txBody>
-      </p:sp>
-      <p:sp>
-        <p:nvSpPr>
-          <p:cNvPr id="23" name="">
-            <a:extLst xmlns:a="http://schemas.openxmlformats.org/drawingml/2006/main">
-              <a:ext uri="{FF2B5EF4-FFF2-40B4-BE49-F238E27FC236}">
-                <a16:creationId xmlns:a16="http://schemas.microsoft.com/office/drawing/2014/main" id="{6AAD1010-1419-4D4B-89E1-DF371D4858F4}"/>
-              </a:ext>
-            </a:extLst>
-          </p:cNvPr>
-          <p:cNvSpPr>
-            <a:spLocks xmlns:a="http://schemas.openxmlformats.org/drawingml/2006/main" noGrp="1"/>
-          </p:cNvSpPr>
-          <p:nvPr/>
-        </p:nvSpPr>
-        <p:spPr>
-          <a:xfrm xmlns:a="http://schemas.openxmlformats.org/drawingml/2006/main">
-            <a:off x="9334500" y="4371975"/>
-            <a:ext cx="2095500" cy="381000"/>
-          </a:xfrm>
-          <a:prstGeom xmlns:a="http://schemas.openxmlformats.org/drawingml/2006/main" prst="rect">
-            <a:avLst/>
-          </a:prstGeom>
-          <a:noFill xmlns:a="http://schemas.openxmlformats.org/drawingml/2006/main"/>
-          <a:ln xmlns:a="http://schemas.openxmlformats.org/drawingml/2006/main" w="0">
-            <a:noFill/>
-            <a:prstDash val="solid"/>
-          </a:ln>
-        </p:spPr>
-        <p:txBody>
-          <a:bodyPr xmlns:a="http://schemas.openxmlformats.org/drawingml/2006/main" lIns="0" tIns="0" rIns="0" bIns="0"/>
-          <a:lstStyle xmlns:a="http://schemas.openxmlformats.org/drawingml/2006/main">
-            <a:defPPr>
-              <a:defRPr sz="1575" b="1">
-                <a:solidFill>
                   <a:srgbClr val="F6B94D"/>
                 </a:solidFill>
                 <a:latin typeface="Arial"/>
                 <a:ea typeface="Arial"/>
                 <a:cs typeface="Arial"/>
-              </a:defRPr>
-            </a:defPPr>
-          </a:lstStyle>
-          <a:p xmlns:a="http://schemas.openxmlformats.org/drawingml/2006/main">
-            <a:pPr>
-              <a:defRPr sz="1575" b="1">
-                <a:solidFill>
-                  <a:srgbClr val="F6B94D"/>
-                </a:solidFill>
-                <a:latin typeface="Arial"/>
-                <a:ea typeface="Arial"/>
-                <a:cs typeface="Arial"/>
-              </a:defRPr>
-            </a:pPr>
-            <a:r>
-              <a:rPr sz="1575" b="1">
-                <a:solidFill>
-                  <a:srgbClr val="F6B94D"/>
-                </a:solidFill>
-                <a:latin typeface="Arial"/>
-                <a:ea typeface="Arial"/>
-                <a:cs typeface="Arial"/>
-              </a:rPr>
-              <a:t>diagnostic</a:t>
-            </a:r>
-          </a:p>
-        </p:txBody>
-      </p:sp>
-      <p:sp>
-        <p:nvSpPr>
-          <p:cNvPr id="24" name="">
-            <a:extLst xmlns:a="http://schemas.openxmlformats.org/drawingml/2006/main">
-              <a:ext uri="{FF2B5EF4-FFF2-40B4-BE49-F238E27FC236}">
-                <a16:creationId xmlns:a16="http://schemas.microsoft.com/office/drawing/2014/main" id="{44F2B25A-189F-43C0-AFE5-B9D1A7F117EB}"/>
-              </a:ext>
-            </a:extLst>
-          </p:cNvPr>
-          <p:cNvSpPr>
-            <a:spLocks xmlns:a="http://schemas.openxmlformats.org/drawingml/2006/main" noGrp="1"/>
-          </p:cNvSpPr>
-          <p:nvPr/>
-        </p:nvSpPr>
-        <p:spPr>
-          <a:xfrm xmlns:a="http://schemas.openxmlformats.org/drawingml/2006/main">
-            <a:off x="628650" y="4781550"/>
-            <a:ext cx="10839450" cy="9525"/>
-          </a:xfrm>
-          <a:prstGeom xmlns:a="http://schemas.openxmlformats.org/drawingml/2006/main" prst="rect">
-            <a:avLst/>
-          </a:prstGeom>
-          <a:solidFill xmlns:a="http://schemas.openxmlformats.org/drawingml/2006/main">
-            <a:srgbClr val="29405D"/>
-          </a:solidFill>
-          <a:ln xmlns:a="http://schemas.openxmlformats.org/drawingml/2006/main" w="0">
-            <a:noFill/>
-            <a:prstDash val="solid"/>
-          </a:ln>
-        </p:spPr>
-      </p:sp>
-      <p:sp>
-        <p:nvSpPr>
-          <p:cNvPr id="25" name="">
-            <a:extLst xmlns:a="http://schemas.openxmlformats.org/drawingml/2006/main">
-              <a:ext uri="{FF2B5EF4-FFF2-40B4-BE49-F238E27FC236}">
-                <a16:creationId xmlns:a16="http://schemas.microsoft.com/office/drawing/2014/main" id="{D2544994-B67A-4884-A7C3-F0B5D36883D3}"/>
-              </a:ext>
-            </a:extLst>
-          </p:cNvPr>
-          <p:cNvSpPr>
-            <a:spLocks xmlns:a="http://schemas.openxmlformats.org/drawingml/2006/main" noGrp="1"/>
-          </p:cNvSpPr>
-          <p:nvPr/>
-        </p:nvSpPr>
-        <p:spPr>
-          <a:xfrm xmlns:a="http://schemas.openxmlformats.org/drawingml/2006/main">
-            <a:off x="638175" y="4914900"/>
-            <a:ext cx="3048000" cy="381000"/>
-          </a:xfrm>
-          <a:prstGeom xmlns:a="http://schemas.openxmlformats.org/drawingml/2006/main" prst="rect">
-            <a:avLst/>
-          </a:prstGeom>
-          <a:noFill xmlns:a="http://schemas.openxmlformats.org/drawingml/2006/main"/>
-          <a:ln xmlns:a="http://schemas.openxmlformats.org/drawingml/2006/main" w="0">
-            <a:noFill/>
-            <a:prstDash val="solid"/>
-          </a:ln>
-        </p:spPr>
-        <p:txBody>
-          <a:bodyPr xmlns:a="http://schemas.openxmlformats.org/drawingml/2006/main" lIns="0" tIns="0" rIns="0" bIns="0"/>
-          <a:lstStyle xmlns:a="http://schemas.openxmlformats.org/drawingml/2006/main">
-            <a:defPPr>
-              <a:defRPr sz="1575" b="0">
-                <a:solidFill>
-                  <a:srgbClr val="F6F8FC"/>
-                </a:solidFill>
-                <a:latin typeface="Arial"/>
-                <a:ea typeface="Arial"/>
-                <a:cs typeface="Arial"/>
-              </a:defRPr>
-            </a:defPPr>
-          </a:lstStyle>
-          <a:p xmlns:a="http://schemas.openxmlformats.org/drawingml/2006/main">
-            <a:pPr>
-              <a:defRPr sz="1575" b="0">
-                <a:solidFill>
-                  <a:srgbClr val="F6F8FC"/>
-                </a:solidFill>
-                <a:latin typeface="Arial"/>
-                <a:ea typeface="Arial"/>
-                <a:cs typeface="Arial"/>
-              </a:defRPr>
-            </a:pPr>
-            <a:r>
-              <a:rPr sz="1575" b="0">
-                <a:solidFill>
-                  <a:srgbClr val="F6F8FC"/>
-                </a:solidFill>
-                <a:latin typeface="Arial"/>
-                <a:ea typeface="Arial"/>
-                <a:cs typeface="Arial"/>
-              </a:rPr>
-              <a:t>Invalid source</a:t>
-            </a:r>
-          </a:p>
-        </p:txBody>
-      </p:sp>
-      <p:sp>
-        <p:nvSpPr>
-          <p:cNvPr id="26" name="">
-            <a:extLst xmlns:a="http://schemas.openxmlformats.org/drawingml/2006/main">
-              <a:ext uri="{FF2B5EF4-FFF2-40B4-BE49-F238E27FC236}">
-                <a16:creationId xmlns:a16="http://schemas.microsoft.com/office/drawing/2014/main" id="{FE78F0A7-56DE-4FEF-929A-B92979AFAF9A}"/>
-              </a:ext>
-            </a:extLst>
-          </p:cNvPr>
-          <p:cNvSpPr>
-            <a:spLocks xmlns:a="http://schemas.openxmlformats.org/drawingml/2006/main" noGrp="1"/>
-          </p:cNvSpPr>
-          <p:nvPr/>
-        </p:nvSpPr>
-        <p:spPr>
-          <a:xfrm xmlns:a="http://schemas.openxmlformats.org/drawingml/2006/main">
-            <a:off x="3905250" y="4914900"/>
-            <a:ext cx="5000625" cy="381000"/>
-          </a:xfrm>
-          <a:prstGeom xmlns:a="http://schemas.openxmlformats.org/drawingml/2006/main" prst="rect">
-            <a:avLst/>
-          </a:prstGeom>
-          <a:noFill xmlns:a="http://schemas.openxmlformats.org/drawingml/2006/main"/>
-          <a:ln xmlns:a="http://schemas.openxmlformats.org/drawingml/2006/main" w="0">
-            <a:noFill/>
-            <a:prstDash val="solid"/>
-          </a:ln>
-        </p:spPr>
-        <p:txBody>
-          <a:bodyPr xmlns:a="http://schemas.openxmlformats.org/drawingml/2006/main" lIns="0" tIns="0" rIns="0" bIns="0"/>
-          <a:lstStyle xmlns:a="http://schemas.openxmlformats.org/drawingml/2006/main">
-            <a:defPPr>
-              <a:defRPr sz="1575" b="0">
-                <a:solidFill>
-                  <a:srgbClr val="AEBBD0"/>
-                </a:solidFill>
-                <a:latin typeface="Arial"/>
-                <a:ea typeface="Arial"/>
-                <a:cs typeface="Arial"/>
-              </a:defRPr>
-            </a:defPPr>
-          </a:lstStyle>
-          <a:p xmlns:a="http://schemas.openxmlformats.org/drawingml/2006/main">
-            <a:pPr>
-              <a:defRPr sz="1575" b="0">
-                <a:solidFill>
-                  <a:srgbClr val="AEBBD0"/>
-                </a:solidFill>
-                <a:latin typeface="Arial"/>
-                <a:ea typeface="Arial"/>
-                <a:cs typeface="Arial"/>
-              </a:defRPr>
-            </a:pPr>
-            <a:r>
-              <a:rPr sz="1575" b="0">
-                <a:solidFill>
-                  <a:srgbClr val="AEBBD0"/>
-                </a:solidFill>
-                <a:latin typeface="Arial"/>
-                <a:ea typeface="Arial"/>
-                <a:cs typeface="Arial"/>
-              </a:rPr>
-              <a:t>undeclared name</a:t>
-            </a:r>
-          </a:p>
-        </p:txBody>
-      </p:sp>
-      <p:sp>
-        <p:nvSpPr>
-          <p:cNvPr id="27" name="">
-            <a:extLst xmlns:a="http://schemas.openxmlformats.org/drawingml/2006/main">
-              <a:ext uri="{FF2B5EF4-FFF2-40B4-BE49-F238E27FC236}">
-                <a16:creationId xmlns:a16="http://schemas.microsoft.com/office/drawing/2014/main" id="{F5A765A0-8A03-4425-B6DC-5D85A04D5B96}"/>
-              </a:ext>
-            </a:extLst>
-          </p:cNvPr>
-          <p:cNvSpPr>
-            <a:spLocks xmlns:a="http://schemas.openxmlformats.org/drawingml/2006/main" noGrp="1"/>
-          </p:cNvSpPr>
-          <p:nvPr/>
-        </p:nvSpPr>
-        <p:spPr>
-          <a:xfrm xmlns:a="http://schemas.openxmlformats.org/drawingml/2006/main">
-            <a:off x="9334500" y="4914900"/>
-            <a:ext cx="2095500" cy="381000"/>
-          </a:xfrm>
-          <a:prstGeom xmlns:a="http://schemas.openxmlformats.org/drawingml/2006/main" prst="rect">
-            <a:avLst/>
-          </a:prstGeom>
-          <a:noFill xmlns:a="http://schemas.openxmlformats.org/drawingml/2006/main"/>
-          <a:ln xmlns:a="http://schemas.openxmlformats.org/drawingml/2006/main" w="0">
-            <a:noFill/>
-            <a:prstDash val="solid"/>
-          </a:ln>
-        </p:spPr>
-        <p:txBody>
-          <a:bodyPr xmlns:a="http://schemas.openxmlformats.org/drawingml/2006/main" lIns="0" tIns="0" rIns="0" bIns="0"/>
-          <a:lstStyle xmlns:a="http://schemas.openxmlformats.org/drawingml/2006/main">
-            <a:defPPr>
-              <a:defRPr sz="1575" b="1">
-                <a:solidFill>
-                  <a:srgbClr val="F6B94D"/>
-                </a:solidFill>
-                <a:latin typeface="Arial"/>
-                <a:ea typeface="Arial"/>
-                <a:cs typeface="Arial"/>
-              </a:defRPr>
-            </a:defPPr>
-          </a:lstStyle>
-          <a:p xmlns:a="http://schemas.openxmlformats.org/drawingml/2006/main">
-            <a:pPr>
-              <a:defRPr sz="1575" b="1">
-                <a:solidFill>
-                  <a:srgbClr val="F6B94D"/>
-                </a:solidFill>
-                <a:latin typeface="Arial"/>
-                <a:ea typeface="Arial"/>
-                <a:cs typeface="Arial"/>
-              </a:defRPr>
-            </a:pPr>
-            <a:r>
-              <a:rPr sz="1575" b="1">
-                <a:solidFill>
-                  <a:srgbClr val="F6B94D"/>
-                </a:solidFill>
-                <a:latin typeface="Arial"/>
-                <a:ea typeface="Arial"/>
-                <a:cs typeface="Arial"/>
-              </a:rPr>
-              <a:t>rejected</a:t>
-            </a:r>
-          </a:p>
-        </p:txBody>
-      </p:sp>
-      <p:sp>
-        <p:nvSpPr>
-          <p:cNvPr id="28" name="">
-            <a:extLst xmlns:a="http://schemas.openxmlformats.org/drawingml/2006/main">
-              <a:ext uri="{FF2B5EF4-FFF2-40B4-BE49-F238E27FC236}">
-                <a16:creationId xmlns:a16="http://schemas.microsoft.com/office/drawing/2014/main" id="{66367774-BFEF-4D02-820D-529A5C80B610}"/>
-              </a:ext>
-            </a:extLst>
-          </p:cNvPr>
-          <p:cNvSpPr>
-            <a:spLocks xmlns:a="http://schemas.openxmlformats.org/drawingml/2006/main" noGrp="1"/>
-          </p:cNvSpPr>
-          <p:nvPr/>
-        </p:nvSpPr>
-        <p:spPr>
-          <a:xfrm xmlns:a="http://schemas.openxmlformats.org/drawingml/2006/main">
-            <a:off x="628650" y="5324475"/>
-            <a:ext cx="10839450" cy="9525"/>
-          </a:xfrm>
-          <a:prstGeom xmlns:a="http://schemas.openxmlformats.org/drawingml/2006/main" prst="rect">
-            <a:avLst/>
-          </a:prstGeom>
-          <a:solidFill xmlns:a="http://schemas.openxmlformats.org/drawingml/2006/main">
-            <a:srgbClr val="29405D"/>
-          </a:solidFill>
-          <a:ln xmlns:a="http://schemas.openxmlformats.org/drawingml/2006/main" w="0">
-            <a:noFill/>
-            <a:prstDash val="solid"/>
-          </a:ln>
-        </p:spPr>
-      </p:sp>
-      <p:sp>
-        <p:nvSpPr>
-          <p:cNvPr id="29" name="">
-            <a:extLst xmlns:a="http://schemas.openxmlformats.org/drawingml/2006/main">
-              <a:ext uri="{FF2B5EF4-FFF2-40B4-BE49-F238E27FC236}">
-                <a16:creationId xmlns:a16="http://schemas.microsoft.com/office/drawing/2014/main" id="{57602008-8D20-458E-A2DA-15A7A96D1CA4}"/>
-              </a:ext>
-            </a:extLst>
-          </p:cNvPr>
-          <p:cNvSpPr>
-            <a:spLocks xmlns:a="http://schemas.openxmlformats.org/drawingml/2006/main" noGrp="1"/>
-          </p:cNvSpPr>
-          <p:nvPr/>
-        </p:nvSpPr>
-        <p:spPr>
-          <a:xfrm xmlns:a="http://schemas.openxmlformats.org/drawingml/2006/main">
-            <a:off x="638175" y="5724525"/>
-            <a:ext cx="10191750" cy="400050"/>
-          </a:xfrm>
-          <a:prstGeom xmlns:a="http://schemas.openxmlformats.org/drawingml/2006/main" prst="rect">
-            <a:avLst/>
-          </a:prstGeom>
-          <a:noFill xmlns:a="http://schemas.openxmlformats.org/drawingml/2006/main"/>
-          <a:ln xmlns:a="http://schemas.openxmlformats.org/drawingml/2006/main" w="0">
-            <a:noFill/>
-            <a:prstDash val="solid"/>
-          </a:ln>
-        </p:spPr>
-        <p:txBody>
-          <a:bodyPr xmlns:a="http://schemas.openxmlformats.org/drawingml/2006/main" lIns="0" tIns="0" rIns="0" bIns="0"/>
-          <a:lstStyle xmlns:a="http://schemas.openxmlformats.org/drawingml/2006/main">
-            <a:defPPr>
-              <a:defRPr sz="1500" b="1">
-                <a:solidFill>
-                  <a:srgbClr val="33D69B"/>
-                </a:solidFill>
-                <a:latin typeface="Arial"/>
-                <a:ea typeface="Arial"/>
-                <a:cs typeface="Arial"/>
-              </a:defRPr>
-            </a:defPPr>
-          </a:lstStyle>
-          <a:p xmlns:a="http://schemas.openxmlformats.org/drawingml/2006/main">
-            <a:pPr>
-              <a:defRPr sz="1500" b="1">
-                <a:solidFill>
-                  <a:srgbClr val="33D69B"/>
-                </a:solidFill>
-                <a:latin typeface="Arial"/>
-                <a:ea typeface="Arial"/>
-                <a:cs typeface="Arial"/>
-              </a:defRPr>
-            </a:pPr>
-            <a:r>
-              <a:rPr sz="1500" b="1">
-                <a:solidFill>
-                  <a:srgbClr val="33D69B"/>
-                </a:solidFill>
-                <a:latin typeface="Arial"/>
-                <a:ea typeface="Arial"/>
-                <a:cs typeface="Arial"/>
-              </a:rPr>
-              <a:t>Optimizer check: 30 programs, 60 executions, no observed differences.</a:t>
+              </a:rPr>
+              <a:t>INPUT: 3 42     RESULT: bounds error at line 7, exit status 1</a:t>
             </a:r>
           </a:p>
         </p:txBody>
@@ -15796,7 +16688,7 @@
     </p:spTree>
     <p:extLst>
       <p:ext uri="{BB962C8B-B14F-4D97-AF65-F5344CB8AC3E}">
-        <p14:creationId xmlns:p14="http://schemas.microsoft.com/office/powerpoint/2010/main" val="993001783"/>
+        <p14:creationId xmlns:p14="http://schemas.microsoft.com/office/powerpoint/2010/main" val="1235355323"/>
       </p:ext>
     </p:extLst>
   </p:cSld>
